--- a/portfolio/portfolio.pptx
+++ b/portfolio/portfolio.pptx
@@ -7351,7 +7351,7 @@
         <p:spPr>
           <a:xfrm>
             <a:off x="6812280" y="2103120"/>
-            <a:ext cx="4608576" cy="2514600"/>
+            <a:ext cx="4361688" cy="2377440"/>
           </a:xfrm>
           <a:prstGeom prst="rect">
             <a:avLst/>
@@ -7366,7 +7366,7 @@
         </p:nvSpPr>
         <p:spPr>
           <a:xfrm>
-            <a:off x="6812280" y="4681728"/>
+            <a:off x="6812280" y="4553712"/>
             <a:ext cx="4754880" cy="274320"/>
           </a:xfrm>
           <a:prstGeom prst="rect">
@@ -7405,8 +7405,8 @@
         </p:nvSpPr>
         <p:spPr>
           <a:xfrm>
-            <a:off x="6812280" y="4956048"/>
-            <a:ext cx="4754880" cy="1325880"/>
+            <a:off x="6812280" y="4828032"/>
+            <a:ext cx="4754880" cy="1463040"/>
           </a:xfrm>
           <a:prstGeom prst="rect">
             <a:avLst/>
@@ -7751,7 +7751,7 @@
                 <a:ea typeface="Pretendard" pitchFamily="34" charset="-122"/>
                 <a:cs typeface="Pretendard" pitchFamily="34" charset="-120"/>
               </a:rPr>
-              <a:t>근거: LOG.md 판단 지점 1~13, 오류 기록 E1~E14, docs/wafer_project_prompt.md</a:t>
+              <a:t>근거: LOG.md 판단 지점 1~13, 오류 기록 E1~E15, docs/wafer_project_prompt.md</a:t>
             </a:r>
             <a:endParaRPr lang="ko-KR" sz="1000" dirty="0"/>
           </a:p>

--- a/portfolio/portfolio.pptx
+++ b/portfolio/portfolio.pptx
@@ -10115,7 +10115,7 @@
                 <a:ea typeface="Pretendard" pitchFamily="34" charset="-122"/>
                 <a:cs typeface="Pretendard" pitchFamily="34" charset="-120"/>
               </a:rPr>
-              <a:t>[본인 문장 한 줄]</a:t>
+              <a:t>새 데이터를 받으면 모델을 만들기 전에 분할 방식과 라벨 품질부터 검사한다</a:t>
             </a:r>
             <a:endParaRPr lang="ko-KR" sz="1300" dirty="0"/>
           </a:p>

--- a/portfolio/portfolio.pptx
+++ b/portfolio/portfolio.pptx
@@ -1577,46 +1577,7 @@
         </p:nvSpPr>
         <p:spPr>
           <a:xfrm>
-            <a:off x="640080" y="3154680"/>
-            <a:ext cx="10911535" cy="365760"/>
-          </a:xfrm>
-          <a:prstGeom prst="rect">
-            <a:avLst/>
-          </a:prstGeom>
-          <a:noFill/>
-          <a:ln/>
-        </p:spPr>
-        <p:txBody>
-          <a:bodyPr wrap="square" lIns="0" tIns="0" rIns="0" bIns="0" rtlCol="0" anchor="t"/>
-          <a:lstStyle/>
-          <a:p>
-            <a:pPr latinLnBrk="0" indent="0" marL="0">
-              <a:buNone/>
-            </a:pPr>
-            <a:r>
-              <a:rPr lang="ko-KR" sz="1400" dirty="0">
-                <a:solidFill>
-                  <a:srgbClr val="52514E"/>
-                </a:solidFill>
-                <a:latin typeface="Pretendard" pitchFamily="34" charset="0"/>
-                <a:ea typeface="Pretendard" pitchFamily="34" charset="-122"/>
-                <a:cs typeface="Pretendard" pitchFamily="34" charset="-120"/>
-              </a:rPr>
-              <a:t>AI 코딩 에이전트 Claude Code와 역할을 나눠 진행: 판단·검증은 본인, 구현·실험은 AI</a:t>
-            </a:r>
-            <a:endParaRPr lang="ko-KR" sz="1400" dirty="0"/>
-          </a:p>
-        </p:txBody>
-      </p:sp>
-      <p:sp>
-        <p:nvSpPr>
-          <p:cNvPr id="5" name="Text 3"/>
-          <p:cNvSpPr txBox="1"/>
-          <p:nvPr/>
-        </p:nvSpPr>
-        <p:spPr>
-          <a:xfrm>
-            <a:off x="640080" y="3474720"/>
+            <a:off x="640080" y="3200400"/>
             <a:ext cx="10911535" cy="365760"/>
           </a:xfrm>
           <a:prstGeom prst="rect">
@@ -1649,7 +1610,7 @@
       </p:sp>
       <p:pic>
         <p:nvPicPr>
-          <p:cNvPr id="6" name="Image 0" descr="fig/p1_wafer_strip.png">    </p:cNvPr>
+          <p:cNvPr id="5" name="Image 0" descr="fig/p1_wafer_strip.png">    </p:cNvPr>
           <p:cNvPicPr>
             <a:picLocks noChangeAspect="1"/>
           </p:cNvPicPr>
@@ -1663,7 +1624,7 @@
         </p:blipFill>
         <p:spPr>
           <a:xfrm>
-            <a:off x="640080" y="4023360"/>
+            <a:off x="640080" y="3931920"/>
             <a:ext cx="10881360" cy="1463040"/>
           </a:xfrm>
           <a:prstGeom prst="rect">
@@ -1673,13 +1634,13 @@
       </p:pic>
       <p:sp>
         <p:nvSpPr>
-          <p:cNvPr id="7" name="Text 4"/>
+          <p:cNvPr id="6" name="Text 3"/>
           <p:cNvSpPr txBox="1"/>
           <p:nvPr/>
         </p:nvSpPr>
         <p:spPr>
           <a:xfrm>
-            <a:off x="640080" y="5852160"/>
+            <a:off x="640080" y="5897880"/>
             <a:ext cx="3657600" cy="365760"/>
           </a:xfrm>
           <a:prstGeom prst="rect">
@@ -1707,45 +1668,6 @@
               <a:t>이진성</a:t>
             </a:r>
             <a:endParaRPr lang="ko-KR" sz="1600" dirty="0"/>
-          </a:p>
-        </p:txBody>
-      </p:sp>
-      <p:sp>
-        <p:nvSpPr>
-          <p:cNvPr id="8" name="Text 5"/>
-          <p:cNvSpPr txBox="1"/>
-          <p:nvPr/>
-        </p:nvSpPr>
-        <p:spPr>
-          <a:xfrm>
-            <a:off x="640080" y="6217920"/>
-            <a:ext cx="7315200" cy="320040"/>
-          </a:xfrm>
-          <a:prstGeom prst="rect">
-            <a:avLst/>
-          </a:prstGeom>
-          <a:noFill/>
-          <a:ln/>
-        </p:spPr>
-        <p:txBody>
-          <a:bodyPr wrap="square" lIns="0" tIns="0" rIns="0" bIns="0" rtlCol="0" anchor="t"/>
-          <a:lstStyle/>
-          <a:p>
-            <a:pPr latinLnBrk="0" indent="0" marL="0">
-              <a:buNone/>
-            </a:pPr>
-            <a:r>
-              <a:rPr lang="ko-KR" sz="1300" dirty="0">
-                <a:solidFill>
-                  <a:srgbClr val="52514E"/>
-                </a:solidFill>
-                <a:latin typeface="Pretendard" pitchFamily="34" charset="0"/>
-                <a:ea typeface="Pretendard" pitchFamily="34" charset="-122"/>
-                <a:cs typeface="Pretendard" pitchFamily="34" charset="-120"/>
-              </a:rPr>
-              <a:t>서울과학기술대학교 전기정보공학과 석사과정</a:t>
-            </a:r>
-            <a:endParaRPr lang="ko-KR" sz="1300" dirty="0"/>
           </a:p>
         </p:txBody>
       </p:sp>
@@ -1913,7 +1835,7 @@
                 <a:ea typeface="Pretendard SemiBold" pitchFamily="34" charset="-122"/>
                 <a:cs typeface="Pretendard SemiBold" pitchFamily="34" charset="-120"/>
               </a:rPr>
-              <a:t>학습에 쓰지 않은 lot에서 macro-F1 0.909를 확인했습니다.</a:t>
+              <a:t>Claude Code에 구현과 실험을 맡기고 평가 방식과 판단·검증은 제가 맡아,</a:t>
             </a:r>
             <a:br/>
             <a:pPr latinLnBrk="0" indent="0" marL="0">
@@ -1931,7 +1853,7 @@
                 <a:ea typeface="Pretendard SemiBold" pitchFamily="34" charset="-122"/>
                 <a:cs typeface="Pretendard SemiBold" pitchFamily="34" charset="-120"/>
               </a:rPr>
-              <a:t>평가 방식을 먼저 고치고, 결과를 다섯 가지 방법으로 검증했습니다.</a:t>
+              <a:t>학습에 쓰지 않은 lot에서 macro-F1 0.909를 확인했습니다.</a:t>
             </a:r>
             <a:endParaRPr lang="ko-KR" sz="1800" dirty="0"/>
           </a:p>
@@ -2002,7 +1924,7 @@
                 <a:gridCol w="1143000"/>
                 <a:gridCol w="5257800"/>
               </a:tblGrid>
-              <a:tr h="402336">
+              <a:tr h="420624">
                 <a:tc>
                   <a:txBody>
                     <a:bodyPr/>
@@ -2140,7 +2062,7 @@
                   </a:tcPr>
                 </a:tc>
               </a:tr>
-              <a:tr h="402336">
+              <a:tr h="420624">
                 <a:tc>
                   <a:txBody>
                     <a:bodyPr/>
@@ -2158,7 +2080,7 @@
                           <a:ea typeface="Pretendard" pitchFamily="34" charset="-122"/>
                           <a:cs typeface="Pretendard" pitchFamily="34" charset="-120"/>
                         </a:rPr>
-                        <a:t>데이터</a:t>
+                        <a:t>AI 활용</a:t>
                       </a:r>
                       <a:endParaRPr lang="ko-KR" sz="1250" dirty="0">
                         <a:latin typeface="Pretendard" charset="0"/>
@@ -2226,7 +2148,37 @@
                           <a:ea typeface="Pretendard" pitchFamily="34" charset="-122"/>
                           <a:cs typeface="Pretendard" pitchFamily="34" charset="-120"/>
                         </a:rPr>
-                        <a:t>WM-811K 웨이퍼 맵 811,457장 중 라벨 있는 172,950장, 불량 패턴 9종</a:t>
+                        <a:t>구현·실험·문헌 조사: Claude Code / 문제 정의·평가 설계·판단·검증: 본인.</a:t>
+                      </a:r>
+                      <a:br/>
+                      <a:pPr latinLnBrk="0" algn="l" indent="0" marL="0">
+                        <a:buNone/>
+                      </a:pPr>
+                      <a:r>
+                        <a:rPr lang="ko-KR" sz="1250" dirty="0">
+                          <a:solidFill>
+                            <a:srgbClr val="0B0B0B"/>
+                          </a:solidFill>
+                          <a:latin typeface="Pretendard" pitchFamily="34" charset="0"/>
+                          <a:ea typeface="Pretendard" pitchFamily="34" charset="-122"/>
+                          <a:cs typeface="Pretendard" pitchFamily="34" charset="-120"/>
+                        </a:rPr>
+                        <a:t>별도 검증 에이전트 45개(워크플로 10회), 체크포인트 6개에서 판단 13건,</a:t>
+                      </a:r>
+                      <a:br/>
+                      <a:pPr latinLnBrk="0" algn="l" indent="0" marL="0">
+                        <a:buNone/>
+                      </a:pPr>
+                      <a:r>
+                        <a:rPr lang="ko-KR" sz="1250" dirty="0">
+                          <a:solidFill>
+                            <a:srgbClr val="0B0B0B"/>
+                          </a:solidFill>
+                          <a:latin typeface="Pretendard" pitchFamily="34" charset="0"/>
+                          <a:ea typeface="Pretendard" pitchFamily="34" charset="-122"/>
+                          <a:cs typeface="Pretendard" pitchFamily="34" charset="-120"/>
+                        </a:rPr>
+                        <a:t>오류 15건 기록</a:t>
                       </a:r>
                       <a:endParaRPr lang="ko-KR" sz="1250" dirty="0">
                         <a:latin typeface="Pretendard" charset="0"/>
@@ -2278,7 +2230,7 @@
                   </a:tcPr>
                 </a:tc>
               </a:tr>
-              <a:tr h="402336">
+              <a:tr h="420624">
                 <a:tc>
                   <a:txBody>
                     <a:bodyPr/>
@@ -2296,7 +2248,7 @@
                           <a:ea typeface="Pretendard" pitchFamily="34" charset="-122"/>
                           <a:cs typeface="Pretendard" pitchFamily="34" charset="-120"/>
                         </a:rPr>
-                        <a:t>문제</a:t>
+                        <a:t>데이터</a:t>
                       </a:r>
                       <a:endParaRPr lang="ko-KR" sz="1250" dirty="0">
                         <a:latin typeface="Pretendard" charset="0"/>
@@ -2364,22 +2316,7 @@
                           <a:ea typeface="Pretendard" pitchFamily="34" charset="-122"/>
                           <a:cs typeface="Pretendard" pitchFamily="34" charset="-120"/>
                         </a:rPr>
-                        <a:t>같은 웨이퍼의 복사본이 학습과 평가에 섞이는 누수를 막고,</a:t>
-                      </a:r>
-                      <a:br/>
-                      <a:pPr latinLnBrk="0" algn="l" indent="0" marL="0">
-                        <a:buNone/>
-                      </a:pPr>
-                      <a:r>
-                        <a:rPr lang="ko-KR" sz="1250" dirty="0">
-                          <a:solidFill>
-                            <a:srgbClr val="0B0B0B"/>
-                          </a:solidFill>
-                          <a:latin typeface="Pretendard" pitchFamily="34" charset="0"/>
-                          <a:ea typeface="Pretendard" pitchFamily="34" charset="-122"/>
-                          <a:cs typeface="Pretendard" pitchFamily="34" charset="-120"/>
-                        </a:rPr>
-                        <a:t>새 lot에서의 성능을 재기</a:t>
+                        <a:t>WM-811K 웨이퍼 맵 811,457장 중 라벨 있는 172,950장, 불량 패턴 9종</a:t>
                       </a:r>
                       <a:endParaRPr lang="ko-KR" sz="1250" dirty="0">
                         <a:latin typeface="Pretendard" charset="0"/>
@@ -2431,7 +2368,7 @@
                   </a:tcPr>
                 </a:tc>
               </a:tr>
-              <a:tr h="402336">
+              <a:tr h="420624">
                 <a:tc>
                   <a:txBody>
                     <a:bodyPr/>
@@ -2449,7 +2386,7 @@
                           <a:ea typeface="Pretendard" pitchFamily="34" charset="-122"/>
                           <a:cs typeface="Pretendard" pitchFamily="34" charset="-120"/>
                         </a:rPr>
-                        <a:t>결과</a:t>
+                        <a:t>문제</a:t>
                       </a:r>
                       <a:endParaRPr lang="ko-KR" sz="1250" dirty="0">
                         <a:latin typeface="Pretendard" charset="0"/>
@@ -2517,7 +2454,22 @@
                           <a:ea typeface="Pretendard" pitchFamily="34" charset="-122"/>
                           <a:cs typeface="Pretendard" pitchFamily="34" charset="-120"/>
                         </a:rPr>
-                        <a:t>macro-F1 0.843(베이스라인) → 0.909(CNN), 모든 패턴 recall 0.77 이상</a:t>
+                        <a:t>같은 웨이퍼의 복사본이 학습과 평가에 섞이는 누수를 막고,</a:t>
+                      </a:r>
+                      <a:br/>
+                      <a:pPr latinLnBrk="0" algn="l" indent="0" marL="0">
+                        <a:buNone/>
+                      </a:pPr>
+                      <a:r>
+                        <a:rPr lang="ko-KR" sz="1250" dirty="0">
+                          <a:solidFill>
+                            <a:srgbClr val="0B0B0B"/>
+                          </a:solidFill>
+                          <a:latin typeface="Pretendard" pitchFamily="34" charset="0"/>
+                          <a:ea typeface="Pretendard" pitchFamily="34" charset="-122"/>
+                          <a:cs typeface="Pretendard" pitchFamily="34" charset="-120"/>
+                        </a:rPr>
+                        <a:t>새 lot에서의 성능을 재기</a:t>
                       </a:r>
                       <a:endParaRPr lang="ko-KR" sz="1250" dirty="0">
                         <a:latin typeface="Pretendard" charset="0"/>
@@ -2569,7 +2521,7 @@
                   </a:tcPr>
                 </a:tc>
               </a:tr>
-              <a:tr h="402336">
+              <a:tr h="420624">
                 <a:tc>
                   <a:txBody>
                     <a:bodyPr/>
@@ -2587,7 +2539,7 @@
                           <a:ea typeface="Pretendard" pitchFamily="34" charset="-122"/>
                           <a:cs typeface="Pretendard" pitchFamily="34" charset="-120"/>
                         </a:rPr>
-                        <a:t>역할</a:t>
+                        <a:t>결과</a:t>
                       </a:r>
                       <a:endParaRPr lang="ko-KR" sz="1250" dirty="0">
                         <a:latin typeface="Pretendard" charset="0"/>
@@ -2655,22 +2607,7 @@
                           <a:ea typeface="Pretendard" pitchFamily="34" charset="-122"/>
                           <a:cs typeface="Pretendard" pitchFamily="34" charset="-120"/>
                         </a:rPr>
-                        <a:t>문제 정의·평가 설계·판단·검증: 본인 /</a:t>
-                      </a:r>
-                      <a:br/>
-                      <a:pPr latinLnBrk="0" algn="l" indent="0" marL="0">
-                        <a:buNone/>
-                      </a:pPr>
-                      <a:r>
-                        <a:rPr lang="ko-KR" sz="1250" dirty="0">
-                          <a:solidFill>
-                            <a:srgbClr val="0B0B0B"/>
-                          </a:solidFill>
-                          <a:latin typeface="Pretendard" pitchFamily="34" charset="0"/>
-                          <a:ea typeface="Pretendard" pitchFamily="34" charset="-122"/>
-                          <a:cs typeface="Pretendard" pitchFamily="34" charset="-120"/>
-                        </a:rPr>
-                        <a:t>코드 구현·실험·문헌 조사: Claude Code(AI 코딩 에이전트)</a:t>
+                        <a:t>macro-F1 0.843(베이스라인) → 0.909(CNN), 모든 패턴 recall 0.77 이상</a:t>
                       </a:r>
                       <a:endParaRPr lang="ko-KR" sz="1250" dirty="0">
                         <a:latin typeface="Pretendard" charset="0"/>
@@ -2722,160 +2659,7 @@
                   </a:tcPr>
                 </a:tc>
               </a:tr>
-              <a:tr h="402336">
-                <a:tc>
-                  <a:txBody>
-                    <a:bodyPr/>
-                    <a:lstStyle/>
-                    <a:p>
-                      <a:pPr latinLnBrk="0" algn="l" indent="0" marL="0">
-                        <a:buNone/>
-                      </a:pPr>
-                      <a:r>
-                        <a:rPr lang="ko-KR" sz="1250" b="1" dirty="0">
-                          <a:solidFill>
-                            <a:srgbClr val="0B0B0B"/>
-                          </a:solidFill>
-                          <a:latin typeface="Pretendard" pitchFamily="34" charset="0"/>
-                          <a:ea typeface="Pretendard" pitchFamily="34" charset="-122"/>
-                          <a:cs typeface="Pretendard" pitchFamily="34" charset="-120"/>
-                        </a:rPr>
-                        <a:t>AI 활용</a:t>
-                      </a:r>
-                      <a:endParaRPr lang="ko-KR" sz="1250" dirty="0">
-                        <a:latin typeface="Pretendard" charset="0"/>
-                        <a:ea typeface="Pretendard" charset="0"/>
-                        <a:cs typeface="Pretendard" charset="0"/>
-                      </a:endParaRPr>
-                    </a:p>
-                  </a:txBody>
-                  <a:tcPr marL="91440" marR="91440" marT="45720" marB="45720" anchor="ctr">
-                    <a:lnL w="6350" cap="flat" cmpd="sng" algn="ctr">
-                      <a:solidFill>
-                        <a:srgbClr val="DAD9D4"/>
-                      </a:solidFill>
-                      <a:prstDash val="solid"/>
-                      <a:round/>
-                      <a:headEnd type="none" w="med" len="med"/>
-                      <a:tailEnd type="none" w="med" len="med"/>
-                    </a:lnL>
-                    <a:lnR w="6350" cap="flat" cmpd="sng" algn="ctr">
-                      <a:solidFill>
-                        <a:srgbClr val="DAD9D4"/>
-                      </a:solidFill>
-                      <a:prstDash val="solid"/>
-                      <a:round/>
-                      <a:headEnd type="none" w="med" len="med"/>
-                      <a:tailEnd type="none" w="med" len="med"/>
-                    </a:lnR>
-                    <a:lnT w="6350" cap="flat" cmpd="sng" algn="ctr">
-                      <a:solidFill>
-                        <a:srgbClr val="DAD9D4"/>
-                      </a:solidFill>
-                      <a:prstDash val="solid"/>
-                      <a:round/>
-                      <a:headEnd type="none" w="med" len="med"/>
-                      <a:tailEnd type="none" w="med" len="med"/>
-                    </a:lnT>
-                    <a:lnB w="6350" cap="flat" cmpd="sng" algn="ctr">
-                      <a:solidFill>
-                        <a:srgbClr val="DAD9D4"/>
-                      </a:solidFill>
-                      <a:prstDash val="solid"/>
-                      <a:round/>
-                      <a:headEnd type="none" w="med" len="med"/>
-                      <a:tailEnd type="none" w="med" len="med"/>
-                    </a:lnB>
-                    <a:solidFill>
-                      <a:srgbClr val="F3F3F1"/>
-                    </a:solidFill>
-                  </a:tcPr>
-                </a:tc>
-                <a:tc>
-                  <a:txBody>
-                    <a:bodyPr/>
-                    <a:lstStyle/>
-                    <a:p>
-                      <a:pPr latinLnBrk="0" algn="l" indent="0" marL="0">
-                        <a:buNone/>
-                      </a:pPr>
-                      <a:r>
-                        <a:rPr lang="ko-KR" sz="1250" dirty="0">
-                          <a:solidFill>
-                            <a:srgbClr val="0B0B0B"/>
-                          </a:solidFill>
-                          <a:latin typeface="Pretendard" pitchFamily="34" charset="0"/>
-                          <a:ea typeface="Pretendard" pitchFamily="34" charset="-122"/>
-                          <a:cs typeface="Pretendard" pitchFamily="34" charset="-120"/>
-                        </a:rPr>
-                        <a:t>Claude Code(구현·실험) + 별도 검증 에이전트 45개(워크플로 10회).</a:t>
-                      </a:r>
-                      <a:br/>
-                      <a:pPr latinLnBrk="0" algn="l" indent="0" marL="0">
-                        <a:buNone/>
-                      </a:pPr>
-                      <a:r>
-                        <a:rPr lang="ko-KR" sz="1250" dirty="0">
-                          <a:solidFill>
-                            <a:srgbClr val="0B0B0B"/>
-                          </a:solidFill>
-                          <a:latin typeface="Pretendard" pitchFamily="34" charset="0"/>
-                          <a:ea typeface="Pretendard" pitchFamily="34" charset="-122"/>
-                          <a:cs typeface="Pretendard" pitchFamily="34" charset="-120"/>
-                        </a:rPr>
-                        <a:t>체크포인트 6개에서 판단 13건, 오류 15건 기록</a:t>
-                      </a:r>
-                      <a:endParaRPr lang="ko-KR" sz="1250" dirty="0">
-                        <a:latin typeface="Pretendard" charset="0"/>
-                        <a:ea typeface="Pretendard" charset="0"/>
-                        <a:cs typeface="Pretendard" charset="0"/>
-                      </a:endParaRPr>
-                    </a:p>
-                  </a:txBody>
-                  <a:tcPr marL="91440" marR="91440" marT="45720" marB="45720" anchor="ctr">
-                    <a:lnL w="6350" cap="flat" cmpd="sng" algn="ctr">
-                      <a:solidFill>
-                        <a:srgbClr val="DAD9D4"/>
-                      </a:solidFill>
-                      <a:prstDash val="solid"/>
-                      <a:round/>
-                      <a:headEnd type="none" w="med" len="med"/>
-                      <a:tailEnd type="none" w="med" len="med"/>
-                    </a:lnL>
-                    <a:lnR w="6350" cap="flat" cmpd="sng" algn="ctr">
-                      <a:solidFill>
-                        <a:srgbClr val="DAD9D4"/>
-                      </a:solidFill>
-                      <a:prstDash val="solid"/>
-                      <a:round/>
-                      <a:headEnd type="none" w="med" len="med"/>
-                      <a:tailEnd type="none" w="med" len="med"/>
-                    </a:lnR>
-                    <a:lnT w="6350" cap="flat" cmpd="sng" algn="ctr">
-                      <a:solidFill>
-                        <a:srgbClr val="DAD9D4"/>
-                      </a:solidFill>
-                      <a:prstDash val="solid"/>
-                      <a:round/>
-                      <a:headEnd type="none" w="med" len="med"/>
-                      <a:tailEnd type="none" w="med" len="med"/>
-                    </a:lnT>
-                    <a:lnB w="6350" cap="flat" cmpd="sng" algn="ctr">
-                      <a:solidFill>
-                        <a:srgbClr val="DAD9D4"/>
-                      </a:solidFill>
-                      <a:prstDash val="solid"/>
-                      <a:round/>
-                      <a:headEnd type="none" w="med" len="med"/>
-                      <a:tailEnd type="none" w="med" len="med"/>
-                    </a:lnB>
-                    <a:solidFill>
-                      <a:srgbClr val="FFFFFF"/>
-                    </a:solidFill>
-                  </a:tcPr>
-                </a:tc>
-              </a:tr>
-              <a:tr h="402336">
+              <a:tr h="420624">
                 <a:tc>
                   <a:txBody>
                     <a:bodyPr/>
@@ -4383,7 +4167,7 @@
                 <a:ea typeface="Pretendard SemiBold" pitchFamily="34" charset="-122"/>
                 <a:cs typeface="Pretendard SemiBold" pitchFamily="34" charset="-120"/>
               </a:rPr>
-              <a:t>원본 분할과 무작위 분할은 같은 웨이퍼의 복사본이 학습과 평가 양쪽에 들어가 점수가 부풀려집니다.</a:t>
+              <a:t>AI 에이전트 10개의 탐색으로 이상점 17개를 받았고, 그중 '같은 웨이퍼의 복사본이 학습과</a:t>
             </a:r>
             <a:br/>
             <a:pPr latinLnBrk="0" indent="0" marL="0">
@@ -4401,7 +4185,7 @@
                 <a:ea typeface="Pretendard SemiBold" pitchFamily="34" charset="-122"/>
                 <a:cs typeface="Pretendard SemiBold" pitchFamily="34" charset="-120"/>
               </a:rPr>
-              <a:t>그래서 lot과 복사본을 한 묶음으로 나눴습니다.</a:t>
+              <a:t>평가에 섞인다'를 핵심 문제로 정해 lot과 복사본을 한 묶음으로 나누는 규칙을 세웠습니다.</a:t>
             </a:r>
             <a:endParaRPr lang="ko-KR" sz="1800" dirty="0"/>
           </a:p>
@@ -5612,7 +5396,31 @@
         <p:spPr>
           <a:xfrm>
             <a:off x="6446520" y="2148840"/>
-            <a:ext cx="5120640" cy="4023360"/>
+            <a:ext cx="5120640" cy="2651760"/>
+          </a:xfrm>
+          <a:prstGeom prst="rect">
+            <a:avLst/>
+          </a:prstGeom>
+        </p:spPr>
+      </p:pic>
+      <p:pic>
+        <p:nvPicPr>
+          <p:cNvPr id="14" name="Image 1" descr="fig/p3_pairs.png">    </p:cNvPr>
+          <p:cNvPicPr>
+            <a:picLocks noChangeAspect="1"/>
+          </p:cNvPicPr>
+          <p:nvPr/>
+        </p:nvPicPr>
+        <p:blipFill>
+          <a:blip r:embed="rId2"/>
+          <a:stretch>
+            <a:fillRect/>
+          </a:stretch>
+        </p:blipFill>
+        <p:spPr>
+          <a:xfrm>
+            <a:off x="6446520" y="4892040"/>
+            <a:ext cx="5120640" cy="1417320"/>
           </a:xfrm>
           <a:prstGeom prst="rect">
             <a:avLst/>
@@ -5783,7 +5591,7 @@
                 <a:ea typeface="Pretendard SemiBold" pitchFamily="34" charset="-122"/>
                 <a:cs typeface="Pretendard SemiBold" pitchFamily="34" charset="-120"/>
               </a:rPr>
-              <a:t>같은 데이터·같은 분할·같은 test 25,444장에서 소형 CNN이 베이스라인보다 macro-F1 0.066 높았고,</a:t>
+              <a:t>베이스라인과 CNN 구현은 AI에 맡기고, 개선 방향(맵을 직접 보는 소형 CNN + val 보정)과</a:t>
             </a:r>
             <a:br/>
             <a:pPr latinLnBrk="0" indent="0" marL="0">
@@ -5801,7 +5609,7 @@
                 <a:ea typeface="Pretendard SemiBold" pitchFamily="34" charset="-122"/>
                 <a:cs typeface="Pretendard SemiBold" pitchFamily="34" charset="-120"/>
               </a:rPr>
-              <a:t>Loc·Scratch recall이 가장 크게 올랐습니다.</a:t>
+              <a:t>채택 기준은 제가 정했습니다. 같은 test 25,444장에서 macro-F1 0.843 → 0.909.</a:t>
             </a:r>
             <a:endParaRPr lang="ko-KR" sz="1800" dirty="0"/>
           </a:p>
@@ -7645,7 +7453,7 @@
                 <a:ea typeface="Pretendard SemiBold" pitchFamily="34" charset="-122"/>
                 <a:cs typeface="Pretendard SemiBold" pitchFamily="34" charset="-120"/>
               </a:rPr>
-              <a:t>점수가 예상보다 높게 나온 이유를 확인하려고 다섯 가지를 검증했고,</a:t>
+              <a:t>점수가 예상보다 높게 나오자 검증 에이전트 4개를 병렬로 돌리고 개입 실험을 시켰습니다.</a:t>
             </a:r>
             <a:br/>
             <a:pPr latinLnBrk="0" indent="0" marL="0">
@@ -7663,7 +7471,7 @@
                 <a:ea typeface="Pretendard SemiBold" pitchFamily="34" charset="-122"/>
                 <a:cs typeface="Pretendard SemiBold" pitchFamily="34" charset="-120"/>
               </a:rPr>
-              <a:t>그 과정에서 분할 절차의 오류 하나를 찾아 고쳤습니다.</a:t>
+              <a:t>그 과정에서 분할 절차의 오류 하나를 잡아 고쳤습니다.</a:t>
             </a:r>
             <a:endParaRPr lang="ko-KR" sz="1800" dirty="0"/>
           </a:p>
@@ -9083,11 +8891,11 @@
         <p:spPr>
           <a:xfrm>
             <a:off x="640080" y="5029200"/>
-            <a:ext cx="5943600" cy="749808"/>
+            <a:ext cx="5943600" cy="658368"/>
           </a:xfrm>
           <a:prstGeom prst="roundRect">
             <a:avLst>
-              <a:gd name="adj" fmla="val 6098"/>
+              <a:gd name="adj" fmla="val 6944"/>
             </a:avLst>
           </a:prstGeom>
           <a:solidFill>
@@ -9189,22 +8997,7 @@
                           <a:ea typeface="Pretendard" pitchFamily="34" charset="-122"/>
                           <a:cs typeface="Pretendard" pitchFamily="34" charset="-120"/>
                         </a:rPr>
-                        <a:t>검증 에이전트 4개 병렬(지표 재계산, 짝비교, 지름길,</a:t>
-                      </a:r>
-                      <a:br/>
-                      <a:pPr latinLnBrk="0" indent="0" marL="0">
-                        <a:buNone/>
-                      </a:pPr>
-                      <a:r>
-                        <a:rPr lang="ko-KR" sz="1100" dirty="0">
-                          <a:solidFill>
-                            <a:srgbClr val="52514E"/>
-                          </a:solidFill>
-                          <a:latin typeface="Pretendard" pitchFamily="34" charset="0"/>
-                          <a:ea typeface="Pretendard" pitchFamily="34" charset="-122"/>
-                          <a:cs typeface="Pretendard" pitchFamily="34" charset="-120"/>
-                        </a:rPr>
-                        <a:t>이중맹검), 개입 실험·재현 비교 스크립트 구현</a:t>
+                        <a:t>검증 에이전트 4개 병렬 실행, 개입 실험·재현 비교 스크립트 구현</a:t>
                       </a:r>
                       <a:endParaRPr lang="ko-KR" sz="1100" dirty="0">
                         <a:latin typeface="Pretendard" charset="0"/>
@@ -9294,7 +9087,7 @@
                           <a:ea typeface="Pretendard" pitchFamily="34" charset="-122"/>
                           <a:cs typeface="Pretendard" pitchFamily="34" charset="-120"/>
                         </a:rPr>
-                        <a:t>오류 판정과 절차 수정 후 전부 재학습 결정(판단 지점 9),</a:t>
+                        <a:t>오류 판정, 절차 수정 후 전부 재학습 결정(판단 지점 9),</a:t>
                       </a:r>
                       <a:br/>
                       <a:pPr latinLnBrk="0" indent="0" marL="0">
@@ -10078,11 +9871,11 @@
         <p:spPr>
           <a:xfrm>
             <a:off x="640080" y="2423160"/>
-            <a:ext cx="5486400" cy="2926080"/>
+            <a:ext cx="5486400" cy="2423160"/>
           </a:xfrm>
           <a:prstGeom prst="roundRect">
             <a:avLst>
-              <a:gd name="adj" fmla="val 1563"/>
+              <a:gd name="adj" fmla="val 1887"/>
             </a:avLst>
           </a:prstGeom>
           <a:solidFill>
@@ -10105,7 +9898,7 @@
         <p:spPr>
           <a:xfrm>
             <a:off x="777240" y="2542032"/>
-            <a:ext cx="5212080" cy="2743200"/>
+            <a:ext cx="5212080" cy="2240280"/>
           </a:xfrm>
           <a:prstGeom prst="rect">
             <a:avLst/>
@@ -10116,29 +9909,6 @@
         <p:txBody>
           <a:bodyPr wrap="square" lIns="0" tIns="0" rIns="0" bIns="0" rtlCol="0" anchor="t"/>
           <a:lstStyle/>
-          <a:p>
-            <a:pPr latinLnBrk="0" indent="0" marL="0">
-              <a:lnSpc>
-                <a:spcPts val="1700"/>
-              </a:lnSpc>
-              <a:spcAft>
-                <a:spcPts val="700"/>
-              </a:spcAft>
-              <a:buNone/>
-            </a:pPr>
-            <a:r>
-              <a:rPr lang="ko-KR" sz="1200" dirty="0">
-                <a:solidFill>
-                  <a:srgbClr val="0B0B0B"/>
-                </a:solidFill>
-                <a:latin typeface="Pretendard" pitchFamily="34" charset="0"/>
-                <a:ea typeface="Pretendard" pitchFamily="34" charset="-122"/>
-                <a:cs typeface="Pretendard" pitchFamily="34" charset="-120"/>
-              </a:rPr>
-              <a:t>“네가 한다: 데이터 탐색, 코드 구현, 실험 실행, 결과 정리, 선택지와 근거 제시”</a:t>
-            </a:r>
-            <a:endParaRPr lang="ko-KR" sz="1200" dirty="0"/>
-          </a:p>
           <a:p>
             <a:pPr latinLnBrk="0" indent="0" marL="0">
               <a:lnSpc>
@@ -10340,45 +10110,6 @@
           </a:p>
         </p:txBody>
       </p:sp>
-      <p:sp>
-        <p:nvSpPr>
-          <p:cNvPr id="11" name="Text 9"/>
-          <p:cNvSpPr txBox="1"/>
-          <p:nvPr/>
-        </p:nvSpPr>
-        <p:spPr>
-          <a:xfrm>
-            <a:off x="640080" y="5486400"/>
-            <a:ext cx="5486400" cy="274320"/>
-          </a:xfrm>
-          <a:prstGeom prst="rect">
-            <a:avLst/>
-          </a:prstGeom>
-          <a:noFill/>
-          <a:ln/>
-        </p:spPr>
-        <p:txBody>
-          <a:bodyPr wrap="square" lIns="0" tIns="0" rIns="0" bIns="0" rtlCol="0" anchor="t"/>
-          <a:lstStyle/>
-          <a:p>
-            <a:pPr latinLnBrk="0" indent="0" marL="0">
-              <a:buNone/>
-            </a:pPr>
-            <a:r>
-              <a:rPr lang="ko-KR" sz="1300" b="1" dirty="0">
-                <a:solidFill>
-                  <a:srgbClr val="0B0B0B"/>
-                </a:solidFill>
-                <a:latin typeface="Pretendard" pitchFamily="34" charset="0"/>
-                <a:ea typeface="Pretendard" pitchFamily="34" charset="-122"/>
-                <a:cs typeface="Pretendard" pitchFamily="34" charset="-120"/>
-              </a:rPr>
-              <a:t>진행 중 지시 (채팅 원문)</a:t>
-            </a:r>
-            <a:endParaRPr lang="ko-KR" sz="1300" dirty="0"/>
-          </a:p>
-        </p:txBody>
-      </p:sp>
       <p:graphicFrame>
         <p:nvGraphicFramePr>
           <p:cNvPr id="7" name="Table 0"/>
@@ -10394,7 +10125,7 @@
           </p:nvPr>
         </p:nvGraphicFramePr>
         <p:xfrm>
-          <a:off x="640080" y="5760720"/>
+          <a:off x="640080" y="4983480"/>
           <a:ext cx="5486400" cy="914400"/>
         </p:xfrm>
         <a:graphic>
@@ -10402,48 +10133,294 @@
             <a:tbl>
               <a:tblPr/>
               <a:tblGrid>
-                <a:gridCol w="3520440"/>
-                <a:gridCol w="1965960"/>
+                <a:gridCol w="1234440"/>
+                <a:gridCol w="1417320"/>
+                <a:gridCol w="2834640"/>
               </a:tblGrid>
-              <a:tr h="237744">
+              <a:tr h="274320">
                 <a:tc>
                   <a:txBody>
                     <a:bodyPr/>
                     <a:lstStyle/>
                     <a:p>
-                      <a:pPr latinLnBrk="0" indent="0" marL="0">
-                        <a:buNone/>
-                      </a:pPr>
-                      <a:r>
-                        <a:rPr lang="ko-KR" sz="1100" b="1" dirty="0">
-                          <a:solidFill>
-                            <a:srgbClr val="52514E"/>
-                          </a:solidFill>
-                          <a:latin typeface="Pretendard" pitchFamily="34" charset="0"/>
-                          <a:ea typeface="Pretendard" pitchFamily="34" charset="-122"/>
-                          <a:cs typeface="Pretendard" pitchFamily="34" charset="-120"/>
-                        </a:rPr>
-                        <a:t>“내가 100프로 만족할 수 있게 나에게 질문하면서 진행해”</a:t>
-                      </a:r>
-                      <a:endParaRPr lang="ko-KR" sz="1100" dirty="0">
+                      <a:pPr latinLnBrk="0" algn="l" indent="0" marL="0">
+                        <a:buNone/>
+                      </a:pPr>
+                      <a:r>
+                        <a:rPr lang="ko-KR" sz="1050" b="1" dirty="0">
+                          <a:solidFill>
+                            <a:srgbClr val="0B0B0B"/>
+                          </a:solidFill>
+                          <a:latin typeface="Pretendard" pitchFamily="34" charset="0"/>
+                          <a:ea typeface="Pretendard" pitchFamily="34" charset="-122"/>
+                          <a:cs typeface="Pretendard" pitchFamily="34" charset="-120"/>
+                        </a:rPr>
+                        <a:t>판단</a:t>
+                      </a:r>
+                      <a:endParaRPr lang="ko-KR" sz="1050" dirty="0">
                         <a:latin typeface="Pretendard" charset="0"/>
                         <a:ea typeface="Pretendard" charset="0"/>
                         <a:cs typeface="Pretendard" charset="0"/>
                       </a:endParaRPr>
                     </a:p>
                   </a:txBody>
-                  <a:tcPr marL="0" marR="54864" marT="36576" marB="45720" anchor="t">
-                    <a:lnL w="0" cap="flat" cmpd="sng" algn="ctr">
-                      <a:noFill/>
+                  <a:tcPr marL="91440" marR="91440" marT="45720" marB="45720" anchor="ctr">
+                    <a:lnL w="6350" cap="flat" cmpd="sng" algn="ctr">
+                      <a:solidFill>
+                        <a:srgbClr val="DAD9D4"/>
+                      </a:solidFill>
+                      <a:prstDash val="solid"/>
+                      <a:round/>
+                      <a:headEnd type="none" w="med" len="med"/>
+                      <a:tailEnd type="none" w="med" len="med"/>
                     </a:lnL>
-                    <a:lnR w="0" cap="flat" cmpd="sng" algn="ctr">
-                      <a:noFill/>
+                    <a:lnR w="6350" cap="flat" cmpd="sng" algn="ctr">
+                      <a:solidFill>
+                        <a:srgbClr val="DAD9D4"/>
+                      </a:solidFill>
+                      <a:prstDash val="solid"/>
+                      <a:round/>
+                      <a:headEnd type="none" w="med" len="med"/>
+                      <a:tailEnd type="none" w="med" len="med"/>
                     </a:lnR>
-                    <a:lnT w="0" cap="flat" cmpd="sng" algn="ctr">
-                      <a:noFill/>
+                    <a:lnT w="6350" cap="flat" cmpd="sng" algn="ctr">
+                      <a:solidFill>
+                        <a:srgbClr val="DAD9D4"/>
+                      </a:solidFill>
+                      <a:prstDash val="solid"/>
+                      <a:round/>
+                      <a:headEnd type="none" w="med" len="med"/>
+                      <a:tailEnd type="none" w="med" len="med"/>
                     </a:lnT>
-                    <a:lnB w="0" cap="flat" cmpd="sng" algn="ctr">
-                      <a:noFill/>
+                    <a:lnB w="6350" cap="flat" cmpd="sng" algn="ctr">
+                      <a:solidFill>
+                        <a:srgbClr val="DAD9D4"/>
+                      </a:solidFill>
+                      <a:prstDash val="solid"/>
+                      <a:round/>
+                      <a:headEnd type="none" w="med" len="med"/>
+                      <a:tailEnd type="none" w="med" len="med"/>
+                    </a:lnB>
+                    <a:solidFill>
+                      <a:srgbClr val="F3F3F1"/>
+                    </a:solidFill>
+                  </a:tcPr>
+                </a:tc>
+                <a:tc>
+                  <a:txBody>
+                    <a:bodyPr/>
+                    <a:lstStyle/>
+                    <a:p>
+                      <a:pPr latinLnBrk="0" algn="l" indent="0" marL="0">
+                        <a:buNone/>
+                      </a:pPr>
+                      <a:r>
+                        <a:rPr lang="ko-KR" sz="1050" b="1" dirty="0">
+                          <a:solidFill>
+                            <a:srgbClr val="0B0B0B"/>
+                          </a:solidFill>
+                          <a:latin typeface="Pretendard" pitchFamily="34" charset="0"/>
+                          <a:ea typeface="Pretendard" pitchFamily="34" charset="-122"/>
+                          <a:cs typeface="Pretendard" pitchFamily="34" charset="-120"/>
+                        </a:rPr>
+                        <a:t>선택</a:t>
+                      </a:r>
+                      <a:endParaRPr lang="ko-KR" sz="1050" dirty="0">
+                        <a:latin typeface="Pretendard" charset="0"/>
+                        <a:ea typeface="Pretendard" charset="0"/>
+                        <a:cs typeface="Pretendard" charset="0"/>
+                      </a:endParaRPr>
+                    </a:p>
+                  </a:txBody>
+                  <a:tcPr marL="91440" marR="91440" marT="45720" marB="45720" anchor="ctr">
+                    <a:lnL w="6350" cap="flat" cmpd="sng" algn="ctr">
+                      <a:solidFill>
+                        <a:srgbClr val="DAD9D4"/>
+                      </a:solidFill>
+                      <a:prstDash val="solid"/>
+                      <a:round/>
+                      <a:headEnd type="none" w="med" len="med"/>
+                      <a:tailEnd type="none" w="med" len="med"/>
+                    </a:lnL>
+                    <a:lnR w="6350" cap="flat" cmpd="sng" algn="ctr">
+                      <a:solidFill>
+                        <a:srgbClr val="DAD9D4"/>
+                      </a:solidFill>
+                      <a:prstDash val="solid"/>
+                      <a:round/>
+                      <a:headEnd type="none" w="med" len="med"/>
+                      <a:tailEnd type="none" w="med" len="med"/>
+                    </a:lnR>
+                    <a:lnT w="6350" cap="flat" cmpd="sng" algn="ctr">
+                      <a:solidFill>
+                        <a:srgbClr val="DAD9D4"/>
+                      </a:solidFill>
+                      <a:prstDash val="solid"/>
+                      <a:round/>
+                      <a:headEnd type="none" w="med" len="med"/>
+                      <a:tailEnd type="none" w="med" len="med"/>
+                    </a:lnT>
+                    <a:lnB w="6350" cap="flat" cmpd="sng" algn="ctr">
+                      <a:solidFill>
+                        <a:srgbClr val="DAD9D4"/>
+                      </a:solidFill>
+                      <a:prstDash val="solid"/>
+                      <a:round/>
+                      <a:headEnd type="none" w="med" len="med"/>
+                      <a:tailEnd type="none" w="med" len="med"/>
+                    </a:lnB>
+                    <a:solidFill>
+                      <a:srgbClr val="F3F3F1"/>
+                    </a:solidFill>
+                  </a:tcPr>
+                </a:tc>
+                <a:tc>
+                  <a:txBody>
+                    <a:bodyPr/>
+                    <a:lstStyle/>
+                    <a:p>
+                      <a:pPr latinLnBrk="0" algn="l" indent="0" marL="0">
+                        <a:buNone/>
+                      </a:pPr>
+                      <a:r>
+                        <a:rPr lang="ko-KR" sz="1050" b="1" dirty="0">
+                          <a:solidFill>
+                            <a:srgbClr val="0B0B0B"/>
+                          </a:solidFill>
+                          <a:latin typeface="Pretendard" pitchFamily="34" charset="0"/>
+                          <a:ea typeface="Pretendard" pitchFamily="34" charset="-122"/>
+                          <a:cs typeface="Pretendard" pitchFamily="34" charset="-120"/>
+                        </a:rPr>
+                        <a:t>근거</a:t>
+                      </a:r>
+                      <a:endParaRPr lang="ko-KR" sz="1050" dirty="0">
+                        <a:latin typeface="Pretendard" charset="0"/>
+                        <a:ea typeface="Pretendard" charset="0"/>
+                        <a:cs typeface="Pretendard" charset="0"/>
+                      </a:endParaRPr>
+                    </a:p>
+                  </a:txBody>
+                  <a:tcPr marL="91440" marR="91440" marT="45720" marB="45720" anchor="ctr">
+                    <a:lnL w="6350" cap="flat" cmpd="sng" algn="ctr">
+                      <a:solidFill>
+                        <a:srgbClr val="DAD9D4"/>
+                      </a:solidFill>
+                      <a:prstDash val="solid"/>
+                      <a:round/>
+                      <a:headEnd type="none" w="med" len="med"/>
+                      <a:tailEnd type="none" w="med" len="med"/>
+                    </a:lnL>
+                    <a:lnR w="6350" cap="flat" cmpd="sng" algn="ctr">
+                      <a:solidFill>
+                        <a:srgbClr val="DAD9D4"/>
+                      </a:solidFill>
+                      <a:prstDash val="solid"/>
+                      <a:round/>
+                      <a:headEnd type="none" w="med" len="med"/>
+                      <a:tailEnd type="none" w="med" len="med"/>
+                    </a:lnR>
+                    <a:lnT w="6350" cap="flat" cmpd="sng" algn="ctr">
+                      <a:solidFill>
+                        <a:srgbClr val="DAD9D4"/>
+                      </a:solidFill>
+                      <a:prstDash val="solid"/>
+                      <a:round/>
+                      <a:headEnd type="none" w="med" len="med"/>
+                      <a:tailEnd type="none" w="med" len="med"/>
+                    </a:lnT>
+                    <a:lnB w="6350" cap="flat" cmpd="sng" algn="ctr">
+                      <a:solidFill>
+                        <a:srgbClr val="DAD9D4"/>
+                      </a:solidFill>
+                      <a:prstDash val="solid"/>
+                      <a:round/>
+                      <a:headEnd type="none" w="med" len="med"/>
+                      <a:tailEnd type="none" w="med" len="med"/>
+                    </a:lnB>
+                    <a:solidFill>
+                      <a:srgbClr val="F3F3F1"/>
+                    </a:solidFill>
+                  </a:tcPr>
+                </a:tc>
+              </a:tr>
+              <a:tr h="274320">
+                <a:tc>
+                  <a:txBody>
+                    <a:bodyPr/>
+                    <a:lstStyle/>
+                    <a:p>
+                      <a:pPr latinLnBrk="0" algn="l" indent="0" marL="0">
+                        <a:buNone/>
+                      </a:pPr>
+                      <a:r>
+                        <a:rPr lang="ko-KR" sz="1050" dirty="0">
+                          <a:solidFill>
+                            <a:srgbClr val="0B0B0B"/>
+                          </a:solidFill>
+                          <a:latin typeface="Pretendard" pitchFamily="34" charset="0"/>
+                          <a:ea typeface="Pretendard" pitchFamily="34" charset="-122"/>
+                          <a:cs typeface="Pretendard" pitchFamily="34" charset="-120"/>
+                        </a:rPr>
+                        <a:t>라벨 없는</a:t>
+                      </a:r>
+                      <a:br/>
+                      <a:pPr latinLnBrk="0" algn="l" indent="0" marL="0">
+                        <a:buNone/>
+                      </a:pPr>
+                      <a:r>
+                        <a:rPr lang="ko-KR" sz="1050" dirty="0">
+                          <a:solidFill>
+                            <a:srgbClr val="0B0B0B"/>
+                          </a:solidFill>
+                          <a:latin typeface="Pretendard" pitchFamily="34" charset="0"/>
+                          <a:ea typeface="Pretendard" pitchFamily="34" charset="-122"/>
+                          <a:cs typeface="Pretendard" pitchFamily="34" charset="-120"/>
+                        </a:rPr>
+                        <a:t>638,507장</a:t>
+                      </a:r>
+                      <a:endParaRPr lang="ko-KR" sz="1050" dirty="0">
+                        <a:latin typeface="Pretendard" charset="0"/>
+                        <a:ea typeface="Pretendard" charset="0"/>
+                        <a:cs typeface="Pretendard" charset="0"/>
+                      </a:endParaRPr>
+                    </a:p>
+                  </a:txBody>
+                  <a:tcPr marL="91440" marR="91440" marT="45720" marB="45720" anchor="ctr">
+                    <a:lnL w="6350" cap="flat" cmpd="sng" algn="ctr">
+                      <a:solidFill>
+                        <a:srgbClr val="DAD9D4"/>
+                      </a:solidFill>
+                      <a:prstDash val="solid"/>
+                      <a:round/>
+                      <a:headEnd type="none" w="med" len="med"/>
+                      <a:tailEnd type="none" w="med" len="med"/>
+                    </a:lnL>
+                    <a:lnR w="6350" cap="flat" cmpd="sng" algn="ctr">
+                      <a:solidFill>
+                        <a:srgbClr val="DAD9D4"/>
+                      </a:solidFill>
+                      <a:prstDash val="solid"/>
+                      <a:round/>
+                      <a:headEnd type="none" w="med" len="med"/>
+                      <a:tailEnd type="none" w="med" len="med"/>
+                    </a:lnR>
+                    <a:lnT w="6350" cap="flat" cmpd="sng" algn="ctr">
+                      <a:solidFill>
+                        <a:srgbClr val="DAD9D4"/>
+                      </a:solidFill>
+                      <a:prstDash val="solid"/>
+                      <a:round/>
+                      <a:headEnd type="none" w="med" len="med"/>
+                      <a:tailEnd type="none" w="med" len="med"/>
+                    </a:lnT>
+                    <a:lnB w="6350" cap="flat" cmpd="sng" algn="ctr">
+                      <a:solidFill>
+                        <a:srgbClr val="DAD9D4"/>
+                      </a:solidFill>
+                      <a:prstDash val="solid"/>
+                      <a:round/>
+                      <a:headEnd type="none" w="med" len="med"/>
+                      <a:tailEnd type="none" w="med" len="med"/>
                     </a:lnB>
                     <a:solidFill>
                       <a:srgbClr val="FFFFFF"/>
@@ -10455,100 +10432,63 @@
                     <a:bodyPr/>
                     <a:lstStyle/>
                     <a:p>
-                      <a:pPr latinLnBrk="0" indent="0" marL="0">
-                        <a:buNone/>
-                      </a:pPr>
-                      <a:r>
-                        <a:rPr lang="ko-KR" sz="1100" dirty="0">
-                          <a:solidFill>
-                            <a:srgbClr val="52514E"/>
-                          </a:solidFill>
-                          <a:latin typeface="Pretendard" pitchFamily="34" charset="0"/>
-                          <a:ea typeface="Pretendard" pitchFamily="34" charset="-122"/>
-                          <a:cs typeface="Pretendard" pitchFamily="34" charset="-120"/>
-                        </a:rPr>
-                        <a:t>첫 지시.</a:t>
-                      </a:r>
-                      <a:br/>
-                      <a:pPr latinLnBrk="0" indent="0" marL="0">
-                        <a:buNone/>
-                      </a:pPr>
-                      <a:r>
-                        <a:rPr lang="ko-KR" sz="1100" dirty="0">
-                          <a:solidFill>
-                            <a:srgbClr val="52514E"/>
-                          </a:solidFill>
-                          <a:latin typeface="Pretendard" pitchFamily="34" charset="0"/>
-                          <a:ea typeface="Pretendard" pitchFamily="34" charset="-122"/>
-                          <a:cs typeface="Pretendard" pitchFamily="34" charset="-120"/>
-                        </a:rPr>
-                        <a:t>체크포인트마다 멈추게 한 근거</a:t>
-                      </a:r>
-                      <a:endParaRPr lang="ko-KR" sz="1100" dirty="0">
+                      <a:pPr latinLnBrk="0" algn="l" indent="0" marL="0">
+                        <a:buNone/>
+                      </a:pPr>
+                      <a:r>
+                        <a:rPr lang="ko-KR" sz="1050" dirty="0">
+                          <a:solidFill>
+                            <a:srgbClr val="0B0B0B"/>
+                          </a:solidFill>
+                          <a:latin typeface="Pretendard" pitchFamily="34" charset="0"/>
+                          <a:ea typeface="Pretendard" pitchFamily="34" charset="-122"/>
+                          <a:cs typeface="Pretendard" pitchFamily="34" charset="-120"/>
+                        </a:rPr>
+                        <a:t>제외</a:t>
+                      </a:r>
+                      <a:endParaRPr lang="ko-KR" sz="1050" dirty="0">
                         <a:latin typeface="Pretendard" charset="0"/>
                         <a:ea typeface="Pretendard" charset="0"/>
                         <a:cs typeface="Pretendard" charset="0"/>
                       </a:endParaRPr>
                     </a:p>
                   </a:txBody>
-                  <a:tcPr marL="0" marR="54864" marT="36576" marB="45720" anchor="t">
-                    <a:lnL w="0" cap="flat" cmpd="sng" algn="ctr">
-                      <a:noFill/>
+                  <a:tcPr marL="91440" marR="91440" marT="45720" marB="45720" anchor="ctr">
+                    <a:lnL w="6350" cap="flat" cmpd="sng" algn="ctr">
+                      <a:solidFill>
+                        <a:srgbClr val="DAD9D4"/>
+                      </a:solidFill>
+                      <a:prstDash val="solid"/>
+                      <a:round/>
+                      <a:headEnd type="none" w="med" len="med"/>
+                      <a:tailEnd type="none" w="med" len="med"/>
                     </a:lnL>
-                    <a:lnR w="0" cap="flat" cmpd="sng" algn="ctr">
-                      <a:noFill/>
+                    <a:lnR w="6350" cap="flat" cmpd="sng" algn="ctr">
+                      <a:solidFill>
+                        <a:srgbClr val="DAD9D4"/>
+                      </a:solidFill>
+                      <a:prstDash val="solid"/>
+                      <a:round/>
+                      <a:headEnd type="none" w="med" len="med"/>
+                      <a:tailEnd type="none" w="med" len="med"/>
                     </a:lnR>
-                    <a:lnT w="0" cap="flat" cmpd="sng" algn="ctr">
-                      <a:noFill/>
+                    <a:lnT w="6350" cap="flat" cmpd="sng" algn="ctr">
+                      <a:solidFill>
+                        <a:srgbClr val="DAD9D4"/>
+                      </a:solidFill>
+                      <a:prstDash val="solid"/>
+                      <a:round/>
+                      <a:headEnd type="none" w="med" len="med"/>
+                      <a:tailEnd type="none" w="med" len="med"/>
                     </a:lnT>
-                    <a:lnB w="0" cap="flat" cmpd="sng" algn="ctr">
-                      <a:noFill/>
-                    </a:lnB>
-                    <a:solidFill>
-                      <a:srgbClr val="FFFFFF"/>
-                    </a:solidFill>
-                  </a:tcPr>
-                </a:tc>
-              </a:tr>
-              <a:tr h="237744">
-                <a:tc>
-                  <a:txBody>
-                    <a:bodyPr/>
-                    <a:lstStyle/>
-                    <a:p>
-                      <a:pPr latinLnBrk="0" indent="0" marL="0">
-                        <a:buNone/>
-                      </a:pPr>
-                      <a:r>
-                        <a:rPr lang="ko-KR" sz="1100" b="1" dirty="0">
-                          <a:solidFill>
-                            <a:srgbClr val="52514E"/>
-                          </a:solidFill>
-                          <a:latin typeface="Pretendard" pitchFamily="34" charset="0"/>
-                          <a:ea typeface="Pretendard" pitchFamily="34" charset="-122"/>
-                          <a:cs typeface="Pretendard" pitchFamily="34" charset="-120"/>
-                        </a:rPr>
-                        <a:t>“대시보드의 문체를 다른 사이트를 참고해서 바꿔줘 너무 ai틱해”</a:t>
-                      </a:r>
-                      <a:endParaRPr lang="ko-KR" sz="1100" dirty="0">
-                        <a:latin typeface="Pretendard" charset="0"/>
-                        <a:ea typeface="Pretendard" charset="0"/>
-                        <a:cs typeface="Pretendard" charset="0"/>
-                      </a:endParaRPr>
-                    </a:p>
-                  </a:txBody>
-                  <a:tcPr marL="0" marR="54864" marT="36576" marB="45720" anchor="t">
-                    <a:lnL w="0" cap="flat" cmpd="sng" algn="ctr">
-                      <a:noFill/>
-                    </a:lnL>
-                    <a:lnR w="0" cap="flat" cmpd="sng" algn="ctr">
-                      <a:noFill/>
-                    </a:lnR>
-                    <a:lnT w="0" cap="flat" cmpd="sng" algn="ctr">
-                      <a:noFill/>
-                    </a:lnT>
-                    <a:lnB w="0" cap="flat" cmpd="sng" algn="ctr">
-                      <a:noFill/>
+                    <a:lnB w="6350" cap="flat" cmpd="sng" algn="ctr">
+                      <a:solidFill>
+                        <a:srgbClr val="DAD9D4"/>
+                      </a:solidFill>
+                      <a:prstDash val="solid"/>
+                      <a:round/>
+                      <a:headEnd type="none" w="med" len="med"/>
+                      <a:tailEnd type="none" w="med" len="med"/>
                     </a:lnB>
                     <a:solidFill>
                       <a:srgbClr val="FFFFFF"/>
@@ -10560,54 +10500,329 @@
                     <a:bodyPr/>
                     <a:lstStyle/>
                     <a:p>
-                      <a:pPr latinLnBrk="0" indent="0" marL="0">
-                        <a:buNone/>
-                      </a:pPr>
-                      <a:r>
-                        <a:rPr lang="ko-KR" sz="1100" dirty="0">
-                          <a:solidFill>
-                            <a:srgbClr val="52514E"/>
-                          </a:solidFill>
-                          <a:latin typeface="Pretendard" pitchFamily="34" charset="0"/>
-                          <a:ea typeface="Pretendard" pitchFamily="34" charset="-122"/>
-                          <a:cs typeface="Pretendard" pitchFamily="34" charset="-120"/>
-                        </a:rPr>
-                        <a:t>산출물 반려. 참고 사례를</a:t>
+                      <a:pPr latinLnBrk="0" algn="l" indent="0" marL="0">
+                        <a:buNone/>
+                      </a:pPr>
+                      <a:r>
+                        <a:rPr lang="ko-KR" sz="1050" dirty="0">
+                          <a:solidFill>
+                            <a:srgbClr val="0B0B0B"/>
+                          </a:solidFill>
+                          <a:latin typeface="Pretendard" pitchFamily="34" charset="0"/>
+                          <a:ea typeface="Pretendard" pitchFamily="34" charset="-122"/>
+                          <a:cs typeface="Pretendard" pitchFamily="34" charset="-120"/>
+                        </a:rPr>
+                        <a:t>불량 0개 맵이 5.8만 장 등 분포가 다르고,</a:t>
                       </a:r>
                       <a:br/>
-                      <a:pPr latinLnBrk="0" indent="0" marL="0">
-                        <a:buNone/>
-                      </a:pPr>
-                      <a:r>
-                        <a:rPr lang="ko-KR" sz="1100" dirty="0">
-                          <a:solidFill>
-                            <a:srgbClr val="52514E"/>
-                          </a:solidFill>
-                          <a:latin typeface="Pretendard" pitchFamily="34" charset="0"/>
-                          <a:ea typeface="Pretendard" pitchFamily="34" charset="-122"/>
-                          <a:cs typeface="Pretendard" pitchFamily="34" charset="-120"/>
-                        </a:rPr>
-                        <a:t>조사한 뒤 문구를 다시 씀</a:t>
-                      </a:r>
-                      <a:endParaRPr lang="ko-KR" sz="1100" dirty="0">
+                      <a:pPr latinLnBrk="0" algn="l" indent="0" marL="0">
+                        <a:buNone/>
+                      </a:pPr>
+                      <a:r>
+                        <a:rPr lang="ko-KR" sz="1050" dirty="0">
+                          <a:solidFill>
+                            <a:srgbClr val="0B0B0B"/>
+                          </a:solidFill>
+                          <a:latin typeface="Pretendard" pitchFamily="34" charset="0"/>
+                          <a:ea typeface="Pretendard" pitchFamily="34" charset="-122"/>
+                          <a:cs typeface="Pretendard" pitchFamily="34" charset="-120"/>
+                        </a:rPr>
+                        <a:t>평가 맵의 복사본 5,408장이 섞여 있음</a:t>
+                      </a:r>
+                      <a:endParaRPr lang="ko-KR" sz="1050" dirty="0">
                         <a:latin typeface="Pretendard" charset="0"/>
                         <a:ea typeface="Pretendard" charset="0"/>
                         <a:cs typeface="Pretendard" charset="0"/>
                       </a:endParaRPr>
                     </a:p>
                   </a:txBody>
-                  <a:tcPr marL="0" marR="54864" marT="36576" marB="45720" anchor="t">
-                    <a:lnL w="0" cap="flat" cmpd="sng" algn="ctr">
-                      <a:noFill/>
+                  <a:tcPr marL="91440" marR="91440" marT="45720" marB="45720" anchor="ctr">
+                    <a:lnL w="6350" cap="flat" cmpd="sng" algn="ctr">
+                      <a:solidFill>
+                        <a:srgbClr val="DAD9D4"/>
+                      </a:solidFill>
+                      <a:prstDash val="solid"/>
+                      <a:round/>
+                      <a:headEnd type="none" w="med" len="med"/>
+                      <a:tailEnd type="none" w="med" len="med"/>
                     </a:lnL>
-                    <a:lnR w="0" cap="flat" cmpd="sng" algn="ctr">
-                      <a:noFill/>
+                    <a:lnR w="6350" cap="flat" cmpd="sng" algn="ctr">
+                      <a:solidFill>
+                        <a:srgbClr val="DAD9D4"/>
+                      </a:solidFill>
+                      <a:prstDash val="solid"/>
+                      <a:round/>
+                      <a:headEnd type="none" w="med" len="med"/>
+                      <a:tailEnd type="none" w="med" len="med"/>
                     </a:lnR>
-                    <a:lnT w="0" cap="flat" cmpd="sng" algn="ctr">
-                      <a:noFill/>
+                    <a:lnT w="6350" cap="flat" cmpd="sng" algn="ctr">
+                      <a:solidFill>
+                        <a:srgbClr val="DAD9D4"/>
+                      </a:solidFill>
+                      <a:prstDash val="solid"/>
+                      <a:round/>
+                      <a:headEnd type="none" w="med" len="med"/>
+                      <a:tailEnd type="none" w="med" len="med"/>
                     </a:lnT>
-                    <a:lnB w="0" cap="flat" cmpd="sng" algn="ctr">
-                      <a:noFill/>
+                    <a:lnB w="6350" cap="flat" cmpd="sng" algn="ctr">
+                      <a:solidFill>
+                        <a:srgbClr val="DAD9D4"/>
+                      </a:solidFill>
+                      <a:prstDash val="solid"/>
+                      <a:round/>
+                      <a:headEnd type="none" w="med" len="med"/>
+                      <a:tailEnd type="none" w="med" len="med"/>
+                    </a:lnB>
+                    <a:solidFill>
+                      <a:srgbClr val="FFFFFF"/>
+                    </a:solidFill>
+                  </a:tcPr>
+                </a:tc>
+              </a:tr>
+              <a:tr h="274320">
+                <a:tc>
+                  <a:txBody>
+                    <a:bodyPr/>
+                    <a:lstStyle/>
+                    <a:p>
+                      <a:pPr latinLnBrk="0" algn="l" indent="0" marL="0">
+                        <a:buNone/>
+                      </a:pPr>
+                      <a:r>
+                        <a:rPr lang="ko-KR" sz="1050" dirty="0">
+                          <a:solidFill>
+                            <a:srgbClr val="0B0B0B"/>
+                          </a:solidFill>
+                          <a:latin typeface="Pretendard" pitchFamily="34" charset="0"/>
+                          <a:ea typeface="Pretendard" pitchFamily="34" charset="-122"/>
+                          <a:cs typeface="Pretendard" pitchFamily="34" charset="-120"/>
+                        </a:rPr>
+                        <a:t>분할 오류 대응</a:t>
+                      </a:r>
+                      <a:endParaRPr lang="ko-KR" sz="1050" dirty="0">
+                        <a:latin typeface="Pretendard" charset="0"/>
+                        <a:ea typeface="Pretendard" charset="0"/>
+                        <a:cs typeface="Pretendard" charset="0"/>
+                      </a:endParaRPr>
+                    </a:p>
+                  </a:txBody>
+                  <a:tcPr marL="91440" marR="91440" marT="45720" marB="45720" anchor="ctr">
+                    <a:lnL w="6350" cap="flat" cmpd="sng" algn="ctr">
+                      <a:solidFill>
+                        <a:srgbClr val="DAD9D4"/>
+                      </a:solidFill>
+                      <a:prstDash val="solid"/>
+                      <a:round/>
+                      <a:headEnd type="none" w="med" len="med"/>
+                      <a:tailEnd type="none" w="med" len="med"/>
+                    </a:lnL>
+                    <a:lnR w="6350" cap="flat" cmpd="sng" algn="ctr">
+                      <a:solidFill>
+                        <a:srgbClr val="DAD9D4"/>
+                      </a:solidFill>
+                      <a:prstDash val="solid"/>
+                      <a:round/>
+                      <a:headEnd type="none" w="med" len="med"/>
+                      <a:tailEnd type="none" w="med" len="med"/>
+                    </a:lnR>
+                    <a:lnT w="6350" cap="flat" cmpd="sng" algn="ctr">
+                      <a:solidFill>
+                        <a:srgbClr val="DAD9D4"/>
+                      </a:solidFill>
+                      <a:prstDash val="solid"/>
+                      <a:round/>
+                      <a:headEnd type="none" w="med" len="med"/>
+                      <a:tailEnd type="none" w="med" len="med"/>
+                    </a:lnT>
+                    <a:lnB w="6350" cap="flat" cmpd="sng" algn="ctr">
+                      <a:solidFill>
+                        <a:srgbClr val="DAD9D4"/>
+                      </a:solidFill>
+                      <a:prstDash val="solid"/>
+                      <a:round/>
+                      <a:headEnd type="none" w="med" len="med"/>
+                      <a:tailEnd type="none" w="med" len="med"/>
+                    </a:lnB>
+                    <a:solidFill>
+                      <a:srgbClr val="FFFFFF"/>
+                    </a:solidFill>
+                  </a:tcPr>
+                </a:tc>
+                <a:tc>
+                  <a:txBody>
+                    <a:bodyPr/>
+                    <a:lstStyle/>
+                    <a:p>
+                      <a:pPr latinLnBrk="0" algn="l" indent="0" marL="0">
+                        <a:buNone/>
+                      </a:pPr>
+                      <a:r>
+                        <a:rPr lang="ko-KR" sz="1050" dirty="0">
+                          <a:solidFill>
+                            <a:srgbClr val="0B0B0B"/>
+                          </a:solidFill>
+                          <a:latin typeface="Pretendard" pitchFamily="34" charset="0"/>
+                          <a:ea typeface="Pretendard" pitchFamily="34" charset="-122"/>
+                          <a:cs typeface="Pretendard" pitchFamily="34" charset="-120"/>
+                        </a:rPr>
+                        <a:t>절차 수정 후</a:t>
+                      </a:r>
+                      <a:br/>
+                      <a:pPr latinLnBrk="0" algn="l" indent="0" marL="0">
+                        <a:buNone/>
+                      </a:pPr>
+                      <a:r>
+                        <a:rPr lang="ko-KR" sz="1050" dirty="0">
+                          <a:solidFill>
+                            <a:srgbClr val="0B0B0B"/>
+                          </a:solidFill>
+                          <a:latin typeface="Pretendard" pitchFamily="34" charset="0"/>
+                          <a:ea typeface="Pretendard" pitchFamily="34" charset="-122"/>
+                          <a:cs typeface="Pretendard" pitchFamily="34" charset="-120"/>
+                        </a:rPr>
+                        <a:t>전부 재학습</a:t>
+                      </a:r>
+                      <a:endParaRPr lang="ko-KR" sz="1050" dirty="0">
+                        <a:latin typeface="Pretendard" charset="0"/>
+                        <a:ea typeface="Pretendard" charset="0"/>
+                        <a:cs typeface="Pretendard" charset="0"/>
+                      </a:endParaRPr>
+                    </a:p>
+                  </a:txBody>
+                  <a:tcPr marL="91440" marR="91440" marT="45720" marB="45720" anchor="ctr">
+                    <a:lnL w="6350" cap="flat" cmpd="sng" algn="ctr">
+                      <a:solidFill>
+                        <a:srgbClr val="DAD9D4"/>
+                      </a:solidFill>
+                      <a:prstDash val="solid"/>
+                      <a:round/>
+                      <a:headEnd type="none" w="med" len="med"/>
+                      <a:tailEnd type="none" w="med" len="med"/>
+                    </a:lnL>
+                    <a:lnR w="6350" cap="flat" cmpd="sng" algn="ctr">
+                      <a:solidFill>
+                        <a:srgbClr val="DAD9D4"/>
+                      </a:solidFill>
+                      <a:prstDash val="solid"/>
+                      <a:round/>
+                      <a:headEnd type="none" w="med" len="med"/>
+                      <a:tailEnd type="none" w="med" len="med"/>
+                    </a:lnR>
+                    <a:lnT w="6350" cap="flat" cmpd="sng" algn="ctr">
+                      <a:solidFill>
+                        <a:srgbClr val="DAD9D4"/>
+                      </a:solidFill>
+                      <a:prstDash val="solid"/>
+                      <a:round/>
+                      <a:headEnd type="none" w="med" len="med"/>
+                      <a:tailEnd type="none" w="med" len="med"/>
+                    </a:lnT>
+                    <a:lnB w="6350" cap="flat" cmpd="sng" algn="ctr">
+                      <a:solidFill>
+                        <a:srgbClr val="DAD9D4"/>
+                      </a:solidFill>
+                      <a:prstDash val="solid"/>
+                      <a:round/>
+                      <a:headEnd type="none" w="med" len="med"/>
+                      <a:tailEnd type="none" w="med" len="med"/>
+                    </a:lnB>
+                    <a:solidFill>
+                      <a:srgbClr val="FFFFFF"/>
+                    </a:solidFill>
+                  </a:tcPr>
+                </a:tc>
+                <a:tc>
+                  <a:txBody>
+                    <a:bodyPr/>
+                    <a:lstStyle/>
+                    <a:p>
+                      <a:pPr latinLnBrk="0" algn="l" indent="0" marL="0">
+                        <a:buNone/>
+                      </a:pPr>
+                      <a:r>
+                        <a:rPr lang="ko-KR" sz="1050" dirty="0">
+                          <a:solidFill>
+                            <a:srgbClr val="0B0B0B"/>
+                          </a:solidFill>
+                          <a:latin typeface="Pretendard" pitchFamily="34" charset="0"/>
+                          <a:ea typeface="Pretendard" pitchFamily="34" charset="-122"/>
+                          <a:cs typeface="Pretendard" pitchFamily="34" charset="-120"/>
+                        </a:rPr>
+                        <a:t>닮은 맵 묶음 규칙은 유지하고 fold</a:t>
+                      </a:r>
+                      <a:br/>
+                      <a:pPr latinLnBrk="0" algn="l" indent="0" marL="0">
+                        <a:buNone/>
+                      </a:pPr>
+                      <a:r>
+                        <a:rPr lang="ko-KR" sz="1050" dirty="0">
+                          <a:solidFill>
+                            <a:srgbClr val="0B0B0B"/>
+                          </a:solidFill>
+                          <a:latin typeface="Pretendard" pitchFamily="34" charset="0"/>
+                          <a:ea typeface="Pretendard" pitchFamily="34" charset="-122"/>
+                          <a:cs typeface="Pretendard" pitchFamily="34" charset="-120"/>
+                        </a:rPr>
+                        <a:t>배정만 무작위로. 이전 결과는</a:t>
+                      </a:r>
+                      <a:br/>
+                      <a:pPr latinLnBrk="0" algn="l" indent="0" marL="0">
+                        <a:buNone/>
+                      </a:pPr>
+                      <a:r>
+                        <a:rPr lang="ko-KR" sz="1050" dirty="0">
+                          <a:solidFill>
+                            <a:srgbClr val="0B0B0B"/>
+                          </a:solidFill>
+                          <a:latin typeface="Pretendard" pitchFamily="34" charset="0"/>
+                          <a:ea typeface="Pretendard" pitchFamily="34" charset="-122"/>
+                          <a:cs typeface="Pretendard" pitchFamily="34" charset="-120"/>
+                        </a:rPr>
+                        <a:t>'편향된 분할'로 표시해 남김</a:t>
+                      </a:r>
+                      <a:endParaRPr lang="ko-KR" sz="1050" dirty="0">
+                        <a:latin typeface="Pretendard" charset="0"/>
+                        <a:ea typeface="Pretendard" charset="0"/>
+                        <a:cs typeface="Pretendard" charset="0"/>
+                      </a:endParaRPr>
+                    </a:p>
+                  </a:txBody>
+                  <a:tcPr marL="91440" marR="91440" marT="45720" marB="45720" anchor="ctr">
+                    <a:lnL w="6350" cap="flat" cmpd="sng" algn="ctr">
+                      <a:solidFill>
+                        <a:srgbClr val="DAD9D4"/>
+                      </a:solidFill>
+                      <a:prstDash val="solid"/>
+                      <a:round/>
+                      <a:headEnd type="none" w="med" len="med"/>
+                      <a:tailEnd type="none" w="med" len="med"/>
+                    </a:lnL>
+                    <a:lnR w="6350" cap="flat" cmpd="sng" algn="ctr">
+                      <a:solidFill>
+                        <a:srgbClr val="DAD9D4"/>
+                      </a:solidFill>
+                      <a:prstDash val="solid"/>
+                      <a:round/>
+                      <a:headEnd type="none" w="med" len="med"/>
+                      <a:tailEnd type="none" w="med" len="med"/>
+                    </a:lnR>
+                    <a:lnT w="6350" cap="flat" cmpd="sng" algn="ctr">
+                      <a:solidFill>
+                        <a:srgbClr val="DAD9D4"/>
+                      </a:solidFill>
+                      <a:prstDash val="solid"/>
+                      <a:round/>
+                      <a:headEnd type="none" w="med" len="med"/>
+                      <a:tailEnd type="none" w="med" len="med"/>
+                    </a:lnT>
+                    <a:lnB w="6350" cap="flat" cmpd="sng" algn="ctr">
+                      <a:solidFill>
+                        <a:srgbClr val="DAD9D4"/>
+                      </a:solidFill>
+                      <a:prstDash val="solid"/>
+                      <a:round/>
+                      <a:headEnd type="none" w="med" len="med"/>
+                      <a:tailEnd type="none" w="med" len="med"/>
                     </a:lnB>
                     <a:solidFill>
                       <a:srgbClr val="FFFFFF"/>
@@ -10621,7 +10836,7 @@
       </p:graphicFrame>
       <p:sp>
         <p:nvSpPr>
-          <p:cNvPr id="13" name="Text 10"/>
+          <p:cNvPr id="12" name="Text 9"/>
           <p:cNvSpPr txBox="1"/>
           <p:nvPr/>
         </p:nvSpPr>
@@ -10660,7 +10875,7 @@
       </p:sp>
       <p:sp>
         <p:nvSpPr>
-          <p:cNvPr id="14" name="Shape 11"/>
+          <p:cNvPr id="13" name="Shape 10"/>
           <p:cNvSpPr/>
           <p:nvPr/>
         </p:nvSpPr>
@@ -10687,7 +10902,7 @@
       </p:sp>
       <p:sp>
         <p:nvSpPr>
-          <p:cNvPr id="15" name="Text 12"/>
+          <p:cNvPr id="14" name="Text 11"/>
           <p:cNvSpPr txBox="1"/>
           <p:nvPr/>
         </p:nvSpPr>
@@ -10740,7 +10955,7 @@
       </p:sp>
       <p:sp>
         <p:nvSpPr>
-          <p:cNvPr id="16" name="Text 13"/>
+          <p:cNvPr id="15" name="Text 12"/>
           <p:cNvSpPr txBox="1"/>
           <p:nvPr/>
         </p:nvSpPr>
@@ -10779,7 +10994,7 @@
       </p:sp>
       <p:sp>
         <p:nvSpPr>
-          <p:cNvPr id="17" name="Shape 14"/>
+          <p:cNvPr id="16" name="Shape 13"/>
           <p:cNvSpPr/>
           <p:nvPr/>
         </p:nvSpPr>
@@ -10806,7 +11021,7 @@
       </p:sp>
       <p:sp>
         <p:nvSpPr>
-          <p:cNvPr id="18" name="Text 15"/>
+          <p:cNvPr id="17" name="Text 14"/>
           <p:cNvSpPr txBox="1"/>
           <p:nvPr/>
         </p:nvSpPr>
@@ -10859,7 +11074,7 @@
       </p:sp>
       <p:sp>
         <p:nvSpPr>
-          <p:cNvPr id="19" name="Text 16"/>
+          <p:cNvPr id="18" name="Text 15"/>
           <p:cNvSpPr txBox="1"/>
           <p:nvPr/>
         </p:nvSpPr>
@@ -10898,7 +11113,7 @@
       </p:sp>
       <p:sp>
         <p:nvSpPr>
-          <p:cNvPr id="20" name="Shape 17"/>
+          <p:cNvPr id="19" name="Shape 16"/>
           <p:cNvSpPr/>
           <p:nvPr/>
         </p:nvSpPr>
@@ -10925,7 +11140,7 @@
       </p:sp>
       <p:sp>
         <p:nvSpPr>
-          <p:cNvPr id="21" name="Text 18"/>
+          <p:cNvPr id="20" name="Text 17"/>
           <p:cNvSpPr txBox="1"/>
           <p:nvPr/>
         </p:nvSpPr>
@@ -10978,7 +11193,7 @@
       </p:sp>
       <p:sp>
         <p:nvSpPr>
-          <p:cNvPr id="22" name="Text 19"/>
+          <p:cNvPr id="21" name="Text 18"/>
           <p:cNvSpPr txBox="1"/>
           <p:nvPr/>
         </p:nvSpPr>
@@ -11017,7 +11232,7 @@
       </p:sp>
       <p:sp>
         <p:nvSpPr>
-          <p:cNvPr id="23" name="Shape 20"/>
+          <p:cNvPr id="22" name="Shape 19"/>
           <p:cNvSpPr/>
           <p:nvPr/>
         </p:nvSpPr>
@@ -11044,7 +11259,7 @@
       </p:sp>
       <p:sp>
         <p:nvSpPr>
-          <p:cNvPr id="24" name="Text 21"/>
+          <p:cNvPr id="23" name="Text 20"/>
           <p:cNvSpPr txBox="1"/>
           <p:nvPr/>
         </p:nvSpPr>
@@ -11097,14 +11312,14 @@
       </p:sp>
       <p:sp>
         <p:nvSpPr>
-          <p:cNvPr id="25" name="Text 22"/>
+          <p:cNvPr id="24" name="Text 21"/>
           <p:cNvSpPr txBox="1"/>
           <p:nvPr/>
         </p:nvSpPr>
         <p:spPr>
           <a:xfrm>
-            <a:off x="6400800" y="4297680"/>
-            <a:ext cx="5148072" cy="274320"/>
+            <a:off x="6400800" y="4315968"/>
+            <a:ext cx="5148072" cy="256032"/>
           </a:xfrm>
           <a:prstGeom prst="rect">
             <a:avLst/>
@@ -11120,7 +11335,7 @@
               <a:buNone/>
             </a:pPr>
             <a:r>
-              <a:rPr lang="ko-KR" sz="1150" dirty="0">
+              <a:rPr lang="ko-KR" sz="1000" dirty="0">
                 <a:solidFill>
                   <a:srgbClr val="52514E"/>
                 </a:solidFill>
@@ -11128,9 +11343,9 @@
                 <a:ea typeface="Pretendard" pitchFamily="34" charset="-122"/>
                 <a:cs typeface="Pretendard" pitchFamily="34" charset="-120"/>
               </a:rPr>
-              <a:t>체크포인트 6개 · 판단 13건 · 검증 워크플로 10회(에이전트 45개) · 오류 15건 기록</a:t>
+              <a:t>체크포인트 6개 · 판단 13건 · 검증 워크플로 10회(에이전트 45개) · 오류 15건 · 작업 시간 7시간 40분</a:t>
             </a:r>
-            <a:endParaRPr lang="ko-KR" sz="1150" dirty="0"/>
+            <a:endParaRPr lang="ko-KR" sz="1000" dirty="0"/>
           </a:p>
         </p:txBody>
       </p:sp>
@@ -11157,8 +11372,7 @@
             <a:tbl>
               <a:tblPr/>
               <a:tblGrid>
-                <a:gridCol w="1188720"/>
-                <a:gridCol w="1417320"/>
+                <a:gridCol w="2606040"/>
                 <a:gridCol w="2542032"/>
               </a:tblGrid>
               <a:tr h="274320">
@@ -11171,17 +11385,32 @@
                         <a:buNone/>
                       </a:pPr>
                       <a:r>
-                        <a:rPr lang="ko-KR" sz="1000" b="1" dirty="0">
-                          <a:solidFill>
-                            <a:srgbClr val="0B0B0B"/>
-                          </a:solidFill>
-                          <a:latin typeface="Pretendard" pitchFamily="34" charset="0"/>
-                          <a:ea typeface="Pretendard" pitchFamily="34" charset="-122"/>
-                          <a:cs typeface="Pretendard" pitchFamily="34" charset="-120"/>
-                        </a:rPr>
-                        <a:t>판단</a:t>
-                      </a:r>
-                      <a:endParaRPr lang="ko-KR" sz="1000" dirty="0">
+                        <a:rPr lang="ko-KR" sz="1050" b="1" dirty="0">
+                          <a:solidFill>
+                            <a:srgbClr val="0B0B0B"/>
+                          </a:solidFill>
+                          <a:latin typeface="Pretendard" pitchFamily="34" charset="0"/>
+                          <a:ea typeface="Pretendard" pitchFamily="34" charset="-122"/>
+                          <a:cs typeface="Pretendard" pitchFamily="34" charset="-120"/>
+                        </a:rPr>
+                        <a:t>체크포인트 3에서 AI가</a:t>
+                      </a:r>
+                      <a:br/>
+                      <a:pPr latinLnBrk="0" algn="l" indent="0" marL="0">
+                        <a:buNone/>
+                      </a:pPr>
+                      <a:r>
+                        <a:rPr lang="ko-KR" sz="1050" b="1" dirty="0">
+                          <a:solidFill>
+                            <a:srgbClr val="0B0B0B"/>
+                          </a:solidFill>
+                          <a:latin typeface="Pretendard" pitchFamily="34" charset="0"/>
+                          <a:ea typeface="Pretendard" pitchFamily="34" charset="-122"/>
+                          <a:cs typeface="Pretendard" pitchFamily="34" charset="-120"/>
+                        </a:rPr>
+                        <a:t>보고한 개선 방향 후보</a:t>
+                      </a:r>
+                      <a:endParaRPr lang="ko-KR" sz="1050" dirty="0">
                         <a:latin typeface="Pretendard" charset="0"/>
                         <a:ea typeface="Pretendard" charset="0"/>
                         <a:cs typeface="Pretendard" charset="0"/>
@@ -11239,85 +11468,17 @@
                         <a:buNone/>
                       </a:pPr>
                       <a:r>
-                        <a:rPr lang="ko-KR" sz="1000" b="1" dirty="0">
-                          <a:solidFill>
-                            <a:srgbClr val="0B0B0B"/>
-                          </a:solidFill>
-                          <a:latin typeface="Pretendard" pitchFamily="34" charset="0"/>
-                          <a:ea typeface="Pretendard" pitchFamily="34" charset="-122"/>
-                          <a:cs typeface="Pretendard" pitchFamily="34" charset="-120"/>
-                        </a:rPr>
-                        <a:t>선택</a:t>
-                      </a:r>
-                      <a:endParaRPr lang="ko-KR" sz="1000" dirty="0">
-                        <a:latin typeface="Pretendard" charset="0"/>
-                        <a:ea typeface="Pretendard" charset="0"/>
-                        <a:cs typeface="Pretendard" charset="0"/>
-                      </a:endParaRPr>
-                    </a:p>
-                  </a:txBody>
-                  <a:tcPr marL="91440" marR="91440" marT="45720" marB="45720" anchor="ctr">
-                    <a:lnL w="6350" cap="flat" cmpd="sng" algn="ctr">
-                      <a:solidFill>
-                        <a:srgbClr val="DAD9D4"/>
-                      </a:solidFill>
-                      <a:prstDash val="solid"/>
-                      <a:round/>
-                      <a:headEnd type="none" w="med" len="med"/>
-                      <a:tailEnd type="none" w="med" len="med"/>
-                    </a:lnL>
-                    <a:lnR w="6350" cap="flat" cmpd="sng" algn="ctr">
-                      <a:solidFill>
-                        <a:srgbClr val="DAD9D4"/>
-                      </a:solidFill>
-                      <a:prstDash val="solid"/>
-                      <a:round/>
-                      <a:headEnd type="none" w="med" len="med"/>
-                      <a:tailEnd type="none" w="med" len="med"/>
-                    </a:lnR>
-                    <a:lnT w="6350" cap="flat" cmpd="sng" algn="ctr">
-                      <a:solidFill>
-                        <a:srgbClr val="DAD9D4"/>
-                      </a:solidFill>
-                      <a:prstDash val="solid"/>
-                      <a:round/>
-                      <a:headEnd type="none" w="med" len="med"/>
-                      <a:tailEnd type="none" w="med" len="med"/>
-                    </a:lnT>
-                    <a:lnB w="6350" cap="flat" cmpd="sng" algn="ctr">
-                      <a:solidFill>
-                        <a:srgbClr val="DAD9D4"/>
-                      </a:solidFill>
-                      <a:prstDash val="solid"/>
-                      <a:round/>
-                      <a:headEnd type="none" w="med" len="med"/>
-                      <a:tailEnd type="none" w="med" len="med"/>
-                    </a:lnB>
-                    <a:solidFill>
-                      <a:srgbClr val="F3F3F1"/>
-                    </a:solidFill>
-                  </a:tcPr>
-                </a:tc>
-                <a:tc>
-                  <a:txBody>
-                    <a:bodyPr/>
-                    <a:lstStyle/>
-                    <a:p>
-                      <a:pPr latinLnBrk="0" algn="l" indent="0" marL="0">
-                        <a:buNone/>
-                      </a:pPr>
-                      <a:r>
-                        <a:rPr lang="ko-KR" sz="1000" b="1" dirty="0">
-                          <a:solidFill>
-                            <a:srgbClr val="0B0B0B"/>
-                          </a:solidFill>
-                          <a:latin typeface="Pretendard" pitchFamily="34" charset="0"/>
-                          <a:ea typeface="Pretendard" pitchFamily="34" charset="-122"/>
-                          <a:cs typeface="Pretendard" pitchFamily="34" charset="-120"/>
-                        </a:rPr>
-                        <a:t>근거</a:t>
-                      </a:r>
-                      <a:endParaRPr lang="ko-KR" sz="1000" dirty="0">
+                        <a:rPr lang="ko-KR" sz="1050" b="1" dirty="0">
+                          <a:solidFill>
+                            <a:srgbClr val="0B0B0B"/>
+                          </a:solidFill>
+                          <a:latin typeface="Pretendard" pitchFamily="34" charset="0"/>
+                          <a:ea typeface="Pretendard" pitchFamily="34" charset="-122"/>
+                          <a:cs typeface="Pretendard" pitchFamily="34" charset="-120"/>
+                        </a:rPr>
+                        <a:t>내 결정 (판단 지점 8)</a:t>
+                      </a:r>
+                      <a:endParaRPr lang="ko-KR" sz="1050" dirty="0">
                         <a:latin typeface="Pretendard" charset="0"/>
                         <a:ea typeface="Pretendard" charset="0"/>
                         <a:cs typeface="Pretendard" charset="0"/>
@@ -11377,32 +11538,122 @@
                         <a:buNone/>
                       </a:pPr>
                       <a:r>
-                        <a:rPr lang="ko-KR" sz="1000" dirty="0">
-                          <a:solidFill>
-                            <a:srgbClr val="0B0B0B"/>
-                          </a:solidFill>
-                          <a:latin typeface="Pretendard" pitchFamily="34" charset="0"/>
-                          <a:ea typeface="Pretendard" pitchFamily="34" charset="-122"/>
-                          <a:cs typeface="Pretendard" pitchFamily="34" charset="-120"/>
-                        </a:rPr>
-                        <a:t>라벨 없는</a:t>
+                        <a:rPr lang="ko-KR" sz="1050" dirty="0">
+                          <a:solidFill>
+                            <a:srgbClr val="0B0B0B"/>
+                          </a:solidFill>
+                          <a:latin typeface="Pretendard" pitchFamily="34" charset="0"/>
+                          <a:ea typeface="Pretendard" pitchFamily="34" charset="-122"/>
+                          <a:cs typeface="Pretendard" pitchFamily="34" charset="-120"/>
+                        </a:rPr>
+                        <a:t>① 소형 CNN: 맵을 격자로 맞추고</a:t>
                       </a:r>
                       <a:br/>
                       <a:pPr latinLnBrk="0" algn="l" indent="0" marL="0">
                         <a:buNone/>
                       </a:pPr>
                       <a:r>
-                        <a:rPr lang="ko-KR" sz="1000" dirty="0">
-                          <a:solidFill>
-                            <a:srgbClr val="0B0B0B"/>
-                          </a:solidFill>
-                          <a:latin typeface="Pretendard" pitchFamily="34" charset="0"/>
-                          <a:ea typeface="Pretendard" pitchFamily="34" charset="-122"/>
-                          <a:cs typeface="Pretendard" pitchFamily="34" charset="-120"/>
-                        </a:rPr>
-                        <a:t>638,507장</a:t>
-                      </a:r>
-                      <a:endParaRPr lang="ko-KR" sz="1000" dirty="0">
+                        <a:rPr lang="ko-KR" sz="1050" dirty="0">
+                          <a:solidFill>
+                            <a:srgbClr val="0B0B0B"/>
+                          </a:solidFill>
+                          <a:latin typeface="Pretendard" pitchFamily="34" charset="0"/>
+                          <a:ea typeface="Pretendard" pitchFamily="34" charset="-122"/>
+                          <a:cs typeface="Pretendard" pitchFamily="34" charset="-120"/>
+                        </a:rPr>
+                        <a:t>회전·반전 증강. 약한 패턴은 모양·위치가</a:t>
+                      </a:r>
+                      <a:br/>
+                      <a:pPr latinLnBrk="0" algn="l" indent="0" marL="0">
+                        <a:buNone/>
+                      </a:pPr>
+                      <a:r>
+                        <a:rPr lang="ko-KR" sz="1050" dirty="0">
+                          <a:solidFill>
+                            <a:srgbClr val="0B0B0B"/>
+                          </a:solidFill>
+                          <a:latin typeface="Pretendard" pitchFamily="34" charset="0"/>
+                          <a:ea typeface="Pretendard" pitchFamily="34" charset="-122"/>
+                          <a:cs typeface="Pretendard" pitchFamily="34" charset="-120"/>
+                        </a:rPr>
+                        <a:t>핵심인데 손으로 만든 특징은 이를</a:t>
+                      </a:r>
+                      <a:br/>
+                      <a:pPr latinLnBrk="0" algn="l" indent="0" marL="0">
+                        <a:buNone/>
+                      </a:pPr>
+                      <a:r>
+                        <a:rPr lang="ko-KR" sz="1050" dirty="0">
+                          <a:solidFill>
+                            <a:srgbClr val="0B0B0B"/>
+                          </a:solidFill>
+                          <a:latin typeface="Pretendard" pitchFamily="34" charset="0"/>
+                          <a:ea typeface="Pretendard" pitchFamily="34" charset="-122"/>
+                          <a:cs typeface="Pretendard" pitchFamily="34" charset="-120"/>
+                        </a:rPr>
+                        <a:t>뭉갬(덩어리 특징만 빼도 0.81 → 0.68).</a:t>
+                      </a:r>
+                      <a:br/>
+                      <a:pPr latinLnBrk="0" algn="l" indent="0" marL="0">
+                        <a:buNone/>
+                      </a:pPr>
+                      <a:r>
+                        <a:rPr lang="ko-KR" sz="1050" dirty="0">
+                          <a:solidFill>
+                            <a:srgbClr val="0B0B0B"/>
+                          </a:solidFill>
+                          <a:latin typeface="Pretendard" pitchFamily="34" charset="0"/>
+                          <a:ea typeface="Pretendard" pitchFamily="34" charset="-122"/>
+                          <a:cs typeface="Pretendard" pitchFamily="34" charset="-120"/>
+                        </a:rPr>
+                        <a:t>② 특징 강화 + 부스팅: 직선·국부 덩어리</a:t>
+                      </a:r>
+                      <a:br/>
+                      <a:pPr latinLnBrk="0" algn="l" indent="0" marL="0">
+                        <a:buNone/>
+                      </a:pPr>
+                      <a:r>
+                        <a:rPr lang="ko-KR" sz="1050" dirty="0">
+                          <a:solidFill>
+                            <a:srgbClr val="0B0B0B"/>
+                          </a:solidFill>
+                          <a:latin typeface="Pretendard" pitchFamily="34" charset="0"/>
+                          <a:ea typeface="Pretendard" pitchFamily="34" charset="-122"/>
+                          <a:cs typeface="Pretendard" pitchFamily="34" charset="-120"/>
+                        </a:rPr>
+                        <a:t>특징 추가. 가볍지만 개선 폭 제한. ③ 사후</a:t>
+                      </a:r>
+                      <a:br/>
+                      <a:pPr latinLnBrk="0" algn="l" indent="0" marL="0">
+                        <a:buNone/>
+                      </a:pPr>
+                      <a:r>
+                        <a:rPr lang="ko-KR" sz="1050" dirty="0">
+                          <a:solidFill>
+                            <a:srgbClr val="0B0B0B"/>
+                          </a:solidFill>
+                          <a:latin typeface="Pretendard" pitchFamily="34" charset="0"/>
+                          <a:ea typeface="Pretendard" pitchFamily="34" charset="-122"/>
+                          <a:cs typeface="Pretendard" pitchFamily="34" charset="-120"/>
+                        </a:rPr>
+                        <a:t>임계값 보정: val에서 패턴별 가중 조정.</a:t>
+                      </a:r>
+                      <a:br/>
+                      <a:pPr latinLnBrk="0" algn="l" indent="0" marL="0">
+                        <a:buNone/>
+                      </a:pPr>
+                      <a:r>
+                        <a:rPr lang="ko-KR" sz="1050" dirty="0">
+                          <a:solidFill>
+                            <a:srgbClr val="0B0B0B"/>
+                          </a:solidFill>
+                          <a:latin typeface="Pretendard" pitchFamily="34" charset="0"/>
+                          <a:ea typeface="Pretendard" pitchFamily="34" charset="-122"/>
+                          <a:cs typeface="Pretendard" pitchFamily="34" charset="-120"/>
+                        </a:rPr>
+                        <a:t>빠르지만 드문 패턴은 val 과적합 위험</a:t>
+                      </a:r>
+                      <a:endParaRPr lang="ko-KR" sz="1050" dirty="0">
                         <a:latin typeface="Pretendard" charset="0"/>
                         <a:ea typeface="Pretendard" charset="0"/>
                         <a:cs typeface="Pretendard" charset="0"/>
@@ -11460,587 +11711,92 @@
                         <a:buNone/>
                       </a:pPr>
                       <a:r>
-                        <a:rPr lang="ko-KR" sz="1000" dirty="0">
-                          <a:solidFill>
-                            <a:srgbClr val="0B0B0B"/>
-                          </a:solidFill>
-                          <a:latin typeface="Pretendard" pitchFamily="34" charset="0"/>
-                          <a:ea typeface="Pretendard" pitchFamily="34" charset="-122"/>
-                          <a:cs typeface="Pretendard" pitchFamily="34" charset="-120"/>
-                        </a:rPr>
-                        <a:t>제외</a:t>
-                      </a:r>
-                      <a:endParaRPr lang="ko-KR" sz="1000" dirty="0">
-                        <a:latin typeface="Pretendard" charset="0"/>
-                        <a:ea typeface="Pretendard" charset="0"/>
-                        <a:cs typeface="Pretendard" charset="0"/>
-                      </a:endParaRPr>
-                    </a:p>
-                  </a:txBody>
-                  <a:tcPr marL="91440" marR="91440" marT="45720" marB="45720" anchor="ctr">
-                    <a:lnL w="6350" cap="flat" cmpd="sng" algn="ctr">
-                      <a:solidFill>
-                        <a:srgbClr val="DAD9D4"/>
-                      </a:solidFill>
-                      <a:prstDash val="solid"/>
-                      <a:round/>
-                      <a:headEnd type="none" w="med" len="med"/>
-                      <a:tailEnd type="none" w="med" len="med"/>
-                    </a:lnL>
-                    <a:lnR w="6350" cap="flat" cmpd="sng" algn="ctr">
-                      <a:solidFill>
-                        <a:srgbClr val="DAD9D4"/>
-                      </a:solidFill>
-                      <a:prstDash val="solid"/>
-                      <a:round/>
-                      <a:headEnd type="none" w="med" len="med"/>
-                      <a:tailEnd type="none" w="med" len="med"/>
-                    </a:lnR>
-                    <a:lnT w="6350" cap="flat" cmpd="sng" algn="ctr">
-                      <a:solidFill>
-                        <a:srgbClr val="DAD9D4"/>
-                      </a:solidFill>
-                      <a:prstDash val="solid"/>
-                      <a:round/>
-                      <a:headEnd type="none" w="med" len="med"/>
-                      <a:tailEnd type="none" w="med" len="med"/>
-                    </a:lnT>
-                    <a:lnB w="6350" cap="flat" cmpd="sng" algn="ctr">
-                      <a:solidFill>
-                        <a:srgbClr val="DAD9D4"/>
-                      </a:solidFill>
-                      <a:prstDash val="solid"/>
-                      <a:round/>
-                      <a:headEnd type="none" w="med" len="med"/>
-                      <a:tailEnd type="none" w="med" len="med"/>
-                    </a:lnB>
-                    <a:solidFill>
-                      <a:srgbClr val="FFFFFF"/>
-                    </a:solidFill>
-                  </a:tcPr>
-                </a:tc>
-                <a:tc>
-                  <a:txBody>
-                    <a:bodyPr/>
-                    <a:lstStyle/>
-                    <a:p>
-                      <a:pPr latinLnBrk="0" algn="l" indent="0" marL="0">
-                        <a:buNone/>
-                      </a:pPr>
-                      <a:r>
-                        <a:rPr lang="ko-KR" sz="1000" dirty="0">
-                          <a:solidFill>
-                            <a:srgbClr val="0B0B0B"/>
-                          </a:solidFill>
-                          <a:latin typeface="Pretendard" pitchFamily="34" charset="0"/>
-                          <a:ea typeface="Pretendard" pitchFamily="34" charset="-122"/>
-                          <a:cs typeface="Pretendard" pitchFamily="34" charset="-120"/>
-                        </a:rPr>
-                        <a:t>불량 0개 맵이 5.8만 장 등 분포가 다르고,</a:t>
+                        <a:rPr lang="ko-KR" sz="1050" dirty="0">
+                          <a:solidFill>
+                            <a:srgbClr val="0B0B0B"/>
+                          </a:solidFill>
+                          <a:latin typeface="Pretendard" pitchFamily="34" charset="0"/>
+                          <a:ea typeface="Pretendard" pitchFamily="34" charset="-122"/>
+                          <a:cs typeface="Pretendard" pitchFamily="34" charset="-120"/>
+                        </a:rPr>
+                        <a:t>①+③ 조합. 가중 없는 CE와 weighted</a:t>
                       </a:r>
                       <a:br/>
                       <a:pPr latinLnBrk="0" algn="l" indent="0" marL="0">
                         <a:buNone/>
                       </a:pPr>
                       <a:r>
-                        <a:rPr lang="ko-KR" sz="1000" dirty="0">
-                          <a:solidFill>
-                            <a:srgbClr val="0B0B0B"/>
-                          </a:solidFill>
-                          <a:latin typeface="Pretendard" pitchFamily="34" charset="0"/>
-                          <a:ea typeface="Pretendard" pitchFamily="34" charset="-122"/>
-                          <a:cs typeface="Pretendard" pitchFamily="34" charset="-120"/>
-                        </a:rPr>
-                        <a:t>평가 맵의 복사본 5,408장이 섞여 있음</a:t>
-                      </a:r>
-                      <a:endParaRPr lang="ko-KR" sz="1000" dirty="0">
-                        <a:latin typeface="Pretendard" charset="0"/>
-                        <a:ea typeface="Pretendard" charset="0"/>
-                        <a:cs typeface="Pretendard" charset="0"/>
-                      </a:endParaRPr>
-                    </a:p>
-                  </a:txBody>
-                  <a:tcPr marL="91440" marR="91440" marT="45720" marB="45720" anchor="ctr">
-                    <a:lnL w="6350" cap="flat" cmpd="sng" algn="ctr">
-                      <a:solidFill>
-                        <a:srgbClr val="DAD9D4"/>
-                      </a:solidFill>
-                      <a:prstDash val="solid"/>
-                      <a:round/>
-                      <a:headEnd type="none" w="med" len="med"/>
-                      <a:tailEnd type="none" w="med" len="med"/>
-                    </a:lnL>
-                    <a:lnR w="6350" cap="flat" cmpd="sng" algn="ctr">
-                      <a:solidFill>
-                        <a:srgbClr val="DAD9D4"/>
-                      </a:solidFill>
-                      <a:prstDash val="solid"/>
-                      <a:round/>
-                      <a:headEnd type="none" w="med" len="med"/>
-                      <a:tailEnd type="none" w="med" len="med"/>
-                    </a:lnR>
-                    <a:lnT w="6350" cap="flat" cmpd="sng" algn="ctr">
-                      <a:solidFill>
-                        <a:srgbClr val="DAD9D4"/>
-                      </a:solidFill>
-                      <a:prstDash val="solid"/>
-                      <a:round/>
-                      <a:headEnd type="none" w="med" len="med"/>
-                      <a:tailEnd type="none" w="med" len="med"/>
-                    </a:lnT>
-                    <a:lnB w="6350" cap="flat" cmpd="sng" algn="ctr">
-                      <a:solidFill>
-                        <a:srgbClr val="DAD9D4"/>
-                      </a:solidFill>
-                      <a:prstDash val="solid"/>
-                      <a:round/>
-                      <a:headEnd type="none" w="med" len="med"/>
-                      <a:tailEnd type="none" w="med" len="med"/>
-                    </a:lnB>
-                    <a:solidFill>
-                      <a:srgbClr val="FFFFFF"/>
-                    </a:solidFill>
-                  </a:tcPr>
-                </a:tc>
-              </a:tr>
-              <a:tr h="274320">
-                <a:tc>
-                  <a:txBody>
-                    <a:bodyPr/>
-                    <a:lstStyle/>
-                    <a:p>
-                      <a:pPr latinLnBrk="0" algn="l" indent="0" marL="0">
-                        <a:buNone/>
-                      </a:pPr>
-                      <a:r>
-                        <a:rPr lang="ko-KR" sz="1000" dirty="0">
-                          <a:solidFill>
-                            <a:srgbClr val="0B0B0B"/>
-                          </a:solidFill>
-                          <a:latin typeface="Pretendard" pitchFamily="34" charset="0"/>
-                          <a:ea typeface="Pretendard" pitchFamily="34" charset="-122"/>
-                          <a:cs typeface="Pretendard" pitchFamily="34" charset="-120"/>
-                        </a:rPr>
-                        <a:t>성공 기준</a:t>
-                      </a:r>
-                      <a:endParaRPr lang="ko-KR" sz="1000" dirty="0">
-                        <a:latin typeface="Pretendard" charset="0"/>
-                        <a:ea typeface="Pretendard" charset="0"/>
-                        <a:cs typeface="Pretendard" charset="0"/>
-                      </a:endParaRPr>
-                    </a:p>
-                  </a:txBody>
-                  <a:tcPr marL="91440" marR="91440" marT="45720" marB="45720" anchor="ctr">
-                    <a:lnL w="6350" cap="flat" cmpd="sng" algn="ctr">
-                      <a:solidFill>
-                        <a:srgbClr val="DAD9D4"/>
-                      </a:solidFill>
-                      <a:prstDash val="solid"/>
-                      <a:round/>
-                      <a:headEnd type="none" w="med" len="med"/>
-                      <a:tailEnd type="none" w="med" len="med"/>
-                    </a:lnL>
-                    <a:lnR w="6350" cap="flat" cmpd="sng" algn="ctr">
-                      <a:solidFill>
-                        <a:srgbClr val="DAD9D4"/>
-                      </a:solidFill>
-                      <a:prstDash val="solid"/>
-                      <a:round/>
-                      <a:headEnd type="none" w="med" len="med"/>
-                      <a:tailEnd type="none" w="med" len="med"/>
-                    </a:lnR>
-                    <a:lnT w="6350" cap="flat" cmpd="sng" algn="ctr">
-                      <a:solidFill>
-                        <a:srgbClr val="DAD9D4"/>
-                      </a:solidFill>
-                      <a:prstDash val="solid"/>
-                      <a:round/>
-                      <a:headEnd type="none" w="med" len="med"/>
-                      <a:tailEnd type="none" w="med" len="med"/>
-                    </a:lnT>
-                    <a:lnB w="6350" cap="flat" cmpd="sng" algn="ctr">
-                      <a:solidFill>
-                        <a:srgbClr val="DAD9D4"/>
-                      </a:solidFill>
-                      <a:prstDash val="solid"/>
-                      <a:round/>
-                      <a:headEnd type="none" w="med" len="med"/>
-                      <a:tailEnd type="none" w="med" len="med"/>
-                    </a:lnB>
-                    <a:solidFill>
-                      <a:srgbClr val="FFFFFF"/>
-                    </a:solidFill>
-                  </a:tcPr>
-                </a:tc>
-                <a:tc>
-                  <a:txBody>
-                    <a:bodyPr/>
-                    <a:lstStyle/>
-                    <a:p>
-                      <a:pPr latinLnBrk="0" algn="l" indent="0" marL="0">
-                        <a:buNone/>
-                      </a:pPr>
-                      <a:r>
-                        <a:rPr lang="ko-KR" sz="1000" dirty="0">
-                          <a:solidFill>
-                            <a:srgbClr val="0B0B0B"/>
-                          </a:solidFill>
-                          <a:latin typeface="Pretendard" pitchFamily="34" charset="0"/>
-                          <a:ea typeface="Pretendard" pitchFamily="34" charset="-122"/>
-                          <a:cs typeface="Pretendard" pitchFamily="34" charset="-120"/>
-                        </a:rPr>
-                        <a:t>macro-F1 0.80 +</a:t>
+                        <a:rPr lang="ko-KR" sz="1050" dirty="0">
+                          <a:solidFill>
+                            <a:srgbClr val="0B0B0B"/>
+                          </a:solidFill>
+                          <a:latin typeface="Pretendard" pitchFamily="34" charset="0"/>
+                          <a:ea typeface="Pretendard" pitchFamily="34" charset="-122"/>
+                          <a:cs typeface="Pretendard" pitchFamily="34" charset="-120"/>
+                        </a:rPr>
+                        <a:t>CE를 같은 test에서 비교하고, 보정값은</a:t>
                       </a:r>
                       <a:br/>
                       <a:pPr latinLnBrk="0" algn="l" indent="0" marL="0">
                         <a:buNone/>
                       </a:pPr>
                       <a:r>
-                        <a:rPr lang="ko-KR" sz="1000" dirty="0">
-                          <a:solidFill>
-                            <a:srgbClr val="0B0B0B"/>
-                          </a:solidFill>
-                          <a:latin typeface="Pretendard" pitchFamily="34" charset="0"/>
-                          <a:ea typeface="Pretendard" pitchFamily="34" charset="-122"/>
-                          <a:cs typeface="Pretendard" pitchFamily="34" charset="-120"/>
-                        </a:rPr>
-                        <a:t>전 패턴 recall 0.50</a:t>
-                      </a:r>
-                      <a:endParaRPr lang="ko-KR" sz="1000" dirty="0">
-                        <a:latin typeface="Pretendard" charset="0"/>
-                        <a:ea typeface="Pretendard" charset="0"/>
-                        <a:cs typeface="Pretendard" charset="0"/>
-                      </a:endParaRPr>
-                    </a:p>
-                  </a:txBody>
-                  <a:tcPr marL="91440" marR="91440" marT="45720" marB="45720" anchor="ctr">
-                    <a:lnL w="6350" cap="flat" cmpd="sng" algn="ctr">
-                      <a:solidFill>
-                        <a:srgbClr val="DAD9D4"/>
-                      </a:solidFill>
-                      <a:prstDash val="solid"/>
-                      <a:round/>
-                      <a:headEnd type="none" w="med" len="med"/>
-                      <a:tailEnd type="none" w="med" len="med"/>
-                    </a:lnL>
-                    <a:lnR w="6350" cap="flat" cmpd="sng" algn="ctr">
-                      <a:solidFill>
-                        <a:srgbClr val="DAD9D4"/>
-                      </a:solidFill>
-                      <a:prstDash val="solid"/>
-                      <a:round/>
-                      <a:headEnd type="none" w="med" len="med"/>
-                      <a:tailEnd type="none" w="med" len="med"/>
-                    </a:lnR>
-                    <a:lnT w="6350" cap="flat" cmpd="sng" algn="ctr">
-                      <a:solidFill>
-                        <a:srgbClr val="DAD9D4"/>
-                      </a:solidFill>
-                      <a:prstDash val="solid"/>
-                      <a:round/>
-                      <a:headEnd type="none" w="med" len="med"/>
-                      <a:tailEnd type="none" w="med" len="med"/>
-                    </a:lnT>
-                    <a:lnB w="6350" cap="flat" cmpd="sng" algn="ctr">
-                      <a:solidFill>
-                        <a:srgbClr val="DAD9D4"/>
-                      </a:solidFill>
-                      <a:prstDash val="solid"/>
-                      <a:round/>
-                      <a:headEnd type="none" w="med" len="med"/>
-                      <a:tailEnd type="none" w="med" len="med"/>
-                    </a:lnB>
-                    <a:solidFill>
-                      <a:srgbClr val="FFFFFF"/>
-                    </a:solidFill>
-                  </a:tcPr>
-                </a:tc>
-                <a:tc>
-                  <a:txBody>
-                    <a:bodyPr/>
-                    <a:lstStyle/>
-                    <a:p>
-                      <a:pPr latinLnBrk="0" algn="l" indent="0" marL="0">
-                        <a:buNone/>
-                      </a:pPr>
-                      <a:r>
-                        <a:rPr lang="ko-KR" sz="1000" dirty="0">
-                          <a:solidFill>
-                            <a:srgbClr val="0B0B0B"/>
-                          </a:solidFill>
-                          <a:latin typeface="Pretendard" pitchFamily="34" charset="0"/>
-                          <a:ea typeface="Pretendard" pitchFamily="34" charset="-122"/>
-                          <a:cs typeface="Pretendard" pitchFamily="34" charset="-120"/>
-                        </a:rPr>
-                        <a:t>선행연구의 lot 분할 0.85는 재검사 복사본</a:t>
+                        <a:rPr lang="ko-KR" sz="1050" dirty="0">
+                          <a:solidFill>
+                            <a:srgbClr val="0B0B0B"/>
+                          </a:solidFill>
+                          <a:latin typeface="Pretendard" pitchFamily="34" charset="0"/>
+                          <a:ea typeface="Pretendard" pitchFamily="34" charset="-122"/>
+                          <a:cs typeface="Pretendard" pitchFamily="34" charset="-120"/>
+                        </a:rPr>
+                        <a:t>val에서만 정함. 비교 기준은 test 최고</a:t>
                       </a:r>
                       <a:br/>
                       <a:pPr latinLnBrk="0" algn="l" indent="0" marL="0">
                         <a:buNone/>
                       </a:pPr>
                       <a:r>
-                        <a:rPr lang="ko-KR" sz="1000" dirty="0">
-                          <a:solidFill>
-                            <a:srgbClr val="0B0B0B"/>
-                          </a:solidFill>
-                          <a:latin typeface="Pretendard" pitchFamily="34" charset="0"/>
-                          <a:ea typeface="Pretendard" pitchFamily="34" charset="-122"/>
-                          <a:cs typeface="Pretendard" pitchFamily="34" charset="-120"/>
-                        </a:rPr>
-                        <a:t>누수 가능성이 크고, 라벨 노이즈도 있음</a:t>
-                      </a:r>
-                      <a:endParaRPr lang="ko-KR" sz="1000" dirty="0">
-                        <a:latin typeface="Pretendard" charset="0"/>
-                        <a:ea typeface="Pretendard" charset="0"/>
-                        <a:cs typeface="Pretendard" charset="0"/>
-                      </a:endParaRPr>
-                    </a:p>
-                  </a:txBody>
-                  <a:tcPr marL="91440" marR="91440" marT="45720" marB="45720" anchor="ctr">
-                    <a:lnL w="6350" cap="flat" cmpd="sng" algn="ctr">
-                      <a:solidFill>
-                        <a:srgbClr val="DAD9D4"/>
-                      </a:solidFill>
-                      <a:prstDash val="solid"/>
-                      <a:round/>
-                      <a:headEnd type="none" w="med" len="med"/>
-                      <a:tailEnd type="none" w="med" len="med"/>
-                    </a:lnL>
-                    <a:lnR w="6350" cap="flat" cmpd="sng" algn="ctr">
-                      <a:solidFill>
-                        <a:srgbClr val="DAD9D4"/>
-                      </a:solidFill>
-                      <a:prstDash val="solid"/>
-                      <a:round/>
-                      <a:headEnd type="none" w="med" len="med"/>
-                      <a:tailEnd type="none" w="med" len="med"/>
-                    </a:lnR>
-                    <a:lnT w="6350" cap="flat" cmpd="sng" algn="ctr">
-                      <a:solidFill>
-                        <a:srgbClr val="DAD9D4"/>
-                      </a:solidFill>
-                      <a:prstDash val="solid"/>
-                      <a:round/>
-                      <a:headEnd type="none" w="med" len="med"/>
-                      <a:tailEnd type="none" w="med" len="med"/>
-                    </a:lnT>
-                    <a:lnB w="6350" cap="flat" cmpd="sng" algn="ctr">
-                      <a:solidFill>
-                        <a:srgbClr val="DAD9D4"/>
-                      </a:solidFill>
-                      <a:prstDash val="solid"/>
-                      <a:round/>
-                      <a:headEnd type="none" w="med" len="med"/>
-                      <a:tailEnd type="none" w="med" len="med"/>
-                    </a:lnB>
-                    <a:solidFill>
-                      <a:srgbClr val="FFFFFF"/>
-                    </a:solidFill>
-                  </a:tcPr>
-                </a:tc>
-              </a:tr>
-              <a:tr h="274320">
-                <a:tc>
-                  <a:txBody>
-                    <a:bodyPr/>
-                    <a:lstStyle/>
-                    <a:p>
-                      <a:pPr latinLnBrk="0" algn="l" indent="0" marL="0">
-                        <a:buNone/>
-                      </a:pPr>
-                      <a:r>
-                        <a:rPr lang="ko-KR" sz="1000" dirty="0">
-                          <a:solidFill>
-                            <a:srgbClr val="0B0B0B"/>
-                          </a:solidFill>
-                          <a:latin typeface="Pretendard" pitchFamily="34" charset="0"/>
-                          <a:ea typeface="Pretendard" pitchFamily="34" charset="-122"/>
-                          <a:cs typeface="Pretendard" pitchFamily="34" charset="-120"/>
-                        </a:rPr>
-                        <a:t>분할 오류 대응</a:t>
-                      </a:r>
-                      <a:endParaRPr lang="ko-KR" sz="1000" dirty="0">
-                        <a:latin typeface="Pretendard" charset="0"/>
-                        <a:ea typeface="Pretendard" charset="0"/>
-                        <a:cs typeface="Pretendard" charset="0"/>
-                      </a:endParaRPr>
-                    </a:p>
-                  </a:txBody>
-                  <a:tcPr marL="91440" marR="91440" marT="45720" marB="45720" anchor="ctr">
-                    <a:lnL w="6350" cap="flat" cmpd="sng" algn="ctr">
-                      <a:solidFill>
-                        <a:srgbClr val="DAD9D4"/>
-                      </a:solidFill>
-                      <a:prstDash val="solid"/>
-                      <a:round/>
-                      <a:headEnd type="none" w="med" len="med"/>
-                      <a:tailEnd type="none" w="med" len="med"/>
-                    </a:lnL>
-                    <a:lnR w="6350" cap="flat" cmpd="sng" algn="ctr">
-                      <a:solidFill>
-                        <a:srgbClr val="DAD9D4"/>
-                      </a:solidFill>
-                      <a:prstDash val="solid"/>
-                      <a:round/>
-                      <a:headEnd type="none" w="med" len="med"/>
-                      <a:tailEnd type="none" w="med" len="med"/>
-                    </a:lnR>
-                    <a:lnT w="6350" cap="flat" cmpd="sng" algn="ctr">
-                      <a:solidFill>
-                        <a:srgbClr val="DAD9D4"/>
-                      </a:solidFill>
-                      <a:prstDash val="solid"/>
-                      <a:round/>
-                      <a:headEnd type="none" w="med" len="med"/>
-                      <a:tailEnd type="none" w="med" len="med"/>
-                    </a:lnT>
-                    <a:lnB w="6350" cap="flat" cmpd="sng" algn="ctr">
-                      <a:solidFill>
-                        <a:srgbClr val="DAD9D4"/>
-                      </a:solidFill>
-                      <a:prstDash val="solid"/>
-                      <a:round/>
-                      <a:headEnd type="none" w="med" len="med"/>
-                      <a:tailEnd type="none" w="med" len="med"/>
-                    </a:lnB>
-                    <a:solidFill>
-                      <a:srgbClr val="FFFFFF"/>
-                    </a:solidFill>
-                  </a:tcPr>
-                </a:tc>
-                <a:tc>
-                  <a:txBody>
-                    <a:bodyPr/>
-                    <a:lstStyle/>
-                    <a:p>
-                      <a:pPr latinLnBrk="0" algn="l" indent="0" marL="0">
-                        <a:buNone/>
-                      </a:pPr>
-                      <a:r>
-                        <a:rPr lang="ko-KR" sz="1000" dirty="0">
-                          <a:solidFill>
-                            <a:srgbClr val="0B0B0B"/>
-                          </a:solidFill>
-                          <a:latin typeface="Pretendard" pitchFamily="34" charset="0"/>
-                          <a:ea typeface="Pretendard" pitchFamily="34" charset="-122"/>
-                          <a:cs typeface="Pretendard" pitchFamily="34" charset="-120"/>
-                        </a:rPr>
-                        <a:t>절차 수정 후</a:t>
+                        <a:rPr lang="ko-KR" sz="1050" dirty="0">
+                          <a:solidFill>
+                            <a:srgbClr val="0B0B0B"/>
+                          </a:solidFill>
+                          <a:latin typeface="Pretendard" pitchFamily="34" charset="0"/>
+                          <a:ea typeface="Pretendard" pitchFamily="34" charset="-122"/>
+                          <a:cs typeface="Pretendard" pitchFamily="34" charset="-120"/>
+                        </a:rPr>
+                        <a:t>베이스라인(더 엄격한 쪽). 입력은 비등방</a:t>
                       </a:r>
                       <a:br/>
                       <a:pPr latinLnBrk="0" algn="l" indent="0" marL="0">
                         <a:buNone/>
                       </a:pPr>
                       <a:r>
-                        <a:rPr lang="ko-KR" sz="1000" dirty="0">
-                          <a:solidFill>
-                            <a:srgbClr val="0B0B0B"/>
-                          </a:solidFill>
-                          <a:latin typeface="Pretendard" pitchFamily="34" charset="0"/>
-                          <a:ea typeface="Pretendard" pitchFamily="34" charset="-122"/>
-                          <a:cs typeface="Pretendard" pitchFamily="34" charset="-120"/>
-                        </a:rPr>
-                        <a:t>전부 재학습</a:t>
-                      </a:r>
-                      <a:endParaRPr lang="ko-KR" sz="1000" dirty="0">
-                        <a:latin typeface="Pretendard" charset="0"/>
-                        <a:ea typeface="Pretendard" charset="0"/>
-                        <a:cs typeface="Pretendard" charset="0"/>
-                      </a:endParaRPr>
-                    </a:p>
-                  </a:txBody>
-                  <a:tcPr marL="91440" marR="91440" marT="45720" marB="45720" anchor="ctr">
-                    <a:lnL w="6350" cap="flat" cmpd="sng" algn="ctr">
-                      <a:solidFill>
-                        <a:srgbClr val="DAD9D4"/>
-                      </a:solidFill>
-                      <a:prstDash val="solid"/>
-                      <a:round/>
-                      <a:headEnd type="none" w="med" len="med"/>
-                      <a:tailEnd type="none" w="med" len="med"/>
-                    </a:lnL>
-                    <a:lnR w="6350" cap="flat" cmpd="sng" algn="ctr">
-                      <a:solidFill>
-                        <a:srgbClr val="DAD9D4"/>
-                      </a:solidFill>
-                      <a:prstDash val="solid"/>
-                      <a:round/>
-                      <a:headEnd type="none" w="med" len="med"/>
-                      <a:tailEnd type="none" w="med" len="med"/>
-                    </a:lnR>
-                    <a:lnT w="6350" cap="flat" cmpd="sng" algn="ctr">
-                      <a:solidFill>
-                        <a:srgbClr val="DAD9D4"/>
-                      </a:solidFill>
-                      <a:prstDash val="solid"/>
-                      <a:round/>
-                      <a:headEnd type="none" w="med" len="med"/>
-                      <a:tailEnd type="none" w="med" len="med"/>
-                    </a:lnT>
-                    <a:lnB w="6350" cap="flat" cmpd="sng" algn="ctr">
-                      <a:solidFill>
-                        <a:srgbClr val="DAD9D4"/>
-                      </a:solidFill>
-                      <a:prstDash val="solid"/>
-                      <a:round/>
-                      <a:headEnd type="none" w="med" len="med"/>
-                      <a:tailEnd type="none" w="med" len="med"/>
-                    </a:lnB>
-                    <a:solidFill>
-                      <a:srgbClr val="FFFFFF"/>
-                    </a:solidFill>
-                  </a:tcPr>
-                </a:tc>
-                <a:tc>
-                  <a:txBody>
-                    <a:bodyPr/>
-                    <a:lstStyle/>
-                    <a:p>
-                      <a:pPr latinLnBrk="0" algn="l" indent="0" marL="0">
-                        <a:buNone/>
-                      </a:pPr>
-                      <a:r>
-                        <a:rPr lang="ko-KR" sz="1000" dirty="0">
-                          <a:solidFill>
-                            <a:srgbClr val="0B0B0B"/>
-                          </a:solidFill>
-                          <a:latin typeface="Pretendard" pitchFamily="34" charset="0"/>
-                          <a:ea typeface="Pretendard" pitchFamily="34" charset="-122"/>
-                          <a:cs typeface="Pretendard" pitchFamily="34" charset="-120"/>
-                        </a:rPr>
-                        <a:t>닮은 맵 묶음 규칙은 유지하고 fold</a:t>
+                        <a:rPr lang="ko-KR" sz="1050" dirty="0">
+                          <a:solidFill>
+                            <a:srgbClr val="0B0B0B"/>
+                          </a:solidFill>
+                          <a:latin typeface="Pretendard" pitchFamily="34" charset="0"/>
+                          <a:ea typeface="Pretendard" pitchFamily="34" charset="-122"/>
+                          <a:cs typeface="Pretendard" pitchFamily="34" charset="-120"/>
+                        </a:rPr>
+                        <a:t>64×64 불량 보존 축소. 결과: weighted</a:t>
                       </a:r>
                       <a:br/>
                       <a:pPr latinLnBrk="0" algn="l" indent="0" marL="0">
                         <a:buNone/>
                       </a:pPr>
                       <a:r>
-                        <a:rPr lang="ko-KR" sz="1000" dirty="0">
-                          <a:solidFill>
-                            <a:srgbClr val="0B0B0B"/>
-                          </a:solidFill>
-                          <a:latin typeface="Pretendard" pitchFamily="34" charset="0"/>
-                          <a:ea typeface="Pretendard" pitchFamily="34" charset="-122"/>
-                          <a:cs typeface="Pretendard" pitchFamily="34" charset="-120"/>
-                        </a:rPr>
-                        <a:t>배정만 무작위로. 이전 결과는</a:t>
-                      </a:r>
-                      <a:br/>
-                      <a:pPr latinLnBrk="0" algn="l" indent="0" marL="0">
-                        <a:buNone/>
-                      </a:pPr>
-                      <a:r>
-                        <a:rPr lang="ko-KR" sz="1000" dirty="0">
-                          <a:solidFill>
-                            <a:srgbClr val="0B0B0B"/>
-                          </a:solidFill>
-                          <a:latin typeface="Pretendard" pitchFamily="34" charset="0"/>
-                          <a:ea typeface="Pretendard" pitchFamily="34" charset="-122"/>
-                          <a:cs typeface="Pretendard" pitchFamily="34" charset="-120"/>
-                        </a:rPr>
-                        <a:t>'편향된 분할'로 표시해 남김</a:t>
-                      </a:r>
-                      <a:endParaRPr lang="ko-KR" sz="1000" dirty="0">
+                        <a:rPr lang="ko-KR" sz="1050" dirty="0">
+                          <a:solidFill>
+                            <a:srgbClr val="0B0B0B"/>
+                          </a:solidFill>
+                          <a:latin typeface="Pretendard" pitchFamily="34" charset="0"/>
+                          <a:ea typeface="Pretendard" pitchFamily="34" charset="-122"/>
+                          <a:cs typeface="Pretendard" pitchFamily="34" charset="-120"/>
+                        </a:rPr>
+                        <a:t>CE는 0.825로 폐기, 보정 채택으로 0.909</a:t>
+                      </a:r>
+                      <a:endParaRPr lang="ko-KR" sz="1050" dirty="0">
                         <a:latin typeface="Pretendard" charset="0"/>
                         <a:ea typeface="Pretendard" charset="0"/>
                         <a:cs typeface="Pretendard" charset="0"/>

--- a/portfolio/portfolio.pptx
+++ b/portfolio/portfolio.pptx
@@ -1835,25 +1835,7 @@
                 <a:ea typeface="Pretendard SemiBold" pitchFamily="34" charset="-122"/>
                 <a:cs typeface="Pretendard SemiBold" pitchFamily="34" charset="-120"/>
               </a:rPr>
-              <a:t>Claude Code에 구현과 실험을 맡기고 평가 방식과 판단·검증은 제가 맡아,</a:t>
-            </a:r>
-            <a:br/>
-            <a:pPr latinLnBrk="0" indent="0" marL="0">
-              <a:lnSpc>
-                <a:spcPts val="2600"/>
-              </a:lnSpc>
-              <a:buNone/>
-            </a:pPr>
-            <a:r>
-              <a:rPr lang="ko-KR" sz="1800" dirty="0">
-                <a:solidFill>
-                  <a:srgbClr val="1F4E9A"/>
-                </a:solidFill>
-                <a:latin typeface="Pretendard SemiBold" pitchFamily="34" charset="0"/>
-                <a:ea typeface="Pretendard SemiBold" pitchFamily="34" charset="-122"/>
-                <a:cs typeface="Pretendard SemiBold" pitchFamily="34" charset="-120"/>
-              </a:rPr>
-              <a:t>학습에 쓰지 않은 lot에서 macro-F1 0.909를 확인했습니다.</a:t>
+              <a:t>구현·실험은 Claude Code, 평가 설계와 판단·검증은 제가 맡았습니다. 새 lot에서 macro-F1 0.909.</a:t>
             </a:r>
             <a:endParaRPr lang="ko-KR" sz="1800" dirty="0"/>
           </a:p>
@@ -1921,10 +1903,10 @@
             <a:tbl>
               <a:tblPr/>
               <a:tblGrid>
-                <a:gridCol w="1143000"/>
-                <a:gridCol w="5257800"/>
+                <a:gridCol w="1097280"/>
+                <a:gridCol w="5303520"/>
               </a:tblGrid>
-              <a:tr h="420624">
+              <a:tr h="512064">
                 <a:tc>
                   <a:txBody>
                     <a:bodyPr/>
@@ -1934,7 +1916,7 @@
                         <a:buNone/>
                       </a:pPr>
                       <a:r>
-                        <a:rPr lang="ko-KR" sz="1250" b="1" dirty="0">
+                        <a:rPr lang="ko-KR" sz="1300" b="1" dirty="0">
                           <a:solidFill>
                             <a:srgbClr val="0B0B0B"/>
                           </a:solidFill>
@@ -1942,9 +1924,9 @@
                           <a:ea typeface="Pretendard" pitchFamily="34" charset="-122"/>
                           <a:cs typeface="Pretendard" pitchFamily="34" charset="-120"/>
                         </a:rPr>
-                        <a:t>기간·형태</a:t>
-                      </a:r>
-                      <a:endParaRPr lang="ko-KR" sz="1250" dirty="0">
+                        <a:t>데이터</a:t>
+                      </a:r>
+                      <a:endParaRPr lang="ko-KR" sz="1300" dirty="0">
                         <a:latin typeface="Pretendard" charset="0"/>
                         <a:ea typeface="Pretendard" charset="0"/>
                         <a:cs typeface="Pretendard" charset="0"/>
@@ -2002,7 +1984,7 @@
                         <a:buNone/>
                       </a:pPr>
                       <a:r>
-                        <a:rPr lang="ko-KR" sz="1250" dirty="0">
+                        <a:rPr lang="ko-KR" sz="1300" dirty="0">
                           <a:solidFill>
                             <a:srgbClr val="0B0B0B"/>
                           </a:solidFill>
@@ -2010,9 +1992,9 @@
                           <a:ea typeface="Pretendard" pitchFamily="34" charset="-122"/>
                           <a:cs typeface="Pretendard" pitchFamily="34" charset="-120"/>
                         </a:rPr>
-                        <a:t>2026년 9월, 개인 프로젝트(1인)</a:t>
-                      </a:r>
-                      <a:endParaRPr lang="ko-KR" sz="1250" dirty="0">
+                        <a:t>WM-811K 웨이퍼 맵 811,457장 중 라벨 있는 172,950장, 불량 패턴 9종</a:t>
+                      </a:r>
+                      <a:endParaRPr lang="ko-KR" sz="1300" dirty="0">
                         <a:latin typeface="Pretendard" charset="0"/>
                         <a:ea typeface="Pretendard" charset="0"/>
                         <a:cs typeface="Pretendard" charset="0"/>
@@ -2062,7 +2044,7 @@
                   </a:tcPr>
                 </a:tc>
               </a:tr>
-              <a:tr h="420624">
+              <a:tr h="512064">
                 <a:tc>
                   <a:txBody>
                     <a:bodyPr/>
@@ -2072,7 +2054,7 @@
                         <a:buNone/>
                       </a:pPr>
                       <a:r>
-                        <a:rPr lang="ko-KR" sz="1250" b="1" dirty="0">
+                        <a:rPr lang="ko-KR" sz="1300" b="1" dirty="0">
                           <a:solidFill>
                             <a:srgbClr val="0B0B0B"/>
                           </a:solidFill>
@@ -2080,9 +2062,9 @@
                           <a:ea typeface="Pretendard" pitchFamily="34" charset="-122"/>
                           <a:cs typeface="Pretendard" pitchFamily="34" charset="-120"/>
                         </a:rPr>
-                        <a:t>AI 활용</a:t>
-                      </a:r>
-                      <a:endParaRPr lang="ko-KR" sz="1250" dirty="0">
+                        <a:t>문제</a:t>
+                      </a:r>
+                      <a:endParaRPr lang="ko-KR" sz="1300" dirty="0">
                         <a:latin typeface="Pretendard" charset="0"/>
                         <a:ea typeface="Pretendard" charset="0"/>
                         <a:cs typeface="Pretendard" charset="0"/>
@@ -2140,7 +2122,7 @@
                         <a:buNone/>
                       </a:pPr>
                       <a:r>
-                        <a:rPr lang="ko-KR" sz="1250" dirty="0">
+                        <a:rPr lang="ko-KR" sz="1300" dirty="0">
                           <a:solidFill>
                             <a:srgbClr val="0B0B0B"/>
                           </a:solidFill>
@@ -2148,14 +2130,14 @@
                           <a:ea typeface="Pretendard" pitchFamily="34" charset="-122"/>
                           <a:cs typeface="Pretendard" pitchFamily="34" charset="-120"/>
                         </a:rPr>
-                        <a:t>구현·실험·문헌 조사: Claude Code / 문제 정의·평가 설계·판단·검증: 본인.</a:t>
+                        <a:t>같은 웨이퍼의 복사본이 학습과 평가에 섞이는 누수를 막고,</a:t>
                       </a:r>
                       <a:br/>
                       <a:pPr latinLnBrk="0" algn="l" indent="0" marL="0">
                         <a:buNone/>
                       </a:pPr>
                       <a:r>
-                        <a:rPr lang="ko-KR" sz="1250" dirty="0">
+                        <a:rPr lang="ko-KR" sz="1300" dirty="0">
                           <a:solidFill>
                             <a:srgbClr val="0B0B0B"/>
                           </a:solidFill>
@@ -2163,24 +2145,9 @@
                           <a:ea typeface="Pretendard" pitchFamily="34" charset="-122"/>
                           <a:cs typeface="Pretendard" pitchFamily="34" charset="-120"/>
                         </a:rPr>
-                        <a:t>별도 검증 에이전트 45개(워크플로 10회), 체크포인트 6개에서 판단 13건,</a:t>
-                      </a:r>
-                      <a:br/>
-                      <a:pPr latinLnBrk="0" algn="l" indent="0" marL="0">
-                        <a:buNone/>
-                      </a:pPr>
-                      <a:r>
-                        <a:rPr lang="ko-KR" sz="1250" dirty="0">
-                          <a:solidFill>
-                            <a:srgbClr val="0B0B0B"/>
-                          </a:solidFill>
-                          <a:latin typeface="Pretendard" pitchFamily="34" charset="0"/>
-                          <a:ea typeface="Pretendard" pitchFamily="34" charset="-122"/>
-                          <a:cs typeface="Pretendard" pitchFamily="34" charset="-120"/>
-                        </a:rPr>
-                        <a:t>오류 15건 기록</a:t>
-                      </a:r>
-                      <a:endParaRPr lang="ko-KR" sz="1250" dirty="0">
+                        <a:t>새 lot에서 성능 재기</a:t>
+                      </a:r>
+                      <a:endParaRPr lang="ko-KR" sz="1300" dirty="0">
                         <a:latin typeface="Pretendard" charset="0"/>
                         <a:ea typeface="Pretendard" charset="0"/>
                         <a:cs typeface="Pretendard" charset="0"/>
@@ -2230,7 +2197,7 @@
                   </a:tcPr>
                 </a:tc>
               </a:tr>
-              <a:tr h="420624">
+              <a:tr h="512064">
                 <a:tc>
                   <a:txBody>
                     <a:bodyPr/>
@@ -2240,7 +2207,7 @@
                         <a:buNone/>
                       </a:pPr>
                       <a:r>
-                        <a:rPr lang="ko-KR" sz="1250" b="1" dirty="0">
+                        <a:rPr lang="ko-KR" sz="1300" b="1" dirty="0">
                           <a:solidFill>
                             <a:srgbClr val="0B0B0B"/>
                           </a:solidFill>
@@ -2248,9 +2215,9 @@
                           <a:ea typeface="Pretendard" pitchFamily="34" charset="-122"/>
                           <a:cs typeface="Pretendard" pitchFamily="34" charset="-120"/>
                         </a:rPr>
-                        <a:t>데이터</a:t>
-                      </a:r>
-                      <a:endParaRPr lang="ko-KR" sz="1250" dirty="0">
+                        <a:t>결과</a:t>
+                      </a:r>
+                      <a:endParaRPr lang="ko-KR" sz="1300" dirty="0">
                         <a:latin typeface="Pretendard" charset="0"/>
                         <a:ea typeface="Pretendard" charset="0"/>
                         <a:cs typeface="Pretendard" charset="0"/>
@@ -2308,7 +2275,7 @@
                         <a:buNone/>
                       </a:pPr>
                       <a:r>
-                        <a:rPr lang="ko-KR" sz="1250" dirty="0">
+                        <a:rPr lang="ko-KR" sz="1300" dirty="0">
                           <a:solidFill>
                             <a:srgbClr val="0B0B0B"/>
                           </a:solidFill>
@@ -2316,9 +2283,24 @@
                           <a:ea typeface="Pretendard" pitchFamily="34" charset="-122"/>
                           <a:cs typeface="Pretendard" pitchFamily="34" charset="-120"/>
                         </a:rPr>
-                        <a:t>WM-811K 웨이퍼 맵 811,457장 중 라벨 있는 172,950장, 불량 패턴 9종</a:t>
-                      </a:r>
-                      <a:endParaRPr lang="ko-KR" sz="1250" dirty="0">
+                        <a:t>macro-F1 0.843(베이스라인) → 0.909(CNN),</a:t>
+                      </a:r>
+                      <a:br/>
+                      <a:pPr latinLnBrk="0" algn="l" indent="0" marL="0">
+                        <a:buNone/>
+                      </a:pPr>
+                      <a:r>
+                        <a:rPr lang="ko-KR" sz="1300" dirty="0">
+                          <a:solidFill>
+                            <a:srgbClr val="0B0B0B"/>
+                          </a:solidFill>
+                          <a:latin typeface="Pretendard" pitchFamily="34" charset="0"/>
+                          <a:ea typeface="Pretendard" pitchFamily="34" charset="-122"/>
+                          <a:cs typeface="Pretendard" pitchFamily="34" charset="-120"/>
+                        </a:rPr>
+                        <a:t>모든 패턴 recall 0.77 이상</a:t>
+                      </a:r>
+                      <a:endParaRPr lang="ko-KR" sz="1300" dirty="0">
                         <a:latin typeface="Pretendard" charset="0"/>
                         <a:ea typeface="Pretendard" charset="0"/>
                         <a:cs typeface="Pretendard" charset="0"/>
@@ -2368,7 +2350,7 @@
                   </a:tcPr>
                 </a:tc>
               </a:tr>
-              <a:tr h="420624">
+              <a:tr h="512064">
                 <a:tc>
                   <a:txBody>
                     <a:bodyPr/>
@@ -2378,7 +2360,7 @@
                         <a:buNone/>
                       </a:pPr>
                       <a:r>
-                        <a:rPr lang="ko-KR" sz="1250" b="1" dirty="0">
+                        <a:rPr lang="ko-KR" sz="1300" b="1" dirty="0">
                           <a:solidFill>
                             <a:srgbClr val="0B0B0B"/>
                           </a:solidFill>
@@ -2386,9 +2368,9 @@
                           <a:ea typeface="Pretendard" pitchFamily="34" charset="-122"/>
                           <a:cs typeface="Pretendard" pitchFamily="34" charset="-120"/>
                         </a:rPr>
-                        <a:t>문제</a:t>
-                      </a:r>
-                      <a:endParaRPr lang="ko-KR" sz="1250" dirty="0">
+                        <a:t>AI 활용</a:t>
+                      </a:r>
+                      <a:endParaRPr lang="ko-KR" sz="1300" dirty="0">
                         <a:latin typeface="Pretendard" charset="0"/>
                         <a:ea typeface="Pretendard" charset="0"/>
                         <a:cs typeface="Pretendard" charset="0"/>
@@ -2446,7 +2428,7 @@
                         <a:buNone/>
                       </a:pPr>
                       <a:r>
-                        <a:rPr lang="ko-KR" sz="1250" dirty="0">
+                        <a:rPr lang="ko-KR" sz="1300" dirty="0">
                           <a:solidFill>
                             <a:srgbClr val="0B0B0B"/>
                           </a:solidFill>
@@ -2454,14 +2436,14 @@
                           <a:ea typeface="Pretendard" pitchFamily="34" charset="-122"/>
                           <a:cs typeface="Pretendard" pitchFamily="34" charset="-120"/>
                         </a:rPr>
-                        <a:t>같은 웨이퍼의 복사본이 학습과 평가에 섞이는 누수를 막고,</a:t>
+                        <a:t>Claude Code가 구현·실험, 별도 검증 에이전트 45개가 재검산.</a:t>
                       </a:r>
                       <a:br/>
                       <a:pPr latinLnBrk="0" algn="l" indent="0" marL="0">
                         <a:buNone/>
                       </a:pPr>
                       <a:r>
-                        <a:rPr lang="ko-KR" sz="1250" dirty="0">
+                        <a:rPr lang="ko-KR" sz="1300" dirty="0">
                           <a:solidFill>
                             <a:srgbClr val="0B0B0B"/>
                           </a:solidFill>
@@ -2469,9 +2451,9 @@
                           <a:ea typeface="Pretendard" pitchFamily="34" charset="-122"/>
                           <a:cs typeface="Pretendard" pitchFamily="34" charset="-120"/>
                         </a:rPr>
-                        <a:t>새 lot에서의 성능을 재기</a:t>
-                      </a:r>
-                      <a:endParaRPr lang="ko-KR" sz="1250" dirty="0">
+                        <a:t>체크포인트 6개에서 판단 13건, 오류 15건 기록</a:t>
+                      </a:r>
+                      <a:endParaRPr lang="ko-KR" sz="1300" dirty="0">
                         <a:latin typeface="Pretendard" charset="0"/>
                         <a:ea typeface="Pretendard" charset="0"/>
                         <a:cs typeface="Pretendard" charset="0"/>
@@ -2521,72 +2503,78 @@
                   </a:tcPr>
                 </a:tc>
               </a:tr>
-              <a:tr h="420624">
+            </a:tbl>
+          </a:graphicData>
+        </a:graphic>
+      </p:graphicFrame>
+      <p:graphicFrame>
+        <p:nvGraphicFramePr>
+          <p:cNvPr id="5" name="Table 1"/>
+          <p:cNvGraphicFramePr>
+            <a:graphicFrameLocks noGrp="1"/>
+          </p:cNvGraphicFramePr>
+          <p:nvPr>
+            <p:extLst>
+              <p:ext uri="{D42A27DB-BD31-4B8C-83A1-F6EECF244321}">
+                <p14:modId xmlns:p14="http://schemas.microsoft.com/office/powerpoint/2010/main" val="1579011935"/>
+              </p:ext>
+            </p:extLst>
+          </p:nvPr>
+        </p:nvGraphicFramePr>
+        <p:xfrm>
+          <a:off x="640080" y="4572000"/>
+          <a:ext cx="6400800" cy="914400"/>
+        </p:xfrm>
+        <a:graphic>
+          <a:graphicData uri="http://schemas.openxmlformats.org/drawingml/2006/table">
+            <a:tbl>
+              <a:tblPr/>
+              <a:tblGrid>
+                <a:gridCol w="640080"/>
+                <a:gridCol w="5760720"/>
+              </a:tblGrid>
+              <a:tr h="274320">
                 <a:tc>
                   <a:txBody>
                     <a:bodyPr/>
                     <a:lstStyle/>
                     <a:p>
-                      <a:pPr latinLnBrk="0" algn="l" indent="0" marL="0">
-                        <a:buNone/>
-                      </a:pPr>
-                      <a:r>
-                        <a:rPr lang="ko-KR" sz="1250" b="1" dirty="0">
-                          <a:solidFill>
-                            <a:srgbClr val="0B0B0B"/>
-                          </a:solidFill>
-                          <a:latin typeface="Pretendard" pitchFamily="34" charset="0"/>
-                          <a:ea typeface="Pretendard" pitchFamily="34" charset="-122"/>
-                          <a:cs typeface="Pretendard" pitchFamily="34" charset="-120"/>
-                        </a:rPr>
-                        <a:t>결과</a:t>
-                      </a:r>
-                      <a:endParaRPr lang="ko-KR" sz="1250" dirty="0">
+                      <a:pPr latinLnBrk="0" indent="0" marL="0">
+                        <a:buNone/>
+                      </a:pPr>
+                      <a:r>
+                        <a:rPr lang="ko-KR" sz="1150" b="1" dirty="0">
+                          <a:solidFill>
+                            <a:srgbClr val="52514E"/>
+                          </a:solidFill>
+                          <a:latin typeface="Pretendard" pitchFamily="34" charset="0"/>
+                          <a:ea typeface="Pretendard" pitchFamily="34" charset="-122"/>
+                          <a:cs typeface="Pretendard" pitchFamily="34" charset="-120"/>
+                        </a:rPr>
+                        <a:t>용어</a:t>
+                      </a:r>
+                      <a:endParaRPr lang="ko-KR" sz="1150" dirty="0">
                         <a:latin typeface="Pretendard" charset="0"/>
                         <a:ea typeface="Pretendard" charset="0"/>
                         <a:cs typeface="Pretendard" charset="0"/>
                       </a:endParaRPr>
                     </a:p>
                   </a:txBody>
-                  <a:tcPr marL="91440" marR="91440" marT="45720" marB="45720" anchor="ctr">
-                    <a:lnL w="6350" cap="flat" cmpd="sng" algn="ctr">
-                      <a:solidFill>
-                        <a:srgbClr val="DAD9D4"/>
-                      </a:solidFill>
-                      <a:prstDash val="solid"/>
-                      <a:round/>
-                      <a:headEnd type="none" w="med" len="med"/>
-                      <a:tailEnd type="none" w="med" len="med"/>
+                  <a:tcPr marL="0" marR="54864" marT="36576" marB="45720" anchor="t">
+                    <a:lnL w="0" cap="flat" cmpd="sng" algn="ctr">
+                      <a:noFill/>
                     </a:lnL>
-                    <a:lnR w="6350" cap="flat" cmpd="sng" algn="ctr">
-                      <a:solidFill>
-                        <a:srgbClr val="DAD9D4"/>
-                      </a:solidFill>
-                      <a:prstDash val="solid"/>
-                      <a:round/>
-                      <a:headEnd type="none" w="med" len="med"/>
-                      <a:tailEnd type="none" w="med" len="med"/>
+                    <a:lnR w="0" cap="flat" cmpd="sng" algn="ctr">
+                      <a:noFill/>
                     </a:lnR>
-                    <a:lnT w="6350" cap="flat" cmpd="sng" algn="ctr">
-                      <a:solidFill>
-                        <a:srgbClr val="DAD9D4"/>
-                      </a:solidFill>
-                      <a:prstDash val="solid"/>
-                      <a:round/>
-                      <a:headEnd type="none" w="med" len="med"/>
-                      <a:tailEnd type="none" w="med" len="med"/>
+                    <a:lnT w="0" cap="flat" cmpd="sng" algn="ctr">
+                      <a:noFill/>
                     </a:lnT>
-                    <a:lnB w="6350" cap="flat" cmpd="sng" algn="ctr">
-                      <a:solidFill>
-                        <a:srgbClr val="DAD9D4"/>
-                      </a:solidFill>
-                      <a:prstDash val="solid"/>
-                      <a:round/>
-                      <a:headEnd type="none" w="med" len="med"/>
-                      <a:tailEnd type="none" w="med" len="med"/>
+                    <a:lnB w="0" cap="flat" cmpd="sng" algn="ctr">
+                      <a:noFill/>
                     </a:lnB>
                     <a:solidFill>
-                      <a:srgbClr val="F3F3F1"/>
+                      <a:srgbClr val="FFFFFF"/>
                     </a:solidFill>
                   </a:tcPr>
                 </a:tc>
@@ -2595,216 +2583,54 @@
                     <a:bodyPr/>
                     <a:lstStyle/>
                     <a:p>
-                      <a:pPr latinLnBrk="0" algn="l" indent="0" marL="0">
-                        <a:buNone/>
-                      </a:pPr>
-                      <a:r>
-                        <a:rPr lang="ko-KR" sz="1250" dirty="0">
-                          <a:solidFill>
-                            <a:srgbClr val="0B0B0B"/>
-                          </a:solidFill>
-                          <a:latin typeface="Pretendard" pitchFamily="34" charset="0"/>
-                          <a:ea typeface="Pretendard" pitchFamily="34" charset="-122"/>
-                          <a:cs typeface="Pretendard" pitchFamily="34" charset="-120"/>
-                        </a:rPr>
-                        <a:t>macro-F1 0.843(베이스라인) → 0.909(CNN), 모든 패턴 recall 0.77 이상</a:t>
-                      </a:r>
-                      <a:endParaRPr lang="ko-KR" sz="1250" dirty="0">
+                      <a:pPr latinLnBrk="0" indent="0" marL="0">
+                        <a:buNone/>
+                      </a:pPr>
+                      <a:r>
+                        <a:rPr lang="ko-KR" sz="1150" dirty="0">
+                          <a:solidFill>
+                            <a:srgbClr val="52514E"/>
+                          </a:solidFill>
+                          <a:latin typeface="Pretendard" pitchFamily="34" charset="0"/>
+                          <a:ea typeface="Pretendard" pitchFamily="34" charset="-122"/>
+                          <a:cs typeface="Pretendard" pitchFamily="34" charset="-120"/>
+                        </a:rPr>
+                        <a:t>lot: 함께 처리한 웨이퍼 묶음(최대 25장) · macro-F1:</a:t>
+                      </a:r>
+                      <a:br/>
+                      <a:pPr latinLnBrk="0" indent="0" marL="0">
+                        <a:buNone/>
+                      </a:pPr>
+                      <a:r>
+                        <a:rPr lang="ko-KR" sz="1150" dirty="0">
+                          <a:solidFill>
+                            <a:srgbClr val="52514E"/>
+                          </a:solidFill>
+                          <a:latin typeface="Pretendard" pitchFamily="34" charset="0"/>
+                          <a:ea typeface="Pretendard" pitchFamily="34" charset="-122"/>
+                          <a:cs typeface="Pretendard" pitchFamily="34" charset="-120"/>
+                        </a:rPr>
+                        <a:t>패턴 9종 F1의 평균 · recall: 실제 그 패턴 중 맞힌 비율</a:t>
+                      </a:r>
+                      <a:endParaRPr lang="ko-KR" sz="1150" dirty="0">
                         <a:latin typeface="Pretendard" charset="0"/>
                         <a:ea typeface="Pretendard" charset="0"/>
                         <a:cs typeface="Pretendard" charset="0"/>
                       </a:endParaRPr>
                     </a:p>
                   </a:txBody>
-                  <a:tcPr marL="91440" marR="91440" marT="45720" marB="45720" anchor="ctr">
-                    <a:lnL w="6350" cap="flat" cmpd="sng" algn="ctr">
-                      <a:solidFill>
-                        <a:srgbClr val="DAD9D4"/>
-                      </a:solidFill>
-                      <a:prstDash val="solid"/>
-                      <a:round/>
-                      <a:headEnd type="none" w="med" len="med"/>
-                      <a:tailEnd type="none" w="med" len="med"/>
+                  <a:tcPr marL="0" marR="54864" marT="36576" marB="45720" anchor="t">
+                    <a:lnL w="0" cap="flat" cmpd="sng" algn="ctr">
+                      <a:noFill/>
                     </a:lnL>
-                    <a:lnR w="6350" cap="flat" cmpd="sng" algn="ctr">
-                      <a:solidFill>
-                        <a:srgbClr val="DAD9D4"/>
-                      </a:solidFill>
-                      <a:prstDash val="solid"/>
-                      <a:round/>
-                      <a:headEnd type="none" w="med" len="med"/>
-                      <a:tailEnd type="none" w="med" len="med"/>
+                    <a:lnR w="0" cap="flat" cmpd="sng" algn="ctr">
+                      <a:noFill/>
                     </a:lnR>
-                    <a:lnT w="6350" cap="flat" cmpd="sng" algn="ctr">
-                      <a:solidFill>
-                        <a:srgbClr val="DAD9D4"/>
-                      </a:solidFill>
-                      <a:prstDash val="solid"/>
-                      <a:round/>
-                      <a:headEnd type="none" w="med" len="med"/>
-                      <a:tailEnd type="none" w="med" len="med"/>
+                    <a:lnT w="0" cap="flat" cmpd="sng" algn="ctr">
+                      <a:noFill/>
                     </a:lnT>
-                    <a:lnB w="6350" cap="flat" cmpd="sng" algn="ctr">
-                      <a:solidFill>
-                        <a:srgbClr val="DAD9D4"/>
-                      </a:solidFill>
-                      <a:prstDash val="solid"/>
-                      <a:round/>
-                      <a:headEnd type="none" w="med" len="med"/>
-                      <a:tailEnd type="none" w="med" len="med"/>
-                    </a:lnB>
-                    <a:solidFill>
-                      <a:srgbClr val="FFFFFF"/>
-                    </a:solidFill>
-                  </a:tcPr>
-                </a:tc>
-              </a:tr>
-              <a:tr h="420624">
-                <a:tc>
-                  <a:txBody>
-                    <a:bodyPr/>
-                    <a:lstStyle/>
-                    <a:p>
-                      <a:pPr latinLnBrk="0" algn="l" indent="0" marL="0">
-                        <a:buNone/>
-                      </a:pPr>
-                      <a:r>
-                        <a:rPr lang="ko-KR" sz="1250" b="1" dirty="0">
-                          <a:solidFill>
-                            <a:srgbClr val="0B0B0B"/>
-                          </a:solidFill>
-                          <a:latin typeface="Pretendard" pitchFamily="34" charset="0"/>
-                          <a:ea typeface="Pretendard" pitchFamily="34" charset="-122"/>
-                          <a:cs typeface="Pretendard" pitchFamily="34" charset="-120"/>
-                        </a:rPr>
-                        <a:t>환경</a:t>
-                      </a:r>
-                      <a:endParaRPr lang="ko-KR" sz="1250" dirty="0">
-                        <a:latin typeface="Pretendard" charset="0"/>
-                        <a:ea typeface="Pretendard" charset="0"/>
-                        <a:cs typeface="Pretendard" charset="0"/>
-                      </a:endParaRPr>
-                    </a:p>
-                  </a:txBody>
-                  <a:tcPr marL="91440" marR="91440" marT="45720" marB="45720" anchor="ctr">
-                    <a:lnL w="6350" cap="flat" cmpd="sng" algn="ctr">
-                      <a:solidFill>
-                        <a:srgbClr val="DAD9D4"/>
-                      </a:solidFill>
-                      <a:prstDash val="solid"/>
-                      <a:round/>
-                      <a:headEnd type="none" w="med" len="med"/>
-                      <a:tailEnd type="none" w="med" len="med"/>
-                    </a:lnL>
-                    <a:lnR w="6350" cap="flat" cmpd="sng" algn="ctr">
-                      <a:solidFill>
-                        <a:srgbClr val="DAD9D4"/>
-                      </a:solidFill>
-                      <a:prstDash val="solid"/>
-                      <a:round/>
-                      <a:headEnd type="none" w="med" len="med"/>
-                      <a:tailEnd type="none" w="med" len="med"/>
-                    </a:lnR>
-                    <a:lnT w="6350" cap="flat" cmpd="sng" algn="ctr">
-                      <a:solidFill>
-                        <a:srgbClr val="DAD9D4"/>
-                      </a:solidFill>
-                      <a:prstDash val="solid"/>
-                      <a:round/>
-                      <a:headEnd type="none" w="med" len="med"/>
-                      <a:tailEnd type="none" w="med" len="med"/>
-                    </a:lnT>
-                    <a:lnB w="6350" cap="flat" cmpd="sng" algn="ctr">
-                      <a:solidFill>
-                        <a:srgbClr val="DAD9D4"/>
-                      </a:solidFill>
-                      <a:prstDash val="solid"/>
-                      <a:round/>
-                      <a:headEnd type="none" w="med" len="med"/>
-                      <a:tailEnd type="none" w="med" len="med"/>
-                    </a:lnB>
-                    <a:solidFill>
-                      <a:srgbClr val="F3F3F1"/>
-                    </a:solidFill>
-                  </a:tcPr>
-                </a:tc>
-                <a:tc>
-                  <a:txBody>
-                    <a:bodyPr/>
-                    <a:lstStyle/>
-                    <a:p>
-                      <a:pPr latinLnBrk="0" algn="l" indent="0" marL="0">
-                        <a:buNone/>
-                      </a:pPr>
-                      <a:r>
-                        <a:rPr lang="ko-KR" sz="1250" dirty="0">
-                          <a:solidFill>
-                            <a:srgbClr val="0B0B0B"/>
-                          </a:solidFill>
-                          <a:latin typeface="Pretendard" pitchFamily="34" charset="0"/>
-                          <a:ea typeface="Pretendard" pitchFamily="34" charset="-122"/>
-                          <a:cs typeface="Pretendard" pitchFamily="34" charset="-120"/>
-                        </a:rPr>
-                        <a:t>Python 3.12, PyTorch 2.7(CUDA 11.8),</a:t>
-                      </a:r>
-                      <a:br/>
-                      <a:pPr latinLnBrk="0" algn="l" indent="0" marL="0">
-                        <a:buNone/>
-                      </a:pPr>
-                      <a:r>
-                        <a:rPr lang="ko-KR" sz="1250" dirty="0">
-                          <a:solidFill>
-                            <a:srgbClr val="0B0B0B"/>
-                          </a:solidFill>
-                          <a:latin typeface="Pretendard" pitchFamily="34" charset="0"/>
-                          <a:ea typeface="Pretendard" pitchFamily="34" charset="-122"/>
-                          <a:cs typeface="Pretendard" pitchFamily="34" charset="-120"/>
-                        </a:rPr>
-                        <a:t>scikit-learn 1.9.1, Streamlit, Quadro P2000</a:t>
-                      </a:r>
-                      <a:endParaRPr lang="ko-KR" sz="1250" dirty="0">
-                        <a:latin typeface="Pretendard" charset="0"/>
-                        <a:ea typeface="Pretendard" charset="0"/>
-                        <a:cs typeface="Pretendard" charset="0"/>
-                      </a:endParaRPr>
-                    </a:p>
-                  </a:txBody>
-                  <a:tcPr marL="91440" marR="91440" marT="45720" marB="45720" anchor="ctr">
-                    <a:lnL w="6350" cap="flat" cmpd="sng" algn="ctr">
-                      <a:solidFill>
-                        <a:srgbClr val="DAD9D4"/>
-                      </a:solidFill>
-                      <a:prstDash val="solid"/>
-                      <a:round/>
-                      <a:headEnd type="none" w="med" len="med"/>
-                      <a:tailEnd type="none" w="med" len="med"/>
-                    </a:lnL>
-                    <a:lnR w="6350" cap="flat" cmpd="sng" algn="ctr">
-                      <a:solidFill>
-                        <a:srgbClr val="DAD9D4"/>
-                      </a:solidFill>
-                      <a:prstDash val="solid"/>
-                      <a:round/>
-                      <a:headEnd type="none" w="med" len="med"/>
-                      <a:tailEnd type="none" w="med" len="med"/>
-                    </a:lnR>
-                    <a:lnT w="6350" cap="flat" cmpd="sng" algn="ctr">
-                      <a:solidFill>
-                        <a:srgbClr val="DAD9D4"/>
-                      </a:solidFill>
-                      <a:prstDash val="solid"/>
-                      <a:round/>
-                      <a:headEnd type="none" w="med" len="med"/>
-                      <a:tailEnd type="none" w="med" len="med"/>
-                    </a:lnT>
-                    <a:lnB w="6350" cap="flat" cmpd="sng" algn="ctr">
-                      <a:solidFill>
-                        <a:srgbClr val="DAD9D4"/>
-                      </a:solidFill>
-                      <a:prstDash val="solid"/>
-                      <a:round/>
-                      <a:headEnd type="none" w="med" len="med"/>
-                      <a:tailEnd type="none" w="med" len="med"/>
+                    <a:lnB w="0" cap="flat" cmpd="sng" algn="ctr">
+                      <a:noFill/>
                     </a:lnB>
                     <a:solidFill>
                       <a:srgbClr val="FFFFFF"/>
@@ -2818,7 +2644,7 @@
       </p:graphicFrame>
       <p:sp>
         <p:nvSpPr>
-          <p:cNvPr id="8" name="Text 5"/>
+          <p:cNvPr id="9" name="Text 5"/>
           <p:cNvSpPr txBox="1"/>
           <p:nvPr/>
         </p:nvSpPr>
@@ -2857,18 +2683,18 @@
       </p:sp>
       <p:sp>
         <p:nvSpPr>
-          <p:cNvPr id="9" name="Shape 6"/>
+          <p:cNvPr id="10" name="Shape 6"/>
           <p:cNvSpPr/>
           <p:nvPr/>
         </p:nvSpPr>
         <p:spPr>
           <a:xfrm>
             <a:off x="7406640" y="2514600"/>
-            <a:ext cx="4142232" cy="429768"/>
+            <a:ext cx="4142232" cy="457200"/>
           </a:xfrm>
           <a:prstGeom prst="roundRect">
             <a:avLst>
-              <a:gd name="adj" fmla="val 12766"/>
+              <a:gd name="adj" fmla="val 12000"/>
             </a:avLst>
           </a:prstGeom>
           <a:solidFill>
@@ -2884,14 +2710,14 @@
       </p:sp>
       <p:sp>
         <p:nvSpPr>
-          <p:cNvPr id="10" name="Text 7"/>
+          <p:cNvPr id="11" name="Text 7"/>
           <p:cNvSpPr txBox="1"/>
           <p:nvPr/>
         </p:nvSpPr>
         <p:spPr>
           <a:xfrm>
             <a:off x="7543800" y="2514600"/>
-            <a:ext cx="3291840" cy="429768"/>
+            <a:ext cx="3291840" cy="457200"/>
           </a:xfrm>
           <a:prstGeom prst="rect">
             <a:avLst/>
@@ -2907,7 +2733,7 @@
               <a:buNone/>
             </a:pPr>
             <a:r>
-              <a:rPr lang="ko-KR" sz="1300" b="1" dirty="0">
+              <a:rPr lang="ko-KR" sz="1350" b="1" dirty="0">
                 <a:solidFill>
                   <a:srgbClr val="1F4E9A"/>
                 </a:solidFill>
@@ -2921,7 +2747,7 @@
               <a:buNone/>
             </a:pPr>
             <a:r>
-              <a:rPr lang="ko-KR" sz="1300" dirty="0">
+              <a:rPr lang="ko-KR" sz="1350" dirty="0">
                 <a:solidFill>
                   <a:srgbClr val="0B0B0B"/>
                 </a:solidFill>
@@ -2929,22 +2755,22 @@
                 <a:ea typeface="Pretendard" pitchFamily="34" charset="-122"/>
                 <a:cs typeface="Pretendard" pitchFamily="34" charset="-120"/>
               </a:rPr>
-              <a:t>데이터 탐색과 누수 확인</a:t>
+              <a:t>문제 정의와 평가 설계</a:t>
             </a:r>
-            <a:endParaRPr lang="ko-KR" sz="1300" dirty="0"/>
+            <a:endParaRPr lang="ko-KR" sz="1350" dirty="0"/>
           </a:p>
         </p:txBody>
       </p:sp>
       <p:sp>
         <p:nvSpPr>
-          <p:cNvPr id="11" name="Text 8"/>
+          <p:cNvPr id="12" name="Text 8"/>
           <p:cNvSpPr txBox="1"/>
           <p:nvPr/>
         </p:nvSpPr>
         <p:spPr>
           <a:xfrm>
             <a:off x="10744200" y="2514600"/>
-            <a:ext cx="731520" cy="429768"/>
+            <a:ext cx="731520" cy="457200"/>
           </a:xfrm>
           <a:prstGeom prst="rect">
             <a:avLst/>
@@ -2976,18 +2802,18 @@
       </p:sp>
       <p:sp>
         <p:nvSpPr>
-          <p:cNvPr id="12" name="Shape 9"/>
+          <p:cNvPr id="13" name="Shape 9"/>
           <p:cNvSpPr/>
           <p:nvPr/>
         </p:nvSpPr>
         <p:spPr>
           <a:xfrm>
-            <a:off x="7406640" y="3026664"/>
-            <a:ext cx="4142232" cy="429768"/>
+            <a:off x="7406640" y="3081528"/>
+            <a:ext cx="4142232" cy="457200"/>
           </a:xfrm>
           <a:prstGeom prst="roundRect">
             <a:avLst>
-              <a:gd name="adj" fmla="val 12766"/>
+              <a:gd name="adj" fmla="val 12000"/>
             </a:avLst>
           </a:prstGeom>
           <a:solidFill>
@@ -3003,14 +2829,14 @@
       </p:sp>
       <p:sp>
         <p:nvSpPr>
-          <p:cNvPr id="13" name="Text 10"/>
+          <p:cNvPr id="14" name="Text 10"/>
           <p:cNvSpPr txBox="1"/>
           <p:nvPr/>
         </p:nvSpPr>
         <p:spPr>
           <a:xfrm>
-            <a:off x="7543800" y="3026664"/>
-            <a:ext cx="3291840" cy="429768"/>
+            <a:off x="7543800" y="3081528"/>
+            <a:ext cx="3291840" cy="457200"/>
           </a:xfrm>
           <a:prstGeom prst="rect">
             <a:avLst/>
@@ -3026,7 +2852,7 @@
               <a:buNone/>
             </a:pPr>
             <a:r>
-              <a:rPr lang="ko-KR" sz="1300" b="1" dirty="0">
+              <a:rPr lang="ko-KR" sz="1350" b="1" dirty="0">
                 <a:solidFill>
                   <a:srgbClr val="1F4E9A"/>
                 </a:solidFill>
@@ -3040,126 +2866,7 @@
               <a:buNone/>
             </a:pPr>
             <a:r>
-              <a:rPr lang="ko-KR" sz="1300" dirty="0">
-                <a:solidFill>
-                  <a:srgbClr val="0B0B0B"/>
-                </a:solidFill>
-                <a:latin typeface="Pretendard" pitchFamily="34" charset="0"/>
-                <a:ea typeface="Pretendard" pitchFamily="34" charset="-122"/>
-                <a:cs typeface="Pretendard" pitchFamily="34" charset="-120"/>
-              </a:rPr>
-              <a:t>평가 설계: lot 단위 분할, 성공 기준</a:t>
-            </a:r>
-            <a:endParaRPr lang="ko-KR" sz="1300" dirty="0"/>
-          </a:p>
-        </p:txBody>
-      </p:sp>
-      <p:sp>
-        <p:nvSpPr>
-          <p:cNvPr id="14" name="Text 11"/>
-          <p:cNvSpPr txBox="1"/>
-          <p:nvPr/>
-        </p:nvSpPr>
-        <p:spPr>
-          <a:xfrm>
-            <a:off x="10744200" y="3026664"/>
-            <a:ext cx="731520" cy="429768"/>
-          </a:xfrm>
-          <a:prstGeom prst="rect">
-            <a:avLst/>
-          </a:prstGeom>
-          <a:noFill/>
-          <a:ln/>
-        </p:spPr>
-        <p:txBody>
-          <a:bodyPr wrap="square" lIns="0" tIns="0" rIns="0" bIns="0" rtlCol="0" anchor="ctr"/>
-          <a:lstStyle/>
-          <a:p>
-            <a:pPr latinLnBrk="0" algn="r" indent="0" marL="0">
-              <a:buNone/>
-            </a:pPr>
-            <a:r>
-              <a:rPr lang="ko-KR" sz="1200" dirty="0">
-                <a:solidFill>
-                  <a:srgbClr val="52514E"/>
-                </a:solidFill>
-                <a:latin typeface="Pretendard" pitchFamily="34" charset="0"/>
-                <a:ea typeface="Pretendard" pitchFamily="34" charset="-122"/>
-                <a:cs typeface="Pretendard" pitchFamily="34" charset="-120"/>
-              </a:rPr>
-              <a:t>3쪽</a:t>
-            </a:r>
-            <a:endParaRPr lang="ko-KR" sz="1200" dirty="0"/>
-          </a:p>
-        </p:txBody>
-      </p:sp>
-      <p:sp>
-        <p:nvSpPr>
-          <p:cNvPr id="15" name="Shape 12"/>
-          <p:cNvSpPr/>
-          <p:nvPr/>
-        </p:nvSpPr>
-        <p:spPr>
-          <a:xfrm>
-            <a:off x="7406640" y="3538728"/>
-            <a:ext cx="4142232" cy="429768"/>
-          </a:xfrm>
-          <a:prstGeom prst="roundRect">
-            <a:avLst>
-              <a:gd name="adj" fmla="val 12766"/>
-            </a:avLst>
-          </a:prstGeom>
-          <a:solidFill>
-            <a:srgbClr val="F3F3F1"/>
-          </a:solidFill>
-          <a:ln w="12700">
-            <a:solidFill>
-              <a:srgbClr val="F3F3F1"/>
-            </a:solidFill>
-            <a:prstDash val="solid"/>
-          </a:ln>
-        </p:spPr>
-      </p:sp>
-      <p:sp>
-        <p:nvSpPr>
-          <p:cNvPr id="16" name="Text 13"/>
-          <p:cNvSpPr txBox="1"/>
-          <p:nvPr/>
-        </p:nvSpPr>
-        <p:spPr>
-          <a:xfrm>
-            <a:off x="7543800" y="3538728"/>
-            <a:ext cx="3291840" cy="429768"/>
-          </a:xfrm>
-          <a:prstGeom prst="rect">
-            <a:avLst/>
-          </a:prstGeom>
-          <a:noFill/>
-          <a:ln/>
-        </p:spPr>
-        <p:txBody>
-          <a:bodyPr wrap="square" lIns="0" tIns="0" rIns="0" bIns="0" rtlCol="0" anchor="ctr"/>
-          <a:lstStyle/>
-          <a:p>
-            <a:pPr latinLnBrk="0" indent="0" marL="0">
-              <a:buNone/>
-            </a:pPr>
-            <a:r>
-              <a:rPr lang="ko-KR" sz="1300" b="1" dirty="0">
-                <a:solidFill>
-                  <a:srgbClr val="1F4E9A"/>
-                </a:solidFill>
-                <a:latin typeface="Pretendard" pitchFamily="34" charset="0"/>
-                <a:ea typeface="Pretendard" pitchFamily="34" charset="-122"/>
-                <a:cs typeface="Pretendard" pitchFamily="34" charset="-120"/>
-              </a:rPr>
-              <a:t>3  </a:t>
-            </a:r>
-            <a:pPr latinLnBrk="0" indent="0" marL="0">
-              <a:buNone/>
-            </a:pPr>
-            <a:r>
-              <a:rPr lang="ko-KR" sz="1300" dirty="0">
+              <a:rPr lang="ko-KR" sz="1350" dirty="0">
                 <a:solidFill>
                   <a:srgbClr val="0B0B0B"/>
                 </a:solidFill>
@@ -3169,20 +2876,20 @@
               </a:rPr>
               <a:t>베이스라인과 소형 CNN</a:t>
             </a:r>
-            <a:endParaRPr lang="ko-KR" sz="1300" dirty="0"/>
+            <a:endParaRPr lang="ko-KR" sz="1350" dirty="0"/>
           </a:p>
         </p:txBody>
       </p:sp>
       <p:sp>
         <p:nvSpPr>
-          <p:cNvPr id="17" name="Text 14"/>
+          <p:cNvPr id="15" name="Text 11"/>
           <p:cNvSpPr txBox="1"/>
           <p:nvPr/>
         </p:nvSpPr>
         <p:spPr>
           <a:xfrm>
-            <a:off x="10744200" y="3538728"/>
-            <a:ext cx="731520" cy="429768"/>
+            <a:off x="10744200" y="3081528"/>
+            <a:ext cx="731520" cy="457200"/>
           </a:xfrm>
           <a:prstGeom prst="rect">
             <a:avLst/>
@@ -3214,18 +2921,18 @@
       </p:sp>
       <p:sp>
         <p:nvSpPr>
-          <p:cNvPr id="18" name="Shape 15"/>
+          <p:cNvPr id="16" name="Shape 12"/>
           <p:cNvSpPr/>
           <p:nvPr/>
         </p:nvSpPr>
         <p:spPr>
           <a:xfrm>
-            <a:off x="7406640" y="4050792"/>
-            <a:ext cx="4142232" cy="429768"/>
+            <a:off x="7406640" y="3648456"/>
+            <a:ext cx="4142232" cy="457200"/>
           </a:xfrm>
           <a:prstGeom prst="roundRect">
             <a:avLst>
-              <a:gd name="adj" fmla="val 12766"/>
+              <a:gd name="adj" fmla="val 12000"/>
             </a:avLst>
           </a:prstGeom>
           <a:solidFill>
@@ -3241,14 +2948,14 @@
       </p:sp>
       <p:sp>
         <p:nvSpPr>
-          <p:cNvPr id="19" name="Text 16"/>
+          <p:cNvPr id="17" name="Text 13"/>
           <p:cNvSpPr txBox="1"/>
           <p:nvPr/>
         </p:nvSpPr>
         <p:spPr>
           <a:xfrm>
-            <a:off x="7543800" y="4050792"/>
-            <a:ext cx="3291840" cy="429768"/>
+            <a:off x="7543800" y="3648456"/>
+            <a:ext cx="3291840" cy="457200"/>
           </a:xfrm>
           <a:prstGeom prst="rect">
             <a:avLst/>
@@ -3264,7 +2971,7 @@
               <a:buNone/>
             </a:pPr>
             <a:r>
-              <a:rPr lang="ko-KR" sz="1300" b="1" dirty="0">
+              <a:rPr lang="ko-KR" sz="1350" b="1" dirty="0">
                 <a:solidFill>
                   <a:srgbClr val="1F4E9A"/>
                 </a:solidFill>
@@ -3272,13 +2979,13 @@
                 <a:ea typeface="Pretendard" pitchFamily="34" charset="-122"/>
                 <a:cs typeface="Pretendard" pitchFamily="34" charset="-120"/>
               </a:rPr>
-              <a:t>4  </a:t>
+              <a:t>3  </a:t>
             </a:r>
             <a:pPr latinLnBrk="0" indent="0" marL="0">
               <a:buNone/>
             </a:pPr>
             <a:r>
-              <a:rPr lang="ko-KR" sz="1300" dirty="0">
+              <a:rPr lang="ko-KR" sz="1350" dirty="0">
                 <a:solidFill>
                   <a:srgbClr val="0B0B0B"/>
                 </a:solidFill>
@@ -3286,22 +2993,22 @@
                 <a:ea typeface="Pretendard" pitchFamily="34" charset="-122"/>
                 <a:cs typeface="Pretendard" pitchFamily="34" charset="-120"/>
               </a:rPr>
-              <a:t>검증 다섯 가지와 오류 수정</a:t>
+              <a:t>검증과 오류 수정</a:t>
             </a:r>
-            <a:endParaRPr lang="ko-KR" sz="1300" dirty="0"/>
+            <a:endParaRPr lang="ko-KR" sz="1350" dirty="0"/>
           </a:p>
         </p:txBody>
       </p:sp>
       <p:sp>
         <p:nvSpPr>
-          <p:cNvPr id="20" name="Text 17"/>
+          <p:cNvPr id="18" name="Text 14"/>
           <p:cNvSpPr txBox="1"/>
           <p:nvPr/>
         </p:nvSpPr>
         <p:spPr>
           <a:xfrm>
-            <a:off x="10744200" y="4050792"/>
-            <a:ext cx="731520" cy="429768"/>
+            <a:off x="10744200" y="3648456"/>
+            <a:ext cx="731520" cy="457200"/>
           </a:xfrm>
           <a:prstGeom prst="rect">
             <a:avLst/>
@@ -3333,18 +3040,18 @@
       </p:sp>
       <p:sp>
         <p:nvSpPr>
-          <p:cNvPr id="21" name="Shape 18"/>
+          <p:cNvPr id="19" name="Shape 15"/>
           <p:cNvSpPr/>
           <p:nvPr/>
         </p:nvSpPr>
         <p:spPr>
           <a:xfrm>
-            <a:off x="7406640" y="4562856"/>
-            <a:ext cx="4142232" cy="429768"/>
+            <a:off x="7406640" y="4215384"/>
+            <a:ext cx="4142232" cy="457200"/>
           </a:xfrm>
           <a:prstGeom prst="roundRect">
             <a:avLst>
-              <a:gd name="adj" fmla="val 12766"/>
+              <a:gd name="adj" fmla="val 12000"/>
             </a:avLst>
           </a:prstGeom>
           <a:solidFill>
@@ -3360,14 +3067,14 @@
       </p:sp>
       <p:sp>
         <p:nvSpPr>
-          <p:cNvPr id="22" name="Text 19"/>
+          <p:cNvPr id="20" name="Text 16"/>
           <p:cNvSpPr txBox="1"/>
           <p:nvPr/>
         </p:nvSpPr>
         <p:spPr>
           <a:xfrm>
-            <a:off x="7543800" y="4562856"/>
-            <a:ext cx="3291840" cy="429768"/>
+            <a:off x="7543800" y="4215384"/>
+            <a:ext cx="3291840" cy="457200"/>
           </a:xfrm>
           <a:prstGeom prst="rect">
             <a:avLst/>
@@ -3383,7 +3090,7 @@
               <a:buNone/>
             </a:pPr>
             <a:r>
-              <a:rPr lang="ko-KR" sz="1300" b="1" dirty="0">
+              <a:rPr lang="ko-KR" sz="1350" b="1" dirty="0">
                 <a:solidFill>
                   <a:srgbClr val="1F4E9A"/>
                 </a:solidFill>
@@ -3391,13 +3098,13 @@
                 <a:ea typeface="Pretendard" pitchFamily="34" charset="-122"/>
                 <a:cs typeface="Pretendard" pitchFamily="34" charset="-120"/>
               </a:rPr>
-              <a:t>5  </a:t>
+              <a:t>4  </a:t>
             </a:r>
             <a:pPr latinLnBrk="0" indent="0" marL="0">
               <a:buNone/>
             </a:pPr>
             <a:r>
-              <a:rPr lang="ko-KR" sz="1300" dirty="0">
+              <a:rPr lang="ko-KR" sz="1350" dirty="0">
                 <a:solidFill>
                   <a:srgbClr val="0B0B0B"/>
                 </a:solidFill>
@@ -3405,22 +3112,22 @@
                 <a:ea typeface="Pretendard" pitchFamily="34" charset="-122"/>
                 <a:cs typeface="Pretendard" pitchFamily="34" charset="-120"/>
               </a:rPr>
-              <a:t>AI 활용 방식: 지시와 역할</a:t>
+              <a:t>AI 활용 ① 지시와 역할</a:t>
             </a:r>
-            <a:endParaRPr lang="ko-KR" sz="1300" dirty="0"/>
+            <a:endParaRPr lang="ko-KR" sz="1350" dirty="0"/>
           </a:p>
         </p:txBody>
       </p:sp>
       <p:sp>
         <p:nvSpPr>
-          <p:cNvPr id="23" name="Text 20"/>
+          <p:cNvPr id="21" name="Text 17"/>
           <p:cNvSpPr txBox="1"/>
           <p:nvPr/>
         </p:nvSpPr>
         <p:spPr>
           <a:xfrm>
-            <a:off x="10744200" y="4562856"/>
-            <a:ext cx="731520" cy="429768"/>
+            <a:off x="10744200" y="4215384"/>
+            <a:ext cx="731520" cy="457200"/>
           </a:xfrm>
           <a:prstGeom prst="rect">
             <a:avLst/>
@@ -3452,18 +3159,18 @@
       </p:sp>
       <p:sp>
         <p:nvSpPr>
-          <p:cNvPr id="24" name="Shape 21"/>
+          <p:cNvPr id="22" name="Shape 18"/>
           <p:cNvSpPr/>
           <p:nvPr/>
         </p:nvSpPr>
         <p:spPr>
           <a:xfrm>
-            <a:off x="7406640" y="5074920"/>
-            <a:ext cx="4142232" cy="429768"/>
+            <a:off x="7406640" y="4782312"/>
+            <a:ext cx="4142232" cy="457200"/>
           </a:xfrm>
           <a:prstGeom prst="roundRect">
             <a:avLst>
-              <a:gd name="adj" fmla="val 12766"/>
+              <a:gd name="adj" fmla="val 12000"/>
             </a:avLst>
           </a:prstGeom>
           <a:solidFill>
@@ -3479,14 +3186,14 @@
       </p:sp>
       <p:sp>
         <p:nvSpPr>
-          <p:cNvPr id="25" name="Text 22"/>
+          <p:cNvPr id="23" name="Text 19"/>
           <p:cNvSpPr txBox="1"/>
           <p:nvPr/>
         </p:nvSpPr>
         <p:spPr>
           <a:xfrm>
-            <a:off x="7543800" y="5074920"/>
-            <a:ext cx="3291840" cy="429768"/>
+            <a:off x="7543800" y="4782312"/>
+            <a:ext cx="3291840" cy="457200"/>
           </a:xfrm>
           <a:prstGeom prst="rect">
             <a:avLst/>
@@ -3502,7 +3209,7 @@
               <a:buNone/>
             </a:pPr>
             <a:r>
-              <a:rPr lang="ko-KR" sz="1300" b="1" dirty="0">
+              <a:rPr lang="ko-KR" sz="1350" b="1" dirty="0">
                 <a:solidFill>
                   <a:srgbClr val="1F4E9A"/>
                 </a:solidFill>
@@ -3510,13 +3217,13 @@
                 <a:ea typeface="Pretendard" pitchFamily="34" charset="-122"/>
                 <a:cs typeface="Pretendard" pitchFamily="34" charset="-120"/>
               </a:rPr>
-              <a:t>6  </a:t>
+              <a:t>5  </a:t>
             </a:r>
             <a:pPr latinLnBrk="0" indent="0" marL="0">
               <a:buNone/>
             </a:pPr>
             <a:r>
-              <a:rPr lang="ko-KR" sz="1300" dirty="0">
+              <a:rPr lang="ko-KR" sz="1350" dirty="0">
                 <a:solidFill>
                   <a:srgbClr val="0B0B0B"/>
                 </a:solidFill>
@@ -3524,22 +3231,22 @@
                 <a:ea typeface="Pretendard" pitchFamily="34" charset="-122"/>
                 <a:cs typeface="Pretendard" pitchFamily="34" charset="-120"/>
               </a:rPr>
-              <a:t>AI 활용 방식: 검증과 오류 적발</a:t>
+              <a:t>AI 활용 ② 검증과 오류 적발</a:t>
             </a:r>
-            <a:endParaRPr lang="ko-KR" sz="1300" dirty="0"/>
+            <a:endParaRPr lang="ko-KR" sz="1350" dirty="0"/>
           </a:p>
         </p:txBody>
       </p:sp>
       <p:sp>
         <p:nvSpPr>
-          <p:cNvPr id="26" name="Text 23"/>
+          <p:cNvPr id="24" name="Text 20"/>
           <p:cNvSpPr txBox="1"/>
           <p:nvPr/>
         </p:nvSpPr>
         <p:spPr>
           <a:xfrm>
-            <a:off x="10744200" y="5074920"/>
-            <a:ext cx="731520" cy="429768"/>
+            <a:off x="10744200" y="4782312"/>
+            <a:ext cx="731520" cy="457200"/>
           </a:xfrm>
           <a:prstGeom prst="rect">
             <a:avLst/>
@@ -3571,18 +3278,18 @@
       </p:sp>
       <p:sp>
         <p:nvSpPr>
-          <p:cNvPr id="27" name="Shape 24"/>
+          <p:cNvPr id="25" name="Shape 21"/>
           <p:cNvSpPr/>
           <p:nvPr/>
         </p:nvSpPr>
         <p:spPr>
           <a:xfrm>
-            <a:off x="7406640" y="5586984"/>
-            <a:ext cx="4142232" cy="429768"/>
+            <a:off x="7406640" y="5349240"/>
+            <a:ext cx="4142232" cy="457200"/>
           </a:xfrm>
           <a:prstGeom prst="roundRect">
             <a:avLst>
-              <a:gd name="adj" fmla="val 12766"/>
+              <a:gd name="adj" fmla="val 12000"/>
             </a:avLst>
           </a:prstGeom>
           <a:solidFill>
@@ -3598,14 +3305,14 @@
       </p:sp>
       <p:sp>
         <p:nvSpPr>
-          <p:cNvPr id="28" name="Text 25"/>
+          <p:cNvPr id="26" name="Text 22"/>
           <p:cNvSpPr txBox="1"/>
           <p:nvPr/>
         </p:nvSpPr>
         <p:spPr>
           <a:xfrm>
-            <a:off x="7543800" y="5586984"/>
-            <a:ext cx="3291840" cy="429768"/>
+            <a:off x="7543800" y="5349240"/>
+            <a:ext cx="3291840" cy="457200"/>
           </a:xfrm>
           <a:prstGeom prst="rect">
             <a:avLst/>
@@ -3621,7 +3328,7 @@
               <a:buNone/>
             </a:pPr>
             <a:r>
-              <a:rPr lang="ko-KR" sz="1300" b="1" dirty="0">
+              <a:rPr lang="ko-KR" sz="1350" b="1" dirty="0">
                 <a:solidFill>
                   <a:srgbClr val="1F4E9A"/>
                 </a:solidFill>
@@ -3629,13 +3336,13 @@
                 <a:ea typeface="Pretendard" pitchFamily="34" charset="-122"/>
                 <a:cs typeface="Pretendard" pitchFamily="34" charset="-120"/>
               </a:rPr>
-              <a:t>7  </a:t>
+              <a:t>6  </a:t>
             </a:r>
             <a:pPr latinLnBrk="0" indent="0" marL="0">
               <a:buNone/>
             </a:pPr>
             <a:r>
-              <a:rPr lang="ko-KR" sz="1300" dirty="0">
+              <a:rPr lang="ko-KR" sz="1350" dirty="0">
                 <a:solidFill>
                   <a:srgbClr val="0B0B0B"/>
                 </a:solidFill>
@@ -3645,20 +3352,20 @@
               </a:rPr>
               <a:t>결론·한계·재현 정보</a:t>
             </a:r>
-            <a:endParaRPr lang="ko-KR" sz="1300" dirty="0"/>
+            <a:endParaRPr lang="ko-KR" sz="1350" dirty="0"/>
           </a:p>
         </p:txBody>
       </p:sp>
       <p:sp>
         <p:nvSpPr>
-          <p:cNvPr id="29" name="Text 26"/>
+          <p:cNvPr id="27" name="Text 23"/>
           <p:cNvSpPr txBox="1"/>
           <p:nvPr/>
         </p:nvSpPr>
         <p:spPr>
           <a:xfrm>
-            <a:off x="10744200" y="5586984"/>
-            <a:ext cx="731520" cy="429768"/>
+            <a:off x="10744200" y="5349240"/>
+            <a:ext cx="731520" cy="457200"/>
           </a:xfrm>
           <a:prstGeom prst="rect">
             <a:avLst/>
@@ -3688,321 +3395,6 @@
           </a:p>
         </p:txBody>
       </p:sp>
-      <p:graphicFrame>
-        <p:nvGraphicFramePr>
-          <p:cNvPr id="5" name="Table 1"/>
-          <p:cNvGraphicFramePr>
-            <a:graphicFrameLocks noGrp="1"/>
-          </p:cNvGraphicFramePr>
-          <p:nvPr>
-            <p:extLst>
-              <p:ext uri="{D42A27DB-BD31-4B8C-83A1-F6EECF244321}">
-                <p14:modId xmlns:p14="http://schemas.microsoft.com/office/powerpoint/2010/main" val="1579011935"/>
-              </p:ext>
-            </p:extLst>
-          </p:nvPr>
-        </p:nvGraphicFramePr>
-        <p:xfrm>
-          <a:off x="640080" y="5440680"/>
-          <a:ext cx="6400800" cy="914400"/>
-        </p:xfrm>
-        <a:graphic>
-          <a:graphicData uri="http://schemas.openxmlformats.org/drawingml/2006/table">
-            <a:tbl>
-              <a:tblPr/>
-              <a:tblGrid>
-                <a:gridCol w="914400"/>
-                <a:gridCol w="5486400"/>
-              </a:tblGrid>
-              <a:tr h="246888">
-                <a:tc>
-                  <a:txBody>
-                    <a:bodyPr/>
-                    <a:lstStyle/>
-                    <a:p>
-                      <a:pPr latinLnBrk="0" indent="0" marL="0">
-                        <a:buNone/>
-                      </a:pPr>
-                      <a:r>
-                        <a:rPr lang="ko-KR" sz="1150" b="1" dirty="0">
-                          <a:solidFill>
-                            <a:srgbClr val="52514E"/>
-                          </a:solidFill>
-                          <a:latin typeface="Pretendard" pitchFamily="34" charset="0"/>
-                          <a:ea typeface="Pretendard" pitchFamily="34" charset="-122"/>
-                          <a:cs typeface="Pretendard" pitchFamily="34" charset="-120"/>
-                        </a:rPr>
-                        <a:t>lot</a:t>
-                      </a:r>
-                      <a:endParaRPr lang="ko-KR" sz="1150" dirty="0">
-                        <a:latin typeface="Pretendard" charset="0"/>
-                        <a:ea typeface="Pretendard" charset="0"/>
-                        <a:cs typeface="Pretendard" charset="0"/>
-                      </a:endParaRPr>
-                    </a:p>
-                  </a:txBody>
-                  <a:tcPr marL="0" marR="54864" marT="36576" marB="45720" anchor="t">
-                    <a:lnL w="0" cap="flat" cmpd="sng" algn="ctr">
-                      <a:noFill/>
-                    </a:lnL>
-                    <a:lnR w="0" cap="flat" cmpd="sng" algn="ctr">
-                      <a:noFill/>
-                    </a:lnR>
-                    <a:lnT w="0" cap="flat" cmpd="sng" algn="ctr">
-                      <a:noFill/>
-                    </a:lnT>
-                    <a:lnB w="0" cap="flat" cmpd="sng" algn="ctr">
-                      <a:noFill/>
-                    </a:lnB>
-                    <a:solidFill>
-                      <a:srgbClr val="FFFFFF"/>
-                    </a:solidFill>
-                  </a:tcPr>
-                </a:tc>
-                <a:tc>
-                  <a:txBody>
-                    <a:bodyPr/>
-                    <a:lstStyle/>
-                    <a:p>
-                      <a:pPr latinLnBrk="0" indent="0" marL="0">
-                        <a:buNone/>
-                      </a:pPr>
-                      <a:r>
-                        <a:rPr lang="ko-KR" sz="1150" dirty="0">
-                          <a:solidFill>
-                            <a:srgbClr val="52514E"/>
-                          </a:solidFill>
-                          <a:latin typeface="Pretendard" pitchFamily="34" charset="0"/>
-                          <a:ea typeface="Pretendard" pitchFamily="34" charset="-122"/>
-                          <a:cs typeface="Pretendard" pitchFamily="34" charset="-120"/>
-                        </a:rPr>
-                        <a:t>같은 공정 조건으로 함께 처리한 웨이퍼 묶음(최대 25장).</a:t>
-                      </a:r>
-                      <a:br/>
-                      <a:pPr latinLnBrk="0" indent="0" marL="0">
-                        <a:buNone/>
-                      </a:pPr>
-                      <a:r>
-                        <a:rPr lang="ko-KR" sz="1150" dirty="0">
-                          <a:solidFill>
-                            <a:srgbClr val="52514E"/>
-                          </a:solidFill>
-                          <a:latin typeface="Pretendard" pitchFamily="34" charset="0"/>
-                          <a:ea typeface="Pretendard" pitchFamily="34" charset="-122"/>
-                          <a:cs typeface="Pretendard" pitchFamily="34" charset="-120"/>
-                        </a:rPr>
-                        <a:t>한 lot의 맵은 서로 닮아서 분할의 기본 단위로 씀</a:t>
-                      </a:r>
-                      <a:endParaRPr lang="ko-KR" sz="1150" dirty="0">
-                        <a:latin typeface="Pretendard" charset="0"/>
-                        <a:ea typeface="Pretendard" charset="0"/>
-                        <a:cs typeface="Pretendard" charset="0"/>
-                      </a:endParaRPr>
-                    </a:p>
-                  </a:txBody>
-                  <a:tcPr marL="0" marR="54864" marT="36576" marB="45720" anchor="t">
-                    <a:lnL w="0" cap="flat" cmpd="sng" algn="ctr">
-                      <a:noFill/>
-                    </a:lnL>
-                    <a:lnR w="0" cap="flat" cmpd="sng" algn="ctr">
-                      <a:noFill/>
-                    </a:lnR>
-                    <a:lnT w="0" cap="flat" cmpd="sng" algn="ctr">
-                      <a:noFill/>
-                    </a:lnT>
-                    <a:lnB w="0" cap="flat" cmpd="sng" algn="ctr">
-                      <a:noFill/>
-                    </a:lnB>
-                    <a:solidFill>
-                      <a:srgbClr val="FFFFFF"/>
-                    </a:solidFill>
-                  </a:tcPr>
-                </a:tc>
-              </a:tr>
-              <a:tr h="246888">
-                <a:tc>
-                  <a:txBody>
-                    <a:bodyPr/>
-                    <a:lstStyle/>
-                    <a:p>
-                      <a:pPr latinLnBrk="0" indent="0" marL="0">
-                        <a:buNone/>
-                      </a:pPr>
-                      <a:r>
-                        <a:rPr lang="ko-KR" sz="1150" b="1" dirty="0">
-                          <a:solidFill>
-                            <a:srgbClr val="52514E"/>
-                          </a:solidFill>
-                          <a:latin typeface="Pretendard" pitchFamily="34" charset="0"/>
-                          <a:ea typeface="Pretendard" pitchFamily="34" charset="-122"/>
-                          <a:cs typeface="Pretendard" pitchFamily="34" charset="-120"/>
-                        </a:rPr>
-                        <a:t>macro-F1</a:t>
-                      </a:r>
-                      <a:endParaRPr lang="ko-KR" sz="1150" dirty="0">
-                        <a:latin typeface="Pretendard" charset="0"/>
-                        <a:ea typeface="Pretendard" charset="0"/>
-                        <a:cs typeface="Pretendard" charset="0"/>
-                      </a:endParaRPr>
-                    </a:p>
-                  </a:txBody>
-                  <a:tcPr marL="0" marR="54864" marT="36576" marB="45720" anchor="t">
-                    <a:lnL w="0" cap="flat" cmpd="sng" algn="ctr">
-                      <a:noFill/>
-                    </a:lnL>
-                    <a:lnR w="0" cap="flat" cmpd="sng" algn="ctr">
-                      <a:noFill/>
-                    </a:lnR>
-                    <a:lnT w="0" cap="flat" cmpd="sng" algn="ctr">
-                      <a:noFill/>
-                    </a:lnT>
-                    <a:lnB w="0" cap="flat" cmpd="sng" algn="ctr">
-                      <a:noFill/>
-                    </a:lnB>
-                    <a:solidFill>
-                      <a:srgbClr val="FFFFFF"/>
-                    </a:solidFill>
-                  </a:tcPr>
-                </a:tc>
-                <a:tc>
-                  <a:txBody>
-                    <a:bodyPr/>
-                    <a:lstStyle/>
-                    <a:p>
-                      <a:pPr latinLnBrk="0" indent="0" marL="0">
-                        <a:buNone/>
-                      </a:pPr>
-                      <a:r>
-                        <a:rPr lang="ko-KR" sz="1150" dirty="0">
-                          <a:solidFill>
-                            <a:srgbClr val="52514E"/>
-                          </a:solidFill>
-                          <a:latin typeface="Pretendard" pitchFamily="34" charset="0"/>
-                          <a:ea typeface="Pretendard" pitchFamily="34" charset="-122"/>
-                          <a:cs typeface="Pretendard" pitchFamily="34" charset="-120"/>
-                        </a:rPr>
-                        <a:t>패턴 9종 F1의 단순 평균. 85%를 차지하는 none에 점수가 치우치지 않음</a:t>
-                      </a:r>
-                      <a:endParaRPr lang="ko-KR" sz="1150" dirty="0">
-                        <a:latin typeface="Pretendard" charset="0"/>
-                        <a:ea typeface="Pretendard" charset="0"/>
-                        <a:cs typeface="Pretendard" charset="0"/>
-                      </a:endParaRPr>
-                    </a:p>
-                  </a:txBody>
-                  <a:tcPr marL="0" marR="54864" marT="36576" marB="45720" anchor="t">
-                    <a:lnL w="0" cap="flat" cmpd="sng" algn="ctr">
-                      <a:noFill/>
-                    </a:lnL>
-                    <a:lnR w="0" cap="flat" cmpd="sng" algn="ctr">
-                      <a:noFill/>
-                    </a:lnR>
-                    <a:lnT w="0" cap="flat" cmpd="sng" algn="ctr">
-                      <a:noFill/>
-                    </a:lnT>
-                    <a:lnB w="0" cap="flat" cmpd="sng" algn="ctr">
-                      <a:noFill/>
-                    </a:lnB>
-                    <a:solidFill>
-                      <a:srgbClr val="FFFFFF"/>
-                    </a:solidFill>
-                  </a:tcPr>
-                </a:tc>
-              </a:tr>
-              <a:tr h="246888">
-                <a:tc>
-                  <a:txBody>
-                    <a:bodyPr/>
-                    <a:lstStyle/>
-                    <a:p>
-                      <a:pPr latinLnBrk="0" indent="0" marL="0">
-                        <a:buNone/>
-                      </a:pPr>
-                      <a:r>
-                        <a:rPr lang="ko-KR" sz="1150" b="1" dirty="0">
-                          <a:solidFill>
-                            <a:srgbClr val="52514E"/>
-                          </a:solidFill>
-                          <a:latin typeface="Pretendard" pitchFamily="34" charset="0"/>
-                          <a:ea typeface="Pretendard" pitchFamily="34" charset="-122"/>
-                          <a:cs typeface="Pretendard" pitchFamily="34" charset="-120"/>
-                        </a:rPr>
-                        <a:t>recall</a:t>
-                      </a:r>
-                      <a:endParaRPr lang="ko-KR" sz="1150" dirty="0">
-                        <a:latin typeface="Pretendard" charset="0"/>
-                        <a:ea typeface="Pretendard" charset="0"/>
-                        <a:cs typeface="Pretendard" charset="0"/>
-                      </a:endParaRPr>
-                    </a:p>
-                  </a:txBody>
-                  <a:tcPr marL="0" marR="54864" marT="36576" marB="45720" anchor="t">
-                    <a:lnL w="0" cap="flat" cmpd="sng" algn="ctr">
-                      <a:noFill/>
-                    </a:lnL>
-                    <a:lnR w="0" cap="flat" cmpd="sng" algn="ctr">
-                      <a:noFill/>
-                    </a:lnR>
-                    <a:lnT w="0" cap="flat" cmpd="sng" algn="ctr">
-                      <a:noFill/>
-                    </a:lnT>
-                    <a:lnB w="0" cap="flat" cmpd="sng" algn="ctr">
-                      <a:noFill/>
-                    </a:lnB>
-                    <a:solidFill>
-                      <a:srgbClr val="FFFFFF"/>
-                    </a:solidFill>
-                  </a:tcPr>
-                </a:tc>
-                <a:tc>
-                  <a:txBody>
-                    <a:bodyPr/>
-                    <a:lstStyle/>
-                    <a:p>
-                      <a:pPr latinLnBrk="0" indent="0" marL="0">
-                        <a:buNone/>
-                      </a:pPr>
-                      <a:r>
-                        <a:rPr lang="ko-KR" sz="1150" dirty="0">
-                          <a:solidFill>
-                            <a:srgbClr val="52514E"/>
-                          </a:solidFill>
-                          <a:latin typeface="Pretendard" pitchFamily="34" charset="0"/>
-                          <a:ea typeface="Pretendard" pitchFamily="34" charset="-122"/>
-                          <a:cs typeface="Pretendard" pitchFamily="34" charset="-120"/>
-                        </a:rPr>
-                        <a:t>실제 그 패턴인 웨이퍼 중 맞힌 비율</a:t>
-                      </a:r>
-                      <a:endParaRPr lang="ko-KR" sz="1150" dirty="0">
-                        <a:latin typeface="Pretendard" charset="0"/>
-                        <a:ea typeface="Pretendard" charset="0"/>
-                        <a:cs typeface="Pretendard" charset="0"/>
-                      </a:endParaRPr>
-                    </a:p>
-                  </a:txBody>
-                  <a:tcPr marL="0" marR="54864" marT="36576" marB="45720" anchor="t">
-                    <a:lnL w="0" cap="flat" cmpd="sng" algn="ctr">
-                      <a:noFill/>
-                    </a:lnL>
-                    <a:lnR w="0" cap="flat" cmpd="sng" algn="ctr">
-                      <a:noFill/>
-                    </a:lnR>
-                    <a:lnT w="0" cap="flat" cmpd="sng" algn="ctr">
-                      <a:noFill/>
-                    </a:lnT>
-                    <a:lnB w="0" cap="flat" cmpd="sng" algn="ctr">
-                      <a:noFill/>
-                    </a:lnB>
-                    <a:solidFill>
-                      <a:srgbClr val="FFFFFF"/>
-                    </a:solidFill>
-                  </a:tcPr>
-                </a:tc>
-              </a:tr>
-            </a:tbl>
-          </a:graphicData>
-        </a:graphic>
-      </p:graphicFrame>
     </p:spTree>
   </p:cSld>
   <p:clrMapOvr>
@@ -4167,25 +3559,7 @@
                 <a:ea typeface="Pretendard SemiBold" pitchFamily="34" charset="-122"/>
                 <a:cs typeface="Pretendard SemiBold" pitchFamily="34" charset="-120"/>
               </a:rPr>
-              <a:t>AI 에이전트 10개의 탐색으로 이상점 17개를 받았고, 그중 '같은 웨이퍼의 복사본이 학습과</a:t>
-            </a:r>
-            <a:br/>
-            <a:pPr latinLnBrk="0" indent="0" marL="0">
-              <a:lnSpc>
-                <a:spcPts val="2600"/>
-              </a:lnSpc>
-              <a:buNone/>
-            </a:pPr>
-            <a:r>
-              <a:rPr lang="ko-KR" sz="1800" dirty="0">
-                <a:solidFill>
-                  <a:srgbClr val="1F4E9A"/>
-                </a:solidFill>
-                <a:latin typeface="Pretendard SemiBold" pitchFamily="34" charset="0"/>
-                <a:ea typeface="Pretendard SemiBold" pitchFamily="34" charset="-122"/>
-                <a:cs typeface="Pretendard SemiBold" pitchFamily="34" charset="-120"/>
-              </a:rPr>
-              <a:t>평가에 섞인다'를 핵심 문제로 정해 lot과 복사본을 한 묶음으로 나누는 규칙을 세웠습니다.</a:t>
+              <a:t>AI 에이전트 10개가 찾은 이상점 17개 중 복사본 누수를 핵심 문제로 정하고, lot과 복사본을 한 묶음으로 나눴습니다.</a:t>
             </a:r>
             <a:endParaRPr lang="ko-KR" sz="1800" dirty="0"/>
           </a:p>
@@ -4224,7 +3598,7 @@
                 <a:ea typeface="Pretendard" pitchFamily="34" charset="-122"/>
                 <a:cs typeface="Pretendard" pitchFamily="34" charset="-120"/>
               </a:rPr>
-              <a:t>근거: scripts/explore_data.py, scripts/make_splits.py → outputs/eda/summary.json, outputs/splits/split_summary.json</a:t>
+              <a:t>근거: outputs/eda/summary.json, outputs/splits/split_summary.json</a:t>
             </a:r>
             <a:endParaRPr lang="ko-KR" sz="1000" dirty="0"/>
           </a:p>
@@ -4324,15 +3698,15 @@
         </p:nvGraphicFramePr>
         <p:xfrm>
           <a:off x="640080" y="2395728"/>
-          <a:ext cx="5577840" cy="914400"/>
+          <a:ext cx="4937760" cy="914400"/>
         </p:xfrm>
         <a:graphic>
           <a:graphicData uri="http://schemas.openxmlformats.org/drawingml/2006/table">
             <a:tbl>
               <a:tblPr/>
               <a:tblGrid>
-                <a:gridCol w="1417320"/>
-                <a:gridCol w="4160520"/>
+                <a:gridCol w="1280160"/>
+                <a:gridCol w="3657600"/>
               </a:tblGrid>
               <a:tr h="420624">
                 <a:tc>
@@ -4344,7 +3718,7 @@
                         <a:buNone/>
                       </a:pPr>
                       <a:r>
-                        <a:rPr lang="ko-KR" sz="1200" b="1" dirty="0">
+                        <a:rPr lang="ko-KR" sz="1250" b="1" dirty="0">
                           <a:solidFill>
                             <a:srgbClr val="0B0B0B"/>
                           </a:solidFill>
@@ -4354,7 +3728,7 @@
                         </a:rPr>
                         <a:t>원본 분할</a:t>
                       </a:r>
-                      <a:endParaRPr lang="ko-KR" sz="1200" dirty="0">
+                      <a:endParaRPr lang="ko-KR" sz="1250" dirty="0">
                         <a:latin typeface="Pretendard" charset="0"/>
                         <a:ea typeface="Pretendard" charset="0"/>
                         <a:cs typeface="Pretendard" charset="0"/>
@@ -4412,7 +3786,7 @@
                         <a:buNone/>
                       </a:pPr>
                       <a:r>
-                        <a:rPr lang="ko-KR" sz="1200" dirty="0">
+                        <a:rPr lang="ko-KR" sz="1250" dirty="0">
                           <a:solidFill>
                             <a:srgbClr val="0B0B0B"/>
                           </a:solidFill>
@@ -4420,24 +3794,9 @@
                           <a:ea typeface="Pretendard" pitchFamily="34" charset="-122"/>
                           <a:cs typeface="Pretendard" pitchFamily="34" charset="-120"/>
                         </a:rPr>
-                        <a:t>test 3,158장이 train의 복사본.</a:t>
-                      </a:r>
-                      <a:br/>
-                      <a:pPr latinLnBrk="0" algn="l" indent="0" marL="0">
-                        <a:buNone/>
-                      </a:pPr>
-                      <a:r>
-                        <a:rPr lang="ko-KR" sz="1200" dirty="0">
-                          <a:solidFill>
-                            <a:srgbClr val="0B0B0B"/>
-                          </a:solidFill>
-                          <a:latin typeface="Pretendard" pitchFamily="34" charset="0"/>
-                          <a:ea typeface="Pretendard" pitchFamily="34" charset="-122"/>
-                          <a:cs typeface="Pretendard" pitchFamily="34" charset="-120"/>
-                        </a:rPr>
-                        <a:t>같은 맵에 다른 라벨이 붙은 쌍 14개</a:t>
-                      </a:r>
-                      <a:endParaRPr lang="ko-KR" sz="1200" dirty="0">
+                        <a:t>test 3,158장이 train의 복사본</a:t>
+                      </a:r>
+                      <a:endParaRPr lang="ko-KR" sz="1250" dirty="0">
                         <a:latin typeface="Pretendard" charset="0"/>
                         <a:ea typeface="Pretendard" charset="0"/>
                         <a:cs typeface="Pretendard" charset="0"/>
@@ -4497,7 +3856,7 @@
                         <a:buNone/>
                       </a:pPr>
                       <a:r>
-                        <a:rPr lang="ko-KR" sz="1200" b="1" dirty="0">
+                        <a:rPr lang="ko-KR" sz="1250" b="1" dirty="0">
                           <a:solidFill>
                             <a:srgbClr val="0B0B0B"/>
                           </a:solidFill>
@@ -4507,7 +3866,7 @@
                         </a:rPr>
                         <a:t>lot 단위 분할</a:t>
                       </a:r>
-                      <a:endParaRPr lang="ko-KR" sz="1200" dirty="0">
+                      <a:endParaRPr lang="ko-KR" sz="1250" dirty="0">
                         <a:latin typeface="Pretendard" charset="0"/>
                         <a:ea typeface="Pretendard" charset="0"/>
                         <a:cs typeface="Pretendard" charset="0"/>
@@ -4565,7 +3924,7 @@
                         <a:buNone/>
                       </a:pPr>
                       <a:r>
-                        <a:rPr lang="ko-KR" sz="1200" dirty="0">
+                        <a:rPr lang="ko-KR" sz="1250" dirty="0">
                           <a:solidFill>
                             <a:srgbClr val="0B0B0B"/>
                           </a:solidFill>
@@ -4573,24 +3932,9 @@
                           <a:ea typeface="Pretendard" pitchFamily="34" charset="-122"/>
                           <a:cs typeface="Pretendard" pitchFamily="34" charset="-120"/>
                         </a:rPr>
-                        <a:t>재검사로 생긴 거의 같은 맵이 양쪽에 남음.</a:t>
-                      </a:r>
-                      <a:br/>
-                      <a:pPr latinLnBrk="0" algn="l" indent="0" marL="0">
-                        <a:buNone/>
-                      </a:pPr>
-                      <a:r>
-                        <a:rPr lang="ko-KR" sz="1200" dirty="0">
-                          <a:solidFill>
-                            <a:srgbClr val="0B0B0B"/>
-                          </a:solidFill>
-                          <a:latin typeface="Pretendard" pitchFamily="34" charset="0"/>
-                          <a:ea typeface="Pretendard" pitchFamily="34" charset="-122"/>
-                          <a:cs typeface="Pretendard" pitchFamily="34" charset="-120"/>
-                        </a:rPr>
-                        <a:t>Center 패턴은 test의 40.7%</a:t>
-                      </a:r>
-                      <a:endParaRPr lang="ko-KR" sz="1200" dirty="0">
+                        <a:t>재검사 복사본이 양쪽에 남음(Center 40.7%)</a:t>
+                      </a:r>
+                      <a:endParaRPr lang="ko-KR" sz="1250" dirty="0">
                         <a:latin typeface="Pretendard" charset="0"/>
                         <a:ea typeface="Pretendard" charset="0"/>
                         <a:cs typeface="Pretendard" charset="0"/>
@@ -4650,7 +3994,7 @@
                         <a:buNone/>
                       </a:pPr>
                       <a:r>
-                        <a:rPr lang="ko-KR" sz="1200" b="1" dirty="0">
+                        <a:rPr lang="ko-KR" sz="1250" b="1" dirty="0">
                           <a:solidFill>
                             <a:srgbClr val="0B0B0B"/>
                           </a:solidFill>
@@ -4658,9 +4002,9 @@
                           <a:ea typeface="Pretendard" pitchFamily="34" charset="-122"/>
                           <a:cs typeface="Pretendard" pitchFamily="34" charset="-120"/>
                         </a:rPr>
-                        <a:t>반전·회전 복사본</a:t>
-                      </a:r>
-                      <a:endParaRPr lang="ko-KR" sz="1200" dirty="0">
+                        <a:t>반전·회전</a:t>
+                      </a:r>
+                      <a:endParaRPr lang="ko-KR" sz="1250" dirty="0">
                         <a:latin typeface="Pretendard" charset="0"/>
                         <a:ea typeface="Pretendard" charset="0"/>
                         <a:cs typeface="Pretendard" charset="0"/>
@@ -4718,7 +4062,7 @@
                         <a:buNone/>
                       </a:pPr>
                       <a:r>
-                        <a:rPr lang="ko-KR" sz="1200" dirty="0">
+                        <a:rPr lang="ko-KR" sz="1250" dirty="0">
                           <a:solidFill>
                             <a:srgbClr val="0B0B0B"/>
                           </a:solidFill>
@@ -4726,9 +4070,9 @@
                           <a:ea typeface="Pretendard" pitchFamily="34" charset="-122"/>
                           <a:cs typeface="Pretendard" pitchFamily="34" charset="-120"/>
                         </a:rPr>
-                        <a:t>뒤집거나 돌린 복사본도 있어 8가지 변환을 모두 비교해서 묶음</a:t>
-                      </a:r>
-                      <a:endParaRPr lang="ko-KR" sz="1200" dirty="0">
+                        <a:t>뒤집거나 돌린 복사본까지 8가지 변환으로 비교</a:t>
+                      </a:r>
+                      <a:endParaRPr lang="ko-KR" sz="1250" dirty="0">
                         <a:latin typeface="Pretendard" charset="0"/>
                         <a:ea typeface="Pretendard" charset="0"/>
                         <a:cs typeface="Pretendard" charset="0"/>
@@ -4797,16 +4141,16 @@
           </p:nvPr>
         </p:nvGraphicFramePr>
         <p:xfrm>
-          <a:off x="640080" y="3840480"/>
-          <a:ext cx="5577840" cy="914400"/>
+          <a:off x="640080" y="3886200"/>
+          <a:ext cx="4937760" cy="914400"/>
         </p:xfrm>
         <a:graphic>
           <a:graphicData uri="http://schemas.openxmlformats.org/drawingml/2006/table">
             <a:tbl>
               <a:tblPr/>
               <a:tblGrid>
-                <a:gridCol w="1143000"/>
-                <a:gridCol w="4434840"/>
+                <a:gridCol w="1188720"/>
+                <a:gridCol w="3749040"/>
               </a:tblGrid>
               <a:tr h="310896">
                 <a:tc>
@@ -4818,7 +4162,7 @@
                         <a:buNone/>
                       </a:pPr>
                       <a:r>
-                        <a:rPr lang="ko-KR" sz="1300" b="1" dirty="0">
+                        <a:rPr lang="ko-KR" sz="1350" b="1" dirty="0">
                           <a:solidFill>
                             <a:srgbClr val="0B0B0B"/>
                           </a:solidFill>
@@ -4826,9 +4170,9 @@
                           <a:ea typeface="Pretendard" pitchFamily="34" charset="-122"/>
                           <a:cs typeface="Pretendard" pitchFamily="34" charset="-120"/>
                         </a:rPr>
-                        <a:t>데이터</a:t>
-                      </a:r>
-                      <a:endParaRPr lang="ko-KR" sz="1300" dirty="0">
+                        <a:t>채택한 분할</a:t>
+                      </a:r>
+                      <a:endParaRPr lang="ko-KR" sz="1350" dirty="0">
                         <a:latin typeface="Pretendard" charset="0"/>
                         <a:ea typeface="Pretendard" charset="0"/>
                         <a:cs typeface="Pretendard" charset="0"/>
@@ -4862,7 +4206,7 @@
                         <a:buNone/>
                       </a:pPr>
                       <a:r>
-                        <a:rPr lang="ko-KR" sz="1300" dirty="0">
+                        <a:rPr lang="ko-KR" sz="1350" dirty="0">
                           <a:solidFill>
                             <a:srgbClr val="0B0B0B"/>
                           </a:solidFill>
@@ -4870,24 +4214,9 @@
                           <a:ea typeface="Pretendard" pitchFamily="34" charset="-122"/>
                           <a:cs typeface="Pretendard" pitchFamily="34" charset="-120"/>
                         </a:rPr>
-                        <a:t>라벨 있는 172,950장 사용.</a:t>
-                      </a:r>
-                      <a:br/>
-                      <a:pPr latinLnBrk="0" indent="0" marL="0">
-                        <a:buNone/>
-                      </a:pPr>
-                      <a:r>
-                        <a:rPr lang="ko-KR" sz="1300" dirty="0">
-                          <a:solidFill>
-                            <a:srgbClr val="0B0B0B"/>
-                          </a:solidFill>
-                          <a:latin typeface="Pretendard" pitchFamily="34" charset="0"/>
-                          <a:ea typeface="Pretendard" pitchFamily="34" charset="-122"/>
-                          <a:cs typeface="Pretendard" pitchFamily="34" charset="-120"/>
-                        </a:rPr>
-                        <a:t>none 85.2%, Near-full 149장(0.09%)으로 불균형</a:t>
-                      </a:r>
-                      <a:endParaRPr lang="ko-KR" sz="1300" dirty="0">
+                        <a:t>lot + 10픽셀 이내 복사본을 한 묶음으로 70:15:15</a:t>
+                      </a:r>
+                      <a:endParaRPr lang="ko-KR" sz="1350" dirty="0">
                         <a:latin typeface="Pretendard" charset="0"/>
                         <a:ea typeface="Pretendard" charset="0"/>
                         <a:cs typeface="Pretendard" charset="0"/>
@@ -4923,7 +4252,7 @@
                         <a:buNone/>
                       </a:pPr>
                       <a:r>
-                        <a:rPr lang="ko-KR" sz="1300" b="1" dirty="0">
+                        <a:rPr lang="ko-KR" sz="1350" b="1" dirty="0">
                           <a:solidFill>
                             <a:srgbClr val="0B0B0B"/>
                           </a:solidFill>
@@ -4931,9 +4260,9 @@
                           <a:ea typeface="Pretendard" pitchFamily="34" charset="-122"/>
                           <a:cs typeface="Pretendard" pitchFamily="34" charset="-120"/>
                         </a:rPr>
-                        <a:t>채택한 분할</a:t>
-                      </a:r>
-                      <a:endParaRPr lang="ko-KR" sz="1300" dirty="0">
+                        <a:t>성공 기준</a:t>
+                      </a:r>
+                      <a:endParaRPr lang="ko-KR" sz="1350" dirty="0">
                         <a:latin typeface="Pretendard" charset="0"/>
                         <a:ea typeface="Pretendard" charset="0"/>
                         <a:cs typeface="Pretendard" charset="0"/>
@@ -4967,7 +4296,7 @@
                         <a:buNone/>
                       </a:pPr>
                       <a:r>
-                        <a:rPr lang="ko-KR" sz="1300" dirty="0">
+                        <a:rPr lang="ko-KR" sz="1350" dirty="0">
                           <a:solidFill>
                             <a:srgbClr val="0B0B0B"/>
                           </a:solidFill>
@@ -4975,14 +4304,14 @@
                           <a:ea typeface="Pretendard" pitchFamily="34" charset="-122"/>
                           <a:cs typeface="Pretendard" pitchFamily="34" charset="-120"/>
                         </a:rPr>
-                        <a:t>lot과 10픽셀 이내 복사본(반전·회전 포함)을 한 묶음으로 나눔.</a:t>
+                        <a:t>macro-F1 0.80 이상,</a:t>
                       </a:r>
                       <a:br/>
                       <a:pPr latinLnBrk="0" indent="0" marL="0">
                         <a:buNone/>
                       </a:pPr>
                       <a:r>
-                        <a:rPr lang="ko-KR" sz="1300" dirty="0">
+                        <a:rPr lang="ko-KR" sz="1350" dirty="0">
                           <a:solidFill>
                             <a:srgbClr val="0B0B0B"/>
                           </a:solidFill>
@@ -4990,114 +4319,9 @@
                           <a:ea typeface="Pretendard" pitchFamily="34" charset="-122"/>
                           <a:cs typeface="Pretendard" pitchFamily="34" charset="-120"/>
                         </a:rPr>
-                        <a:t>학습:검증:테스트 = 70:15:15</a:t>
-                      </a:r>
-                      <a:endParaRPr lang="ko-KR" sz="1300" dirty="0">
-                        <a:latin typeface="Pretendard" charset="0"/>
-                        <a:ea typeface="Pretendard" charset="0"/>
-                        <a:cs typeface="Pretendard" charset="0"/>
-                      </a:endParaRPr>
-                    </a:p>
-                  </a:txBody>
-                  <a:tcPr marL="0" marR="54864" marT="36576" marB="45720" anchor="t">
-                    <a:lnL w="0" cap="flat" cmpd="sng" algn="ctr">
-                      <a:noFill/>
-                    </a:lnL>
-                    <a:lnR w="0" cap="flat" cmpd="sng" algn="ctr">
-                      <a:noFill/>
-                    </a:lnR>
-                    <a:lnT w="0" cap="flat" cmpd="sng" algn="ctr">
-                      <a:noFill/>
-                    </a:lnT>
-                    <a:lnB w="0" cap="flat" cmpd="sng" algn="ctr">
-                      <a:noFill/>
-                    </a:lnB>
-                    <a:solidFill>
-                      <a:srgbClr val="FFFFFF"/>
-                    </a:solidFill>
-                  </a:tcPr>
-                </a:tc>
-              </a:tr>
-              <a:tr h="310896">
-                <a:tc>
-                  <a:txBody>
-                    <a:bodyPr/>
-                    <a:lstStyle/>
-                    <a:p>
-                      <a:pPr latinLnBrk="0" indent="0" marL="0">
-                        <a:buNone/>
-                      </a:pPr>
-                      <a:r>
-                        <a:rPr lang="ko-KR" sz="1300" b="1" dirty="0">
-                          <a:solidFill>
-                            <a:srgbClr val="0B0B0B"/>
-                          </a:solidFill>
-                          <a:latin typeface="Pretendard" pitchFamily="34" charset="0"/>
-                          <a:ea typeface="Pretendard" pitchFamily="34" charset="-122"/>
-                          <a:cs typeface="Pretendard" pitchFamily="34" charset="-120"/>
-                        </a:rPr>
-                        <a:t>성공 기준</a:t>
-                      </a:r>
-                      <a:endParaRPr lang="ko-KR" sz="1300" dirty="0">
-                        <a:latin typeface="Pretendard" charset="0"/>
-                        <a:ea typeface="Pretendard" charset="0"/>
-                        <a:cs typeface="Pretendard" charset="0"/>
-                      </a:endParaRPr>
-                    </a:p>
-                  </a:txBody>
-                  <a:tcPr marL="0" marR="54864" marT="36576" marB="45720" anchor="t">
-                    <a:lnL w="0" cap="flat" cmpd="sng" algn="ctr">
-                      <a:noFill/>
-                    </a:lnL>
-                    <a:lnR w="0" cap="flat" cmpd="sng" algn="ctr">
-                      <a:noFill/>
-                    </a:lnR>
-                    <a:lnT w="0" cap="flat" cmpd="sng" algn="ctr">
-                      <a:noFill/>
-                    </a:lnT>
-                    <a:lnB w="0" cap="flat" cmpd="sng" algn="ctr">
-                      <a:noFill/>
-                    </a:lnB>
-                    <a:solidFill>
-                      <a:srgbClr val="FFFFFF"/>
-                    </a:solidFill>
-                  </a:tcPr>
-                </a:tc>
-                <a:tc>
-                  <a:txBody>
-                    <a:bodyPr/>
-                    <a:lstStyle/>
-                    <a:p>
-                      <a:pPr latinLnBrk="0" indent="0" marL="0">
-                        <a:buNone/>
-                      </a:pPr>
-                      <a:r>
-                        <a:rPr lang="ko-KR" sz="1300" dirty="0">
-                          <a:solidFill>
-                            <a:srgbClr val="0B0B0B"/>
-                          </a:solidFill>
-                          <a:latin typeface="Pretendard" pitchFamily="34" charset="0"/>
-                          <a:ea typeface="Pretendard" pitchFamily="34" charset="-122"/>
-                          <a:cs typeface="Pretendard" pitchFamily="34" charset="-120"/>
-                        </a:rPr>
-                        <a:t>test macro-F1 0.80 이상, 모든 패턴 recall 0.50 이상,</a:t>
-                      </a:r>
-                      <a:br/>
-                      <a:pPr latinLnBrk="0" indent="0" marL="0">
-                        <a:buNone/>
-                      </a:pPr>
-                      <a:r>
-                        <a:rPr lang="ko-KR" sz="1300" dirty="0">
-                          <a:solidFill>
-                            <a:srgbClr val="0B0B0B"/>
-                          </a:solidFill>
-                          <a:latin typeface="Pretendard" pitchFamily="34" charset="0"/>
-                          <a:ea typeface="Pretendard" pitchFamily="34" charset="-122"/>
-                          <a:cs typeface="Pretendard" pitchFamily="34" charset="-120"/>
-                        </a:rPr>
-                        <a:t>베이스라인 초과. 95% 신뢰구간 병기</a:t>
-                      </a:r>
-                      <a:endParaRPr lang="ko-KR" sz="1300" dirty="0">
+                        <a:t>모든 패턴 recall 0.50 이상, 베이스라인 초과</a:t>
+                      </a:r>
+                      <a:endParaRPr lang="ko-KR" sz="1350" dirty="0">
                         <a:latin typeface="Pretendard" charset="0"/>
                         <a:ea typeface="Pretendard" charset="0"/>
                         <a:cs typeface="Pretendard" charset="0"/>
@@ -5135,12 +4359,12 @@
         </p:nvSpPr>
         <p:spPr>
           <a:xfrm>
-            <a:off x="640080" y="5532120"/>
-            <a:ext cx="5577840" cy="749808"/>
+            <a:off x="640080" y="5166360"/>
+            <a:ext cx="4937760" cy="777240"/>
           </a:xfrm>
           <a:prstGeom prst="roundRect">
             <a:avLst>
-              <a:gd name="adj" fmla="val 6098"/>
+              <a:gd name="adj" fmla="val 5882"/>
             </a:avLst>
           </a:prstGeom>
           <a:solidFill>
@@ -5169,18 +4393,18 @@
           </p:nvPr>
         </p:nvGraphicFramePr>
         <p:xfrm>
-          <a:off x="749808" y="5586984"/>
-          <a:ext cx="5358384" cy="914400"/>
+          <a:off x="749808" y="5230368"/>
+          <a:ext cx="4718304" cy="914400"/>
         </p:xfrm>
         <a:graphic>
           <a:graphicData uri="http://schemas.openxmlformats.org/drawingml/2006/table">
             <a:tbl>
               <a:tblPr/>
               <a:tblGrid>
-                <a:gridCol w="914400"/>
-                <a:gridCol w="4443984"/>
+                <a:gridCol w="960120"/>
+                <a:gridCol w="3758184"/>
               </a:tblGrid>
-              <a:tr h="237744">
+              <a:tr h="246888">
                 <a:tc>
                   <a:txBody>
                     <a:bodyPr/>
@@ -5190,7 +4414,7 @@
                         <a:buNone/>
                       </a:pPr>
                       <a:r>
-                        <a:rPr lang="ko-KR" sz="1100" b="1" dirty="0">
+                        <a:rPr lang="ko-KR" sz="1150" b="1" dirty="0">
                           <a:solidFill>
                             <a:srgbClr val="52514E"/>
                           </a:solidFill>
@@ -5200,7 +4424,7 @@
                         </a:rPr>
                         <a:t>Claude Code</a:t>
                       </a:r>
-                      <a:endParaRPr lang="ko-KR" sz="1100" dirty="0">
+                      <a:endParaRPr lang="ko-KR" sz="1150" dirty="0">
                         <a:latin typeface="Pretendard" charset="0"/>
                         <a:ea typeface="Pretendard" charset="0"/>
                         <a:cs typeface="Pretendard" charset="0"/>
@@ -5234,7 +4458,7 @@
                         <a:buNone/>
                       </a:pPr>
                       <a:r>
-                        <a:rPr lang="ko-KR" sz="1100" dirty="0">
+                        <a:rPr lang="ko-KR" sz="1150" dirty="0">
                           <a:solidFill>
                             <a:srgbClr val="52514E"/>
                           </a:solidFill>
@@ -5242,9 +4466,24 @@
                           <a:ea typeface="Pretendard" pitchFamily="34" charset="-122"/>
                           <a:cs typeface="Pretendard" pitchFamily="34" charset="-120"/>
                         </a:rPr>
-                        <a:t>탐색·정제·분할 스크립트 3개 구현, 이상점 탐색 에이전트 10개 병렬 실행</a:t>
-                      </a:r>
-                      <a:endParaRPr lang="ko-KR" sz="1100" dirty="0">
+                        <a:t>탐색·분할 스크립트 구현,</a:t>
+                      </a:r>
+                      <a:br/>
+                      <a:pPr latinLnBrk="0" indent="0" marL="0">
+                        <a:buNone/>
+                      </a:pPr>
+                      <a:r>
+                        <a:rPr lang="ko-KR" sz="1150" dirty="0">
+                          <a:solidFill>
+                            <a:srgbClr val="52514E"/>
+                          </a:solidFill>
+                          <a:latin typeface="Pretendard" pitchFamily="34" charset="0"/>
+                          <a:ea typeface="Pretendard" pitchFamily="34" charset="-122"/>
+                          <a:cs typeface="Pretendard" pitchFamily="34" charset="-120"/>
+                        </a:rPr>
+                        <a:t>이상점 탐색 에이전트 10개 병렬 실행</a:t>
+                      </a:r>
+                      <a:endParaRPr lang="ko-KR" sz="1150" dirty="0">
                         <a:latin typeface="Pretendard" charset="0"/>
                         <a:ea typeface="Pretendard" charset="0"/>
                         <a:cs typeface="Pretendard" charset="0"/>
@@ -5270,7 +4509,7 @@
                   </a:tcPr>
                 </a:tc>
               </a:tr>
-              <a:tr h="237744">
+              <a:tr h="246888">
                 <a:tc>
                   <a:txBody>
                     <a:bodyPr/>
@@ -5280,7 +4519,7 @@
                         <a:buNone/>
                       </a:pPr>
                       <a:r>
-                        <a:rPr lang="ko-KR" sz="1100" b="1" dirty="0">
+                        <a:rPr lang="ko-KR" sz="1150" b="1" dirty="0">
                           <a:solidFill>
                             <a:srgbClr val="52514E"/>
                           </a:solidFill>
@@ -5290,7 +4529,7 @@
                         </a:rPr>
                         <a:t>본인</a:t>
                       </a:r>
-                      <a:endParaRPr lang="ko-KR" sz="1100" dirty="0">
+                      <a:endParaRPr lang="ko-KR" sz="1150" dirty="0">
                         <a:latin typeface="Pretendard" charset="0"/>
                         <a:ea typeface="Pretendard" charset="0"/>
                         <a:cs typeface="Pretendard" charset="0"/>
@@ -5324,7 +4563,7 @@
                         <a:buNone/>
                       </a:pPr>
                       <a:r>
-                        <a:rPr lang="ko-KR" sz="1100" dirty="0">
+                        <a:rPr lang="ko-KR" sz="1150" dirty="0">
                           <a:solidFill>
                             <a:srgbClr val="52514E"/>
                           </a:solidFill>
@@ -5332,24 +4571,9 @@
                           <a:ea typeface="Pretendard" pitchFamily="34" charset="-122"/>
                           <a:cs typeface="Pretendard" pitchFamily="34" charset="-120"/>
                         </a:rPr>
-                        <a:t>정제 규칙, 분할 방식, 성공 기준 결정(판단 지점 6·7).</a:t>
-                      </a:r>
-                      <a:br/>
-                      <a:pPr latinLnBrk="0" indent="0" marL="0">
-                        <a:buNone/>
-                      </a:pPr>
-                      <a:r>
-                        <a:rPr lang="ko-KR" sz="1100" dirty="0">
-                          <a:solidFill>
-                            <a:srgbClr val="52514E"/>
-                          </a:solidFill>
-                          <a:latin typeface="Pretendard" pitchFamily="34" charset="0"/>
-                          <a:ea typeface="Pretendard" pitchFamily="34" charset="-122"/>
-                          <a:cs typeface="Pretendard" pitchFamily="34" charset="-120"/>
-                        </a:rPr>
-                        <a:t>라벨 없는 638,507장 제외 결정</a:t>
-                      </a:r>
-                      <a:endParaRPr lang="ko-KR" sz="1100" dirty="0">
+                        <a:t>정제 규칙·분할 방식·성공 기준 결정(판단 지점 6·7)</a:t>
+                      </a:r>
+                      <a:endParaRPr lang="ko-KR" sz="1150" dirty="0">
                         <a:latin typeface="Pretendard" charset="0"/>
                         <a:ea typeface="Pretendard" charset="0"/>
                         <a:cs typeface="Pretendard" charset="0"/>
@@ -5395,8 +4619,8 @@
         </p:blipFill>
         <p:spPr>
           <a:xfrm>
-            <a:off x="6446520" y="2148840"/>
-            <a:ext cx="5120640" cy="2651760"/>
+            <a:off x="5852160" y="2103120"/>
+            <a:ext cx="5715000" cy="2926080"/>
           </a:xfrm>
           <a:prstGeom prst="rect">
             <a:avLst/>
@@ -5419,8 +4643,8 @@
         </p:blipFill>
         <p:spPr>
           <a:xfrm>
-            <a:off x="6446520" y="4892040"/>
-            <a:ext cx="5120640" cy="1417320"/>
+            <a:off x="5852160" y="4800600"/>
+            <a:ext cx="5715000" cy="1554480"/>
           </a:xfrm>
           <a:prstGeom prst="rect">
             <a:avLst/>
@@ -5591,7 +4815,7 @@
                 <a:ea typeface="Pretendard SemiBold" pitchFamily="34" charset="-122"/>
                 <a:cs typeface="Pretendard SemiBold" pitchFamily="34" charset="-120"/>
               </a:rPr>
-              <a:t>베이스라인과 CNN 구현은 AI에 맡기고, 개선 방향(맵을 직접 보는 소형 CNN + val 보정)과</a:t>
+              <a:t>구현은 AI에 맡기고 개선 방향과 채택 기준은 제가 정했습니다.</a:t>
             </a:r>
             <a:br/>
             <a:pPr latinLnBrk="0" indent="0" marL="0">
@@ -5609,7 +4833,7 @@
                 <a:ea typeface="Pretendard SemiBold" pitchFamily="34" charset="-122"/>
                 <a:cs typeface="Pretendard SemiBold" pitchFamily="34" charset="-120"/>
               </a:rPr>
-              <a:t>채택 기준은 제가 정했습니다. 같은 test 25,444장에서 macro-F1 0.843 → 0.909.</a:t>
+              <a:t>같은 test 25,444장에서 macro-F1 0.843 → 0.909.</a:t>
             </a:r>
             <a:endParaRPr lang="ko-KR" sz="1800" dirty="0"/>
           </a:p>
@@ -5648,7 +4872,7 @@
                 <a:ea typeface="Pretendard" pitchFamily="34" charset="-122"/>
                 <a:cs typeface="Pretendard" pitchFamily="34" charset="-120"/>
               </a:rPr>
-              <a:t>근거: scripts/baseline.py, train_cnn.py, evaluate_cnn.py → outputs/baseline/results.json, outputs/cnn/results.json. 신뢰구간은 연결 성분 부트스트랩 1,000회</a:t>
+              <a:t>근거: outputs/baseline/results.json, outputs/cnn/results.json. 신뢰구간은 연결 성분 부트스트랩 1,000회</a:t>
             </a:r>
             <a:endParaRPr lang="ko-KR" sz="1000" dirty="0"/>
           </a:p>
@@ -5709,18 +4933,18 @@
         </p:nvGraphicFramePr>
         <p:xfrm>
           <a:off x="640080" y="2148840"/>
-          <a:ext cx="5669280" cy="914400"/>
+          <a:ext cx="5120640" cy="914400"/>
         </p:xfrm>
         <a:graphic>
           <a:graphicData uri="http://schemas.openxmlformats.org/drawingml/2006/table">
             <a:tbl>
               <a:tblPr/>
               <a:tblGrid>
-                <a:gridCol w="2651760"/>
+                <a:gridCol w="2103120"/>
                 <a:gridCol w="1874520"/>
                 <a:gridCol w="1143000"/>
               </a:tblGrid>
-              <a:tr h="329184">
+              <a:tr h="365760">
                 <a:tc>
                   <a:txBody>
                     <a:bodyPr/>
@@ -5926,7 +5150,7 @@
                   </a:tcPr>
                 </a:tc>
               </a:tr>
-              <a:tr h="329184">
+              <a:tr h="365760">
                 <a:tc>
                   <a:txBody>
                     <a:bodyPr/>
@@ -5944,7 +5168,7 @@
                           <a:ea typeface="Pretendard" pitchFamily="34" charset="-122"/>
                           <a:cs typeface="Pretendard" pitchFamily="34" charset="-120"/>
                         </a:rPr>
-                        <a:t>베이스라인: 특징 23개 + 랜덤 포레스트</a:t>
+                        <a:t>베이스라인 (특징 23개 + RF)</a:t>
                       </a:r>
                       <a:endParaRPr lang="ko-KR" sz="1200" dirty="0">
                         <a:latin typeface="Pretendard" charset="0"/>
@@ -6132,7 +5356,7 @@
                   </a:tcPr>
                 </a:tc>
               </a:tr>
-              <a:tr h="329184">
+              <a:tr h="365760">
                 <a:tc>
                   <a:txBody>
                     <a:bodyPr/>
@@ -6150,7 +5374,7 @@
                           <a:ea typeface="Pretendard" pitchFamily="34" charset="-122"/>
                           <a:cs typeface="Pretendard" pitchFamily="34" charset="-120"/>
                         </a:rPr>
-                        <a:t>소형 CNN, CE</a:t>
+                        <a:t>소형 CNN</a:t>
                       </a:r>
                       <a:endParaRPr lang="ko-KR" sz="1200" dirty="0">
                         <a:latin typeface="Pretendard" charset="0"/>
@@ -6338,7 +5562,7 @@
                   </a:tcPr>
                 </a:tc>
               </a:tr>
-              <a:tr h="329184">
+              <a:tr h="365760">
                 <a:tc>
                   <a:txBody>
                     <a:bodyPr/>
@@ -6356,7 +5580,7 @@
                           <a:ea typeface="Pretendard" pitchFamily="34" charset="-122"/>
                           <a:cs typeface="Pretendard" pitchFamily="34" charset="-120"/>
                         </a:rPr>
-                        <a:t>소형 CNN, CE + val 보정 (최종)</a:t>
+                        <a:t>소형 CNN + val 보정 (최종)</a:t>
                       </a:r>
                       <a:endParaRPr lang="ko-KR" sz="1200" dirty="0">
                         <a:latin typeface="Pretendard" charset="0"/>
@@ -6563,18 +5787,18 @@
           </p:nvPr>
         </p:nvGraphicFramePr>
         <p:xfrm>
-          <a:off x="640080" y="3584448"/>
-          <a:ext cx="5669280" cy="914400"/>
+          <a:off x="640080" y="3886200"/>
+          <a:ext cx="5120640" cy="914400"/>
         </p:xfrm>
         <a:graphic>
           <a:graphicData uri="http://schemas.openxmlformats.org/drawingml/2006/table">
             <a:tbl>
               <a:tblPr/>
               <a:tblGrid>
-                <a:gridCol w="1188720"/>
-                <a:gridCol w="4480560"/>
+                <a:gridCol w="1280160"/>
+                <a:gridCol w="3840480"/>
               </a:tblGrid>
-              <a:tr h="274320">
+              <a:tr h="310896">
                 <a:tc>
                   <a:txBody>
                     <a:bodyPr/>
@@ -6584,7 +5808,7 @@
                         <a:buNone/>
                       </a:pPr>
                       <a:r>
-                        <a:rPr lang="ko-KR" sz="1250" b="1" dirty="0">
+                        <a:rPr lang="ko-KR" sz="1350" b="1" dirty="0">
                           <a:solidFill>
                             <a:srgbClr val="0B0B0B"/>
                           </a:solidFill>
@@ -6592,9 +5816,9 @@
                           <a:ea typeface="Pretendard" pitchFamily="34" charset="-122"/>
                           <a:cs typeface="Pretendard" pitchFamily="34" charset="-120"/>
                         </a:rPr>
-                        <a:t>입력</a:t>
-                      </a:r>
-                      <a:endParaRPr lang="ko-KR" sz="1250" dirty="0">
+                        <a:t>방법</a:t>
+                      </a:r>
+                      <a:endParaRPr lang="ko-KR" sz="1350" dirty="0">
                         <a:latin typeface="Pretendard" charset="0"/>
                         <a:ea typeface="Pretendard" charset="0"/>
                         <a:cs typeface="Pretendard" charset="0"/>
@@ -6628,7 +5852,7 @@
                         <a:buNone/>
                       </a:pPr>
                       <a:r>
-                        <a:rPr lang="ko-KR" sz="1250" dirty="0">
+                        <a:rPr lang="ko-KR" sz="1350" dirty="0">
                           <a:solidFill>
                             <a:srgbClr val="0B0B0B"/>
                           </a:solidFill>
@@ -6636,14 +5860,14 @@
                           <a:ea typeface="Pretendard" pitchFamily="34" charset="-122"/>
                           <a:cs typeface="Pretendard" pitchFamily="34" charset="-120"/>
                         </a:rPr>
-                        <a:t>64×64로 축소. 축소할 때 블록 최대값을 써서</a:t>
+                        <a:t>64×64 축소(블록 최대값으로 Scratch 보존),</a:t>
                       </a:r>
                       <a:br/>
                       <a:pPr latinLnBrk="0" indent="0" marL="0">
                         <a:buNone/>
                       </a:pPr>
                       <a:r>
-                        <a:rPr lang="ko-KR" sz="1250" dirty="0">
+                        <a:rPr lang="ko-KR" sz="1350" dirty="0">
                           <a:solidFill>
                             <a:srgbClr val="0B0B0B"/>
                           </a:solidFill>
@@ -6651,9 +5875,24 @@
                           <a:ea typeface="Pretendard" pitchFamily="34" charset="-122"/>
                           <a:cs typeface="Pretendard" pitchFamily="34" charset="-120"/>
                         </a:rPr>
-                        <a:t>1다이 폭 Scratch를 남김. 반전·회전 8종 증강</a:t>
-                      </a:r>
-                      <a:endParaRPr lang="ko-KR" sz="1250" dirty="0">
+                        <a:t>반전·회전 증강, 합성곱 4블록 58만 파라미터.</a:t>
+                      </a:r>
+                      <a:br/>
+                      <a:pPr latinLnBrk="0" indent="0" marL="0">
+                        <a:buNone/>
+                      </a:pPr>
+                      <a:r>
+                        <a:rPr lang="ko-KR" sz="1350" dirty="0">
+                          <a:solidFill>
+                            <a:srgbClr val="0B0B0B"/>
+                          </a:solidFill>
+                          <a:latin typeface="Pretendard" pitchFamily="34" charset="0"/>
+                          <a:ea typeface="Pretendard" pitchFamily="34" charset="-122"/>
+                          <a:cs typeface="Pretendard" pitchFamily="34" charset="-120"/>
+                        </a:rPr>
+                        <a:t>보정값은 val에서만 정함</a:t>
+                      </a:r>
+                      <a:endParaRPr lang="ko-KR" sz="1350" dirty="0">
                         <a:latin typeface="Pretendard" charset="0"/>
                         <a:ea typeface="Pretendard" charset="0"/>
                         <a:cs typeface="Pretendard" charset="0"/>
@@ -6679,7 +5918,7 @@
                   </a:tcPr>
                 </a:tc>
               </a:tr>
-              <a:tr h="274320">
+              <a:tr h="310896">
                 <a:tc>
                   <a:txBody>
                     <a:bodyPr/>
@@ -6689,7 +5928,7 @@
                         <a:buNone/>
                       </a:pPr>
                       <a:r>
-                        <a:rPr lang="ko-KR" sz="1250" b="1" dirty="0">
+                        <a:rPr lang="ko-KR" sz="1350" b="1" dirty="0">
                           <a:solidFill>
                             <a:srgbClr val="0B0B0B"/>
                           </a:solidFill>
@@ -6697,9 +5936,9 @@
                           <a:ea typeface="Pretendard" pitchFamily="34" charset="-122"/>
                           <a:cs typeface="Pretendard" pitchFamily="34" charset="-120"/>
                         </a:rPr>
-                        <a:t>모델</a:t>
-                      </a:r>
-                      <a:endParaRPr lang="ko-KR" sz="1250" dirty="0">
+                        <a:t>효과 없던 시도</a:t>
+                      </a:r>
+                      <a:endParaRPr lang="ko-KR" sz="1350" dirty="0">
                         <a:latin typeface="Pretendard" charset="0"/>
                         <a:ea typeface="Pretendard" charset="0"/>
                         <a:cs typeface="Pretendard" charset="0"/>
@@ -6733,7 +5972,7 @@
                         <a:buNone/>
                       </a:pPr>
                       <a:r>
-                        <a:rPr lang="ko-KR" sz="1250" dirty="0">
+                        <a:rPr lang="ko-KR" sz="1350" dirty="0">
                           <a:solidFill>
                             <a:srgbClr val="0B0B0B"/>
                           </a:solidFill>
@@ -6741,14 +5980,14 @@
                           <a:ea typeface="Pretendard" pitchFamily="34" charset="-122"/>
                           <a:cs typeface="Pretendard" pitchFamily="34" charset="-120"/>
                         </a:rPr>
-                        <a:t>합성곱 블록 4개, 파라미터 58만, CE 20 epoch(GPU 40분).</a:t>
+                        <a:t>class-weighted CE: 0.825,</a:t>
                       </a:r>
                       <a:br/>
                       <a:pPr latinLnBrk="0" indent="0" marL="0">
                         <a:buNone/>
                       </a:pPr>
                       <a:r>
-                        <a:rPr lang="ko-KR" sz="1250" dirty="0">
+                        <a:rPr lang="ko-KR" sz="1350" dirty="0">
                           <a:solidFill>
                             <a:srgbClr val="0B0B0B"/>
                           </a:solidFill>
@@ -6756,219 +5995,9 @@
                           <a:ea typeface="Pretendard" pitchFamily="34" charset="-122"/>
                           <a:cs typeface="Pretendard" pitchFamily="34" charset="-120"/>
                         </a:rPr>
-                        <a:t>패턴별 점수 보정값은 val에서만 정함</a:t>
-                      </a:r>
-                      <a:endParaRPr lang="ko-KR" sz="1250" dirty="0">
-                        <a:latin typeface="Pretendard" charset="0"/>
-                        <a:ea typeface="Pretendard" charset="0"/>
-                        <a:cs typeface="Pretendard" charset="0"/>
-                      </a:endParaRPr>
-                    </a:p>
-                  </a:txBody>
-                  <a:tcPr marL="0" marR="54864" marT="36576" marB="45720" anchor="t">
-                    <a:lnL w="0" cap="flat" cmpd="sng" algn="ctr">
-                      <a:noFill/>
-                    </a:lnL>
-                    <a:lnR w="0" cap="flat" cmpd="sng" algn="ctr">
-                      <a:noFill/>
-                    </a:lnR>
-                    <a:lnT w="0" cap="flat" cmpd="sng" algn="ctr">
-                      <a:noFill/>
-                    </a:lnT>
-                    <a:lnB w="0" cap="flat" cmpd="sng" algn="ctr">
-                      <a:noFill/>
-                    </a:lnB>
-                    <a:solidFill>
-                      <a:srgbClr val="FFFFFF"/>
-                    </a:solidFill>
-                  </a:tcPr>
-                </a:tc>
-              </a:tr>
-              <a:tr h="274320">
-                <a:tc>
-                  <a:txBody>
-                    <a:bodyPr/>
-                    <a:lstStyle/>
-                    <a:p>
-                      <a:pPr latinLnBrk="0" indent="0" marL="0">
-                        <a:buNone/>
-                      </a:pPr>
-                      <a:r>
-                        <a:rPr lang="ko-KR" sz="1250" b="1" dirty="0">
-                          <a:solidFill>
-                            <a:srgbClr val="0B0B0B"/>
-                          </a:solidFill>
-                          <a:latin typeface="Pretendard" pitchFamily="34" charset="0"/>
-                          <a:ea typeface="Pretendard" pitchFamily="34" charset="-122"/>
-                          <a:cs typeface="Pretendard" pitchFamily="34" charset="-120"/>
-                        </a:rPr>
-                        <a:t>효과 없던 시도</a:t>
-                      </a:r>
-                      <a:endParaRPr lang="ko-KR" sz="1250" dirty="0">
-                        <a:latin typeface="Pretendard" charset="0"/>
-                        <a:ea typeface="Pretendard" charset="0"/>
-                        <a:cs typeface="Pretendard" charset="0"/>
-                      </a:endParaRPr>
-                    </a:p>
-                  </a:txBody>
-                  <a:tcPr marL="0" marR="54864" marT="36576" marB="45720" anchor="t">
-                    <a:lnL w="0" cap="flat" cmpd="sng" algn="ctr">
-                      <a:noFill/>
-                    </a:lnL>
-                    <a:lnR w="0" cap="flat" cmpd="sng" algn="ctr">
-                      <a:noFill/>
-                    </a:lnR>
-                    <a:lnT w="0" cap="flat" cmpd="sng" algn="ctr">
-                      <a:noFill/>
-                    </a:lnT>
-                    <a:lnB w="0" cap="flat" cmpd="sng" algn="ctr">
-                      <a:noFill/>
-                    </a:lnB>
-                    <a:solidFill>
-                      <a:srgbClr val="FFFFFF"/>
-                    </a:solidFill>
-                  </a:tcPr>
-                </a:tc>
-                <a:tc>
-                  <a:txBody>
-                    <a:bodyPr/>
-                    <a:lstStyle/>
-                    <a:p>
-                      <a:pPr latinLnBrk="0" indent="0" marL="0">
-                        <a:buNone/>
-                      </a:pPr>
-                      <a:r>
-                        <a:rPr lang="ko-KR" sz="1250" dirty="0">
-                          <a:solidFill>
-                            <a:srgbClr val="0B0B0B"/>
-                          </a:solidFill>
-                          <a:latin typeface="Pretendard" pitchFamily="34" charset="0"/>
-                          <a:ea typeface="Pretendard" pitchFamily="34" charset="-122"/>
-                          <a:cs typeface="Pretendard" pitchFamily="34" charset="-120"/>
-                        </a:rPr>
-                        <a:t>class-weighted CE: macro-F1 0.825,</a:t>
-                      </a:r>
-                      <a:br/>
-                      <a:pPr latinLnBrk="0" indent="0" marL="0">
-                        <a:buNone/>
-                      </a:pPr>
-                      <a:r>
-                        <a:rPr lang="ko-KR" sz="1250" dirty="0">
-                          <a:solidFill>
-                            <a:srgbClr val="0B0B0B"/>
-                          </a:solidFill>
-                          <a:latin typeface="Pretendard" pitchFamily="34" charset="0"/>
-                          <a:ea typeface="Pretendard" pitchFamily="34" charset="-122"/>
-                          <a:cs typeface="Pretendard" pitchFamily="34" charset="-120"/>
-                        </a:rPr>
                         <a:t>none 오탐 증가 → 미채택</a:t>
                       </a:r>
-                      <a:endParaRPr lang="ko-KR" sz="1250" dirty="0">
-                        <a:latin typeface="Pretendard" charset="0"/>
-                        <a:ea typeface="Pretendard" charset="0"/>
-                        <a:cs typeface="Pretendard" charset="0"/>
-                      </a:endParaRPr>
-                    </a:p>
-                  </a:txBody>
-                  <a:tcPr marL="0" marR="54864" marT="36576" marB="45720" anchor="t">
-                    <a:lnL w="0" cap="flat" cmpd="sng" algn="ctr">
-                      <a:noFill/>
-                    </a:lnL>
-                    <a:lnR w="0" cap="flat" cmpd="sng" algn="ctr">
-                      <a:noFill/>
-                    </a:lnR>
-                    <a:lnT w="0" cap="flat" cmpd="sng" algn="ctr">
-                      <a:noFill/>
-                    </a:lnT>
-                    <a:lnB w="0" cap="flat" cmpd="sng" algn="ctr">
-                      <a:noFill/>
-                    </a:lnB>
-                    <a:solidFill>
-                      <a:srgbClr val="FFFFFF"/>
-                    </a:solidFill>
-                  </a:tcPr>
-                </a:tc>
-              </a:tr>
-              <a:tr h="274320">
-                <a:tc>
-                  <a:txBody>
-                    <a:bodyPr/>
-                    <a:lstStyle/>
-                    <a:p>
-                      <a:pPr latinLnBrk="0" indent="0" marL="0">
-                        <a:buNone/>
-                      </a:pPr>
-                      <a:r>
-                        <a:rPr lang="ko-KR" sz="1250" b="1" dirty="0">
-                          <a:solidFill>
-                            <a:srgbClr val="0B0B0B"/>
-                          </a:solidFill>
-                          <a:latin typeface="Pretendard" pitchFamily="34" charset="0"/>
-                          <a:ea typeface="Pretendard" pitchFamily="34" charset="-122"/>
-                          <a:cs typeface="Pretendard" pitchFamily="34" charset="-120"/>
-                        </a:rPr>
-                        <a:t>용도</a:t>
-                      </a:r>
-                      <a:endParaRPr lang="ko-KR" sz="1250" dirty="0">
-                        <a:latin typeface="Pretendard" charset="0"/>
-                        <a:ea typeface="Pretendard" charset="0"/>
-                        <a:cs typeface="Pretendard" charset="0"/>
-                      </a:endParaRPr>
-                    </a:p>
-                  </a:txBody>
-                  <a:tcPr marL="0" marR="54864" marT="36576" marB="45720" anchor="t">
-                    <a:lnL w="0" cap="flat" cmpd="sng" algn="ctr">
-                      <a:noFill/>
-                    </a:lnL>
-                    <a:lnR w="0" cap="flat" cmpd="sng" algn="ctr">
-                      <a:noFill/>
-                    </a:lnR>
-                    <a:lnT w="0" cap="flat" cmpd="sng" algn="ctr">
-                      <a:noFill/>
-                    </a:lnT>
-                    <a:lnB w="0" cap="flat" cmpd="sng" algn="ctr">
-                      <a:noFill/>
-                    </a:lnB>
-                    <a:solidFill>
-                      <a:srgbClr val="FFFFFF"/>
-                    </a:solidFill>
-                  </a:tcPr>
-                </a:tc>
-                <a:tc>
-                  <a:txBody>
-                    <a:bodyPr/>
-                    <a:lstStyle/>
-                    <a:p>
-                      <a:pPr latinLnBrk="0" indent="0" marL="0">
-                        <a:buNone/>
-                      </a:pPr>
-                      <a:r>
-                        <a:rPr lang="ko-KR" sz="1250" dirty="0">
-                          <a:solidFill>
-                            <a:srgbClr val="0B0B0B"/>
-                          </a:solidFill>
-                          <a:latin typeface="Pretendard" pitchFamily="34" charset="0"/>
-                          <a:ea typeface="Pretendard" pitchFamily="34" charset="-122"/>
-                          <a:cs typeface="Pretendard" pitchFamily="34" charset="-120"/>
-                        </a:rPr>
-                        <a:t>엔지니어가 어떤 웨이퍼를 먼저 볼지 정하는 1차 분류 보조.</a:t>
-                      </a:r>
-                      <a:br/>
-                      <a:pPr latinLnBrk="0" indent="0" marL="0">
-                        <a:buNone/>
-                      </a:pPr>
-                      <a:r>
-                        <a:rPr lang="ko-KR" sz="1250" dirty="0">
-                          <a:solidFill>
-                            <a:srgbClr val="0B0B0B"/>
-                          </a:solidFill>
-                          <a:latin typeface="Pretendard" pitchFamily="34" charset="0"/>
-                          <a:ea typeface="Pretendard" pitchFamily="34" charset="-122"/>
-                          <a:cs typeface="Pretendard" pitchFamily="34" charset="-120"/>
-                        </a:rPr>
-                        <a:t>자동 폐기 판정에는 부적합</a:t>
-                      </a:r>
-                      <a:endParaRPr lang="ko-KR" sz="1250" dirty="0">
+                      <a:endParaRPr lang="ko-KR" sz="1350" dirty="0">
                         <a:latin typeface="Pretendard" charset="0"/>
                         <a:ea typeface="Pretendard" charset="0"/>
                         <a:cs typeface="Pretendard" charset="0"/>
@@ -7006,12 +6035,12 @@
         </p:nvSpPr>
         <p:spPr>
           <a:xfrm>
-            <a:off x="640080" y="5468112"/>
-            <a:ext cx="5669280" cy="868680"/>
+            <a:off x="640080" y="5394960"/>
+            <a:ext cx="5120640" cy="777240"/>
           </a:xfrm>
           <a:prstGeom prst="roundRect">
             <a:avLst>
-              <a:gd name="adj" fmla="val 5263"/>
+              <a:gd name="adj" fmla="val 5882"/>
             </a:avLst>
           </a:prstGeom>
           <a:solidFill>
@@ -7040,18 +6069,18 @@
           </p:nvPr>
         </p:nvGraphicFramePr>
         <p:xfrm>
-          <a:off x="749808" y="5522976"/>
-          <a:ext cx="5449824" cy="914400"/>
+          <a:off x="749808" y="5458968"/>
+          <a:ext cx="4901184" cy="914400"/>
         </p:xfrm>
         <a:graphic>
           <a:graphicData uri="http://schemas.openxmlformats.org/drawingml/2006/table">
             <a:tbl>
               <a:tblPr/>
               <a:tblGrid>
-                <a:gridCol w="914400"/>
-                <a:gridCol w="4535424"/>
+                <a:gridCol w="960120"/>
+                <a:gridCol w="3941064"/>
               </a:tblGrid>
-              <a:tr h="237744">
+              <a:tr h="246888">
                 <a:tc>
                   <a:txBody>
                     <a:bodyPr/>
@@ -7061,7 +6090,7 @@
                         <a:buNone/>
                       </a:pPr>
                       <a:r>
-                        <a:rPr lang="ko-KR" sz="1050" b="1" dirty="0">
+                        <a:rPr lang="ko-KR" sz="1150" b="1" dirty="0">
                           <a:solidFill>
                             <a:srgbClr val="52514E"/>
                           </a:solidFill>
@@ -7071,7 +6100,7 @@
                         </a:rPr>
                         <a:t>Claude Code</a:t>
                       </a:r>
-                      <a:endParaRPr lang="ko-KR" sz="1050" dirty="0">
+                      <a:endParaRPr lang="ko-KR" sz="1150" dirty="0">
                         <a:latin typeface="Pretendard" charset="0"/>
                         <a:ea typeface="Pretendard" charset="0"/>
                         <a:cs typeface="Pretendard" charset="0"/>
@@ -7105,7 +6134,7 @@
                         <a:buNone/>
                       </a:pPr>
                       <a:r>
-                        <a:rPr lang="ko-KR" sz="1050" dirty="0">
+                        <a:rPr lang="ko-KR" sz="1150" dirty="0">
                           <a:solidFill>
                             <a:srgbClr val="52514E"/>
                           </a:solidFill>
@@ -7113,24 +6142,9 @@
                           <a:ea typeface="Pretendard" pitchFamily="34" charset="-122"/>
                           <a:cs typeface="Pretendard" pitchFamily="34" charset="-120"/>
                         </a:rPr>
-                        <a:t>특징 23개·랜덤 포레스트·CNN 구현, 학습 5회(CE,</a:t>
-                      </a:r>
-                      <a:br/>
-                      <a:pPr latinLnBrk="0" indent="0" marL="0">
-                        <a:buNone/>
-                      </a:pPr>
-                      <a:r>
-                        <a:rPr lang="ko-KR" sz="1050" dirty="0">
-                          <a:solidFill>
-                            <a:srgbClr val="52514E"/>
-                          </a:solidFill>
-                          <a:latin typeface="Pretendard" pitchFamily="34" charset="0"/>
-                          <a:ea typeface="Pretendard" pitchFamily="34" charset="-122"/>
-                          <a:cs typeface="Pretendard" pitchFamily="34" charset="-120"/>
-                        </a:rPr>
-                        <a:t>weighted CE, 셔플 라벨, 무작위 분할, 재학습)</a:t>
-                      </a:r>
-                      <a:endParaRPr lang="ko-KR" sz="1050" dirty="0">
+                        <a:t>특징 23개·RF·CNN 구현, 학습 5회</a:t>
+                      </a:r>
+                      <a:endParaRPr lang="ko-KR" sz="1150" dirty="0">
                         <a:latin typeface="Pretendard" charset="0"/>
                         <a:ea typeface="Pretendard" charset="0"/>
                         <a:cs typeface="Pretendard" charset="0"/>
@@ -7156,7 +6170,7 @@
                   </a:tcPr>
                 </a:tc>
               </a:tr>
-              <a:tr h="237744">
+              <a:tr h="246888">
                 <a:tc>
                   <a:txBody>
                     <a:bodyPr/>
@@ -7166,7 +6180,7 @@
                         <a:buNone/>
                       </a:pPr>
                       <a:r>
-                        <a:rPr lang="ko-KR" sz="1050" b="1" dirty="0">
+                        <a:rPr lang="ko-KR" sz="1150" b="1" dirty="0">
                           <a:solidFill>
                             <a:srgbClr val="52514E"/>
                           </a:solidFill>
@@ -7176,7 +6190,7 @@
                         </a:rPr>
                         <a:t>본인</a:t>
                       </a:r>
-                      <a:endParaRPr lang="ko-KR" sz="1050" dirty="0">
+                      <a:endParaRPr lang="ko-KR" sz="1150" dirty="0">
                         <a:latin typeface="Pretendard" charset="0"/>
                         <a:ea typeface="Pretendard" charset="0"/>
                         <a:cs typeface="Pretendard" charset="0"/>
@@ -7210,7 +6224,7 @@
                         <a:buNone/>
                       </a:pPr>
                       <a:r>
-                        <a:rPr lang="ko-KR" sz="1050" dirty="0">
+                        <a:rPr lang="ko-KR" sz="1150" dirty="0">
                           <a:solidFill>
                             <a:srgbClr val="52514E"/>
                           </a:solidFill>
@@ -7225,7 +6239,7 @@
                         <a:buNone/>
                       </a:pPr>
                       <a:r>
-                        <a:rPr lang="ko-KR" sz="1050" dirty="0">
+                        <a:rPr lang="ko-KR" sz="1150" dirty="0">
                           <a:solidFill>
                             <a:srgbClr val="52514E"/>
                           </a:solidFill>
@@ -7233,9 +6247,9 @@
                           <a:ea typeface="Pretendard" pitchFamily="34" charset="-122"/>
                           <a:cs typeface="Pretendard" pitchFamily="34" charset="-120"/>
                         </a:rPr>
-                        <a:t>weighted CE 폐기와 val 보정 채택(판단 지점 10)</a:t>
-                      </a:r>
-                      <a:endParaRPr lang="ko-KR" sz="1050" dirty="0">
+                        <a:t>weighted CE 폐기(판단 지점 10)</a:t>
+                      </a:r>
+                      <a:endParaRPr lang="ko-KR" sz="1150" dirty="0">
                         <a:latin typeface="Pretendard" charset="0"/>
                         <a:ea typeface="Pretendard" charset="0"/>
                         <a:cs typeface="Pretendard" charset="0"/>
@@ -7281,8 +6295,8 @@
         </p:blipFill>
         <p:spPr>
           <a:xfrm>
-            <a:off x="6446520" y="2148840"/>
-            <a:ext cx="5120640" cy="4023360"/>
+            <a:off x="6035040" y="2103120"/>
+            <a:ext cx="5532120" cy="4069080"/>
           </a:xfrm>
           <a:prstGeom prst="rect">
             <a:avLst/>
@@ -7453,25 +6467,7 @@
                 <a:ea typeface="Pretendard SemiBold" pitchFamily="34" charset="-122"/>
                 <a:cs typeface="Pretendard SemiBold" pitchFamily="34" charset="-120"/>
               </a:rPr>
-              <a:t>점수가 예상보다 높게 나오자 검증 에이전트 4개를 병렬로 돌리고 개입 실험을 시켰습니다.</a:t>
-            </a:r>
-            <a:br/>
-            <a:pPr latinLnBrk="0" indent="0" marL="0">
-              <a:lnSpc>
-                <a:spcPts val="2600"/>
-              </a:lnSpc>
-              <a:buNone/>
-            </a:pPr>
-            <a:r>
-              <a:rPr lang="ko-KR" sz="1800" dirty="0">
-                <a:solidFill>
-                  <a:srgbClr val="1F4E9A"/>
-                </a:solidFill>
-                <a:latin typeface="Pretendard SemiBold" pitchFamily="34" charset="0"/>
-                <a:ea typeface="Pretendard SemiBold" pitchFamily="34" charset="-122"/>
-                <a:cs typeface="Pretendard SemiBold" pitchFamily="34" charset="-120"/>
-              </a:rPr>
-              <a:t>그 과정에서 분할 절차의 오류 하나를 잡아 고쳤습니다.</a:t>
+              <a:t>점수가 예상보다 높게 나오자 검증 에이전트 4개와 개입 실험을 돌렸고, 분할 절차의 오류 하나를 잡아 고쳤습니다.</a:t>
             </a:r>
             <a:endParaRPr lang="ko-KR" sz="1800" dirty="0"/>
           </a:p>
@@ -7510,7 +6506,7 @@
                 <a:ea typeface="Pretendard" pitchFamily="34" charset="-122"/>
                 <a:cs typeface="Pretendard" pitchFamily="34" charset="-120"/>
               </a:rPr>
-              <a:t>근거: outputs/splits/split_seed_variance.json, outputs/cnn/outline_intervention.json, scripts/compare_reproduction.py, LOG.md 오류 기록 E11</a:t>
+              <a:t>근거: outputs/splits/split_seed_variance.json, outputs/cnn/outline_intervention.json, LOG.md 오류 E11</a:t>
             </a:r>
             <a:endParaRPr lang="ko-KR" sz="1000" dirty="0"/>
           </a:p>
@@ -7571,16 +6567,16 @@
         </p:nvGraphicFramePr>
         <p:xfrm>
           <a:off x="640080" y="2148840"/>
-          <a:ext cx="5943600" cy="914400"/>
+          <a:ext cx="5486400" cy="914400"/>
         </p:xfrm>
         <a:graphic>
           <a:graphicData uri="http://schemas.openxmlformats.org/drawingml/2006/table">
             <a:tbl>
               <a:tblPr/>
               <a:tblGrid>
-                <a:gridCol w="1234440"/>
-                <a:gridCol w="2606040"/>
-                <a:gridCol w="2103120"/>
+                <a:gridCol w="1325880"/>
+                <a:gridCol w="2423160"/>
+                <a:gridCol w="1737360"/>
               </a:tblGrid>
               <a:tr h="420624">
                 <a:tc>
@@ -7592,7 +6588,7 @@
                         <a:buNone/>
                       </a:pPr>
                       <a:r>
-                        <a:rPr lang="ko-KR" sz="1200" b="1" dirty="0">
+                        <a:rPr lang="ko-KR" sz="1250" b="1" dirty="0">
                           <a:solidFill>
                             <a:srgbClr val="0B0B0B"/>
                           </a:solidFill>
@@ -7602,7 +6598,7 @@
                         </a:rPr>
                         <a:t>검증</a:t>
                       </a:r>
-                      <a:endParaRPr lang="ko-KR" sz="1200" dirty="0">
+                      <a:endParaRPr lang="ko-KR" sz="1250" dirty="0">
                         <a:latin typeface="Pretendard" charset="0"/>
                         <a:ea typeface="Pretendard" charset="0"/>
                         <a:cs typeface="Pretendard" charset="0"/>
@@ -7660,7 +6656,7 @@
                         <a:buNone/>
                       </a:pPr>
                       <a:r>
-                        <a:rPr lang="ko-KR" sz="1200" b="1" dirty="0">
+                        <a:rPr lang="ko-KR" sz="1250" b="1" dirty="0">
                           <a:solidFill>
                             <a:srgbClr val="0B0B0B"/>
                           </a:solidFill>
@@ -7670,7 +6666,7 @@
                         </a:rPr>
                         <a:t>방법</a:t>
                       </a:r>
-                      <a:endParaRPr lang="ko-KR" sz="1200" dirty="0">
+                      <a:endParaRPr lang="ko-KR" sz="1250" dirty="0">
                         <a:latin typeface="Pretendard" charset="0"/>
                         <a:ea typeface="Pretendard" charset="0"/>
                         <a:cs typeface="Pretendard" charset="0"/>
@@ -7728,7 +6724,7 @@
                         <a:buNone/>
                       </a:pPr>
                       <a:r>
-                        <a:rPr lang="ko-KR" sz="1200" b="1" dirty="0">
+                        <a:rPr lang="ko-KR" sz="1250" b="1" dirty="0">
                           <a:solidFill>
                             <a:srgbClr val="0B0B0B"/>
                           </a:solidFill>
@@ -7738,7 +6734,7 @@
                         </a:rPr>
                         <a:t>결과</a:t>
                       </a:r>
-                      <a:endParaRPr lang="ko-KR" sz="1200" dirty="0">
+                      <a:endParaRPr lang="ko-KR" sz="1250" dirty="0">
                         <a:latin typeface="Pretendard" charset="0"/>
                         <a:ea typeface="Pretendard" charset="0"/>
                         <a:cs typeface="Pretendard" charset="0"/>
@@ -7798,7 +6794,7 @@
                         <a:buNone/>
                       </a:pPr>
                       <a:r>
-                        <a:rPr lang="ko-KR" sz="1200" dirty="0">
+                        <a:rPr lang="ko-KR" sz="1250" dirty="0">
                           <a:solidFill>
                             <a:srgbClr val="0B0B0B"/>
                           </a:solidFill>
@@ -7808,7 +6804,7 @@
                         </a:rPr>
                         <a:t>우연 수준</a:t>
                       </a:r>
-                      <a:endParaRPr lang="ko-KR" sz="1200" dirty="0">
+                      <a:endParaRPr lang="ko-KR" sz="1250" dirty="0">
                         <a:latin typeface="Pretendard" charset="0"/>
                         <a:ea typeface="Pretendard" charset="0"/>
                         <a:cs typeface="Pretendard" charset="0"/>
@@ -7866,7 +6862,7 @@
                         <a:buNone/>
                       </a:pPr>
                       <a:r>
-                        <a:rPr lang="ko-KR" sz="1200" dirty="0">
+                        <a:rPr lang="ko-KR" sz="1250" dirty="0">
                           <a:solidFill>
                             <a:srgbClr val="0B0B0B"/>
                           </a:solidFill>
@@ -7874,9 +6870,9 @@
                           <a:ea typeface="Pretendard" pitchFamily="34" charset="-122"/>
                           <a:cs typeface="Pretendard" pitchFamily="34" charset="-120"/>
                         </a:rPr>
-                        <a:t>라벨을 섞어 같은 CNN 학습</a:t>
-                      </a:r>
-                      <a:endParaRPr lang="ko-KR" sz="1200" dirty="0">
+                        <a:t>라벨을 섞어 학습</a:t>
+                      </a:r>
+                      <a:endParaRPr lang="ko-KR" sz="1250" dirty="0">
                         <a:latin typeface="Pretendard" charset="0"/>
                         <a:ea typeface="Pretendard" charset="0"/>
                         <a:cs typeface="Pretendard" charset="0"/>
@@ -7934,7 +6930,7 @@
                         <a:buNone/>
                       </a:pPr>
                       <a:r>
-                        <a:rPr lang="ko-KR" sz="1200" dirty="0">
+                        <a:rPr lang="ko-KR" sz="1250" dirty="0">
                           <a:solidFill>
                             <a:srgbClr val="0B0B0B"/>
                           </a:solidFill>
@@ -7942,9 +6938,9 @@
                           <a:ea typeface="Pretendard" pitchFamily="34" charset="-122"/>
                           <a:cs typeface="Pretendard" pitchFamily="34" charset="-120"/>
                         </a:rPr>
-                        <a:t>macro-F1 0.102 (우연 수준)</a:t>
-                      </a:r>
-                      <a:endParaRPr lang="ko-KR" sz="1200" dirty="0">
+                        <a:t>macro-F1 0.102</a:t>
+                      </a:r>
+                      <a:endParaRPr lang="ko-KR" sz="1250" dirty="0">
                         <a:latin typeface="Pretendard" charset="0"/>
                         <a:ea typeface="Pretendard" charset="0"/>
                         <a:cs typeface="Pretendard" charset="0"/>
@@ -8004,7 +7000,7 @@
                         <a:buNone/>
                       </a:pPr>
                       <a:r>
-                        <a:rPr lang="ko-KR" sz="1200" dirty="0">
+                        <a:rPr lang="ko-KR" sz="1250" dirty="0">
                           <a:solidFill>
                             <a:srgbClr val="0B0B0B"/>
                           </a:solidFill>
@@ -8014,7 +7010,7 @@
                         </a:rPr>
                         <a:t>누수 제거 효과</a:t>
                       </a:r>
-                      <a:endParaRPr lang="ko-KR" sz="1200" dirty="0">
+                      <a:endParaRPr lang="ko-KR" sz="1250" dirty="0">
                         <a:latin typeface="Pretendard" charset="0"/>
                         <a:ea typeface="Pretendard" charset="0"/>
                         <a:cs typeface="Pretendard" charset="0"/>
@@ -8072,7 +7068,7 @@
                         <a:buNone/>
                       </a:pPr>
                       <a:r>
-                        <a:rPr lang="ko-KR" sz="1200" dirty="0">
+                        <a:rPr lang="ko-KR" sz="1250" dirty="0">
                           <a:solidFill>
                             <a:srgbClr val="0B0B0B"/>
                           </a:solidFill>
@@ -8080,9 +7076,9 @@
                           <a:ea typeface="Pretendard" pitchFamily="34" charset="-122"/>
                           <a:cs typeface="Pretendard" pitchFamily="34" charset="-120"/>
                         </a:rPr>
-                        <a:t>무작위 분할 vs lot 분할, 같은 모델</a:t>
-                      </a:r>
-                      <a:endParaRPr lang="ko-KR" sz="1200" dirty="0">
+                        <a:t>무작위 분할 vs lot 분할</a:t>
+                      </a:r>
+                      <a:endParaRPr lang="ko-KR" sz="1250" dirty="0">
                         <a:latin typeface="Pretendard" charset="0"/>
                         <a:ea typeface="Pretendard" charset="0"/>
                         <a:cs typeface="Pretendard" charset="0"/>
@@ -8140,7 +7136,7 @@
                         <a:buNone/>
                       </a:pPr>
                       <a:r>
-                        <a:rPr lang="ko-KR" sz="1200" dirty="0">
+                        <a:rPr lang="ko-KR" sz="1250" dirty="0">
                           <a:solidFill>
                             <a:srgbClr val="0B0B0B"/>
                           </a:solidFill>
@@ -8148,9 +7144,9 @@
                           <a:ea typeface="Pretendard" pitchFamily="34" charset="-122"/>
                           <a:cs typeface="Pretendard" pitchFamily="34" charset="-120"/>
                         </a:rPr>
-                        <a:t>0.895 vs 0.909, 차이 없음</a:t>
-                      </a:r>
-                      <a:endParaRPr lang="ko-KR" sz="1200" dirty="0">
+                        <a:t>0.895 vs 0.909</a:t>
+                      </a:r>
+                      <a:endParaRPr lang="ko-KR" sz="1250" dirty="0">
                         <a:latin typeface="Pretendard" charset="0"/>
                         <a:ea typeface="Pretendard" charset="0"/>
                         <a:cs typeface="Pretendard" charset="0"/>
@@ -8210,7 +7206,7 @@
                         <a:buNone/>
                       </a:pPr>
                       <a:r>
-                        <a:rPr lang="ko-KR" sz="1200" dirty="0">
+                        <a:rPr lang="ko-KR" sz="1250" dirty="0">
                           <a:solidFill>
                             <a:srgbClr val="0B0B0B"/>
                           </a:solidFill>
@@ -8220,7 +7216,7 @@
                         </a:rPr>
                         <a:t>지름길 학습</a:t>
                       </a:r>
-                      <a:endParaRPr lang="ko-KR" sz="1200" dirty="0">
+                      <a:endParaRPr lang="ko-KR" sz="1250" dirty="0">
                         <a:latin typeface="Pretendard" charset="0"/>
                         <a:ea typeface="Pretendard" charset="0"/>
                         <a:cs typeface="Pretendard" charset="0"/>
@@ -8278,7 +7274,7 @@
                         <a:buNone/>
                       </a:pPr>
                       <a:r>
-                        <a:rPr lang="ko-KR" sz="1200" dirty="0">
+                        <a:rPr lang="ko-KR" sz="1250" dirty="0">
                           <a:solidFill>
                             <a:srgbClr val="0B0B0B"/>
                           </a:solidFill>
@@ -8286,24 +7282,9 @@
                           <a:ea typeface="Pretendard" pitchFamily="34" charset="-122"/>
                           <a:cs typeface="Pretendard" pitchFamily="34" charset="-120"/>
                         </a:rPr>
-                        <a:t>25×27 제품 외곽선을</a:t>
-                      </a:r>
-                      <a:br/>
-                      <a:pPr latinLnBrk="0" algn="l" indent="0" marL="0">
-                        <a:buNone/>
-                      </a:pPr>
-                      <a:r>
-                        <a:rPr lang="ko-KR" sz="1200" dirty="0">
-                          <a:solidFill>
-                            <a:srgbClr val="0B0B0B"/>
-                          </a:solidFill>
-                          <a:latin typeface="Pretendard" pitchFamily="34" charset="0"/>
-                          <a:ea typeface="Pretendard" pitchFamily="34" charset="-122"/>
-                          <a:cs typeface="Pretendard" pitchFamily="34" charset="-120"/>
-                        </a:rPr>
-                        <a:t>다른 제품 것으로 교체</a:t>
-                      </a:r>
-                      <a:endParaRPr lang="ko-KR" sz="1200" dirty="0">
+                        <a:t>제품 외곽선을 바꿔 끼움</a:t>
+                      </a:r>
+                      <a:endParaRPr lang="ko-KR" sz="1250" dirty="0">
                         <a:latin typeface="Pretendard" charset="0"/>
                         <a:ea typeface="Pretendard" charset="0"/>
                         <a:cs typeface="Pretendard" charset="0"/>
@@ -8361,7 +7342,7 @@
                         <a:buNone/>
                       </a:pPr>
                       <a:r>
-                        <a:rPr lang="ko-KR" sz="1200" dirty="0">
+                        <a:rPr lang="ko-KR" sz="1250" dirty="0">
                           <a:solidFill>
                             <a:srgbClr val="0B0B0B"/>
                           </a:solidFill>
@@ -8369,9 +7350,9 @@
                           <a:ea typeface="Pretendard" pitchFamily="34" charset="-122"/>
                           <a:cs typeface="Pretendard" pitchFamily="34" charset="-120"/>
                         </a:rPr>
-                        <a:t>예측 99.5% 이상 유지</a:t>
-                      </a:r>
-                      <a:endParaRPr lang="ko-KR" sz="1200" dirty="0">
+                        <a:t>예측 99.5% 유지</a:t>
+                      </a:r>
+                      <a:endParaRPr lang="ko-KR" sz="1250" dirty="0">
                         <a:latin typeface="Pretendard" charset="0"/>
                         <a:ea typeface="Pretendard" charset="0"/>
                         <a:cs typeface="Pretendard" charset="0"/>
@@ -8431,7 +7412,7 @@
                         <a:buNone/>
                       </a:pPr>
                       <a:r>
-                        <a:rPr lang="ko-KR" sz="1200" dirty="0">
+                        <a:rPr lang="ko-KR" sz="1250" dirty="0">
                           <a:solidFill>
                             <a:srgbClr val="0B0B0B"/>
                           </a:solidFill>
@@ -8441,7 +7422,7 @@
                         </a:rPr>
                         <a:t>오분류 검토</a:t>
                       </a:r>
-                      <a:endParaRPr lang="ko-KR" sz="1200" dirty="0">
+                      <a:endParaRPr lang="ko-KR" sz="1250" dirty="0">
                         <a:latin typeface="Pretendard" charset="0"/>
                         <a:ea typeface="Pretendard" charset="0"/>
                         <a:cs typeface="Pretendard" charset="0"/>
@@ -8499,7 +7480,7 @@
                         <a:buNone/>
                       </a:pPr>
                       <a:r>
-                        <a:rPr lang="ko-KR" sz="1200" dirty="0">
+                        <a:rPr lang="ko-KR" sz="1250" dirty="0">
                           <a:solidFill>
                             <a:srgbClr val="0B0B0B"/>
                           </a:solidFill>
@@ -8507,9 +7488,9 @@
                           <a:ea typeface="Pretendard" pitchFamily="34" charset="-122"/>
                           <a:cs typeface="Pretendard" pitchFamily="34" charset="-120"/>
                         </a:rPr>
-                        <a:t>96장을 라벨 가린 채 독립 판정 2회</a:t>
-                      </a:r>
-                      <a:endParaRPr lang="ko-KR" sz="1200" dirty="0">
+                        <a:t>96장, 라벨 가린 독립 판정</a:t>
+                      </a:r>
+                      <a:endParaRPr lang="ko-KR" sz="1250" dirty="0">
                         <a:latin typeface="Pretendard" charset="0"/>
                         <a:ea typeface="Pretendard" charset="0"/>
                         <a:cs typeface="Pretendard" charset="0"/>
@@ -8567,7 +7548,7 @@
                         <a:buNone/>
                       </a:pPr>
                       <a:r>
-                        <a:rPr lang="ko-KR" sz="1200" dirty="0">
+                        <a:rPr lang="ko-KR" sz="1250" dirty="0">
                           <a:solidFill>
                             <a:srgbClr val="0B0B0B"/>
                           </a:solidFill>
@@ -8575,24 +7556,9 @@
                           <a:ea typeface="Pretendard" pitchFamily="34" charset="-122"/>
                           <a:cs typeface="Pretendard" pitchFamily="34" charset="-120"/>
                         </a:rPr>
-                        <a:t>애매 46% / 모델 오류 27% /</a:t>
-                      </a:r>
-                      <a:br/>
-                      <a:pPr latinLnBrk="0" algn="l" indent="0" marL="0">
-                        <a:buNone/>
-                      </a:pPr>
-                      <a:r>
-                        <a:rPr lang="ko-KR" sz="1200" dirty="0">
-                          <a:solidFill>
-                            <a:srgbClr val="0B0B0B"/>
-                          </a:solidFill>
-                          <a:latin typeface="Pretendard" pitchFamily="34" charset="0"/>
-                          <a:ea typeface="Pretendard" pitchFamily="34" charset="-122"/>
-                          <a:cs typeface="Pretendard" pitchFamily="34" charset="-120"/>
-                        </a:rPr>
-                        <a:t>라벨 의심 27%</a:t>
-                      </a:r>
-                      <a:endParaRPr lang="ko-KR" sz="1200" dirty="0">
+                        <a:t>라벨 의심 27%</a:t>
+                      </a:r>
+                      <a:endParaRPr lang="ko-KR" sz="1250" dirty="0">
                         <a:latin typeface="Pretendard" charset="0"/>
                         <a:ea typeface="Pretendard" charset="0"/>
                         <a:cs typeface="Pretendard" charset="0"/>
@@ -8652,7 +7618,7 @@
                         <a:buNone/>
                       </a:pPr>
                       <a:r>
-                        <a:rPr lang="ko-KR" sz="1200" dirty="0">
+                        <a:rPr lang="ko-KR" sz="1250" dirty="0">
                           <a:solidFill>
                             <a:srgbClr val="0B0B0B"/>
                           </a:solidFill>
@@ -8662,7 +7628,7 @@
                         </a:rPr>
                         <a:t>재현</a:t>
                       </a:r>
-                      <a:endParaRPr lang="ko-KR" sz="1200" dirty="0">
+                      <a:endParaRPr lang="ko-KR" sz="1250" dirty="0">
                         <a:latin typeface="Pretendard" charset="0"/>
                         <a:ea typeface="Pretendard" charset="0"/>
                         <a:cs typeface="Pretendard" charset="0"/>
@@ -8720,7 +7686,7 @@
                         <a:buNone/>
                       </a:pPr>
                       <a:r>
-                        <a:rPr lang="ko-KR" sz="1200" dirty="0">
+                        <a:rPr lang="ko-KR" sz="1250" dirty="0">
                           <a:solidFill>
                             <a:srgbClr val="0B0B0B"/>
                           </a:solidFill>
@@ -8728,24 +7694,9 @@
                           <a:ea typeface="Pretendard" pitchFamily="34" charset="-122"/>
                           <a:cs typeface="Pretendard" pitchFamily="34" charset="-120"/>
                         </a:rPr>
-                        <a:t>새 폴더에 clone 후</a:t>
-                      </a:r>
-                      <a:br/>
-                      <a:pPr latinLnBrk="0" algn="l" indent="0" marL="0">
-                        <a:buNone/>
-                      </a:pPr>
-                      <a:r>
-                        <a:rPr lang="ko-KR" sz="1200" dirty="0">
-                          <a:solidFill>
-                            <a:srgbClr val="0B0B0B"/>
-                          </a:solidFill>
-                          <a:latin typeface="Pretendard" pitchFamily="34" charset="0"/>
-                          <a:ea typeface="Pretendard" pitchFamily="34" charset="-122"/>
-                          <a:cs typeface="Pretendard" pitchFamily="34" charset="-120"/>
-                        </a:rPr>
-                        <a:t>README 순서로 재실행</a:t>
-                      </a:r>
-                      <a:endParaRPr lang="ko-KR" sz="1200" dirty="0">
+                        <a:t>새 폴더에서 처음부터 재실행</a:t>
+                      </a:r>
+                      <a:endParaRPr lang="ko-KR" sz="1250" dirty="0">
                         <a:latin typeface="Pretendard" charset="0"/>
                         <a:ea typeface="Pretendard" charset="0"/>
                         <a:cs typeface="Pretendard" charset="0"/>
@@ -8803,7 +7754,7 @@
                         <a:buNone/>
                       </a:pPr>
                       <a:r>
-                        <a:rPr lang="ko-KR" sz="1200" dirty="0">
+                        <a:rPr lang="ko-KR" sz="1250" dirty="0">
                           <a:solidFill>
                             <a:srgbClr val="0B0B0B"/>
                           </a:solidFill>
@@ -8811,24 +7762,9 @@
                           <a:ea typeface="Pretendard" pitchFamily="34" charset="-122"/>
                           <a:cs typeface="Pretendard" pitchFamily="34" charset="-120"/>
                         </a:rPr>
-                        <a:t>1시간 8분,</a:t>
-                      </a:r>
-                      <a:br/>
-                      <a:pPr latinLnBrk="0" algn="l" indent="0" marL="0">
-                        <a:buNone/>
-                      </a:pPr>
-                      <a:r>
-                        <a:rPr lang="ko-KR" sz="1200" dirty="0">
-                          <a:solidFill>
-                            <a:srgbClr val="0B0B0B"/>
-                          </a:solidFill>
-                          <a:latin typeface="Pretendard" pitchFamily="34" charset="0"/>
-                          <a:ea typeface="Pretendard" pitchFamily="34" charset="-122"/>
-                          <a:cs typeface="Pretendard" pitchFamily="34" charset="-120"/>
-                        </a:rPr>
-                        <a:t>비교 항목 10개 일치</a:t>
-                      </a:r>
-                      <a:endParaRPr lang="ko-KR" sz="1200" dirty="0">
+                        <a:t>10개 항목 일치</a:t>
+                      </a:r>
+                      <a:endParaRPr lang="ko-KR" sz="1250" dirty="0">
                         <a:latin typeface="Pretendard" charset="0"/>
                         <a:ea typeface="Pretendard" charset="0"/>
                         <a:cs typeface="Pretendard" charset="0"/>
@@ -8891,11 +7827,11 @@
         <p:spPr>
           <a:xfrm>
             <a:off x="640080" y="5029200"/>
-            <a:ext cx="5943600" cy="658368"/>
+            <a:ext cx="5486400" cy="777240"/>
           </a:xfrm>
           <a:prstGeom prst="roundRect">
             <a:avLst>
-              <a:gd name="adj" fmla="val 6944"/>
+              <a:gd name="adj" fmla="val 5882"/>
             </a:avLst>
           </a:prstGeom>
           <a:solidFill>
@@ -8924,18 +7860,18 @@
           </p:nvPr>
         </p:nvGraphicFramePr>
         <p:xfrm>
-          <a:off x="749808" y="5084064"/>
-          <a:ext cx="5724144" cy="914400"/>
+          <a:off x="749808" y="5093208"/>
+          <a:ext cx="5266944" cy="914400"/>
         </p:xfrm>
         <a:graphic>
           <a:graphicData uri="http://schemas.openxmlformats.org/drawingml/2006/table">
             <a:tbl>
               <a:tblPr/>
               <a:tblGrid>
-                <a:gridCol w="914400"/>
-                <a:gridCol w="4809744"/>
+                <a:gridCol w="960120"/>
+                <a:gridCol w="4306824"/>
               </a:tblGrid>
-              <a:tr h="237744">
+              <a:tr h="246888">
                 <a:tc>
                   <a:txBody>
                     <a:bodyPr/>
@@ -8945,7 +7881,7 @@
                         <a:buNone/>
                       </a:pPr>
                       <a:r>
-                        <a:rPr lang="ko-KR" sz="1100" b="1" dirty="0">
+                        <a:rPr lang="ko-KR" sz="1150" b="1" dirty="0">
                           <a:solidFill>
                             <a:srgbClr val="52514E"/>
                           </a:solidFill>
@@ -8955,7 +7891,7 @@
                         </a:rPr>
                         <a:t>Claude Code</a:t>
                       </a:r>
-                      <a:endParaRPr lang="ko-KR" sz="1100" dirty="0">
+                      <a:endParaRPr lang="ko-KR" sz="1150" dirty="0">
                         <a:latin typeface="Pretendard" charset="0"/>
                         <a:ea typeface="Pretendard" charset="0"/>
                         <a:cs typeface="Pretendard" charset="0"/>
@@ -8989,7 +7925,7 @@
                         <a:buNone/>
                       </a:pPr>
                       <a:r>
-                        <a:rPr lang="ko-KR" sz="1100" dirty="0">
+                        <a:rPr lang="ko-KR" sz="1150" dirty="0">
                           <a:solidFill>
                             <a:srgbClr val="52514E"/>
                           </a:solidFill>
@@ -8997,9 +7933,9 @@
                           <a:ea typeface="Pretendard" pitchFamily="34" charset="-122"/>
                           <a:cs typeface="Pretendard" pitchFamily="34" charset="-120"/>
                         </a:rPr>
-                        <a:t>검증 에이전트 4개 병렬 실행, 개입 실험·재현 비교 스크립트 구현</a:t>
-                      </a:r>
-                      <a:endParaRPr lang="ko-KR" sz="1100" dirty="0">
+                        <a:t>검증 에이전트 4개 병렬, 개입 실험 구현</a:t>
+                      </a:r>
+                      <a:endParaRPr lang="ko-KR" sz="1150" dirty="0">
                         <a:latin typeface="Pretendard" charset="0"/>
                         <a:ea typeface="Pretendard" charset="0"/>
                         <a:cs typeface="Pretendard" charset="0"/>
@@ -9025,7 +7961,7 @@
                   </a:tcPr>
                 </a:tc>
               </a:tr>
-              <a:tr h="237744">
+              <a:tr h="246888">
                 <a:tc>
                   <a:txBody>
                     <a:bodyPr/>
@@ -9035,7 +7971,7 @@
                         <a:buNone/>
                       </a:pPr>
                       <a:r>
-                        <a:rPr lang="ko-KR" sz="1100" b="1" dirty="0">
+                        <a:rPr lang="ko-KR" sz="1150" b="1" dirty="0">
                           <a:solidFill>
                             <a:srgbClr val="52514E"/>
                           </a:solidFill>
@@ -9045,7 +7981,7 @@
                         </a:rPr>
                         <a:t>본인</a:t>
                       </a:r>
-                      <a:endParaRPr lang="ko-KR" sz="1100" dirty="0">
+                      <a:endParaRPr lang="ko-KR" sz="1150" dirty="0">
                         <a:latin typeface="Pretendard" charset="0"/>
                         <a:ea typeface="Pretendard" charset="0"/>
                         <a:cs typeface="Pretendard" charset="0"/>
@@ -9079,7 +8015,7 @@
                         <a:buNone/>
                       </a:pPr>
                       <a:r>
-                        <a:rPr lang="ko-KR" sz="1100" dirty="0">
+                        <a:rPr lang="ko-KR" sz="1150" dirty="0">
                           <a:solidFill>
                             <a:srgbClr val="52514E"/>
                           </a:solidFill>
@@ -9087,24 +8023,9 @@
                           <a:ea typeface="Pretendard" pitchFamily="34" charset="-122"/>
                           <a:cs typeface="Pretendard" pitchFamily="34" charset="-120"/>
                         </a:rPr>
-                        <a:t>오류 판정, 절차 수정 후 전부 재학습 결정(판단 지점 9),</a:t>
-                      </a:r>
-                      <a:br/>
-                      <a:pPr latinLnBrk="0" indent="0" marL="0">
-                        <a:buNone/>
-                      </a:pPr>
-                      <a:r>
-                        <a:rPr lang="ko-KR" sz="1100" dirty="0">
-                          <a:solidFill>
-                            <a:srgbClr val="52514E"/>
-                          </a:solidFill>
-                          <a:latin typeface="Pretendard" pitchFamily="34" charset="0"/>
-                          <a:ea typeface="Pretendard" pitchFamily="34" charset="-122"/>
-                          <a:cs typeface="Pretendard" pitchFamily="34" charset="-120"/>
-                        </a:rPr>
-                        <a:t>재현 범위 결정(판단 지점 11·12)</a:t>
-                      </a:r>
-                      <a:endParaRPr lang="ko-KR" sz="1100" dirty="0">
+                        <a:t>오류 판정, 전부 재학습 결정(판단 지점 9)</a:t>
+                      </a:r>
+                      <a:endParaRPr lang="ko-KR" sz="1150" dirty="0">
                         <a:latin typeface="Pretendard" charset="0"/>
                         <a:ea typeface="Pretendard" charset="0"/>
                         <a:cs typeface="Pretendard" charset="0"/>
@@ -9150,8 +8071,8 @@
         </p:blipFill>
         <p:spPr>
           <a:xfrm>
-            <a:off x="6812280" y="2103120"/>
-            <a:ext cx="4361688" cy="2377440"/>
+            <a:off x="6492240" y="2103120"/>
+            <a:ext cx="4937760" cy="2651760"/>
           </a:xfrm>
           <a:prstGeom prst="rect">
             <a:avLst/>
@@ -9166,8 +8087,8 @@
         </p:nvSpPr>
         <p:spPr>
           <a:xfrm>
-            <a:off x="6812280" y="4553712"/>
-            <a:ext cx="4754880" cy="274320"/>
+            <a:off x="6492240" y="4846320"/>
+            <a:ext cx="5029200" cy="274320"/>
           </a:xfrm>
           <a:prstGeom prst="rect">
             <a:avLst/>
@@ -9212,8 +8133,8 @@
           </p:nvPr>
         </p:nvGraphicFramePr>
         <p:xfrm>
-          <a:off x="6812280" y="4828032"/>
-          <a:ext cx="4754880" cy="914400"/>
+          <a:off x="6492240" y="5138928"/>
+          <a:ext cx="5029200" cy="914400"/>
         </p:xfrm>
         <a:graphic>
           <a:graphicData uri="http://schemas.openxmlformats.org/drawingml/2006/table">
@@ -9221,7 +8142,7 @@
               <a:tblPr/>
               <a:tblGrid>
                 <a:gridCol w="502920"/>
-                <a:gridCol w="4251960"/>
+                <a:gridCol w="4526280"/>
               </a:tblGrid>
               <a:tr h="256032">
                 <a:tc>
@@ -9233,7 +8154,7 @@
                         <a:buNone/>
                       </a:pPr>
                       <a:r>
-                        <a:rPr lang="ko-KR" sz="1050" b="1" dirty="0">
+                        <a:rPr lang="ko-KR" sz="1100" b="1" dirty="0">
                           <a:solidFill>
                             <a:srgbClr val="0B0B0B"/>
                           </a:solidFill>
@@ -9243,7 +8164,7 @@
                         </a:rPr>
                         <a:t>원인</a:t>
                       </a:r>
-                      <a:endParaRPr lang="ko-KR" sz="1050" dirty="0">
+                      <a:endParaRPr lang="ko-KR" sz="1100" dirty="0">
                         <a:latin typeface="Pretendard" charset="0"/>
                         <a:ea typeface="Pretendard" charset="0"/>
                         <a:cs typeface="Pretendard" charset="0"/>
@@ -9277,7 +8198,7 @@
                         <a:buNone/>
                       </a:pPr>
                       <a:r>
-                        <a:rPr lang="ko-KR" sz="1050" dirty="0">
+                        <a:rPr lang="ko-KR" sz="1100" dirty="0">
                           <a:solidFill>
                             <a:srgbClr val="0B0B0B"/>
                           </a:solidFill>
@@ -9285,14 +8206,14 @@
                           <a:ea typeface="Pretendard" pitchFamily="34" charset="-122"/>
                           <a:cs typeface="Pretendard" pitchFamily="34" charset="-120"/>
                         </a:rPr>
-                        <a:t>StratifiedGroupKFold(scikit-learn 1.9.1)가 크고</a:t>
+                        <a:t>StratifiedGroupKFold가 큰 그룹을 seed와 무관하게 같은 fold에 고정 →</a:t>
                       </a:r>
                       <a:br/>
                       <a:pPr latinLnBrk="0" indent="0" marL="0">
                         <a:buNone/>
                       </a:pPr>
                       <a:r>
-                        <a:rPr lang="ko-KR" sz="1050" dirty="0">
+                        <a:rPr lang="ko-KR" sz="1100" dirty="0">
                           <a:solidFill>
                             <a:srgbClr val="0B0B0B"/>
                           </a:solidFill>
@@ -9300,24 +8221,9 @@
                           <a:ea typeface="Pretendard" pitchFamily="34" charset="-122"/>
                           <a:cs typeface="Pretendard" pitchFamily="34" charset="-120"/>
                         </a:rPr>
-                        <a:t>치우친 그룹을 seed와 무관하게 같은 fold에 배정 →</a:t>
-                      </a:r>
-                      <a:br/>
-                      <a:pPr latinLnBrk="0" indent="0" marL="0">
-                        <a:buNone/>
-                      </a:pPr>
-                      <a:r>
-                        <a:rPr lang="ko-KR" sz="1050" dirty="0">
-                          <a:solidFill>
-                            <a:srgbClr val="0B0B0B"/>
-                          </a:solidFill>
-                          <a:latin typeface="Pretendard" pitchFamily="34" charset="0"/>
-                          <a:ea typeface="Pretendard" pitchFamily="34" charset="-122"/>
-                          <a:cs typeface="Pretendard" pitchFamily="34" charset="-120"/>
-                        </a:rPr>
-                        <a:t>맞히기 쉬운 Loc 웨이퍼 132장이 항상 test에 들어감</a:t>
-                      </a:r>
-                      <a:endParaRPr lang="ko-KR" sz="1050" dirty="0">
+                        <a:t>쉬운 Loc 132장이 항상 test</a:t>
+                      </a:r>
+                      <a:endParaRPr lang="ko-KR" sz="1100" dirty="0">
                         <a:latin typeface="Pretendard" charset="0"/>
                         <a:ea typeface="Pretendard" charset="0"/>
                         <a:cs typeface="Pretendard" charset="0"/>
@@ -9353,7 +8259,7 @@
                         <a:buNone/>
                       </a:pPr>
                       <a:r>
-                        <a:rPr lang="ko-KR" sz="1050" b="1" dirty="0">
+                        <a:rPr lang="ko-KR" sz="1100" b="1" dirty="0">
                           <a:solidFill>
                             <a:srgbClr val="0B0B0B"/>
                           </a:solidFill>
@@ -9363,7 +8269,7 @@
                         </a:rPr>
                         <a:t>발견</a:t>
                       </a:r>
-                      <a:endParaRPr lang="ko-KR" sz="1050" dirty="0">
+                      <a:endParaRPr lang="ko-KR" sz="1100" dirty="0">
                         <a:latin typeface="Pretendard" charset="0"/>
                         <a:ea typeface="Pretendard" charset="0"/>
                         <a:cs typeface="Pretendard" charset="0"/>
@@ -9397,7 +8303,7 @@
                         <a:buNone/>
                       </a:pPr>
                       <a:r>
-                        <a:rPr lang="ko-KR" sz="1050" dirty="0">
+                        <a:rPr lang="ko-KR" sz="1100" dirty="0">
                           <a:solidFill>
                             <a:srgbClr val="0B0B0B"/>
                           </a:solidFill>
@@ -9405,14 +8311,14 @@
                           <a:ea typeface="Pretendard" pitchFamily="34" charset="-122"/>
                           <a:cs typeface="Pretendard" pitchFamily="34" charset="-120"/>
                         </a:rPr>
-                        <a:t>베이스라인 점수가 이유 없이 오름 → seed 10개로 다시 나눠 Loc</a:t>
+                        <a:t>베이스라인이 이유 없이 오름 →</a:t>
                       </a:r>
                       <a:br/>
                       <a:pPr latinLnBrk="0" indent="0" marL="0">
                         <a:buNone/>
                       </a:pPr>
                       <a:r>
-                        <a:rPr lang="ko-KR" sz="1050" dirty="0">
+                        <a:rPr lang="ko-KR" sz="1100" dirty="0">
                           <a:solidFill>
                             <a:srgbClr val="0B0B0B"/>
                           </a:solidFill>
@@ -9420,9 +8326,9 @@
                           <a:ea typeface="Pretendard" pitchFamily="34" charset="-122"/>
                           <a:cs typeface="Pretendard" pitchFamily="34" charset="-120"/>
                         </a:rPr>
-                        <a:t>recall 최대 15%p 차이 확인 → lot 묶음 하나를 test에서 빼 보는 실험</a:t>
-                      </a:r>
-                      <a:endParaRPr lang="ko-KR" sz="1050" dirty="0">
+                        <a:t>seed 10개로 재분할 → lot 묶음 하나를 빼 보는 실험</a:t>
+                      </a:r>
+                      <a:endParaRPr lang="ko-KR" sz="1100" dirty="0">
                         <a:latin typeface="Pretendard" charset="0"/>
                         <a:ea typeface="Pretendard" charset="0"/>
                         <a:cs typeface="Pretendard" charset="0"/>
@@ -9458,7 +8364,7 @@
                         <a:buNone/>
                       </a:pPr>
                       <a:r>
-                        <a:rPr lang="ko-KR" sz="1050" b="1" dirty="0">
+                        <a:rPr lang="ko-KR" sz="1100" b="1" dirty="0">
                           <a:solidFill>
                             <a:srgbClr val="0B0B0B"/>
                           </a:solidFill>
@@ -9468,7 +8374,7 @@
                         </a:rPr>
                         <a:t>수정</a:t>
                       </a:r>
-                      <a:endParaRPr lang="ko-KR" sz="1050" dirty="0">
+                      <a:endParaRPr lang="ko-KR" sz="1100" dirty="0">
                         <a:latin typeface="Pretendard" charset="0"/>
                         <a:ea typeface="Pretendard" charset="0"/>
                         <a:cs typeface="Pretendard" charset="0"/>
@@ -9502,7 +8408,7 @@
                         <a:buNone/>
                       </a:pPr>
                       <a:r>
-                        <a:rPr lang="ko-KR" sz="1050" dirty="0">
+                        <a:rPr lang="ko-KR" sz="1100" dirty="0">
                           <a:solidFill>
                             <a:srgbClr val="0B0B0B"/>
                           </a:solidFill>
@@ -9510,14 +8416,14 @@
                           <a:ea typeface="Pretendard" pitchFamily="34" charset="-122"/>
                           <a:cs typeface="Pretendard" pitchFamily="34" charset="-120"/>
                         </a:rPr>
-                        <a:t>fold 배정을 seed로 무작위 치환하고 모든 모델 재학습(0.893 → 0.909).</a:t>
+                        <a:t>fold 배정 무작위 치환, 전 모델 재학습(0.893 → 0.909),</a:t>
                       </a:r>
                       <a:br/>
                       <a:pPr latinLnBrk="0" indent="0" marL="0">
                         <a:buNone/>
                       </a:pPr>
                       <a:r>
-                        <a:rPr lang="ko-KR" sz="1050" dirty="0">
+                        <a:rPr lang="ko-KR" sz="1100" dirty="0">
                           <a:solidFill>
                             <a:srgbClr val="0B0B0B"/>
                           </a:solidFill>
@@ -9525,9 +8431,9 @@
                           <a:ea typeface="Pretendard" pitchFamily="34" charset="-122"/>
                           <a:cs typeface="Pretendard" pitchFamily="34" charset="-120"/>
                         </a:rPr>
-                        <a:t>분할 직후 겹침과 lot 묶음 비중을 검사하는 단계 추가</a:t>
-                      </a:r>
-                      <a:endParaRPr lang="ko-KR" sz="1050" dirty="0">
+                        <a:t>분할 후 겹침 검사 추가</a:t>
+                      </a:r>
+                      <a:endParaRPr lang="ko-KR" sz="1100" dirty="0">
                         <a:latin typeface="Pretendard" charset="0"/>
                         <a:ea typeface="Pretendard" charset="0"/>
                         <a:cs typeface="Pretendard" charset="0"/>
@@ -9679,7 +8585,7 @@
                 <a:ea typeface="Pretendard" pitchFamily="34" charset="-122"/>
                 <a:cs typeface="Pretendard" pitchFamily="34" charset="-120"/>
               </a:rPr>
-              <a:t>AI 활용 방식 ①  지시와 역할</a:t>
+              <a:t>AI 활용 ①  지시와 역할</a:t>
             </a:r>
             <a:endParaRPr lang="ko-KR" sz="2800" dirty="0"/>
           </a:p>
@@ -9721,25 +8627,7 @@
                 <a:ea typeface="Pretendard SemiBold" pitchFamily="34" charset="-122"/>
                 <a:cs typeface="Pretendard SemiBold" pitchFamily="34" charset="-120"/>
               </a:rPr>
-              <a:t>첫 지시문에 AI가 할 일과 멈출 지점, 수치와 오류의 기록 규칙을 정해 두고,</a:t>
-            </a:r>
-            <a:br/>
-            <a:pPr latinLnBrk="0" indent="0" marL="0">
-              <a:lnSpc>
-                <a:spcPts val="2600"/>
-              </a:lnSpc>
-              <a:buNone/>
-            </a:pPr>
-            <a:r>
-              <a:rPr lang="ko-KR" sz="1800" dirty="0">
-                <a:solidFill>
-                  <a:srgbClr val="1F4E9A"/>
-                </a:solidFill>
-                <a:latin typeface="Pretendard SemiBold" pitchFamily="34" charset="0"/>
-                <a:ea typeface="Pretendard SemiBold" pitchFamily="34" charset="-122"/>
-                <a:cs typeface="Pretendard SemiBold" pitchFamily="34" charset="-120"/>
-              </a:rPr>
-              <a:t>체크포인트 6개에서 판단 13건을 내렸습니다.</a:t>
+              <a:t>첫 지시문에 AI가 할 일과 멈출 지점, 기록 규칙을 정해 두고 체크포인트 6개에서 판단 13건을 내렸습니다.</a:t>
             </a:r>
             <a:endParaRPr lang="ko-KR" sz="1800" dirty="0"/>
           </a:p>
@@ -9778,7 +8666,7 @@
                 <a:ea typeface="Pretendard" pitchFamily="34" charset="-122"/>
                 <a:cs typeface="Pretendard" pitchFamily="34" charset="-120"/>
               </a:rPr>
-              <a:t>근거: docs/wafer_project_prompt.md(첫 지시문 원문), LOG.md 지시 원문·판단 지점 1~13</a:t>
+              <a:t>근거: docs/wafer_project_prompt.md(첫 지시문), LOG.md 17:04 보고와 판단 지점 8</a:t>
             </a:r>
             <a:endParaRPr lang="ko-KR" sz="1000" dirty="0"/>
           </a:p>
@@ -9856,7 +8744,7 @@
                 <a:ea typeface="Pretendard" pitchFamily="34" charset="-122"/>
                 <a:cs typeface="Pretendard" pitchFamily="34" charset="-120"/>
               </a:rPr>
-              <a:t>첫 지시문에서 정한 규칙 (원문)</a:t>
+              <a:t>첫 지시문의 규칙 (원문)</a:t>
             </a:r>
             <a:endParaRPr lang="ko-KR" sz="1300" dirty="0"/>
           </a:p>
@@ -9871,11 +8759,11 @@
         <p:spPr>
           <a:xfrm>
             <a:off x="640080" y="2423160"/>
-            <a:ext cx="5486400" cy="2423160"/>
+            <a:ext cx="5486400" cy="1691640"/>
           </a:xfrm>
           <a:prstGeom prst="roundRect">
             <a:avLst>
-              <a:gd name="adj" fmla="val 1887"/>
+              <a:gd name="adj" fmla="val 2703"/>
             </a:avLst>
           </a:prstGeom>
           <a:solidFill>
@@ -9898,7 +8786,7 @@
         <p:spPr>
           <a:xfrm>
             <a:off x="777240" y="2542032"/>
-            <a:ext cx="5212080" cy="2240280"/>
+            <a:ext cx="5212080" cy="1508760"/>
           </a:xfrm>
           <a:prstGeom prst="rect">
             <a:avLst/>
@@ -9912,7 +8800,7 @@
           <a:p>
             <a:pPr latinLnBrk="0" indent="0" marL="0">
               <a:lnSpc>
-                <a:spcPts val="1700"/>
+                <a:spcPts val="1800"/>
               </a:lnSpc>
               <a:spcAft>
                 <a:spcPts val="700"/>
@@ -9920,7 +8808,7 @@
               <a:buNone/>
             </a:pPr>
             <a:r>
-              <a:rPr lang="ko-KR" sz="1200" dirty="0">
+              <a:rPr lang="ko-KR" sz="1250" dirty="0">
                 <a:solidFill>
                   <a:srgbClr val="0B0B0B"/>
                 </a:solidFill>
@@ -9928,12 +8816,12 @@
                 <a:ea typeface="Pretendard" pitchFamily="34" charset="-122"/>
                 <a:cs typeface="Pretendard" pitchFamily="34" charset="-120"/>
               </a:rPr>
-              <a:t>“판단이 필요한 지점에서는 멈추고 나에게 묻는다. 선택지 2~3개와 각각의 장단점을</a:t>
+              <a:t>“판단이 필요한 지점에서는 멈추고 나에게 묻는다.</a:t>
             </a:r>
             <a:br/>
             <a:pPr latinLnBrk="0" indent="0" marL="0">
               <a:lnSpc>
-                <a:spcPts val="1700"/>
+                <a:spcPts val="1800"/>
               </a:lnSpc>
               <a:spcAft>
                 <a:spcPts val="700"/>
@@ -9941,7 +8829,7 @@
               <a:buNone/>
             </a:pPr>
             <a:r>
-              <a:rPr lang="ko-KR" sz="1200" dirty="0">
+              <a:rPr lang="ko-KR" sz="1250" dirty="0">
                 <a:solidFill>
                   <a:srgbClr val="0B0B0B"/>
                 </a:solidFill>
@@ -9949,14 +8837,14 @@
                 <a:ea typeface="Pretendard" pitchFamily="34" charset="-122"/>
                 <a:cs typeface="Pretendard" pitchFamily="34" charset="-120"/>
               </a:rPr>
-              <a:t>제시하고, 추천이 있으면 이유와 함께 밝힌다. 조용히 하나를 골라 진행하지 않는다.”</a:t>
+              <a:t>선택지 2~3개와 각각의 장단점을 제시하고, 추천이 있으면 이유와 함께 밝힌다.”</a:t>
             </a:r>
-            <a:endParaRPr lang="ko-KR" sz="1200" dirty="0"/>
+            <a:endParaRPr lang="ko-KR" sz="1250" dirty="0"/>
           </a:p>
           <a:p>
             <a:pPr latinLnBrk="0" indent="0" marL="0">
               <a:lnSpc>
-                <a:spcPts val="1700"/>
+                <a:spcPts val="1800"/>
               </a:lnSpc>
               <a:spcAft>
                 <a:spcPts val="700"/>
@@ -9964,7 +8852,7 @@
               <a:buNone/>
             </a:pPr>
             <a:r>
-              <a:rPr lang="ko-KR" sz="1200" dirty="0">
+              <a:rPr lang="ko-KR" sz="1250" dirty="0">
                 <a:solidFill>
                   <a:srgbClr val="0B0B0B"/>
                 </a:solidFill>
@@ -9972,12 +8860,14 @@
                 <a:ea typeface="Pretendard" pitchFamily="34" charset="-122"/>
                 <a:cs typeface="Pretendard" pitchFamily="34" charset="-120"/>
               </a:rPr>
-              <a:t>“내 지시가 틀렸다고 생각하면 반대 의견임을 명시하고 근거를 댄다.</a:t>
+              <a:t>“숫자는 실행 결과에서만 가져온다. 추정치를 결과처럼 쓰지 않는다.”</a:t>
             </a:r>
-            <a:br/>
+            <a:endParaRPr lang="ko-KR" sz="1250" dirty="0"/>
+          </a:p>
+          <a:p>
             <a:pPr latinLnBrk="0" indent="0" marL="0">
               <a:lnSpc>
-                <a:spcPts val="1700"/>
+                <a:spcPts val="1800"/>
               </a:lnSpc>
               <a:spcAft>
                 <a:spcPts val="700"/>
@@ -9985,74 +8875,7 @@
               <a:buNone/>
             </a:pPr>
             <a:r>
-              <a:rPr lang="ko-KR" sz="1200" dirty="0">
-                <a:solidFill>
-                  <a:srgbClr val="0B0B0B"/>
-                </a:solidFill>
-                <a:latin typeface="Pretendard" pitchFamily="34" charset="0"/>
-                <a:ea typeface="Pretendard" pitchFamily="34" charset="-122"/>
-                <a:cs typeface="Pretendard" pitchFamily="34" charset="-120"/>
-              </a:rPr>
-              <a:t>그대로 따르지 않는다.”</a:t>
-            </a:r>
-            <a:endParaRPr lang="ko-KR" sz="1200" dirty="0"/>
-          </a:p>
-          <a:p>
-            <a:pPr latinLnBrk="0" indent="0" marL="0">
-              <a:lnSpc>
-                <a:spcPts val="1700"/>
-              </a:lnSpc>
-              <a:spcAft>
-                <a:spcPts val="700"/>
-              </a:spcAft>
-              <a:buNone/>
-            </a:pPr>
-            <a:r>
-              <a:rPr lang="ko-KR" sz="1200" dirty="0">
-                <a:solidFill>
-                  <a:srgbClr val="0B0B0B"/>
-                </a:solidFill>
-                <a:latin typeface="Pretendard" pitchFamily="34" charset="0"/>
-                <a:ea typeface="Pretendard" pitchFamily="34" charset="-122"/>
-                <a:cs typeface="Pretendard" pitchFamily="34" charset="-120"/>
-              </a:rPr>
-              <a:t>“숫자는 실행 결과에서만 가져온다. 추정치를 결과처럼 쓰지 않는다.</a:t>
-            </a:r>
-            <a:br/>
-            <a:pPr latinLnBrk="0" indent="0" marL="0">
-              <a:lnSpc>
-                <a:spcPts val="1700"/>
-              </a:lnSpc>
-              <a:spcAft>
-                <a:spcPts val="700"/>
-              </a:spcAft>
-              <a:buNone/>
-            </a:pPr>
-            <a:r>
-              <a:rPr lang="ko-KR" sz="1200" dirty="0">
-                <a:solidFill>
-                  <a:srgbClr val="0B0B0B"/>
-                </a:solidFill>
-                <a:latin typeface="Pretendard" pitchFamily="34" charset="0"/>
-                <a:ea typeface="Pretendard" pitchFamily="34" charset="-122"/>
-                <a:cs typeface="Pretendard" pitchFamily="34" charset="-120"/>
-              </a:rPr>
-              <a:t>결과를 적을 때는 어떤 스크립트·어떤 설정에서 나온 값인지 함께 적는다.”</a:t>
-            </a:r>
-            <a:endParaRPr lang="ko-KR" sz="1200" dirty="0"/>
-          </a:p>
-          <a:p>
-            <a:pPr latinLnBrk="0" indent="0" marL="0">
-              <a:lnSpc>
-                <a:spcPts val="1700"/>
-              </a:lnSpc>
-              <a:spcAft>
-                <a:spcPts val="700"/>
-              </a:spcAft>
-              <a:buNone/>
-            </a:pPr>
-            <a:r>
-              <a:rPr lang="ko-KR" sz="1200" dirty="0">
+              <a:rPr lang="ko-KR" sz="1250" dirty="0">
                 <a:solidFill>
                   <a:srgbClr val="0B0B0B"/>
                 </a:solidFill>
@@ -10065,7 +8888,7 @@
             <a:br/>
             <a:pPr latinLnBrk="0" indent="0" marL="0">
               <a:lnSpc>
-                <a:spcPts val="1700"/>
+                <a:spcPts val="1800"/>
               </a:lnSpc>
               <a:spcAft>
                 <a:spcPts val="700"/>
@@ -10073,7 +8896,7 @@
               <a:buNone/>
             </a:pPr>
             <a:r>
-              <a:rPr lang="ko-KR" sz="1200" dirty="0">
+              <a:rPr lang="ko-KR" sz="1250" dirty="0">
                 <a:solidFill>
                   <a:srgbClr val="0B0B0B"/>
                 </a:solidFill>
@@ -10081,769 +8904,22 @@
                 <a:ea typeface="Pretendard" pitchFamily="34" charset="-122"/>
                 <a:cs typeface="Pretendard" pitchFamily="34" charset="-120"/>
               </a:rPr>
-              <a:t>누가(나/너) 어떻게 발견했고 무엇을 바꿨는지. 틀린 것을 숨기지 말고 반드시 남긴다.”</a:t>
+              <a:t>누가(나/너) 어떻게 발견했고 무엇을 바꿨는지.”</a:t>
             </a:r>
-            <a:endParaRPr lang="ko-KR" sz="1200" dirty="0"/>
-          </a:p>
-          <a:p>
-            <a:pPr latinLnBrk="0" indent="0" marL="0">
-              <a:lnSpc>
-                <a:spcPts val="1700"/>
-              </a:lnSpc>
-              <a:spcAft>
-                <a:spcPts val="700"/>
-              </a:spcAft>
-              <a:buNone/>
-            </a:pPr>
-            <a:r>
-              <a:rPr lang="ko-KR" sz="1200" dirty="0">
-                <a:solidFill>
-                  <a:srgbClr val="0B0B0B"/>
-                </a:solidFill>
-                <a:latin typeface="Pretendard" pitchFamily="34" charset="0"/>
-                <a:ea typeface="Pretendard" pitchFamily="34" charset="-122"/>
-                <a:cs typeface="Pretendard" pitchFamily="34" charset="-120"/>
-              </a:rPr>
-              <a:t>“각 체크포인트(★)에서는 반드시 멈추고 나에게 보고한 뒤 지시를 기다린다.”</a:t>
-            </a:r>
-            <a:endParaRPr lang="ko-KR" sz="1200" dirty="0"/>
+            <a:endParaRPr lang="ko-KR" sz="1250" dirty="0"/>
           </a:p>
         </p:txBody>
       </p:sp>
-      <p:graphicFrame>
-        <p:nvGraphicFramePr>
-          <p:cNvPr id="7" name="Table 0"/>
-          <p:cNvGraphicFramePr>
-            <a:graphicFrameLocks noGrp="1"/>
-          </p:cNvGraphicFramePr>
-          <p:nvPr>
-            <p:extLst>
-              <p:ext uri="{D42A27DB-BD31-4B8C-83A1-F6EECF244321}">
-                <p14:modId xmlns:p14="http://schemas.microsoft.com/office/powerpoint/2010/main" val="1579011935"/>
-              </p:ext>
-            </p:extLst>
-          </p:nvPr>
-        </p:nvGraphicFramePr>
-        <p:xfrm>
-          <a:off x="640080" y="4983480"/>
-          <a:ext cx="5486400" cy="914400"/>
-        </p:xfrm>
-        <a:graphic>
-          <a:graphicData uri="http://schemas.openxmlformats.org/drawingml/2006/table">
-            <a:tbl>
-              <a:tblPr/>
-              <a:tblGrid>
-                <a:gridCol w="1234440"/>
-                <a:gridCol w="1417320"/>
-                <a:gridCol w="2834640"/>
-              </a:tblGrid>
-              <a:tr h="274320">
-                <a:tc>
-                  <a:txBody>
-                    <a:bodyPr/>
-                    <a:lstStyle/>
-                    <a:p>
-                      <a:pPr latinLnBrk="0" algn="l" indent="0" marL="0">
-                        <a:buNone/>
-                      </a:pPr>
-                      <a:r>
-                        <a:rPr lang="ko-KR" sz="1050" b="1" dirty="0">
-                          <a:solidFill>
-                            <a:srgbClr val="0B0B0B"/>
-                          </a:solidFill>
-                          <a:latin typeface="Pretendard" pitchFamily="34" charset="0"/>
-                          <a:ea typeface="Pretendard" pitchFamily="34" charset="-122"/>
-                          <a:cs typeface="Pretendard" pitchFamily="34" charset="-120"/>
-                        </a:rPr>
-                        <a:t>판단</a:t>
-                      </a:r>
-                      <a:endParaRPr lang="ko-KR" sz="1050" dirty="0">
-                        <a:latin typeface="Pretendard" charset="0"/>
-                        <a:ea typeface="Pretendard" charset="0"/>
-                        <a:cs typeface="Pretendard" charset="0"/>
-                      </a:endParaRPr>
-                    </a:p>
-                  </a:txBody>
-                  <a:tcPr marL="91440" marR="91440" marT="45720" marB="45720" anchor="ctr">
-                    <a:lnL w="6350" cap="flat" cmpd="sng" algn="ctr">
-                      <a:solidFill>
-                        <a:srgbClr val="DAD9D4"/>
-                      </a:solidFill>
-                      <a:prstDash val="solid"/>
-                      <a:round/>
-                      <a:headEnd type="none" w="med" len="med"/>
-                      <a:tailEnd type="none" w="med" len="med"/>
-                    </a:lnL>
-                    <a:lnR w="6350" cap="flat" cmpd="sng" algn="ctr">
-                      <a:solidFill>
-                        <a:srgbClr val="DAD9D4"/>
-                      </a:solidFill>
-                      <a:prstDash val="solid"/>
-                      <a:round/>
-                      <a:headEnd type="none" w="med" len="med"/>
-                      <a:tailEnd type="none" w="med" len="med"/>
-                    </a:lnR>
-                    <a:lnT w="6350" cap="flat" cmpd="sng" algn="ctr">
-                      <a:solidFill>
-                        <a:srgbClr val="DAD9D4"/>
-                      </a:solidFill>
-                      <a:prstDash val="solid"/>
-                      <a:round/>
-                      <a:headEnd type="none" w="med" len="med"/>
-                      <a:tailEnd type="none" w="med" len="med"/>
-                    </a:lnT>
-                    <a:lnB w="6350" cap="flat" cmpd="sng" algn="ctr">
-                      <a:solidFill>
-                        <a:srgbClr val="DAD9D4"/>
-                      </a:solidFill>
-                      <a:prstDash val="solid"/>
-                      <a:round/>
-                      <a:headEnd type="none" w="med" len="med"/>
-                      <a:tailEnd type="none" w="med" len="med"/>
-                    </a:lnB>
-                    <a:solidFill>
-                      <a:srgbClr val="F3F3F1"/>
-                    </a:solidFill>
-                  </a:tcPr>
-                </a:tc>
-                <a:tc>
-                  <a:txBody>
-                    <a:bodyPr/>
-                    <a:lstStyle/>
-                    <a:p>
-                      <a:pPr latinLnBrk="0" algn="l" indent="0" marL="0">
-                        <a:buNone/>
-                      </a:pPr>
-                      <a:r>
-                        <a:rPr lang="ko-KR" sz="1050" b="1" dirty="0">
-                          <a:solidFill>
-                            <a:srgbClr val="0B0B0B"/>
-                          </a:solidFill>
-                          <a:latin typeface="Pretendard" pitchFamily="34" charset="0"/>
-                          <a:ea typeface="Pretendard" pitchFamily="34" charset="-122"/>
-                          <a:cs typeface="Pretendard" pitchFamily="34" charset="-120"/>
-                        </a:rPr>
-                        <a:t>선택</a:t>
-                      </a:r>
-                      <a:endParaRPr lang="ko-KR" sz="1050" dirty="0">
-                        <a:latin typeface="Pretendard" charset="0"/>
-                        <a:ea typeface="Pretendard" charset="0"/>
-                        <a:cs typeface="Pretendard" charset="0"/>
-                      </a:endParaRPr>
-                    </a:p>
-                  </a:txBody>
-                  <a:tcPr marL="91440" marR="91440" marT="45720" marB="45720" anchor="ctr">
-                    <a:lnL w="6350" cap="flat" cmpd="sng" algn="ctr">
-                      <a:solidFill>
-                        <a:srgbClr val="DAD9D4"/>
-                      </a:solidFill>
-                      <a:prstDash val="solid"/>
-                      <a:round/>
-                      <a:headEnd type="none" w="med" len="med"/>
-                      <a:tailEnd type="none" w="med" len="med"/>
-                    </a:lnL>
-                    <a:lnR w="6350" cap="flat" cmpd="sng" algn="ctr">
-                      <a:solidFill>
-                        <a:srgbClr val="DAD9D4"/>
-                      </a:solidFill>
-                      <a:prstDash val="solid"/>
-                      <a:round/>
-                      <a:headEnd type="none" w="med" len="med"/>
-                      <a:tailEnd type="none" w="med" len="med"/>
-                    </a:lnR>
-                    <a:lnT w="6350" cap="flat" cmpd="sng" algn="ctr">
-                      <a:solidFill>
-                        <a:srgbClr val="DAD9D4"/>
-                      </a:solidFill>
-                      <a:prstDash val="solid"/>
-                      <a:round/>
-                      <a:headEnd type="none" w="med" len="med"/>
-                      <a:tailEnd type="none" w="med" len="med"/>
-                    </a:lnT>
-                    <a:lnB w="6350" cap="flat" cmpd="sng" algn="ctr">
-                      <a:solidFill>
-                        <a:srgbClr val="DAD9D4"/>
-                      </a:solidFill>
-                      <a:prstDash val="solid"/>
-                      <a:round/>
-                      <a:headEnd type="none" w="med" len="med"/>
-                      <a:tailEnd type="none" w="med" len="med"/>
-                    </a:lnB>
-                    <a:solidFill>
-                      <a:srgbClr val="F3F3F1"/>
-                    </a:solidFill>
-                  </a:tcPr>
-                </a:tc>
-                <a:tc>
-                  <a:txBody>
-                    <a:bodyPr/>
-                    <a:lstStyle/>
-                    <a:p>
-                      <a:pPr latinLnBrk="0" algn="l" indent="0" marL="0">
-                        <a:buNone/>
-                      </a:pPr>
-                      <a:r>
-                        <a:rPr lang="ko-KR" sz="1050" b="1" dirty="0">
-                          <a:solidFill>
-                            <a:srgbClr val="0B0B0B"/>
-                          </a:solidFill>
-                          <a:latin typeface="Pretendard" pitchFamily="34" charset="0"/>
-                          <a:ea typeface="Pretendard" pitchFamily="34" charset="-122"/>
-                          <a:cs typeface="Pretendard" pitchFamily="34" charset="-120"/>
-                        </a:rPr>
-                        <a:t>근거</a:t>
-                      </a:r>
-                      <a:endParaRPr lang="ko-KR" sz="1050" dirty="0">
-                        <a:latin typeface="Pretendard" charset="0"/>
-                        <a:ea typeface="Pretendard" charset="0"/>
-                        <a:cs typeface="Pretendard" charset="0"/>
-                      </a:endParaRPr>
-                    </a:p>
-                  </a:txBody>
-                  <a:tcPr marL="91440" marR="91440" marT="45720" marB="45720" anchor="ctr">
-                    <a:lnL w="6350" cap="flat" cmpd="sng" algn="ctr">
-                      <a:solidFill>
-                        <a:srgbClr val="DAD9D4"/>
-                      </a:solidFill>
-                      <a:prstDash val="solid"/>
-                      <a:round/>
-                      <a:headEnd type="none" w="med" len="med"/>
-                      <a:tailEnd type="none" w="med" len="med"/>
-                    </a:lnL>
-                    <a:lnR w="6350" cap="flat" cmpd="sng" algn="ctr">
-                      <a:solidFill>
-                        <a:srgbClr val="DAD9D4"/>
-                      </a:solidFill>
-                      <a:prstDash val="solid"/>
-                      <a:round/>
-                      <a:headEnd type="none" w="med" len="med"/>
-                      <a:tailEnd type="none" w="med" len="med"/>
-                    </a:lnR>
-                    <a:lnT w="6350" cap="flat" cmpd="sng" algn="ctr">
-                      <a:solidFill>
-                        <a:srgbClr val="DAD9D4"/>
-                      </a:solidFill>
-                      <a:prstDash val="solid"/>
-                      <a:round/>
-                      <a:headEnd type="none" w="med" len="med"/>
-                      <a:tailEnd type="none" w="med" len="med"/>
-                    </a:lnT>
-                    <a:lnB w="6350" cap="flat" cmpd="sng" algn="ctr">
-                      <a:solidFill>
-                        <a:srgbClr val="DAD9D4"/>
-                      </a:solidFill>
-                      <a:prstDash val="solid"/>
-                      <a:round/>
-                      <a:headEnd type="none" w="med" len="med"/>
-                      <a:tailEnd type="none" w="med" len="med"/>
-                    </a:lnB>
-                    <a:solidFill>
-                      <a:srgbClr val="F3F3F1"/>
-                    </a:solidFill>
-                  </a:tcPr>
-                </a:tc>
-              </a:tr>
-              <a:tr h="274320">
-                <a:tc>
-                  <a:txBody>
-                    <a:bodyPr/>
-                    <a:lstStyle/>
-                    <a:p>
-                      <a:pPr latinLnBrk="0" algn="l" indent="0" marL="0">
-                        <a:buNone/>
-                      </a:pPr>
-                      <a:r>
-                        <a:rPr lang="ko-KR" sz="1050" dirty="0">
-                          <a:solidFill>
-                            <a:srgbClr val="0B0B0B"/>
-                          </a:solidFill>
-                          <a:latin typeface="Pretendard" pitchFamily="34" charset="0"/>
-                          <a:ea typeface="Pretendard" pitchFamily="34" charset="-122"/>
-                          <a:cs typeface="Pretendard" pitchFamily="34" charset="-120"/>
-                        </a:rPr>
-                        <a:t>라벨 없는</a:t>
-                      </a:r>
-                      <a:br/>
-                      <a:pPr latinLnBrk="0" algn="l" indent="0" marL="0">
-                        <a:buNone/>
-                      </a:pPr>
-                      <a:r>
-                        <a:rPr lang="ko-KR" sz="1050" dirty="0">
-                          <a:solidFill>
-                            <a:srgbClr val="0B0B0B"/>
-                          </a:solidFill>
-                          <a:latin typeface="Pretendard" pitchFamily="34" charset="0"/>
-                          <a:ea typeface="Pretendard" pitchFamily="34" charset="-122"/>
-                          <a:cs typeface="Pretendard" pitchFamily="34" charset="-120"/>
-                        </a:rPr>
-                        <a:t>638,507장</a:t>
-                      </a:r>
-                      <a:endParaRPr lang="ko-KR" sz="1050" dirty="0">
-                        <a:latin typeface="Pretendard" charset="0"/>
-                        <a:ea typeface="Pretendard" charset="0"/>
-                        <a:cs typeface="Pretendard" charset="0"/>
-                      </a:endParaRPr>
-                    </a:p>
-                  </a:txBody>
-                  <a:tcPr marL="91440" marR="91440" marT="45720" marB="45720" anchor="ctr">
-                    <a:lnL w="6350" cap="flat" cmpd="sng" algn="ctr">
-                      <a:solidFill>
-                        <a:srgbClr val="DAD9D4"/>
-                      </a:solidFill>
-                      <a:prstDash val="solid"/>
-                      <a:round/>
-                      <a:headEnd type="none" w="med" len="med"/>
-                      <a:tailEnd type="none" w="med" len="med"/>
-                    </a:lnL>
-                    <a:lnR w="6350" cap="flat" cmpd="sng" algn="ctr">
-                      <a:solidFill>
-                        <a:srgbClr val="DAD9D4"/>
-                      </a:solidFill>
-                      <a:prstDash val="solid"/>
-                      <a:round/>
-                      <a:headEnd type="none" w="med" len="med"/>
-                      <a:tailEnd type="none" w="med" len="med"/>
-                    </a:lnR>
-                    <a:lnT w="6350" cap="flat" cmpd="sng" algn="ctr">
-                      <a:solidFill>
-                        <a:srgbClr val="DAD9D4"/>
-                      </a:solidFill>
-                      <a:prstDash val="solid"/>
-                      <a:round/>
-                      <a:headEnd type="none" w="med" len="med"/>
-                      <a:tailEnd type="none" w="med" len="med"/>
-                    </a:lnT>
-                    <a:lnB w="6350" cap="flat" cmpd="sng" algn="ctr">
-                      <a:solidFill>
-                        <a:srgbClr val="DAD9D4"/>
-                      </a:solidFill>
-                      <a:prstDash val="solid"/>
-                      <a:round/>
-                      <a:headEnd type="none" w="med" len="med"/>
-                      <a:tailEnd type="none" w="med" len="med"/>
-                    </a:lnB>
-                    <a:solidFill>
-                      <a:srgbClr val="FFFFFF"/>
-                    </a:solidFill>
-                  </a:tcPr>
-                </a:tc>
-                <a:tc>
-                  <a:txBody>
-                    <a:bodyPr/>
-                    <a:lstStyle/>
-                    <a:p>
-                      <a:pPr latinLnBrk="0" algn="l" indent="0" marL="0">
-                        <a:buNone/>
-                      </a:pPr>
-                      <a:r>
-                        <a:rPr lang="ko-KR" sz="1050" dirty="0">
-                          <a:solidFill>
-                            <a:srgbClr val="0B0B0B"/>
-                          </a:solidFill>
-                          <a:latin typeface="Pretendard" pitchFamily="34" charset="0"/>
-                          <a:ea typeface="Pretendard" pitchFamily="34" charset="-122"/>
-                          <a:cs typeface="Pretendard" pitchFamily="34" charset="-120"/>
-                        </a:rPr>
-                        <a:t>제외</a:t>
-                      </a:r>
-                      <a:endParaRPr lang="ko-KR" sz="1050" dirty="0">
-                        <a:latin typeface="Pretendard" charset="0"/>
-                        <a:ea typeface="Pretendard" charset="0"/>
-                        <a:cs typeface="Pretendard" charset="0"/>
-                      </a:endParaRPr>
-                    </a:p>
-                  </a:txBody>
-                  <a:tcPr marL="91440" marR="91440" marT="45720" marB="45720" anchor="ctr">
-                    <a:lnL w="6350" cap="flat" cmpd="sng" algn="ctr">
-                      <a:solidFill>
-                        <a:srgbClr val="DAD9D4"/>
-                      </a:solidFill>
-                      <a:prstDash val="solid"/>
-                      <a:round/>
-                      <a:headEnd type="none" w="med" len="med"/>
-                      <a:tailEnd type="none" w="med" len="med"/>
-                    </a:lnL>
-                    <a:lnR w="6350" cap="flat" cmpd="sng" algn="ctr">
-                      <a:solidFill>
-                        <a:srgbClr val="DAD9D4"/>
-                      </a:solidFill>
-                      <a:prstDash val="solid"/>
-                      <a:round/>
-                      <a:headEnd type="none" w="med" len="med"/>
-                      <a:tailEnd type="none" w="med" len="med"/>
-                    </a:lnR>
-                    <a:lnT w="6350" cap="flat" cmpd="sng" algn="ctr">
-                      <a:solidFill>
-                        <a:srgbClr val="DAD9D4"/>
-                      </a:solidFill>
-                      <a:prstDash val="solid"/>
-                      <a:round/>
-                      <a:headEnd type="none" w="med" len="med"/>
-                      <a:tailEnd type="none" w="med" len="med"/>
-                    </a:lnT>
-                    <a:lnB w="6350" cap="flat" cmpd="sng" algn="ctr">
-                      <a:solidFill>
-                        <a:srgbClr val="DAD9D4"/>
-                      </a:solidFill>
-                      <a:prstDash val="solid"/>
-                      <a:round/>
-                      <a:headEnd type="none" w="med" len="med"/>
-                      <a:tailEnd type="none" w="med" len="med"/>
-                    </a:lnB>
-                    <a:solidFill>
-                      <a:srgbClr val="FFFFFF"/>
-                    </a:solidFill>
-                  </a:tcPr>
-                </a:tc>
-                <a:tc>
-                  <a:txBody>
-                    <a:bodyPr/>
-                    <a:lstStyle/>
-                    <a:p>
-                      <a:pPr latinLnBrk="0" algn="l" indent="0" marL="0">
-                        <a:buNone/>
-                      </a:pPr>
-                      <a:r>
-                        <a:rPr lang="ko-KR" sz="1050" dirty="0">
-                          <a:solidFill>
-                            <a:srgbClr val="0B0B0B"/>
-                          </a:solidFill>
-                          <a:latin typeface="Pretendard" pitchFamily="34" charset="0"/>
-                          <a:ea typeface="Pretendard" pitchFamily="34" charset="-122"/>
-                          <a:cs typeface="Pretendard" pitchFamily="34" charset="-120"/>
-                        </a:rPr>
-                        <a:t>불량 0개 맵이 5.8만 장 등 분포가 다르고,</a:t>
-                      </a:r>
-                      <a:br/>
-                      <a:pPr latinLnBrk="0" algn="l" indent="0" marL="0">
-                        <a:buNone/>
-                      </a:pPr>
-                      <a:r>
-                        <a:rPr lang="ko-KR" sz="1050" dirty="0">
-                          <a:solidFill>
-                            <a:srgbClr val="0B0B0B"/>
-                          </a:solidFill>
-                          <a:latin typeface="Pretendard" pitchFamily="34" charset="0"/>
-                          <a:ea typeface="Pretendard" pitchFamily="34" charset="-122"/>
-                          <a:cs typeface="Pretendard" pitchFamily="34" charset="-120"/>
-                        </a:rPr>
-                        <a:t>평가 맵의 복사본 5,408장이 섞여 있음</a:t>
-                      </a:r>
-                      <a:endParaRPr lang="ko-KR" sz="1050" dirty="0">
-                        <a:latin typeface="Pretendard" charset="0"/>
-                        <a:ea typeface="Pretendard" charset="0"/>
-                        <a:cs typeface="Pretendard" charset="0"/>
-                      </a:endParaRPr>
-                    </a:p>
-                  </a:txBody>
-                  <a:tcPr marL="91440" marR="91440" marT="45720" marB="45720" anchor="ctr">
-                    <a:lnL w="6350" cap="flat" cmpd="sng" algn="ctr">
-                      <a:solidFill>
-                        <a:srgbClr val="DAD9D4"/>
-                      </a:solidFill>
-                      <a:prstDash val="solid"/>
-                      <a:round/>
-                      <a:headEnd type="none" w="med" len="med"/>
-                      <a:tailEnd type="none" w="med" len="med"/>
-                    </a:lnL>
-                    <a:lnR w="6350" cap="flat" cmpd="sng" algn="ctr">
-                      <a:solidFill>
-                        <a:srgbClr val="DAD9D4"/>
-                      </a:solidFill>
-                      <a:prstDash val="solid"/>
-                      <a:round/>
-                      <a:headEnd type="none" w="med" len="med"/>
-                      <a:tailEnd type="none" w="med" len="med"/>
-                    </a:lnR>
-                    <a:lnT w="6350" cap="flat" cmpd="sng" algn="ctr">
-                      <a:solidFill>
-                        <a:srgbClr val="DAD9D4"/>
-                      </a:solidFill>
-                      <a:prstDash val="solid"/>
-                      <a:round/>
-                      <a:headEnd type="none" w="med" len="med"/>
-                      <a:tailEnd type="none" w="med" len="med"/>
-                    </a:lnT>
-                    <a:lnB w="6350" cap="flat" cmpd="sng" algn="ctr">
-                      <a:solidFill>
-                        <a:srgbClr val="DAD9D4"/>
-                      </a:solidFill>
-                      <a:prstDash val="solid"/>
-                      <a:round/>
-                      <a:headEnd type="none" w="med" len="med"/>
-                      <a:tailEnd type="none" w="med" len="med"/>
-                    </a:lnB>
-                    <a:solidFill>
-                      <a:srgbClr val="FFFFFF"/>
-                    </a:solidFill>
-                  </a:tcPr>
-                </a:tc>
-              </a:tr>
-              <a:tr h="274320">
-                <a:tc>
-                  <a:txBody>
-                    <a:bodyPr/>
-                    <a:lstStyle/>
-                    <a:p>
-                      <a:pPr latinLnBrk="0" algn="l" indent="0" marL="0">
-                        <a:buNone/>
-                      </a:pPr>
-                      <a:r>
-                        <a:rPr lang="ko-KR" sz="1050" dirty="0">
-                          <a:solidFill>
-                            <a:srgbClr val="0B0B0B"/>
-                          </a:solidFill>
-                          <a:latin typeface="Pretendard" pitchFamily="34" charset="0"/>
-                          <a:ea typeface="Pretendard" pitchFamily="34" charset="-122"/>
-                          <a:cs typeface="Pretendard" pitchFamily="34" charset="-120"/>
-                        </a:rPr>
-                        <a:t>분할 오류 대응</a:t>
-                      </a:r>
-                      <a:endParaRPr lang="ko-KR" sz="1050" dirty="0">
-                        <a:latin typeface="Pretendard" charset="0"/>
-                        <a:ea typeface="Pretendard" charset="0"/>
-                        <a:cs typeface="Pretendard" charset="0"/>
-                      </a:endParaRPr>
-                    </a:p>
-                  </a:txBody>
-                  <a:tcPr marL="91440" marR="91440" marT="45720" marB="45720" anchor="ctr">
-                    <a:lnL w="6350" cap="flat" cmpd="sng" algn="ctr">
-                      <a:solidFill>
-                        <a:srgbClr val="DAD9D4"/>
-                      </a:solidFill>
-                      <a:prstDash val="solid"/>
-                      <a:round/>
-                      <a:headEnd type="none" w="med" len="med"/>
-                      <a:tailEnd type="none" w="med" len="med"/>
-                    </a:lnL>
-                    <a:lnR w="6350" cap="flat" cmpd="sng" algn="ctr">
-                      <a:solidFill>
-                        <a:srgbClr val="DAD9D4"/>
-                      </a:solidFill>
-                      <a:prstDash val="solid"/>
-                      <a:round/>
-                      <a:headEnd type="none" w="med" len="med"/>
-                      <a:tailEnd type="none" w="med" len="med"/>
-                    </a:lnR>
-                    <a:lnT w="6350" cap="flat" cmpd="sng" algn="ctr">
-                      <a:solidFill>
-                        <a:srgbClr val="DAD9D4"/>
-                      </a:solidFill>
-                      <a:prstDash val="solid"/>
-                      <a:round/>
-                      <a:headEnd type="none" w="med" len="med"/>
-                      <a:tailEnd type="none" w="med" len="med"/>
-                    </a:lnT>
-                    <a:lnB w="6350" cap="flat" cmpd="sng" algn="ctr">
-                      <a:solidFill>
-                        <a:srgbClr val="DAD9D4"/>
-                      </a:solidFill>
-                      <a:prstDash val="solid"/>
-                      <a:round/>
-                      <a:headEnd type="none" w="med" len="med"/>
-                      <a:tailEnd type="none" w="med" len="med"/>
-                    </a:lnB>
-                    <a:solidFill>
-                      <a:srgbClr val="FFFFFF"/>
-                    </a:solidFill>
-                  </a:tcPr>
-                </a:tc>
-                <a:tc>
-                  <a:txBody>
-                    <a:bodyPr/>
-                    <a:lstStyle/>
-                    <a:p>
-                      <a:pPr latinLnBrk="0" algn="l" indent="0" marL="0">
-                        <a:buNone/>
-                      </a:pPr>
-                      <a:r>
-                        <a:rPr lang="ko-KR" sz="1050" dirty="0">
-                          <a:solidFill>
-                            <a:srgbClr val="0B0B0B"/>
-                          </a:solidFill>
-                          <a:latin typeface="Pretendard" pitchFamily="34" charset="0"/>
-                          <a:ea typeface="Pretendard" pitchFamily="34" charset="-122"/>
-                          <a:cs typeface="Pretendard" pitchFamily="34" charset="-120"/>
-                        </a:rPr>
-                        <a:t>절차 수정 후</a:t>
-                      </a:r>
-                      <a:br/>
-                      <a:pPr latinLnBrk="0" algn="l" indent="0" marL="0">
-                        <a:buNone/>
-                      </a:pPr>
-                      <a:r>
-                        <a:rPr lang="ko-KR" sz="1050" dirty="0">
-                          <a:solidFill>
-                            <a:srgbClr val="0B0B0B"/>
-                          </a:solidFill>
-                          <a:latin typeface="Pretendard" pitchFamily="34" charset="0"/>
-                          <a:ea typeface="Pretendard" pitchFamily="34" charset="-122"/>
-                          <a:cs typeface="Pretendard" pitchFamily="34" charset="-120"/>
-                        </a:rPr>
-                        <a:t>전부 재학습</a:t>
-                      </a:r>
-                      <a:endParaRPr lang="ko-KR" sz="1050" dirty="0">
-                        <a:latin typeface="Pretendard" charset="0"/>
-                        <a:ea typeface="Pretendard" charset="0"/>
-                        <a:cs typeface="Pretendard" charset="0"/>
-                      </a:endParaRPr>
-                    </a:p>
-                  </a:txBody>
-                  <a:tcPr marL="91440" marR="91440" marT="45720" marB="45720" anchor="ctr">
-                    <a:lnL w="6350" cap="flat" cmpd="sng" algn="ctr">
-                      <a:solidFill>
-                        <a:srgbClr val="DAD9D4"/>
-                      </a:solidFill>
-                      <a:prstDash val="solid"/>
-                      <a:round/>
-                      <a:headEnd type="none" w="med" len="med"/>
-                      <a:tailEnd type="none" w="med" len="med"/>
-                    </a:lnL>
-                    <a:lnR w="6350" cap="flat" cmpd="sng" algn="ctr">
-                      <a:solidFill>
-                        <a:srgbClr val="DAD9D4"/>
-                      </a:solidFill>
-                      <a:prstDash val="solid"/>
-                      <a:round/>
-                      <a:headEnd type="none" w="med" len="med"/>
-                      <a:tailEnd type="none" w="med" len="med"/>
-                    </a:lnR>
-                    <a:lnT w="6350" cap="flat" cmpd="sng" algn="ctr">
-                      <a:solidFill>
-                        <a:srgbClr val="DAD9D4"/>
-                      </a:solidFill>
-                      <a:prstDash val="solid"/>
-                      <a:round/>
-                      <a:headEnd type="none" w="med" len="med"/>
-                      <a:tailEnd type="none" w="med" len="med"/>
-                    </a:lnT>
-                    <a:lnB w="6350" cap="flat" cmpd="sng" algn="ctr">
-                      <a:solidFill>
-                        <a:srgbClr val="DAD9D4"/>
-                      </a:solidFill>
-                      <a:prstDash val="solid"/>
-                      <a:round/>
-                      <a:headEnd type="none" w="med" len="med"/>
-                      <a:tailEnd type="none" w="med" len="med"/>
-                    </a:lnB>
-                    <a:solidFill>
-                      <a:srgbClr val="FFFFFF"/>
-                    </a:solidFill>
-                  </a:tcPr>
-                </a:tc>
-                <a:tc>
-                  <a:txBody>
-                    <a:bodyPr/>
-                    <a:lstStyle/>
-                    <a:p>
-                      <a:pPr latinLnBrk="0" algn="l" indent="0" marL="0">
-                        <a:buNone/>
-                      </a:pPr>
-                      <a:r>
-                        <a:rPr lang="ko-KR" sz="1050" dirty="0">
-                          <a:solidFill>
-                            <a:srgbClr val="0B0B0B"/>
-                          </a:solidFill>
-                          <a:latin typeface="Pretendard" pitchFamily="34" charset="0"/>
-                          <a:ea typeface="Pretendard" pitchFamily="34" charset="-122"/>
-                          <a:cs typeface="Pretendard" pitchFamily="34" charset="-120"/>
-                        </a:rPr>
-                        <a:t>닮은 맵 묶음 규칙은 유지하고 fold</a:t>
-                      </a:r>
-                      <a:br/>
-                      <a:pPr latinLnBrk="0" algn="l" indent="0" marL="0">
-                        <a:buNone/>
-                      </a:pPr>
-                      <a:r>
-                        <a:rPr lang="ko-KR" sz="1050" dirty="0">
-                          <a:solidFill>
-                            <a:srgbClr val="0B0B0B"/>
-                          </a:solidFill>
-                          <a:latin typeface="Pretendard" pitchFamily="34" charset="0"/>
-                          <a:ea typeface="Pretendard" pitchFamily="34" charset="-122"/>
-                          <a:cs typeface="Pretendard" pitchFamily="34" charset="-120"/>
-                        </a:rPr>
-                        <a:t>배정만 무작위로. 이전 결과는</a:t>
-                      </a:r>
-                      <a:br/>
-                      <a:pPr latinLnBrk="0" algn="l" indent="0" marL="0">
-                        <a:buNone/>
-                      </a:pPr>
-                      <a:r>
-                        <a:rPr lang="ko-KR" sz="1050" dirty="0">
-                          <a:solidFill>
-                            <a:srgbClr val="0B0B0B"/>
-                          </a:solidFill>
-                          <a:latin typeface="Pretendard" pitchFamily="34" charset="0"/>
-                          <a:ea typeface="Pretendard" pitchFamily="34" charset="-122"/>
-                          <a:cs typeface="Pretendard" pitchFamily="34" charset="-120"/>
-                        </a:rPr>
-                        <a:t>'편향된 분할'로 표시해 남김</a:t>
-                      </a:r>
-                      <a:endParaRPr lang="ko-KR" sz="1050" dirty="0">
-                        <a:latin typeface="Pretendard" charset="0"/>
-                        <a:ea typeface="Pretendard" charset="0"/>
-                        <a:cs typeface="Pretendard" charset="0"/>
-                      </a:endParaRPr>
-                    </a:p>
-                  </a:txBody>
-                  <a:tcPr marL="91440" marR="91440" marT="45720" marB="45720" anchor="ctr">
-                    <a:lnL w="6350" cap="flat" cmpd="sng" algn="ctr">
-                      <a:solidFill>
-                        <a:srgbClr val="DAD9D4"/>
-                      </a:solidFill>
-                      <a:prstDash val="solid"/>
-                      <a:round/>
-                      <a:headEnd type="none" w="med" len="med"/>
-                      <a:tailEnd type="none" w="med" len="med"/>
-                    </a:lnL>
-                    <a:lnR w="6350" cap="flat" cmpd="sng" algn="ctr">
-                      <a:solidFill>
-                        <a:srgbClr val="DAD9D4"/>
-                      </a:solidFill>
-                      <a:prstDash val="solid"/>
-                      <a:round/>
-                      <a:headEnd type="none" w="med" len="med"/>
-                      <a:tailEnd type="none" w="med" len="med"/>
-                    </a:lnR>
-                    <a:lnT w="6350" cap="flat" cmpd="sng" algn="ctr">
-                      <a:solidFill>
-                        <a:srgbClr val="DAD9D4"/>
-                      </a:solidFill>
-                      <a:prstDash val="solid"/>
-                      <a:round/>
-                      <a:headEnd type="none" w="med" len="med"/>
-                      <a:tailEnd type="none" w="med" len="med"/>
-                    </a:lnT>
-                    <a:lnB w="6350" cap="flat" cmpd="sng" algn="ctr">
-                      <a:solidFill>
-                        <a:srgbClr val="DAD9D4"/>
-                      </a:solidFill>
-                      <a:prstDash val="solid"/>
-                      <a:round/>
-                      <a:headEnd type="none" w="med" len="med"/>
-                      <a:tailEnd type="none" w="med" len="med"/>
-                    </a:lnB>
-                    <a:solidFill>
-                      <a:srgbClr val="FFFFFF"/>
-                    </a:solidFill>
-                  </a:tcPr>
-                </a:tc>
-              </a:tr>
-            </a:tbl>
-          </a:graphicData>
-        </a:graphic>
-      </p:graphicFrame>
       <p:sp>
         <p:nvSpPr>
-          <p:cNvPr id="12" name="Text 9"/>
+          <p:cNvPr id="11" name="Text 9"/>
           <p:cNvSpPr txBox="1"/>
           <p:nvPr/>
         </p:nvSpPr>
         <p:spPr>
           <a:xfrm>
-            <a:off x="6400800" y="2103120"/>
-            <a:ext cx="5148072" cy="274320"/>
+            <a:off x="640080" y="4297680"/>
+            <a:ext cx="5486400" cy="274320"/>
           </a:xfrm>
           <a:prstGeom prst="rect">
             <a:avLst/>
@@ -10875,14 +8951,14 @@
       </p:sp>
       <p:sp>
         <p:nvSpPr>
-          <p:cNvPr id="13" name="Shape 10"/>
+          <p:cNvPr id="12" name="Shape 10"/>
           <p:cNvSpPr/>
           <p:nvPr/>
         </p:nvSpPr>
         <p:spPr>
           <a:xfrm>
-            <a:off x="6400800" y="2423160"/>
-            <a:ext cx="5148072" cy="365760"/>
+            <a:off x="640080" y="4617720"/>
+            <a:ext cx="5486400" cy="365760"/>
           </a:xfrm>
           <a:prstGeom prst="roundRect">
             <a:avLst>
@@ -10902,14 +8978,14 @@
       </p:sp>
       <p:sp>
         <p:nvSpPr>
-          <p:cNvPr id="14" name="Text 11"/>
+          <p:cNvPr id="13" name="Text 11"/>
           <p:cNvSpPr txBox="1"/>
           <p:nvPr/>
         </p:nvSpPr>
         <p:spPr>
           <a:xfrm>
-            <a:off x="6537960" y="2423160"/>
-            <a:ext cx="4873752" cy="365760"/>
+            <a:off x="777240" y="4617720"/>
+            <a:ext cx="5212080" cy="365760"/>
           </a:xfrm>
           <a:prstGeom prst="rect">
             <a:avLst/>
@@ -10947,7 +9023,7 @@
                 <a:ea typeface="Pretendard" pitchFamily="34" charset="-122"/>
                 <a:cs typeface="Pretendard" pitchFamily="34" charset="-120"/>
               </a:rPr>
-              <a:t>문제 정의 · 성공 기준 · 지시문 작성</a:t>
+              <a:t>문제 정의 · 성공 기준 · 지시문</a:t>
             </a:r>
             <a:endParaRPr lang="ko-KR" sz="1250" dirty="0"/>
           </a:p>
@@ -10955,13 +9031,13 @@
       </p:sp>
       <p:sp>
         <p:nvSpPr>
-          <p:cNvPr id="15" name="Text 12"/>
+          <p:cNvPr id="14" name="Text 12"/>
           <p:cNvSpPr txBox="1"/>
           <p:nvPr/>
         </p:nvSpPr>
         <p:spPr>
           <a:xfrm>
-            <a:off x="8837676" y="2761488"/>
+            <a:off x="3246120" y="4956048"/>
             <a:ext cx="274320" cy="146304"/>
           </a:xfrm>
           <a:prstGeom prst="rect">
@@ -10994,14 +9070,14 @@
       </p:sp>
       <p:sp>
         <p:nvSpPr>
-          <p:cNvPr id="16" name="Shape 13"/>
+          <p:cNvPr id="15" name="Shape 13"/>
           <p:cNvSpPr/>
           <p:nvPr/>
         </p:nvSpPr>
         <p:spPr>
           <a:xfrm>
-            <a:off x="6400800" y="2898648"/>
-            <a:ext cx="5148072" cy="365760"/>
+            <a:off x="640080" y="5074920"/>
+            <a:ext cx="5486400" cy="365760"/>
           </a:xfrm>
           <a:prstGeom prst="roundRect">
             <a:avLst>
@@ -11021,14 +9097,14 @@
       </p:sp>
       <p:sp>
         <p:nvSpPr>
-          <p:cNvPr id="17" name="Text 14"/>
+          <p:cNvPr id="16" name="Text 14"/>
           <p:cNvSpPr txBox="1"/>
           <p:nvPr/>
         </p:nvSpPr>
         <p:spPr>
           <a:xfrm>
-            <a:off x="6537960" y="2898648"/>
-            <a:ext cx="4873752" cy="365760"/>
+            <a:off x="777240" y="5074920"/>
+            <a:ext cx="5212080" cy="365760"/>
           </a:xfrm>
           <a:prstGeom prst="rect">
             <a:avLst/>
@@ -11066,7 +9142,7 @@
                 <a:ea typeface="Pretendard" pitchFamily="34" charset="-122"/>
                 <a:cs typeface="Pretendard" pitchFamily="34" charset="-120"/>
               </a:rPr>
-              <a:t>구현 · 실험 · 선택지와 근거 제시</a:t>
+              <a:t>구현 · 실험 · 선택지 제시</a:t>
             </a:r>
             <a:endParaRPr lang="ko-KR" sz="1250" dirty="0"/>
           </a:p>
@@ -11074,13 +9150,13 @@
       </p:sp>
       <p:sp>
         <p:nvSpPr>
-          <p:cNvPr id="18" name="Text 15"/>
+          <p:cNvPr id="17" name="Text 15"/>
           <p:cNvSpPr txBox="1"/>
           <p:nvPr/>
         </p:nvSpPr>
         <p:spPr>
           <a:xfrm>
-            <a:off x="8837676" y="3236976"/>
+            <a:off x="3246120" y="5413248"/>
             <a:ext cx="274320" cy="146304"/>
           </a:xfrm>
           <a:prstGeom prst="rect">
@@ -11113,14 +9189,14 @@
       </p:sp>
       <p:sp>
         <p:nvSpPr>
-          <p:cNvPr id="19" name="Shape 16"/>
+          <p:cNvPr id="18" name="Shape 16"/>
           <p:cNvSpPr/>
           <p:nvPr/>
         </p:nvSpPr>
         <p:spPr>
           <a:xfrm>
-            <a:off x="6400800" y="3374136"/>
-            <a:ext cx="5148072" cy="365760"/>
+            <a:off x="640080" y="5532120"/>
+            <a:ext cx="5486400" cy="365760"/>
           </a:xfrm>
           <a:prstGeom prst="roundRect">
             <a:avLst>
@@ -11140,14 +9216,14 @@
       </p:sp>
       <p:sp>
         <p:nvSpPr>
-          <p:cNvPr id="20" name="Text 17"/>
+          <p:cNvPr id="19" name="Text 17"/>
           <p:cNvSpPr txBox="1"/>
           <p:nvPr/>
         </p:nvSpPr>
         <p:spPr>
           <a:xfrm>
-            <a:off x="6537960" y="3374136"/>
-            <a:ext cx="4873752" cy="365760"/>
+            <a:off x="777240" y="5532120"/>
+            <a:ext cx="5212080" cy="365760"/>
           </a:xfrm>
           <a:prstGeom prst="rect">
             <a:avLst/>
@@ -11171,7 +9247,7 @@
                 <a:ea typeface="Pretendard" pitchFamily="34" charset="-122"/>
                 <a:cs typeface="Pretendard" pitchFamily="34" charset="-120"/>
               </a:rPr>
-              <a:t>검증 에이전트 (별도 세션)   </a:t>
+              <a:t>검증 에이전트   </a:t>
             </a:r>
             <a:pPr latinLnBrk="0" indent="0" marL="0">
               <a:buNone/>
@@ -11193,13 +9269,13 @@
       </p:sp>
       <p:sp>
         <p:nvSpPr>
-          <p:cNvPr id="21" name="Text 18"/>
+          <p:cNvPr id="20" name="Text 18"/>
           <p:cNvSpPr txBox="1"/>
           <p:nvPr/>
         </p:nvSpPr>
         <p:spPr>
           <a:xfrm>
-            <a:off x="8837676" y="3712464"/>
+            <a:off x="3246120" y="5870448"/>
             <a:ext cx="274320" cy="146304"/>
           </a:xfrm>
           <a:prstGeom prst="rect">
@@ -11232,14 +9308,14 @@
       </p:sp>
       <p:sp>
         <p:nvSpPr>
-          <p:cNvPr id="22" name="Shape 19"/>
+          <p:cNvPr id="21" name="Shape 19"/>
           <p:cNvSpPr/>
           <p:nvPr/>
         </p:nvSpPr>
         <p:spPr>
           <a:xfrm>
-            <a:off x="6400800" y="3849624"/>
-            <a:ext cx="5148072" cy="365760"/>
+            <a:off x="640080" y="5989320"/>
+            <a:ext cx="5486400" cy="365760"/>
           </a:xfrm>
           <a:prstGeom prst="roundRect">
             <a:avLst>
@@ -11259,14 +9335,14 @@
       </p:sp>
       <p:sp>
         <p:nvSpPr>
-          <p:cNvPr id="23" name="Text 20"/>
+          <p:cNvPr id="22" name="Text 20"/>
           <p:cNvSpPr txBox="1"/>
           <p:nvPr/>
         </p:nvSpPr>
         <p:spPr>
           <a:xfrm>
-            <a:off x="6537960" y="3849624"/>
-            <a:ext cx="4873752" cy="365760"/>
+            <a:off x="777240" y="5989320"/>
+            <a:ext cx="5212080" cy="365760"/>
           </a:xfrm>
           <a:prstGeom prst="rect">
             <a:avLst/>
@@ -11304,7 +9380,7 @@
                 <a:ea typeface="Pretendard" pitchFamily="34" charset="-122"/>
                 <a:cs typeface="Pretendard" pitchFamily="34" charset="-120"/>
               </a:rPr>
-              <a:t>체크포인트에서 판단 · 채택/폐기 · 기록</a:t>
+              <a:t>체크포인트에서 판단 · 기록</a:t>
             </a:r>
             <a:endParaRPr lang="ko-KR" sz="1250" dirty="0"/>
           </a:p>
@@ -11312,14 +9388,14 @@
       </p:sp>
       <p:sp>
         <p:nvSpPr>
-          <p:cNvPr id="24" name="Text 21"/>
+          <p:cNvPr id="23" name="Text 21"/>
           <p:cNvSpPr txBox="1"/>
           <p:nvPr/>
         </p:nvSpPr>
         <p:spPr>
           <a:xfrm>
-            <a:off x="6400800" y="4315968"/>
-            <a:ext cx="5148072" cy="256032"/>
+            <a:off x="6400800" y="2103120"/>
+            <a:ext cx="5148072" cy="274320"/>
           </a:xfrm>
           <a:prstGeom prst="rect">
             <a:avLst/>
@@ -11335,23 +9411,23 @@
               <a:buNone/>
             </a:pPr>
             <a:r>
-              <a:rPr lang="ko-KR" sz="1000" dirty="0">
+              <a:rPr lang="ko-KR" sz="1300" b="1" dirty="0">
                 <a:solidFill>
-                  <a:srgbClr val="52514E"/>
+                  <a:srgbClr val="0B0B0B"/>
                 </a:solidFill>
                 <a:latin typeface="Pretendard" pitchFamily="34" charset="0"/>
                 <a:ea typeface="Pretendard" pitchFamily="34" charset="-122"/>
                 <a:cs typeface="Pretendard" pitchFamily="34" charset="-120"/>
               </a:rPr>
-              <a:t>체크포인트 6개 · 판단 13건 · 검증 워크플로 10회(에이전트 45개) · 오류 15건 · 작업 시간 7시간 40분</a:t>
+              <a:t>체크포인트 3: AI의 제안과 내 결정</a:t>
             </a:r>
-            <a:endParaRPr lang="ko-KR" sz="1000" dirty="0"/>
+            <a:endParaRPr lang="ko-KR" sz="1300" dirty="0"/>
           </a:p>
         </p:txBody>
       </p:sp>
       <p:graphicFrame>
         <p:nvGraphicFramePr>
-          <p:cNvPr id="13" name="Table 1"/>
+          <p:cNvPr id="7" name="Table 0"/>
           <p:cNvGraphicFramePr>
             <a:graphicFrameLocks noGrp="1"/>
           </p:cNvGraphicFramePr>
@@ -11364,7 +9440,7 @@
           </p:nvPr>
         </p:nvGraphicFramePr>
         <p:xfrm>
-          <a:off x="6400800" y="4590288"/>
+          <a:off x="6400800" y="2395728"/>
           <a:ext cx="5148072" cy="914400"/>
         </p:xfrm>
         <a:graphic>
@@ -11385,7 +9461,7 @@
                         <a:buNone/>
                       </a:pPr>
                       <a:r>
-                        <a:rPr lang="ko-KR" sz="1050" b="1" dirty="0">
+                        <a:rPr lang="ko-KR" sz="1300" b="1" dirty="0">
                           <a:solidFill>
                             <a:srgbClr val="0B0B0B"/>
                           </a:solidFill>
@@ -11393,24 +9469,9 @@
                           <a:ea typeface="Pretendard" pitchFamily="34" charset="-122"/>
                           <a:cs typeface="Pretendard" pitchFamily="34" charset="-120"/>
                         </a:rPr>
-                        <a:t>체크포인트 3에서 AI가</a:t>
-                      </a:r>
-                      <a:br/>
-                      <a:pPr latinLnBrk="0" algn="l" indent="0" marL="0">
-                        <a:buNone/>
-                      </a:pPr>
-                      <a:r>
-                        <a:rPr lang="ko-KR" sz="1050" b="1" dirty="0">
-                          <a:solidFill>
-                            <a:srgbClr val="0B0B0B"/>
-                          </a:solidFill>
-                          <a:latin typeface="Pretendard" pitchFamily="34" charset="0"/>
-                          <a:ea typeface="Pretendard" pitchFamily="34" charset="-122"/>
-                          <a:cs typeface="Pretendard" pitchFamily="34" charset="-120"/>
-                        </a:rPr>
-                        <a:t>보고한 개선 방향 후보</a:t>
-                      </a:r>
-                      <a:endParaRPr lang="ko-KR" sz="1050" dirty="0">
+                        <a:t>AI가 보고한 개선 방향 후보</a:t>
+                      </a:r>
+                      <a:endParaRPr lang="ko-KR" sz="1300" dirty="0">
                         <a:latin typeface="Pretendard" charset="0"/>
                         <a:ea typeface="Pretendard" charset="0"/>
                         <a:cs typeface="Pretendard" charset="0"/>
@@ -11468,7 +9529,7 @@
                         <a:buNone/>
                       </a:pPr>
                       <a:r>
-                        <a:rPr lang="ko-KR" sz="1050" b="1" dirty="0">
+                        <a:rPr lang="ko-KR" sz="1300" b="1" dirty="0">
                           <a:solidFill>
                             <a:srgbClr val="0B0B0B"/>
                           </a:solidFill>
@@ -11478,7 +9539,7 @@
                         </a:rPr>
                         <a:t>내 결정 (판단 지점 8)</a:t>
                       </a:r>
-                      <a:endParaRPr lang="ko-KR" sz="1050" dirty="0">
+                      <a:endParaRPr lang="ko-KR" sz="1300" dirty="0">
                         <a:latin typeface="Pretendard" charset="0"/>
                         <a:ea typeface="Pretendard" charset="0"/>
                         <a:cs typeface="Pretendard" charset="0"/>
@@ -11538,7 +9599,7 @@
                         <a:buNone/>
                       </a:pPr>
                       <a:r>
-                        <a:rPr lang="ko-KR" sz="1050" dirty="0">
+                        <a:rPr lang="ko-KR" sz="1300" dirty="0">
                           <a:solidFill>
                             <a:srgbClr val="0B0B0B"/>
                           </a:solidFill>
@@ -11553,7 +9614,7 @@
                         <a:buNone/>
                       </a:pPr>
                       <a:r>
-                        <a:rPr lang="ko-KR" sz="1050" dirty="0">
+                        <a:rPr lang="ko-KR" sz="1300" dirty="0">
                           <a:solidFill>
                             <a:srgbClr val="0B0B0B"/>
                           </a:solidFill>
@@ -11561,14 +9622,14 @@
                           <a:ea typeface="Pretendard" pitchFamily="34" charset="-122"/>
                           <a:cs typeface="Pretendard" pitchFamily="34" charset="-120"/>
                         </a:rPr>
-                        <a:t>회전·반전 증강. 약한 패턴은 모양·위치가</a:t>
+                        <a:t>회전·반전 증강. 손으로 만든 특징은</a:t>
                       </a:r>
                       <a:br/>
                       <a:pPr latinLnBrk="0" algn="l" indent="0" marL="0">
                         <a:buNone/>
                       </a:pPr>
                       <a:r>
-                        <a:rPr lang="ko-KR" sz="1050" dirty="0">
+                        <a:rPr lang="ko-KR" sz="1300" dirty="0">
                           <a:solidFill>
                             <a:srgbClr val="0B0B0B"/>
                           </a:solidFill>
@@ -11576,14 +9637,14 @@
                           <a:ea typeface="Pretendard" pitchFamily="34" charset="-122"/>
                           <a:cs typeface="Pretendard" pitchFamily="34" charset="-120"/>
                         </a:rPr>
-                        <a:t>핵심인데 손으로 만든 특징은 이를</a:t>
+                        <a:t>모양·위치 정보를 뭉갬. ② 특징 강화</a:t>
                       </a:r>
                       <a:br/>
                       <a:pPr latinLnBrk="0" algn="l" indent="0" marL="0">
                         <a:buNone/>
                       </a:pPr>
                       <a:r>
-                        <a:rPr lang="ko-KR" sz="1050" dirty="0">
+                        <a:rPr lang="ko-KR" sz="1300" dirty="0">
                           <a:solidFill>
                             <a:srgbClr val="0B0B0B"/>
                           </a:solidFill>
@@ -11591,14 +9652,14 @@
                           <a:ea typeface="Pretendard" pitchFamily="34" charset="-122"/>
                           <a:cs typeface="Pretendard" pitchFamily="34" charset="-120"/>
                         </a:rPr>
-                        <a:t>뭉갬(덩어리 특징만 빼도 0.81 → 0.68).</a:t>
+                        <a:t>+ 부스팅: 가볍지만 개선 폭 제한.</a:t>
                       </a:r>
                       <a:br/>
                       <a:pPr latinLnBrk="0" algn="l" indent="0" marL="0">
                         <a:buNone/>
                       </a:pPr>
                       <a:r>
-                        <a:rPr lang="ko-KR" sz="1050" dirty="0">
+                        <a:rPr lang="ko-KR" sz="1300" dirty="0">
                           <a:solidFill>
                             <a:srgbClr val="0B0B0B"/>
                           </a:solidFill>
@@ -11606,14 +9667,14 @@
                           <a:ea typeface="Pretendard" pitchFamily="34" charset="-122"/>
                           <a:cs typeface="Pretendard" pitchFamily="34" charset="-120"/>
                         </a:rPr>
-                        <a:t>② 특징 강화 + 부스팅: 직선·국부 덩어리</a:t>
+                        <a:t>③ 사후 임계값 보정: 빠르지만 드문</a:t>
                       </a:r>
                       <a:br/>
                       <a:pPr latinLnBrk="0" algn="l" indent="0" marL="0">
                         <a:buNone/>
                       </a:pPr>
                       <a:r>
-                        <a:rPr lang="ko-KR" sz="1050" dirty="0">
+                        <a:rPr lang="ko-KR" sz="1300" dirty="0">
                           <a:solidFill>
                             <a:srgbClr val="0B0B0B"/>
                           </a:solidFill>
@@ -11621,39 +9682,9 @@
                           <a:ea typeface="Pretendard" pitchFamily="34" charset="-122"/>
                           <a:cs typeface="Pretendard" pitchFamily="34" charset="-120"/>
                         </a:rPr>
-                        <a:t>특징 추가. 가볍지만 개선 폭 제한. ③ 사후</a:t>
-                      </a:r>
-                      <a:br/>
-                      <a:pPr latinLnBrk="0" algn="l" indent="0" marL="0">
-                        <a:buNone/>
-                      </a:pPr>
-                      <a:r>
-                        <a:rPr lang="ko-KR" sz="1050" dirty="0">
-                          <a:solidFill>
-                            <a:srgbClr val="0B0B0B"/>
-                          </a:solidFill>
-                          <a:latin typeface="Pretendard" pitchFamily="34" charset="0"/>
-                          <a:ea typeface="Pretendard" pitchFamily="34" charset="-122"/>
-                          <a:cs typeface="Pretendard" pitchFamily="34" charset="-120"/>
-                        </a:rPr>
-                        <a:t>임계값 보정: val에서 패턴별 가중 조정.</a:t>
-                      </a:r>
-                      <a:br/>
-                      <a:pPr latinLnBrk="0" algn="l" indent="0" marL="0">
-                        <a:buNone/>
-                      </a:pPr>
-                      <a:r>
-                        <a:rPr lang="ko-KR" sz="1050" dirty="0">
-                          <a:solidFill>
-                            <a:srgbClr val="0B0B0B"/>
-                          </a:solidFill>
-                          <a:latin typeface="Pretendard" pitchFamily="34" charset="0"/>
-                          <a:ea typeface="Pretendard" pitchFamily="34" charset="-122"/>
-                          <a:cs typeface="Pretendard" pitchFamily="34" charset="-120"/>
-                        </a:rPr>
-                        <a:t>빠르지만 드문 패턴은 val 과적합 위험</a:t>
-                      </a:r>
-                      <a:endParaRPr lang="ko-KR" sz="1050" dirty="0">
+                        <a:t>패턴은 val 과적합 위험</a:t>
+                      </a:r>
+                      <a:endParaRPr lang="ko-KR" sz="1300" dirty="0">
                         <a:latin typeface="Pretendard" charset="0"/>
                         <a:ea typeface="Pretendard" charset="0"/>
                         <a:cs typeface="Pretendard" charset="0"/>
@@ -11711,7 +9742,7 @@
                         <a:buNone/>
                       </a:pPr>
                       <a:r>
-                        <a:rPr lang="ko-KR" sz="1050" dirty="0">
+                        <a:rPr lang="ko-KR" sz="1300" dirty="0">
                           <a:solidFill>
                             <a:srgbClr val="0B0B0B"/>
                           </a:solidFill>
@@ -11719,14 +9750,14 @@
                           <a:ea typeface="Pretendard" pitchFamily="34" charset="-122"/>
                           <a:cs typeface="Pretendard" pitchFamily="34" charset="-120"/>
                         </a:rPr>
-                        <a:t>①+③ 조합. 가중 없는 CE와 weighted</a:t>
+                        <a:t>①+③ 조합. weighted CE는</a:t>
                       </a:r>
                       <a:br/>
                       <a:pPr latinLnBrk="0" algn="l" indent="0" marL="0">
                         <a:buNone/>
                       </a:pPr>
                       <a:r>
-                        <a:rPr lang="ko-KR" sz="1050" dirty="0">
+                        <a:rPr lang="ko-KR" sz="1300" dirty="0">
                           <a:solidFill>
                             <a:srgbClr val="0B0B0B"/>
                           </a:solidFill>
@@ -11734,14 +9765,14 @@
                           <a:ea typeface="Pretendard" pitchFamily="34" charset="-122"/>
                           <a:cs typeface="Pretendard" pitchFamily="34" charset="-120"/>
                         </a:rPr>
-                        <a:t>CE를 같은 test에서 비교하고, 보정값은</a:t>
+                        <a:t>같은 test에서 비교해 결정하고</a:t>
                       </a:r>
                       <a:br/>
                       <a:pPr latinLnBrk="0" algn="l" indent="0" marL="0">
                         <a:buNone/>
                       </a:pPr>
                       <a:r>
-                        <a:rPr lang="ko-KR" sz="1050" dirty="0">
+                        <a:rPr lang="ko-KR" sz="1300" dirty="0">
                           <a:solidFill>
                             <a:srgbClr val="0B0B0B"/>
                           </a:solidFill>
@@ -11749,14 +9780,14 @@
                           <a:ea typeface="Pretendard" pitchFamily="34" charset="-122"/>
                           <a:cs typeface="Pretendard" pitchFamily="34" charset="-120"/>
                         </a:rPr>
-                        <a:t>val에서만 정함. 비교 기준은 test 최고</a:t>
+                        <a:t>보정값은 val에서만. 비교</a:t>
                       </a:r>
                       <a:br/>
                       <a:pPr latinLnBrk="0" algn="l" indent="0" marL="0">
                         <a:buNone/>
                       </a:pPr>
                       <a:r>
-                        <a:rPr lang="ko-KR" sz="1050" dirty="0">
+                        <a:rPr lang="ko-KR" sz="1300" dirty="0">
                           <a:solidFill>
                             <a:srgbClr val="0B0B0B"/>
                           </a:solidFill>
@@ -11764,14 +9795,14 @@
                           <a:ea typeface="Pretendard" pitchFamily="34" charset="-122"/>
                           <a:cs typeface="Pretendard" pitchFamily="34" charset="-120"/>
                         </a:rPr>
-                        <a:t>베이스라인(더 엄격한 쪽). 입력은 비등방</a:t>
+                        <a:t>기준은 test 최고 베이스라인.</a:t>
                       </a:r>
                       <a:br/>
                       <a:pPr latinLnBrk="0" algn="l" indent="0" marL="0">
                         <a:buNone/>
                       </a:pPr>
                       <a:r>
-                        <a:rPr lang="ko-KR" sz="1050" dirty="0">
+                        <a:rPr lang="ko-KR" sz="1300" dirty="0">
                           <a:solidFill>
                             <a:srgbClr val="0B0B0B"/>
                           </a:solidFill>
@@ -11779,14 +9810,14 @@
                           <a:ea typeface="Pretendard" pitchFamily="34" charset="-122"/>
                           <a:cs typeface="Pretendard" pitchFamily="34" charset="-120"/>
                         </a:rPr>
-                        <a:t>64×64 불량 보존 축소. 결과: weighted</a:t>
+                        <a:t>결과: weighted CE 0.825로</a:t>
                       </a:r>
                       <a:br/>
                       <a:pPr latinLnBrk="0" algn="l" indent="0" marL="0">
                         <a:buNone/>
                       </a:pPr>
                       <a:r>
-                        <a:rPr lang="ko-KR" sz="1050" dirty="0">
+                        <a:rPr lang="ko-KR" sz="1300" dirty="0">
                           <a:solidFill>
                             <a:srgbClr val="0B0B0B"/>
                           </a:solidFill>
@@ -11794,9 +9825,9 @@
                           <a:ea typeface="Pretendard" pitchFamily="34" charset="-122"/>
                           <a:cs typeface="Pretendard" pitchFamily="34" charset="-120"/>
                         </a:rPr>
-                        <a:t>CE는 0.825로 폐기, 보정 채택으로 0.909</a:t>
-                      </a:r>
-                      <a:endParaRPr lang="ko-KR" sz="1050" dirty="0">
+                        <a:t>폐기, 보정 채택 0.909</a:t>
+                      </a:r>
+                      <a:endParaRPr lang="ko-KR" sz="1300" dirty="0">
                         <a:latin typeface="Pretendard" charset="0"/>
                         <a:ea typeface="Pretendard" charset="0"/>
                         <a:cs typeface="Pretendard" charset="0"/>
@@ -11850,6 +9881,45 @@
           </a:graphicData>
         </a:graphic>
       </p:graphicFrame>
+      <p:sp>
+        <p:nvSpPr>
+          <p:cNvPr id="25" name="Text 22"/>
+          <p:cNvSpPr txBox="1"/>
+          <p:nvPr/>
+        </p:nvSpPr>
+        <p:spPr>
+          <a:xfrm>
+            <a:off x="6400800" y="5120640"/>
+            <a:ext cx="5148072" cy="274320"/>
+          </a:xfrm>
+          <a:prstGeom prst="rect">
+            <a:avLst/>
+          </a:prstGeom>
+          <a:noFill/>
+          <a:ln/>
+        </p:spPr>
+        <p:txBody>
+          <a:bodyPr wrap="square" lIns="0" tIns="0" rIns="0" bIns="0" rtlCol="0" anchor="t"/>
+          <a:lstStyle/>
+          <a:p>
+            <a:pPr latinLnBrk="0" indent="0" marL="0">
+              <a:buNone/>
+            </a:pPr>
+            <a:r>
+              <a:rPr lang="ko-KR" sz="1050" dirty="0">
+                <a:solidFill>
+                  <a:srgbClr val="52514E"/>
+                </a:solidFill>
+                <a:latin typeface="Pretendard" pitchFamily="34" charset="0"/>
+                <a:ea typeface="Pretendard" pitchFamily="34" charset="-122"/>
+                <a:cs typeface="Pretendard" pitchFamily="34" charset="-120"/>
+              </a:rPr>
+              <a:t>체크포인트 6개 · 판단 13건 · 워크플로 10회(에이전트 45개) · 오류 15건 · 작업 시간 7시간 40분</a:t>
+            </a:r>
+            <a:endParaRPr lang="ko-KR" sz="1050" dirty="0"/>
+          </a:p>
+        </p:txBody>
+      </p:sp>
     </p:spTree>
   </p:cSld>
   <p:clrMapOvr>
@@ -11972,7 +10042,7 @@
                 <a:ea typeface="Pretendard" pitchFamily="34" charset="-122"/>
                 <a:cs typeface="Pretendard" pitchFamily="34" charset="-120"/>
               </a:rPr>
-              <a:t>AI 활용 방식 ②  검증과 오류 적발</a:t>
+              <a:t>AI 활용 ②  검증과 오류 적발</a:t>
             </a:r>
             <a:endParaRPr lang="ko-KR" sz="2800" dirty="0"/>
           </a:p>
@@ -12014,25 +10084,7 @@
                 <a:ea typeface="Pretendard SemiBold" pitchFamily="34" charset="-122"/>
                 <a:cs typeface="Pretendard SemiBold" pitchFamily="34" charset="-120"/>
               </a:rPr>
-              <a:t>구현한 AI와 별개의 검증 에이전트 45개를 10회 돌려 AI가 낸 오류 15건 중 7건을 잡았고,</a:t>
-            </a:r>
-            <a:br/>
-            <a:pPr latinLnBrk="0" indent="0" marL="0">
-              <a:lnSpc>
-                <a:spcPts val="2600"/>
-              </a:lnSpc>
-              <a:buNone/>
-            </a:pPr>
-            <a:r>
-              <a:rPr lang="ko-KR" sz="1800" dirty="0">
-                <a:solidFill>
-                  <a:srgbClr val="1F4E9A"/>
-                </a:solidFill>
-                <a:latin typeface="Pretendard SemiBold" pitchFamily="34" charset="0"/>
-                <a:ea typeface="Pretendard SemiBold" pitchFamily="34" charset="-122"/>
-                <a:cs typeface="Pretendard SemiBold" pitchFamily="34" charset="-120"/>
-              </a:rPr>
-              <a:t>나머지 8건은 실행 전 검토와 커밋 전 대조 규칙에서 나왔습니다.</a:t>
+              <a:t>구현 AI와 별개의 검증 에이전트 45개가 AI의 오류 15건 중 7건을 잡았고, 8건은 자체 점검 규칙에서 나왔습니다.</a:t>
             </a:r>
             <a:endParaRPr lang="ko-KR" sz="1800" dirty="0"/>
           </a:p>
@@ -12071,7 +10123,7 @@
                 <a:ea typeface="Pretendard" pitchFamily="34" charset="-122"/>
                 <a:cs typeface="Pretendard" pitchFamily="34" charset="-120"/>
               </a:rPr>
-              <a:t>근거: LOG.md 오류 기록 E1~E15와 각 워크플로 결과 항목(15:11, 15:57, 16:55, 17:02, 17:39, 18:33, 20:57, 21:18, 23:0x, 00:03)</a:t>
+              <a:t>근거: LOG.md 오류 기록 E1~E15, 워크플로 결과 항목 10건</a:t>
             </a:r>
             <a:endParaRPr lang="ko-KR" sz="1000" dirty="0"/>
           </a:p>
@@ -12125,7 +10177,7 @@
         <p:spPr>
           <a:xfrm>
             <a:off x="640080" y="2103120"/>
-            <a:ext cx="5577840" cy="274320"/>
+            <a:ext cx="5486400" cy="274320"/>
           </a:xfrm>
           <a:prstGeom prst="rect">
             <a:avLst/>
@@ -12171,18 +10223,18 @@
         </p:nvGraphicFramePr>
         <p:xfrm>
           <a:off x="640080" y="2395728"/>
-          <a:ext cx="5577840" cy="914400"/>
+          <a:ext cx="5486400" cy="914400"/>
         </p:xfrm>
         <a:graphic>
           <a:graphicData uri="http://schemas.openxmlformats.org/drawingml/2006/table">
             <a:tbl>
               <a:tblPr/>
               <a:tblGrid>
+                <a:gridCol w="1554480"/>
+                <a:gridCol w="2560320"/>
                 <a:gridCol w="1371600"/>
-                <a:gridCol w="2651760"/>
-                <a:gridCol w="1554480"/>
               </a:tblGrid>
-              <a:tr h="365760">
+              <a:tr h="420624">
                 <a:tc>
                   <a:txBody>
                     <a:bodyPr/>
@@ -12192,7 +10244,7 @@
                         <a:buNone/>
                       </a:pPr>
                       <a:r>
-                        <a:rPr lang="ko-KR" sz="1100" b="1" dirty="0">
+                        <a:rPr lang="ko-KR" sz="1200" b="1" dirty="0">
                           <a:solidFill>
                             <a:srgbClr val="0B0B0B"/>
                           </a:solidFill>
@@ -12202,7 +10254,7 @@
                         </a:rPr>
                         <a:t>오류</a:t>
                       </a:r>
-                      <a:endParaRPr lang="ko-KR" sz="1100" dirty="0">
+                      <a:endParaRPr lang="ko-KR" sz="1200" dirty="0">
                         <a:latin typeface="Pretendard" charset="0"/>
                         <a:ea typeface="Pretendard" charset="0"/>
                         <a:cs typeface="Pretendard" charset="0"/>
@@ -12260,7 +10312,7 @@
                         <a:buNone/>
                       </a:pPr>
                       <a:r>
-                        <a:rPr lang="ko-KR" sz="1100" b="1" dirty="0">
+                        <a:rPr lang="ko-KR" sz="1200" b="1" dirty="0">
                           <a:solidFill>
                             <a:srgbClr val="0B0B0B"/>
                           </a:solidFill>
@@ -12270,7 +10322,7 @@
                         </a:rPr>
                         <a:t>어떻게 드러났나</a:t>
                       </a:r>
-                      <a:endParaRPr lang="ko-KR" sz="1100" dirty="0">
+                      <a:endParaRPr lang="ko-KR" sz="1200" dirty="0">
                         <a:latin typeface="Pretendard" charset="0"/>
                         <a:ea typeface="Pretendard" charset="0"/>
                         <a:cs typeface="Pretendard" charset="0"/>
@@ -12328,7 +10380,7 @@
                         <a:buNone/>
                       </a:pPr>
                       <a:r>
-                        <a:rPr lang="ko-KR" sz="1100" b="1" dirty="0">
+                        <a:rPr lang="ko-KR" sz="1200" b="1" dirty="0">
                           <a:solidFill>
                             <a:srgbClr val="0B0B0B"/>
                           </a:solidFill>
@@ -12338,7 +10390,7 @@
                         </a:rPr>
                         <a:t>조치</a:t>
                       </a:r>
-                      <a:endParaRPr lang="ko-KR" sz="1100" dirty="0">
+                      <a:endParaRPr lang="ko-KR" sz="1200" dirty="0">
                         <a:latin typeface="Pretendard" charset="0"/>
                         <a:ea typeface="Pretendard" charset="0"/>
                         <a:cs typeface="Pretendard" charset="0"/>
@@ -12388,7 +10440,7 @@
                   </a:tcPr>
                 </a:tc>
               </a:tr>
-              <a:tr h="365760">
+              <a:tr h="420624">
                 <a:tc>
                   <a:txBody>
                     <a:bodyPr/>
@@ -12398,7 +10450,7 @@
                         <a:buNone/>
                       </a:pPr>
                       <a:r>
-                        <a:rPr lang="ko-KR" sz="1100" dirty="0">
+                        <a:rPr lang="ko-KR" sz="1200" dirty="0">
                           <a:solidFill>
                             <a:srgbClr val="0B0B0B"/>
                           </a:solidFill>
@@ -12406,24 +10458,9 @@
                           <a:ea typeface="Pretendard" pitchFamily="34" charset="-122"/>
                           <a:cs typeface="Pretendard" pitchFamily="34" charset="-120"/>
                         </a:rPr>
-                        <a:t>E10 잘못된</a:t>
-                      </a:r>
-                      <a:br/>
-                      <a:pPr latinLnBrk="0" algn="l" indent="0" marL="0">
-                        <a:buNone/>
-                      </a:pPr>
-                      <a:r>
-                        <a:rPr lang="ko-KR" sz="1100" dirty="0">
-                          <a:solidFill>
-                            <a:srgbClr val="0B0B0B"/>
-                          </a:solidFill>
-                          <a:latin typeface="Pretendard" pitchFamily="34" charset="0"/>
-                          <a:ea typeface="Pretendard" pitchFamily="34" charset="-122"/>
-                          <a:cs typeface="Pretendard" pitchFamily="34" charset="-120"/>
-                        </a:rPr>
-                        <a:t>원인 가설</a:t>
-                      </a:r>
-                      <a:endParaRPr lang="ko-KR" sz="1100" dirty="0">
+                        <a:t>E10 잘못된 원인 가설</a:t>
+                      </a:r>
+                      <a:endParaRPr lang="ko-KR" sz="1200" dirty="0">
                         <a:latin typeface="Pretendard" charset="0"/>
                         <a:ea typeface="Pretendard" charset="0"/>
                         <a:cs typeface="Pretendard" charset="0"/>
@@ -12481,7 +10518,7 @@
                         <a:buNone/>
                       </a:pPr>
                       <a:r>
-                        <a:rPr lang="ko-KR" sz="1100" dirty="0">
+                        <a:rPr lang="ko-KR" sz="1200" dirty="0">
                           <a:solidFill>
                             <a:srgbClr val="0B0B0B"/>
                           </a:solidFill>
@@ -12489,14 +10526,14 @@
                           <a:ea typeface="Pretendard" pitchFamily="34" charset="-122"/>
                           <a:cs typeface="Pretendard" pitchFamily="34" charset="-120"/>
                         </a:rPr>
-                        <a:t>AI가 세운 가설(라벨이 다른 재검사 쌍의</a:t>
+                        <a:t>AI가 짠 진단 스크립트가</a:t>
                       </a:r>
                       <a:br/>
                       <a:pPr latinLnBrk="0" algn="l" indent="0" marL="0">
                         <a:buNone/>
                       </a:pPr>
                       <a:r>
-                        <a:rPr lang="ko-KR" sz="1100" dirty="0">
+                        <a:rPr lang="ko-KR" sz="1200" dirty="0">
                           <a:solidFill>
                             <a:srgbClr val="0B0B0B"/>
                           </a:solidFill>
@@ -12504,9 +10541,9 @@
                           <a:ea typeface="Pretendard" pitchFamily="34" charset="-122"/>
                           <a:cs typeface="Pretendard" pitchFamily="34" charset="-120"/>
                         </a:rPr>
-                        <a:t>역누수)을 AI가 짠 진단 스크립트가 반증</a:t>
-                      </a:r>
-                      <a:endParaRPr lang="ko-KR" sz="1100" dirty="0">
+                        <a:t>자기 가설을 반증</a:t>
+                      </a:r>
+                      <a:endParaRPr lang="ko-KR" sz="1200" dirty="0">
                         <a:latin typeface="Pretendard" charset="0"/>
                         <a:ea typeface="Pretendard" charset="0"/>
                         <a:cs typeface="Pretendard" charset="0"/>
@@ -12564,7 +10601,7 @@
                         <a:buNone/>
                       </a:pPr>
                       <a:r>
-                        <a:rPr lang="ko-KR" sz="1100" dirty="0">
+                        <a:rPr lang="ko-KR" sz="1200" dirty="0">
                           <a:solidFill>
                             <a:srgbClr val="0B0B0B"/>
                           </a:solidFill>
@@ -12572,24 +10609,9 @@
                           <a:ea typeface="Pretendard" pitchFamily="34" charset="-122"/>
                           <a:cs typeface="Pretendard" pitchFamily="34" charset="-120"/>
                         </a:rPr>
-                        <a:t>가설 철회, 원인 조사</a:t>
-                      </a:r>
-                      <a:br/>
-                      <a:pPr latinLnBrk="0" algn="l" indent="0" marL="0">
-                        <a:buNone/>
-                      </a:pPr>
-                      <a:r>
-                        <a:rPr lang="ko-KR" sz="1100" dirty="0">
-                          <a:solidFill>
-                            <a:srgbClr val="0B0B0B"/>
-                          </a:solidFill>
-                          <a:latin typeface="Pretendard" pitchFamily="34" charset="0"/>
-                          <a:ea typeface="Pretendard" pitchFamily="34" charset="-122"/>
-                          <a:cs typeface="Pretendard" pitchFamily="34" charset="-120"/>
-                        </a:rPr>
-                        <a:t>워크플로로 전환</a:t>
-                      </a:r>
-                      <a:endParaRPr lang="ko-KR" sz="1100" dirty="0">
+                        <a:t>가설 철회</a:t>
+                      </a:r>
+                      <a:endParaRPr lang="ko-KR" sz="1200" dirty="0">
                         <a:latin typeface="Pretendard" charset="0"/>
                         <a:ea typeface="Pretendard" charset="0"/>
                         <a:cs typeface="Pretendard" charset="0"/>
@@ -12639,7 +10661,7 @@
                   </a:tcPr>
                 </a:tc>
               </a:tr>
-              <a:tr h="365760">
+              <a:tr h="420624">
                 <a:tc>
                   <a:txBody>
                     <a:bodyPr/>
@@ -12649,7 +10671,7 @@
                         <a:buNone/>
                       </a:pPr>
                       <a:r>
-                        <a:rPr lang="ko-KR" sz="1100" dirty="0">
+                        <a:rPr lang="ko-KR" sz="1200" dirty="0">
                           <a:solidFill>
                             <a:srgbClr val="0B0B0B"/>
                           </a:solidFill>
@@ -12659,7 +10681,7 @@
                         </a:rPr>
                         <a:t>E11 분할 절차 오류</a:t>
                       </a:r>
-                      <a:endParaRPr lang="ko-KR" sz="1100" dirty="0">
+                      <a:endParaRPr lang="ko-KR" sz="1200" dirty="0">
                         <a:latin typeface="Pretendard" charset="0"/>
                         <a:ea typeface="Pretendard" charset="0"/>
                         <a:cs typeface="Pretendard" charset="0"/>
@@ -12717,7 +10739,7 @@
                         <a:buNone/>
                       </a:pPr>
                       <a:r>
-                        <a:rPr lang="ko-KR" sz="1100" dirty="0">
+                        <a:rPr lang="ko-KR" sz="1200" dirty="0">
                           <a:solidFill>
                             <a:srgbClr val="0B0B0B"/>
                           </a:solidFill>
@@ -12725,14 +10747,14 @@
                           <a:ea typeface="Pretendard" pitchFamily="34" charset="-122"/>
                           <a:cs typeface="Pretendard" pitchFamily="34" charset="-120"/>
                         </a:rPr>
-                        <a:t>반박 검증 에이전트가 scikit-learn</a:t>
+                        <a:t>반박 검증 에이전트가 sklearn</a:t>
                       </a:r>
                       <a:br/>
                       <a:pPr latinLnBrk="0" algn="l" indent="0" marL="0">
                         <a:buNone/>
                       </a:pPr>
                       <a:r>
-                        <a:rPr lang="ko-KR" sz="1100" dirty="0">
+                        <a:rPr lang="ko-KR" sz="1200" dirty="0">
                           <a:solidFill>
                             <a:srgbClr val="0B0B0B"/>
                           </a:solidFill>
@@ -12742,7 +10764,7 @@
                         </a:rPr>
                         <a:t>소스와 개입 실험으로 확인</a:t>
                       </a:r>
-                      <a:endParaRPr lang="ko-KR" sz="1100" dirty="0">
+                      <a:endParaRPr lang="ko-KR" sz="1200" dirty="0">
                         <a:latin typeface="Pretendard" charset="0"/>
                         <a:ea typeface="Pretendard" charset="0"/>
                         <a:cs typeface="Pretendard" charset="0"/>
@@ -12800,7 +10822,7 @@
                         <a:buNone/>
                       </a:pPr>
                       <a:r>
-                        <a:rPr lang="ko-KR" sz="1100" dirty="0">
+                        <a:rPr lang="ko-KR" sz="1200" dirty="0">
                           <a:solidFill>
                             <a:srgbClr val="0B0B0B"/>
                           </a:solidFill>
@@ -12815,7 +10837,7 @@
                         <a:buNone/>
                       </a:pPr>
                       <a:r>
-                        <a:rPr lang="ko-KR" sz="1100" dirty="0">
+                        <a:rPr lang="ko-KR" sz="1200" dirty="0">
                           <a:solidFill>
                             <a:srgbClr val="0B0B0B"/>
                           </a:solidFill>
@@ -12823,9 +10845,9 @@
                           <a:ea typeface="Pretendard" pitchFamily="34" charset="-122"/>
                           <a:cs typeface="Pretendard" pitchFamily="34" charset="-120"/>
                         </a:rPr>
-                        <a:t>모든 모델 재학습</a:t>
-                      </a:r>
-                      <a:endParaRPr lang="ko-KR" sz="1100" dirty="0">
+                        <a:t>전부 재학습</a:t>
+                      </a:r>
+                      <a:endParaRPr lang="ko-KR" sz="1200" dirty="0">
                         <a:latin typeface="Pretendard" charset="0"/>
                         <a:ea typeface="Pretendard" charset="0"/>
                         <a:cs typeface="Pretendard" charset="0"/>
@@ -12875,7 +10897,7 @@
                   </a:tcPr>
                 </a:tc>
               </a:tr>
-              <a:tr h="365760">
+              <a:tr h="420624">
                 <a:tc>
                   <a:txBody>
                     <a:bodyPr/>
@@ -12885,7 +10907,7 @@
                         <a:buNone/>
                       </a:pPr>
                       <a:r>
-                        <a:rPr lang="ko-KR" sz="1100" dirty="0">
+                        <a:rPr lang="ko-KR" sz="1200" dirty="0">
                           <a:solidFill>
                             <a:srgbClr val="0B0B0B"/>
                           </a:solidFill>
@@ -12895,7 +10917,7 @@
                         </a:rPr>
                         <a:t>E13 확률 열 버그</a:t>
                       </a:r>
-                      <a:endParaRPr lang="ko-KR" sz="1100" dirty="0">
+                      <a:endParaRPr lang="ko-KR" sz="1200" dirty="0">
                         <a:latin typeface="Pretendard" charset="0"/>
                         <a:ea typeface="Pretendard" charset="0"/>
                         <a:cs typeface="Pretendard" charset="0"/>
@@ -12953,7 +10975,7 @@
                         <a:buNone/>
                       </a:pPr>
                       <a:r>
-                        <a:rPr lang="ko-KR" sz="1100" dirty="0">
+                        <a:rPr lang="ko-KR" sz="1200" dirty="0">
                           <a:solidFill>
                             <a:srgbClr val="0B0B0B"/>
                           </a:solidFill>
@@ -12961,14 +10983,14 @@
                           <a:ea typeface="Pretendard" pitchFamily="34" charset="-122"/>
                           <a:cs typeface="Pretendard" pitchFamily="34" charset="-120"/>
                         </a:rPr>
-                        <a:t>지표 검증 에이전트가 예측 파일로</a:t>
+                        <a:t>지표 검증 에이전트가 보정</a:t>
                       </a:r>
                       <a:br/>
                       <a:pPr latinLnBrk="0" algn="l" indent="0" marL="0">
                         <a:buNone/>
                       </a:pPr>
                       <a:r>
-                        <a:rPr lang="ko-KR" sz="1100" dirty="0">
+                        <a:rPr lang="ko-KR" sz="1200" dirty="0">
                           <a:solidFill>
                             <a:srgbClr val="0B0B0B"/>
                           </a:solidFill>
@@ -12976,9 +10998,9 @@
                           <a:ea typeface="Pretendard" pitchFamily="34" charset="-122"/>
                           <a:cs typeface="Pretendard" pitchFamily="34" charset="-120"/>
                         </a:rPr>
-                        <a:t>보정 결과를 재현하다 발견</a:t>
-                      </a:r>
-                      <a:endParaRPr lang="ko-KR" sz="1100" dirty="0">
+                        <a:t>결과를 재현하다 발견</a:t>
+                      </a:r>
+                      <a:endParaRPr lang="ko-KR" sz="1200" dirty="0">
                         <a:latin typeface="Pretendard" charset="0"/>
                         <a:ea typeface="Pretendard" charset="0"/>
                         <a:cs typeface="Pretendard" charset="0"/>
@@ -13036,7 +11058,7 @@
                         <a:buNone/>
                       </a:pPr>
                       <a:r>
-                        <a:rPr lang="ko-KR" sz="1100" dirty="0">
+                        <a:rPr lang="ko-KR" sz="1200" dirty="0">
                           <a:solidFill>
                             <a:srgbClr val="0B0B0B"/>
                           </a:solidFill>
@@ -13044,24 +11066,9 @@
                           <a:ea typeface="Pretendard" pitchFamily="34" charset="-122"/>
                           <a:cs typeface="Pretendard" pitchFamily="34" charset="-120"/>
                         </a:rPr>
-                        <a:t>저장 로직 수정 후</a:t>
-                      </a:r>
-                      <a:br/>
-                      <a:pPr latinLnBrk="0" algn="l" indent="0" marL="0">
-                        <a:buNone/>
-                      </a:pPr>
-                      <a:r>
-                        <a:rPr lang="ko-KR" sz="1100" dirty="0">
-                          <a:solidFill>
-                            <a:srgbClr val="0B0B0B"/>
-                          </a:solidFill>
-                          <a:latin typeface="Pretendard" pitchFamily="34" charset="0"/>
-                          <a:ea typeface="Pretendard" pitchFamily="34" charset="-122"/>
-                          <a:cs typeface="Pretendard" pitchFamily="34" charset="-120"/>
-                        </a:rPr>
-                        <a:t>재평가, 지표 변화 없음</a:t>
-                      </a:r>
-                      <a:endParaRPr lang="ko-KR" sz="1100" dirty="0">
+                        <a:t>저장 로직 수정</a:t>
+                      </a:r>
+                      <a:endParaRPr lang="ko-KR" sz="1200" dirty="0">
                         <a:latin typeface="Pretendard" charset="0"/>
                         <a:ea typeface="Pretendard" charset="0"/>
                         <a:cs typeface="Pretendard" charset="0"/>
@@ -13115,45 +11122,6 @@
           </a:graphicData>
         </a:graphic>
       </p:graphicFrame>
-      <p:sp>
-        <p:nvSpPr>
-          <p:cNvPr id="10" name="Text 7"/>
-          <p:cNvSpPr txBox="1"/>
-          <p:nvPr/>
-        </p:nvSpPr>
-        <p:spPr>
-          <a:xfrm>
-            <a:off x="640080" y="4434840"/>
-            <a:ext cx="5577840" cy="274320"/>
-          </a:xfrm>
-          <a:prstGeom prst="rect">
-            <a:avLst/>
-          </a:prstGeom>
-          <a:noFill/>
-          <a:ln/>
-        </p:spPr>
-        <p:txBody>
-          <a:bodyPr wrap="square" lIns="0" tIns="0" rIns="0" bIns="0" rtlCol="0" anchor="t"/>
-          <a:lstStyle/>
-          <a:p>
-            <a:pPr latinLnBrk="0" indent="0" marL="0">
-              <a:buNone/>
-            </a:pPr>
-            <a:r>
-              <a:rPr lang="ko-KR" sz="1300" b="1" dirty="0">
-                <a:solidFill>
-                  <a:srgbClr val="0B0B0B"/>
-                </a:solidFill>
-                <a:latin typeface="Pretendard" pitchFamily="34" charset="0"/>
-                <a:ea typeface="Pretendard" pitchFamily="34" charset="-122"/>
-                <a:cs typeface="Pretendard" pitchFamily="34" charset="-120"/>
-              </a:rPr>
-              <a:t>산출물 반려</a:t>
-            </a:r>
-            <a:endParaRPr lang="ko-KR" sz="1300" dirty="0"/>
-          </a:p>
-        </p:txBody>
-      </p:sp>
       <p:graphicFrame>
         <p:nvGraphicFramePr>
           <p:cNvPr id="15" name="Table 1"/>
@@ -13169,287 +11137,56 @@
           </p:nvPr>
         </p:nvGraphicFramePr>
         <p:xfrm>
-          <a:off x="640080" y="4727448"/>
-          <a:ext cx="5577840" cy="914400"/>
+          <a:off x="640080" y="4572000"/>
+          <a:ext cx="5486400" cy="914400"/>
         </p:xfrm>
         <a:graphic>
           <a:graphicData uri="http://schemas.openxmlformats.org/drawingml/2006/table">
             <a:tbl>
               <a:tblPr/>
               <a:tblGrid>
-                <a:gridCol w="1188720"/>
-                <a:gridCol w="2286000"/>
-                <a:gridCol w="2103120"/>
+                <a:gridCol w="1097280"/>
+                <a:gridCol w="4389120"/>
               </a:tblGrid>
-              <a:tr h="365760">
+              <a:tr h="274320">
                 <a:tc>
                   <a:txBody>
                     <a:bodyPr/>
                     <a:lstStyle/>
                     <a:p>
-                      <a:pPr latinLnBrk="0" algn="l" indent="0" marL="0">
-                        <a:buNone/>
-                      </a:pPr>
-                      <a:r>
-                        <a:rPr lang="ko-KR" sz="1100" b="1" dirty="0">
-                          <a:solidFill>
-                            <a:srgbClr val="0B0B0B"/>
-                          </a:solidFill>
-                          <a:latin typeface="Pretendard" pitchFamily="34" charset="0"/>
-                          <a:ea typeface="Pretendard" pitchFamily="34" charset="-122"/>
-                          <a:cs typeface="Pretendard" pitchFamily="34" charset="-120"/>
-                        </a:rPr>
-                        <a:t>산출물</a:t>
-                      </a:r>
-                      <a:endParaRPr lang="ko-KR" sz="1100" dirty="0">
+                      <a:pPr latinLnBrk="0" indent="0" marL="0">
+                        <a:buNone/>
+                      </a:pPr>
+                      <a:r>
+                        <a:rPr lang="ko-KR" sz="1250" b="1" dirty="0">
+                          <a:solidFill>
+                            <a:srgbClr val="52514E"/>
+                          </a:solidFill>
+                          <a:latin typeface="Pretendard" pitchFamily="34" charset="0"/>
+                          <a:ea typeface="Pretendard" pitchFamily="34" charset="-122"/>
+                          <a:cs typeface="Pretendard" pitchFamily="34" charset="-120"/>
+                        </a:rPr>
+                        <a:t>산출물 반려</a:t>
+                      </a:r>
+                      <a:endParaRPr lang="ko-KR" sz="1250" dirty="0">
                         <a:latin typeface="Pretendard" charset="0"/>
                         <a:ea typeface="Pretendard" charset="0"/>
                         <a:cs typeface="Pretendard" charset="0"/>
                       </a:endParaRPr>
                     </a:p>
                   </a:txBody>
-                  <a:tcPr marL="91440" marR="91440" marT="45720" marB="45720" anchor="ctr">
-                    <a:lnL w="6350" cap="flat" cmpd="sng" algn="ctr">
-                      <a:solidFill>
-                        <a:srgbClr val="DAD9D4"/>
-                      </a:solidFill>
-                      <a:prstDash val="solid"/>
-                      <a:round/>
-                      <a:headEnd type="none" w="med" len="med"/>
-                      <a:tailEnd type="none" w="med" len="med"/>
+                  <a:tcPr marL="0" marR="54864" marT="36576" marB="45720" anchor="t">
+                    <a:lnL w="0" cap="flat" cmpd="sng" algn="ctr">
+                      <a:noFill/>
                     </a:lnL>
-                    <a:lnR w="6350" cap="flat" cmpd="sng" algn="ctr">
-                      <a:solidFill>
-                        <a:srgbClr val="DAD9D4"/>
-                      </a:solidFill>
-                      <a:prstDash val="solid"/>
-                      <a:round/>
-                      <a:headEnd type="none" w="med" len="med"/>
-                      <a:tailEnd type="none" w="med" len="med"/>
+                    <a:lnR w="0" cap="flat" cmpd="sng" algn="ctr">
+                      <a:noFill/>
                     </a:lnR>
-                    <a:lnT w="6350" cap="flat" cmpd="sng" algn="ctr">
-                      <a:solidFill>
-                        <a:srgbClr val="DAD9D4"/>
-                      </a:solidFill>
-                      <a:prstDash val="solid"/>
-                      <a:round/>
-                      <a:headEnd type="none" w="med" len="med"/>
-                      <a:tailEnd type="none" w="med" len="med"/>
+                    <a:lnT w="0" cap="flat" cmpd="sng" algn="ctr">
+                      <a:noFill/>
                     </a:lnT>
-                    <a:lnB w="6350" cap="flat" cmpd="sng" algn="ctr">
-                      <a:solidFill>
-                        <a:srgbClr val="DAD9D4"/>
-                      </a:solidFill>
-                      <a:prstDash val="solid"/>
-                      <a:round/>
-                      <a:headEnd type="none" w="med" len="med"/>
-                      <a:tailEnd type="none" w="med" len="med"/>
-                    </a:lnB>
-                    <a:solidFill>
-                      <a:srgbClr val="F3F3F1"/>
-                    </a:solidFill>
-                  </a:tcPr>
-                </a:tc>
-                <a:tc>
-                  <a:txBody>
-                    <a:bodyPr/>
-                    <a:lstStyle/>
-                    <a:p>
-                      <a:pPr latinLnBrk="0" algn="l" indent="0" marL="0">
-                        <a:buNone/>
-                      </a:pPr>
-                      <a:r>
-                        <a:rPr lang="ko-KR" sz="1100" b="1" dirty="0">
-                          <a:solidFill>
-                            <a:srgbClr val="0B0B0B"/>
-                          </a:solidFill>
-                          <a:latin typeface="Pretendard" pitchFamily="34" charset="0"/>
-                          <a:ea typeface="Pretendard" pitchFamily="34" charset="-122"/>
-                          <a:cs typeface="Pretendard" pitchFamily="34" charset="-120"/>
-                        </a:rPr>
-                        <a:t>문제</a:t>
-                      </a:r>
-                      <a:endParaRPr lang="ko-KR" sz="1100" dirty="0">
-                        <a:latin typeface="Pretendard" charset="0"/>
-                        <a:ea typeface="Pretendard" charset="0"/>
-                        <a:cs typeface="Pretendard" charset="0"/>
-                      </a:endParaRPr>
-                    </a:p>
-                  </a:txBody>
-                  <a:tcPr marL="91440" marR="91440" marT="45720" marB="45720" anchor="ctr">
-                    <a:lnL w="6350" cap="flat" cmpd="sng" algn="ctr">
-                      <a:solidFill>
-                        <a:srgbClr val="DAD9D4"/>
-                      </a:solidFill>
-                      <a:prstDash val="solid"/>
-                      <a:round/>
-                      <a:headEnd type="none" w="med" len="med"/>
-                      <a:tailEnd type="none" w="med" len="med"/>
-                    </a:lnL>
-                    <a:lnR w="6350" cap="flat" cmpd="sng" algn="ctr">
-                      <a:solidFill>
-                        <a:srgbClr val="DAD9D4"/>
-                      </a:solidFill>
-                      <a:prstDash val="solid"/>
-                      <a:round/>
-                      <a:headEnd type="none" w="med" len="med"/>
-                      <a:tailEnd type="none" w="med" len="med"/>
-                    </a:lnR>
-                    <a:lnT w="6350" cap="flat" cmpd="sng" algn="ctr">
-                      <a:solidFill>
-                        <a:srgbClr val="DAD9D4"/>
-                      </a:solidFill>
-                      <a:prstDash val="solid"/>
-                      <a:round/>
-                      <a:headEnd type="none" w="med" len="med"/>
-                      <a:tailEnd type="none" w="med" len="med"/>
-                    </a:lnT>
-                    <a:lnB w="6350" cap="flat" cmpd="sng" algn="ctr">
-                      <a:solidFill>
-                        <a:srgbClr val="DAD9D4"/>
-                      </a:solidFill>
-                      <a:prstDash val="solid"/>
-                      <a:round/>
-                      <a:headEnd type="none" w="med" len="med"/>
-                      <a:tailEnd type="none" w="med" len="med"/>
-                    </a:lnB>
-                    <a:solidFill>
-                      <a:srgbClr val="F3F3F1"/>
-                    </a:solidFill>
-                  </a:tcPr>
-                </a:tc>
-                <a:tc>
-                  <a:txBody>
-                    <a:bodyPr/>
-                    <a:lstStyle/>
-                    <a:p>
-                      <a:pPr latinLnBrk="0" algn="l" indent="0" marL="0">
-                        <a:buNone/>
-                      </a:pPr>
-                      <a:r>
-                        <a:rPr lang="ko-KR" sz="1100" b="1" dirty="0">
-                          <a:solidFill>
-                            <a:srgbClr val="0B0B0B"/>
-                          </a:solidFill>
-                          <a:latin typeface="Pretendard" pitchFamily="34" charset="0"/>
-                          <a:ea typeface="Pretendard" pitchFamily="34" charset="-122"/>
-                          <a:cs typeface="Pretendard" pitchFamily="34" charset="-120"/>
-                        </a:rPr>
-                        <a:t>조치</a:t>
-                      </a:r>
-                      <a:endParaRPr lang="ko-KR" sz="1100" dirty="0">
-                        <a:latin typeface="Pretendard" charset="0"/>
-                        <a:ea typeface="Pretendard" charset="0"/>
-                        <a:cs typeface="Pretendard" charset="0"/>
-                      </a:endParaRPr>
-                    </a:p>
-                  </a:txBody>
-                  <a:tcPr marL="91440" marR="91440" marT="45720" marB="45720" anchor="ctr">
-                    <a:lnL w="6350" cap="flat" cmpd="sng" algn="ctr">
-                      <a:solidFill>
-                        <a:srgbClr val="DAD9D4"/>
-                      </a:solidFill>
-                      <a:prstDash val="solid"/>
-                      <a:round/>
-                      <a:headEnd type="none" w="med" len="med"/>
-                      <a:tailEnd type="none" w="med" len="med"/>
-                    </a:lnL>
-                    <a:lnR w="6350" cap="flat" cmpd="sng" algn="ctr">
-                      <a:solidFill>
-                        <a:srgbClr val="DAD9D4"/>
-                      </a:solidFill>
-                      <a:prstDash val="solid"/>
-                      <a:round/>
-                      <a:headEnd type="none" w="med" len="med"/>
-                      <a:tailEnd type="none" w="med" len="med"/>
-                    </a:lnR>
-                    <a:lnT w="6350" cap="flat" cmpd="sng" algn="ctr">
-                      <a:solidFill>
-                        <a:srgbClr val="DAD9D4"/>
-                      </a:solidFill>
-                      <a:prstDash val="solid"/>
-                      <a:round/>
-                      <a:headEnd type="none" w="med" len="med"/>
-                      <a:tailEnd type="none" w="med" len="med"/>
-                    </a:lnT>
-                    <a:lnB w="6350" cap="flat" cmpd="sng" algn="ctr">
-                      <a:solidFill>
-                        <a:srgbClr val="DAD9D4"/>
-                      </a:solidFill>
-                      <a:prstDash val="solid"/>
-                      <a:round/>
-                      <a:headEnd type="none" w="med" len="med"/>
-                      <a:tailEnd type="none" w="med" len="med"/>
-                    </a:lnB>
-                    <a:solidFill>
-                      <a:srgbClr val="F3F3F1"/>
-                    </a:solidFill>
-                  </a:tcPr>
-                </a:tc>
-              </a:tr>
-              <a:tr h="365760">
-                <a:tc>
-                  <a:txBody>
-                    <a:bodyPr/>
-                    <a:lstStyle/>
-                    <a:p>
-                      <a:pPr latinLnBrk="0" algn="l" indent="0" marL="0">
-                        <a:buNone/>
-                      </a:pPr>
-                      <a:r>
-                        <a:rPr lang="ko-KR" sz="1100" dirty="0">
-                          <a:solidFill>
-                            <a:srgbClr val="0B0B0B"/>
-                          </a:solidFill>
-                          <a:latin typeface="Pretendard" pitchFamily="34" charset="0"/>
-                          <a:ea typeface="Pretendard" pitchFamily="34" charset="-122"/>
-                          <a:cs typeface="Pretendard" pitchFamily="34" charset="-120"/>
-                        </a:rPr>
-                        <a:t>대시보드 문구</a:t>
-                      </a:r>
-                      <a:endParaRPr lang="ko-KR" sz="1100" dirty="0">
-                        <a:latin typeface="Pretendard" charset="0"/>
-                        <a:ea typeface="Pretendard" charset="0"/>
-                        <a:cs typeface="Pretendard" charset="0"/>
-                      </a:endParaRPr>
-                    </a:p>
-                  </a:txBody>
-                  <a:tcPr marL="91440" marR="91440" marT="45720" marB="45720" anchor="ctr">
-                    <a:lnL w="6350" cap="flat" cmpd="sng" algn="ctr">
-                      <a:solidFill>
-                        <a:srgbClr val="DAD9D4"/>
-                      </a:solidFill>
-                      <a:prstDash val="solid"/>
-                      <a:round/>
-                      <a:headEnd type="none" w="med" len="med"/>
-                      <a:tailEnd type="none" w="med" len="med"/>
-                    </a:lnL>
-                    <a:lnR w="6350" cap="flat" cmpd="sng" algn="ctr">
-                      <a:solidFill>
-                        <a:srgbClr val="DAD9D4"/>
-                      </a:solidFill>
-                      <a:prstDash val="solid"/>
-                      <a:round/>
-                      <a:headEnd type="none" w="med" len="med"/>
-                      <a:tailEnd type="none" w="med" len="med"/>
-                    </a:lnR>
-                    <a:lnT w="6350" cap="flat" cmpd="sng" algn="ctr">
-                      <a:solidFill>
-                        <a:srgbClr val="DAD9D4"/>
-                      </a:solidFill>
-                      <a:prstDash val="solid"/>
-                      <a:round/>
-                      <a:headEnd type="none" w="med" len="med"/>
-                      <a:tailEnd type="none" w="med" len="med"/>
-                    </a:lnT>
-                    <a:lnB w="6350" cap="flat" cmpd="sng" algn="ctr">
-                      <a:solidFill>
-                        <a:srgbClr val="DAD9D4"/>
-                      </a:solidFill>
-                      <a:prstDash val="solid"/>
-                      <a:round/>
-                      <a:headEnd type="none" w="med" len="med"/>
-                      <a:tailEnd type="none" w="med" len="med"/>
+                    <a:lnB w="0" cap="flat" cmpd="sng" algn="ctr">
+                      <a:noFill/>
                     </a:lnB>
                     <a:solidFill>
                       <a:srgbClr val="FFFFFF"/>
@@ -13461,78 +11198,100 @@
                     <a:bodyPr/>
                     <a:lstStyle/>
                     <a:p>
-                      <a:pPr latinLnBrk="0" algn="l" indent="0" marL="0">
-                        <a:buNone/>
-                      </a:pPr>
-                      <a:r>
-                        <a:rPr lang="ko-KR" sz="1100" dirty="0">
-                          <a:solidFill>
-                            <a:srgbClr val="0B0B0B"/>
-                          </a:solidFill>
-                          <a:latin typeface="Pretendard" pitchFamily="34" charset="0"/>
-                          <a:ea typeface="Pretendard" pitchFamily="34" charset="-122"/>
-                          <a:cs typeface="Pretendard" pitchFamily="34" charset="-120"/>
-                        </a:rPr>
-                        <a:t>AI가 쓴 티: 한다체 설명문,</a:t>
+                      <a:pPr latinLnBrk="0" indent="0" marL="0">
+                        <a:buNone/>
+                      </a:pPr>
+                      <a:r>
+                        <a:rPr lang="ko-KR" sz="1250" dirty="0">
+                          <a:solidFill>
+                            <a:srgbClr val="52514E"/>
+                          </a:solidFill>
+                          <a:latin typeface="Pretendard" pitchFamily="34" charset="0"/>
+                          <a:ea typeface="Pretendard" pitchFamily="34" charset="-122"/>
+                          <a:cs typeface="Pretendard" pitchFamily="34" charset="-120"/>
+                        </a:rPr>
+                        <a:t>2회(대시보드 문구, 포트폴리오 1차).</a:t>
                       </a:r>
                       <a:br/>
-                      <a:pPr latinLnBrk="0" algn="l" indent="0" marL="0">
-                        <a:buNone/>
-                      </a:pPr>
-                      <a:r>
-                        <a:rPr lang="ko-KR" sz="1100" dirty="0">
-                          <a:solidFill>
-                            <a:srgbClr val="0B0B0B"/>
-                          </a:solidFill>
-                          <a:latin typeface="Pretendard" pitchFamily="34" charset="0"/>
-                          <a:ea typeface="Pretendard" pitchFamily="34" charset="-122"/>
-                          <a:cs typeface="Pretendard" pitchFamily="34" charset="-120"/>
-                        </a:rPr>
-                        <a:t>이모지, 내부 실행 이름</a:t>
-                      </a:r>
-                      <a:endParaRPr lang="ko-KR" sz="1100" dirty="0">
+                      <a:pPr latinLnBrk="0" indent="0" marL="0">
+                        <a:buNone/>
+                      </a:pPr>
+                      <a:r>
+                        <a:rPr lang="ko-KR" sz="1250" dirty="0">
+                          <a:solidFill>
+                            <a:srgbClr val="52514E"/>
+                          </a:solidFill>
+                          <a:latin typeface="Pretendard" pitchFamily="34" charset="0"/>
+                          <a:ea typeface="Pretendard" pitchFamily="34" charset="-122"/>
+                          <a:cs typeface="Pretendard" pitchFamily="34" charset="-120"/>
+                        </a:rPr>
+                        <a:t>참고 사례를 조사하게 한 뒤 다시 씀</a:t>
+                      </a:r>
+                      <a:endParaRPr lang="ko-KR" sz="1250" dirty="0">
                         <a:latin typeface="Pretendard" charset="0"/>
                         <a:ea typeface="Pretendard" charset="0"/>
                         <a:cs typeface="Pretendard" charset="0"/>
                       </a:endParaRPr>
                     </a:p>
                   </a:txBody>
-                  <a:tcPr marL="91440" marR="91440" marT="45720" marB="45720" anchor="ctr">
-                    <a:lnL w="6350" cap="flat" cmpd="sng" algn="ctr">
-                      <a:solidFill>
-                        <a:srgbClr val="DAD9D4"/>
-                      </a:solidFill>
-                      <a:prstDash val="solid"/>
-                      <a:round/>
-                      <a:headEnd type="none" w="med" len="med"/>
-                      <a:tailEnd type="none" w="med" len="med"/>
+                  <a:tcPr marL="0" marR="54864" marT="36576" marB="45720" anchor="t">
+                    <a:lnL w="0" cap="flat" cmpd="sng" algn="ctr">
+                      <a:noFill/>
                     </a:lnL>
-                    <a:lnR w="6350" cap="flat" cmpd="sng" algn="ctr">
-                      <a:solidFill>
-                        <a:srgbClr val="DAD9D4"/>
-                      </a:solidFill>
-                      <a:prstDash val="solid"/>
-                      <a:round/>
-                      <a:headEnd type="none" w="med" len="med"/>
-                      <a:tailEnd type="none" w="med" len="med"/>
+                    <a:lnR w="0" cap="flat" cmpd="sng" algn="ctr">
+                      <a:noFill/>
                     </a:lnR>
-                    <a:lnT w="6350" cap="flat" cmpd="sng" algn="ctr">
-                      <a:solidFill>
-                        <a:srgbClr val="DAD9D4"/>
-                      </a:solidFill>
-                      <a:prstDash val="solid"/>
-                      <a:round/>
-                      <a:headEnd type="none" w="med" len="med"/>
-                      <a:tailEnd type="none" w="med" len="med"/>
+                    <a:lnT w="0" cap="flat" cmpd="sng" algn="ctr">
+                      <a:noFill/>
                     </a:lnT>
-                    <a:lnB w="6350" cap="flat" cmpd="sng" algn="ctr">
-                      <a:solidFill>
-                        <a:srgbClr val="DAD9D4"/>
-                      </a:solidFill>
-                      <a:prstDash val="solid"/>
-                      <a:round/>
-                      <a:headEnd type="none" w="med" len="med"/>
-                      <a:tailEnd type="none" w="med" len="med"/>
+                    <a:lnB w="0" cap="flat" cmpd="sng" algn="ctr">
+                      <a:noFill/>
+                    </a:lnB>
+                    <a:solidFill>
+                      <a:srgbClr val="FFFFFF"/>
+                    </a:solidFill>
+                  </a:tcPr>
+                </a:tc>
+              </a:tr>
+              <a:tr h="274320">
+                <a:tc>
+                  <a:txBody>
+                    <a:bodyPr/>
+                    <a:lstStyle/>
+                    <a:p>
+                      <a:pPr latinLnBrk="0" indent="0" marL="0">
+                        <a:buNone/>
+                      </a:pPr>
+                      <a:r>
+                        <a:rPr lang="ko-KR" sz="1250" b="1" dirty="0">
+                          <a:solidFill>
+                            <a:srgbClr val="52514E"/>
+                          </a:solidFill>
+                          <a:latin typeface="Pretendard" pitchFamily="34" charset="0"/>
+                          <a:ea typeface="Pretendard" pitchFamily="34" charset="-122"/>
+                          <a:cs typeface="Pretendard" pitchFamily="34" charset="-120"/>
+                        </a:rPr>
+                        <a:t>규칙</a:t>
+                      </a:r>
+                      <a:endParaRPr lang="ko-KR" sz="1250" dirty="0">
+                        <a:latin typeface="Pretendard" charset="0"/>
+                        <a:ea typeface="Pretendard" charset="0"/>
+                        <a:cs typeface="Pretendard" charset="0"/>
+                      </a:endParaRPr>
+                    </a:p>
+                  </a:txBody>
+                  <a:tcPr marL="0" marR="54864" marT="36576" marB="45720" anchor="t">
+                    <a:lnL w="0" cap="flat" cmpd="sng" algn="ctr">
+                      <a:noFill/>
+                    </a:lnL>
+                    <a:lnR w="0" cap="flat" cmpd="sng" algn="ctr">
+                      <a:noFill/>
+                    </a:lnR>
+                    <a:lnT w="0" cap="flat" cmpd="sng" algn="ctr">
+                      <a:noFill/>
+                    </a:lnT>
+                    <a:lnB w="0" cap="flat" cmpd="sng" algn="ctr">
+                      <a:noFill/>
                     </a:lnB>
                     <a:solidFill>
                       <a:srgbClr val="FFFFFF"/>
@@ -13544,314 +11303,54 @@
                     <a:bodyPr/>
                     <a:lstStyle/>
                     <a:p>
-                      <a:pPr latinLnBrk="0" algn="l" indent="0" marL="0">
-                        <a:buNone/>
-                      </a:pPr>
-                      <a:r>
-                        <a:rPr lang="ko-KR" sz="1100" dirty="0">
-                          <a:solidFill>
-                            <a:srgbClr val="0B0B0B"/>
-                          </a:solidFill>
-                          <a:latin typeface="Pretendard" pitchFamily="34" charset="0"/>
-                          <a:ea typeface="Pretendard" pitchFamily="34" charset="-122"/>
-                          <a:cs typeface="Pretendard" pitchFamily="34" charset="-120"/>
-                        </a:rPr>
-                        <a:t>수율 도구·ML 리포트·UX</a:t>
+                      <a:pPr latinLnBrk="0" indent="0" marL="0">
+                        <a:buNone/>
+                      </a:pPr>
+                      <a:r>
+                        <a:rPr lang="ko-KR" sz="1250" dirty="0">
+                          <a:solidFill>
+                            <a:srgbClr val="52514E"/>
+                          </a:solidFill>
+                          <a:latin typeface="Pretendard" pitchFamily="34" charset="0"/>
+                          <a:ea typeface="Pretendard" pitchFamily="34" charset="-122"/>
+                          <a:cs typeface="Pretendard" pitchFamily="34" charset="-120"/>
+                        </a:rPr>
+                        <a:t>검증 에이전트에는 원본 코드 대신 데이터와</a:t>
                       </a:r>
                       <a:br/>
-                      <a:pPr latinLnBrk="0" algn="l" indent="0" marL="0">
-                        <a:buNone/>
-                      </a:pPr>
-                      <a:r>
-                        <a:rPr lang="ko-KR" sz="1100" dirty="0">
-                          <a:solidFill>
-                            <a:srgbClr val="0B0B0B"/>
-                          </a:solidFill>
-                          <a:latin typeface="Pretendard" pitchFamily="34" charset="0"/>
-                          <a:ea typeface="Pretendard" pitchFamily="34" charset="-122"/>
-                          <a:cs typeface="Pretendard" pitchFamily="34" charset="-120"/>
-                        </a:rPr>
-                        <a:t>라이팅 관례 조사 후 재작성</a:t>
-                      </a:r>
-                      <a:endParaRPr lang="ko-KR" sz="1100" dirty="0">
+                      <a:pPr latinLnBrk="0" indent="0" marL="0">
+                        <a:buNone/>
+                      </a:pPr>
+                      <a:r>
+                        <a:rPr lang="ko-KR" sz="1250" dirty="0">
+                          <a:solidFill>
+                            <a:srgbClr val="52514E"/>
+                          </a:solidFill>
+                          <a:latin typeface="Pretendard" pitchFamily="34" charset="0"/>
+                          <a:ea typeface="Pretendard" pitchFamily="34" charset="-122"/>
+                          <a:cs typeface="Pretendard" pitchFamily="34" charset="-120"/>
+                        </a:rPr>
+                        <a:t>결과 파일만 주고 다시 계산하게 함</a:t>
+                      </a:r>
+                      <a:endParaRPr lang="ko-KR" sz="1250" dirty="0">
                         <a:latin typeface="Pretendard" charset="0"/>
                         <a:ea typeface="Pretendard" charset="0"/>
                         <a:cs typeface="Pretendard" charset="0"/>
                       </a:endParaRPr>
                     </a:p>
                   </a:txBody>
-                  <a:tcPr marL="91440" marR="91440" marT="45720" marB="45720" anchor="ctr">
-                    <a:lnL w="6350" cap="flat" cmpd="sng" algn="ctr">
-                      <a:solidFill>
-                        <a:srgbClr val="DAD9D4"/>
-                      </a:solidFill>
-                      <a:prstDash val="solid"/>
-                      <a:round/>
-                      <a:headEnd type="none" w="med" len="med"/>
-                      <a:tailEnd type="none" w="med" len="med"/>
+                  <a:tcPr marL="0" marR="54864" marT="36576" marB="45720" anchor="t">
+                    <a:lnL w="0" cap="flat" cmpd="sng" algn="ctr">
+                      <a:noFill/>
                     </a:lnL>
-                    <a:lnR w="6350" cap="flat" cmpd="sng" algn="ctr">
-                      <a:solidFill>
-                        <a:srgbClr val="DAD9D4"/>
-                      </a:solidFill>
-                      <a:prstDash val="solid"/>
-                      <a:round/>
-                      <a:headEnd type="none" w="med" len="med"/>
-                      <a:tailEnd type="none" w="med" len="med"/>
+                    <a:lnR w="0" cap="flat" cmpd="sng" algn="ctr">
+                      <a:noFill/>
                     </a:lnR>
-                    <a:lnT w="6350" cap="flat" cmpd="sng" algn="ctr">
-                      <a:solidFill>
-                        <a:srgbClr val="DAD9D4"/>
-                      </a:solidFill>
-                      <a:prstDash val="solid"/>
-                      <a:round/>
-                      <a:headEnd type="none" w="med" len="med"/>
-                      <a:tailEnd type="none" w="med" len="med"/>
+                    <a:lnT w="0" cap="flat" cmpd="sng" algn="ctr">
+                      <a:noFill/>
                     </a:lnT>
-                    <a:lnB w="6350" cap="flat" cmpd="sng" algn="ctr">
-                      <a:solidFill>
-                        <a:srgbClr val="DAD9D4"/>
-                      </a:solidFill>
-                      <a:prstDash val="solid"/>
-                      <a:round/>
-                      <a:headEnd type="none" w="med" len="med"/>
-                      <a:tailEnd type="none" w="med" len="med"/>
-                    </a:lnB>
-                    <a:solidFill>
-                      <a:srgbClr val="FFFFFF"/>
-                    </a:solidFill>
-                  </a:tcPr>
-                </a:tc>
-              </a:tr>
-              <a:tr h="365760">
-                <a:tc>
-                  <a:txBody>
-                    <a:bodyPr/>
-                    <a:lstStyle/>
-                    <a:p>
-                      <a:pPr latinLnBrk="0" algn="l" indent="0" marL="0">
-                        <a:buNone/>
-                      </a:pPr>
-                      <a:r>
-                        <a:rPr lang="ko-KR" sz="1100" dirty="0">
-                          <a:solidFill>
-                            <a:srgbClr val="0B0B0B"/>
-                          </a:solidFill>
-                          <a:latin typeface="Pretendard" pitchFamily="34" charset="0"/>
-                          <a:ea typeface="Pretendard" pitchFamily="34" charset="-122"/>
-                          <a:cs typeface="Pretendard" pitchFamily="34" charset="-120"/>
-                        </a:rPr>
-                        <a:t>포트폴리오 1차</a:t>
-                      </a:r>
-                      <a:endParaRPr lang="ko-KR" sz="1100" dirty="0">
-                        <a:latin typeface="Pretendard" charset="0"/>
-                        <a:ea typeface="Pretendard" charset="0"/>
-                        <a:cs typeface="Pretendard" charset="0"/>
-                      </a:endParaRPr>
-                    </a:p>
-                  </a:txBody>
-                  <a:tcPr marL="91440" marR="91440" marT="45720" marB="45720" anchor="ctr">
-                    <a:lnL w="6350" cap="flat" cmpd="sng" algn="ctr">
-                      <a:solidFill>
-                        <a:srgbClr val="DAD9D4"/>
-                      </a:solidFill>
-                      <a:prstDash val="solid"/>
-                      <a:round/>
-                      <a:headEnd type="none" w="med" len="med"/>
-                      <a:tailEnd type="none" w="med" len="med"/>
-                    </a:lnL>
-                    <a:lnR w="6350" cap="flat" cmpd="sng" algn="ctr">
-                      <a:solidFill>
-                        <a:srgbClr val="DAD9D4"/>
-                      </a:solidFill>
-                      <a:prstDash val="solid"/>
-                      <a:round/>
-                      <a:headEnd type="none" w="med" len="med"/>
-                      <a:tailEnd type="none" w="med" len="med"/>
-                    </a:lnR>
-                    <a:lnT w="6350" cap="flat" cmpd="sng" algn="ctr">
-                      <a:solidFill>
-                        <a:srgbClr val="DAD9D4"/>
-                      </a:solidFill>
-                      <a:prstDash val="solid"/>
-                      <a:round/>
-                      <a:headEnd type="none" w="med" len="med"/>
-                      <a:tailEnd type="none" w="med" len="med"/>
-                    </a:lnT>
-                    <a:lnB w="6350" cap="flat" cmpd="sng" algn="ctr">
-                      <a:solidFill>
-                        <a:srgbClr val="DAD9D4"/>
-                      </a:solidFill>
-                      <a:prstDash val="solid"/>
-                      <a:round/>
-                      <a:headEnd type="none" w="med" len="med"/>
-                      <a:tailEnd type="none" w="med" len="med"/>
-                    </a:lnB>
-                    <a:solidFill>
-                      <a:srgbClr val="FFFFFF"/>
-                    </a:solidFill>
-                  </a:tcPr>
-                </a:tc>
-                <a:tc>
-                  <a:txBody>
-                    <a:bodyPr/>
-                    <a:lstStyle/>
-                    <a:p>
-                      <a:pPr latinLnBrk="0" algn="l" indent="0" marL="0">
-                        <a:buNone/>
-                      </a:pPr>
-                      <a:r>
-                        <a:rPr lang="ko-KR" sz="1100" dirty="0">
-                          <a:solidFill>
-                            <a:srgbClr val="0B0B0B"/>
-                          </a:solidFill>
-                          <a:latin typeface="Pretendard" pitchFamily="34" charset="0"/>
-                          <a:ea typeface="Pretendard" pitchFamily="34" charset="-122"/>
-                          <a:cs typeface="Pretendard" pitchFamily="34" charset="-120"/>
-                        </a:rPr>
-                        <a:t>과밀, 반말 서술 제목,</a:t>
-                      </a:r>
-                      <a:br/>
-                      <a:pPr latinLnBrk="0" algn="l" indent="0" marL="0">
-                        <a:buNone/>
-                      </a:pPr>
-                      <a:r>
-                        <a:rPr lang="ko-KR" sz="1100" dirty="0">
-                          <a:solidFill>
-                            <a:srgbClr val="0B0B0B"/>
-                          </a:solidFill>
-                          <a:latin typeface="Pretendard" pitchFamily="34" charset="0"/>
-                          <a:ea typeface="Pretendard" pitchFamily="34" charset="-122"/>
-                          <a:cs typeface="Pretendard" pitchFamily="34" charset="-120"/>
-                        </a:rPr>
-                        <a:t>쪽별 주장 파악 안 됨</a:t>
-                      </a:r>
-                      <a:endParaRPr lang="ko-KR" sz="1100" dirty="0">
-                        <a:latin typeface="Pretendard" charset="0"/>
-                        <a:ea typeface="Pretendard" charset="0"/>
-                        <a:cs typeface="Pretendard" charset="0"/>
-                      </a:endParaRPr>
-                    </a:p>
-                  </a:txBody>
-                  <a:tcPr marL="91440" marR="91440" marT="45720" marB="45720" anchor="ctr">
-                    <a:lnL w="6350" cap="flat" cmpd="sng" algn="ctr">
-                      <a:solidFill>
-                        <a:srgbClr val="DAD9D4"/>
-                      </a:solidFill>
-                      <a:prstDash val="solid"/>
-                      <a:round/>
-                      <a:headEnd type="none" w="med" len="med"/>
-                      <a:tailEnd type="none" w="med" len="med"/>
-                    </a:lnL>
-                    <a:lnR w="6350" cap="flat" cmpd="sng" algn="ctr">
-                      <a:solidFill>
-                        <a:srgbClr val="DAD9D4"/>
-                      </a:solidFill>
-                      <a:prstDash val="solid"/>
-                      <a:round/>
-                      <a:headEnd type="none" w="med" len="med"/>
-                      <a:tailEnd type="none" w="med" len="med"/>
-                    </a:lnR>
-                    <a:lnT w="6350" cap="flat" cmpd="sng" algn="ctr">
-                      <a:solidFill>
-                        <a:srgbClr val="DAD9D4"/>
-                      </a:solidFill>
-                      <a:prstDash val="solid"/>
-                      <a:round/>
-                      <a:headEnd type="none" w="med" len="med"/>
-                      <a:tailEnd type="none" w="med" len="med"/>
-                    </a:lnT>
-                    <a:lnB w="6350" cap="flat" cmpd="sng" algn="ctr">
-                      <a:solidFill>
-                        <a:srgbClr val="DAD9D4"/>
-                      </a:solidFill>
-                      <a:prstDash val="solid"/>
-                      <a:round/>
-                      <a:headEnd type="none" w="med" len="med"/>
-                      <a:tailEnd type="none" w="med" len="med"/>
-                    </a:lnB>
-                    <a:solidFill>
-                      <a:srgbClr val="FFFFFF"/>
-                    </a:solidFill>
-                  </a:tcPr>
-                </a:tc>
-                <a:tc>
-                  <a:txBody>
-                    <a:bodyPr/>
-                    <a:lstStyle/>
-                    <a:p>
-                      <a:pPr latinLnBrk="0" algn="l" indent="0" marL="0">
-                        <a:buNone/>
-                      </a:pPr>
-                      <a:r>
-                        <a:rPr lang="ko-KR" sz="1100" dirty="0">
-                          <a:solidFill>
-                            <a:srgbClr val="0B0B0B"/>
-                          </a:solidFill>
-                          <a:latin typeface="Pretendard" pitchFamily="34" charset="0"/>
-                          <a:ea typeface="Pretendard" pitchFamily="34" charset="-122"/>
-                          <a:cs typeface="Pretendard" pitchFamily="34" charset="-120"/>
-                        </a:rPr>
-                        <a:t>실제 국내 덱 6건 조사</a:t>
-                      </a:r>
-                      <a:br/>
-                      <a:pPr latinLnBrk="0" algn="l" indent="0" marL="0">
-                        <a:buNone/>
-                      </a:pPr>
-                      <a:r>
-                        <a:rPr lang="ko-KR" sz="1100" dirty="0">
-                          <a:solidFill>
-                            <a:srgbClr val="0B0B0B"/>
-                          </a:solidFill>
-                          <a:latin typeface="Pretendard" pitchFamily="34" charset="0"/>
-                          <a:ea typeface="Pretendard" pitchFamily="34" charset="-122"/>
-                          <a:cs typeface="Pretendard" pitchFamily="34" charset="-120"/>
-                        </a:rPr>
-                        <a:t>후 8쪽으로 재구성</a:t>
-                      </a:r>
-                      <a:endParaRPr lang="ko-KR" sz="1100" dirty="0">
-                        <a:latin typeface="Pretendard" charset="0"/>
-                        <a:ea typeface="Pretendard" charset="0"/>
-                        <a:cs typeface="Pretendard" charset="0"/>
-                      </a:endParaRPr>
-                    </a:p>
-                  </a:txBody>
-                  <a:tcPr marL="91440" marR="91440" marT="45720" marB="45720" anchor="ctr">
-                    <a:lnL w="6350" cap="flat" cmpd="sng" algn="ctr">
-                      <a:solidFill>
-                        <a:srgbClr val="DAD9D4"/>
-                      </a:solidFill>
-                      <a:prstDash val="solid"/>
-                      <a:round/>
-                      <a:headEnd type="none" w="med" len="med"/>
-                      <a:tailEnd type="none" w="med" len="med"/>
-                    </a:lnL>
-                    <a:lnR w="6350" cap="flat" cmpd="sng" algn="ctr">
-                      <a:solidFill>
-                        <a:srgbClr val="DAD9D4"/>
-                      </a:solidFill>
-                      <a:prstDash val="solid"/>
-                      <a:round/>
-                      <a:headEnd type="none" w="med" len="med"/>
-                      <a:tailEnd type="none" w="med" len="med"/>
-                    </a:lnR>
-                    <a:lnT w="6350" cap="flat" cmpd="sng" algn="ctr">
-                      <a:solidFill>
-                        <a:srgbClr val="DAD9D4"/>
-                      </a:solidFill>
-                      <a:prstDash val="solid"/>
-                      <a:round/>
-                      <a:headEnd type="none" w="med" len="med"/>
-                      <a:tailEnd type="none" w="med" len="med"/>
-                    </a:lnT>
-                    <a:lnB w="6350" cap="flat" cmpd="sng" algn="ctr">
-                      <a:solidFill>
-                        <a:srgbClr val="DAD9D4"/>
-                      </a:solidFill>
-                      <a:prstDash val="solid"/>
-                      <a:round/>
-                      <a:headEnd type="none" w="med" len="med"/>
-                      <a:tailEnd type="none" w="med" len="med"/>
+                    <a:lnB w="0" cap="flat" cmpd="sng" algn="ctr">
+                      <a:noFill/>
                     </a:lnB>
                     <a:solidFill>
                       <a:srgbClr val="FFFFFF"/>
@@ -13865,7 +11364,7 @@
       </p:graphicFrame>
       <p:sp>
         <p:nvSpPr>
-          <p:cNvPr id="12" name="Text 8"/>
+          <p:cNvPr id="11" name="Text 7"/>
           <p:cNvSpPr txBox="1"/>
           <p:nvPr/>
         </p:nvSpPr>
@@ -13896,7 +11395,7 @@
                 <a:ea typeface="Pretendard" pitchFamily="34" charset="-122"/>
                 <a:cs typeface="Pretendard" pitchFamily="34" charset="-120"/>
               </a:rPr>
-              <a:t>독립 검증·조사 워크플로 10회 (에이전트 45개)</a:t>
+              <a:t>검증·조사 워크플로 10회 (에이전트 45개)</a:t>
             </a:r>
             <a:endParaRPr lang="ko-KR" sz="1300" dirty="0"/>
           </a:p>
@@ -13925,11 +11424,11 @@
             <a:tbl>
               <a:tblPr/>
               <a:tblGrid>
-                <a:gridCol w="1737360"/>
-                <a:gridCol w="777240"/>
-                <a:gridCol w="2633472"/>
+                <a:gridCol w="1828800"/>
+                <a:gridCol w="822960"/>
+                <a:gridCol w="2496312"/>
               </a:tblGrid>
-              <a:tr h="347472">
+              <a:tr h="402336">
                 <a:tc>
                   <a:txBody>
                     <a:bodyPr/>
@@ -13939,7 +11438,7 @@
                         <a:buNone/>
                       </a:pPr>
                       <a:r>
-                        <a:rPr lang="ko-KR" sz="1100" b="1" dirty="0">
+                        <a:rPr lang="ko-KR" sz="1200" b="1" dirty="0">
                           <a:solidFill>
                             <a:srgbClr val="0B0B0B"/>
                           </a:solidFill>
@@ -13949,7 +11448,7 @@
                         </a:rPr>
                         <a:t>단계</a:t>
                       </a:r>
-                      <a:endParaRPr lang="ko-KR" sz="1100" dirty="0">
+                      <a:endParaRPr lang="ko-KR" sz="1200" dirty="0">
                         <a:latin typeface="Pretendard" charset="0"/>
                         <a:ea typeface="Pretendard" charset="0"/>
                         <a:cs typeface="Pretendard" charset="0"/>
@@ -14007,7 +11506,7 @@
                         <a:buNone/>
                       </a:pPr>
                       <a:r>
-                        <a:rPr lang="ko-KR" sz="1100" b="1" dirty="0">
+                        <a:rPr lang="ko-KR" sz="1200" b="1" dirty="0">
                           <a:solidFill>
                             <a:srgbClr val="0B0B0B"/>
                           </a:solidFill>
@@ -14017,7 +11516,7 @@
                         </a:rPr>
                         <a:t>에이전트</a:t>
                       </a:r>
-                      <a:endParaRPr lang="ko-KR" sz="1100" dirty="0">
+                      <a:endParaRPr lang="ko-KR" sz="1200" dirty="0">
                         <a:latin typeface="Pretendard" charset="0"/>
                         <a:ea typeface="Pretendard" charset="0"/>
                         <a:cs typeface="Pretendard" charset="0"/>
@@ -14075,7 +11574,7 @@
                         <a:buNone/>
                       </a:pPr>
                       <a:r>
-                        <a:rPr lang="ko-KR" sz="1100" b="1" dirty="0">
+                        <a:rPr lang="ko-KR" sz="1200" b="1" dirty="0">
                           <a:solidFill>
                             <a:srgbClr val="0B0B0B"/>
                           </a:solidFill>
@@ -14083,9 +11582,9 @@
                           <a:ea typeface="Pretendard" pitchFamily="34" charset="-122"/>
                           <a:cs typeface="Pretendard" pitchFamily="34" charset="-120"/>
                         </a:rPr>
-                        <a:t>한 일</a:t>
-                      </a:r>
-                      <a:endParaRPr lang="ko-KR" sz="1100" dirty="0">
+                        <a:t>결과</a:t>
+                      </a:r>
+                      <a:endParaRPr lang="ko-KR" sz="1200" dirty="0">
                         <a:latin typeface="Pretendard" charset="0"/>
                         <a:ea typeface="Pretendard" charset="0"/>
                         <a:cs typeface="Pretendard" charset="0"/>
@@ -14135,7 +11634,7 @@
                   </a:tcPr>
                 </a:tc>
               </a:tr>
-              <a:tr h="347472">
+              <a:tr h="402336">
                 <a:tc>
                   <a:txBody>
                     <a:bodyPr/>
@@ -14145,7 +11644,7 @@
                         <a:buNone/>
                       </a:pPr>
                       <a:r>
-                        <a:rPr lang="ko-KR" sz="1100" dirty="0">
+                        <a:rPr lang="ko-KR" sz="1200" dirty="0">
                           <a:solidFill>
                             <a:srgbClr val="0B0B0B"/>
                           </a:solidFill>
@@ -14155,7 +11654,7 @@
                         </a:rPr>
                         <a:t>데이터 확보·문헌 조사</a:t>
                       </a:r>
-                      <a:endParaRPr lang="ko-KR" sz="1100" dirty="0">
+                      <a:endParaRPr lang="ko-KR" sz="1200" dirty="0">
                         <a:latin typeface="Pretendard" charset="0"/>
                         <a:ea typeface="Pretendard" charset="0"/>
                         <a:cs typeface="Pretendard" charset="0"/>
@@ -14213,7 +11712,7 @@
                         <a:buNone/>
                       </a:pPr>
                       <a:r>
-                        <a:rPr lang="ko-KR" sz="1100" dirty="0">
+                        <a:rPr lang="ko-KR" sz="1200" dirty="0">
                           <a:solidFill>
                             <a:srgbClr val="0B0B0B"/>
                           </a:solidFill>
@@ -14223,7 +11722,7 @@
                         </a:rPr>
                         <a:t>10</a:t>
                       </a:r>
-                      <a:endParaRPr lang="ko-KR" sz="1100" dirty="0">
+                      <a:endParaRPr lang="ko-KR" sz="1200" dirty="0">
                         <a:latin typeface="Pretendard" charset="0"/>
                         <a:ea typeface="Pretendard" charset="0"/>
                         <a:cs typeface="Pretendard" charset="0"/>
@@ -14281,7 +11780,7 @@
                         <a:buNone/>
                       </a:pPr>
                       <a:r>
-                        <a:rPr lang="ko-KR" sz="1100" dirty="0">
+                        <a:rPr lang="ko-KR" sz="1200" dirty="0">
                           <a:solidFill>
                             <a:srgbClr val="0B0B0B"/>
                           </a:solidFill>
@@ -14289,9 +11788,9 @@
                           <a:ea typeface="Pretendard" pitchFamily="34" charset="-122"/>
                           <a:cs typeface="Pretendard" pitchFamily="34" charset="-120"/>
                         </a:rPr>
-                        <a:t>조사 5 + 반박 검증 5. 오류 E1~E4 발견</a:t>
-                      </a:r>
-                      <a:endParaRPr lang="ko-KR" sz="1100" dirty="0">
+                        <a:t>조사 5 + 반박 5 → E1~E4</a:t>
+                      </a:r>
+                      <a:endParaRPr lang="ko-KR" sz="1200" dirty="0">
                         <a:latin typeface="Pretendard" charset="0"/>
                         <a:ea typeface="Pretendard" charset="0"/>
                         <a:cs typeface="Pretendard" charset="0"/>
@@ -14341,7 +11840,7 @@
                   </a:tcPr>
                 </a:tc>
               </a:tr>
-              <a:tr h="347472">
+              <a:tr h="402336">
                 <a:tc>
                   <a:txBody>
                     <a:bodyPr/>
@@ -14351,7 +11850,7 @@
                         <a:buNone/>
                       </a:pPr>
                       <a:r>
-                        <a:rPr lang="ko-KR" sz="1100" dirty="0">
+                        <a:rPr lang="ko-KR" sz="1200" dirty="0">
                           <a:solidFill>
                             <a:srgbClr val="0B0B0B"/>
                           </a:solidFill>
@@ -14361,7 +11860,7 @@
                         </a:rPr>
                         <a:t>데이터 이상점 탐색</a:t>
                       </a:r>
-                      <a:endParaRPr lang="ko-KR" sz="1100" dirty="0">
+                      <a:endParaRPr lang="ko-KR" sz="1200" dirty="0">
                         <a:latin typeface="Pretendard" charset="0"/>
                         <a:ea typeface="Pretendard" charset="0"/>
                         <a:cs typeface="Pretendard" charset="0"/>
@@ -14419,7 +11918,7 @@
                         <a:buNone/>
                       </a:pPr>
                       <a:r>
-                        <a:rPr lang="ko-KR" sz="1100" dirty="0">
+                        <a:rPr lang="ko-KR" sz="1200" dirty="0">
                           <a:solidFill>
                             <a:srgbClr val="0B0B0B"/>
                           </a:solidFill>
@@ -14429,7 +11928,7 @@
                         </a:rPr>
                         <a:t>10</a:t>
                       </a:r>
-                      <a:endParaRPr lang="ko-KR" sz="1100" dirty="0">
+                      <a:endParaRPr lang="ko-KR" sz="1200" dirty="0">
                         <a:latin typeface="Pretendard" charset="0"/>
                         <a:ea typeface="Pretendard" charset="0"/>
                         <a:cs typeface="Pretendard" charset="0"/>
@@ -14487,7 +11986,7 @@
                         <a:buNone/>
                       </a:pPr>
                       <a:r>
-                        <a:rPr lang="ko-KR" sz="1100" dirty="0">
+                        <a:rPr lang="ko-KR" sz="1200" dirty="0">
                           <a:solidFill>
                             <a:srgbClr val="0B0B0B"/>
                           </a:solidFill>
@@ -14495,9 +11994,9 @@
                           <a:ea typeface="Pretendard" pitchFamily="34" charset="-122"/>
                           <a:cs typeface="Pretendard" pitchFamily="34" charset="-120"/>
                         </a:rPr>
-                        <a:t>탐색 4 + 검증. 부분 정정 7건(E7)</a:t>
-                      </a:r>
-                      <a:endParaRPr lang="ko-KR" sz="1100" dirty="0">
+                        <a:t>탐색 4 + 검증 → 정정 7건</a:t>
+                      </a:r>
+                      <a:endParaRPr lang="ko-KR" sz="1200" dirty="0">
                         <a:latin typeface="Pretendard" charset="0"/>
                         <a:ea typeface="Pretendard" charset="0"/>
                         <a:cs typeface="Pretendard" charset="0"/>
@@ -14547,7 +12046,7 @@
                   </a:tcPr>
                 </a:tc>
               </a:tr>
-              <a:tr h="347472">
+              <a:tr h="402336">
                 <a:tc>
                   <a:txBody>
                     <a:bodyPr/>
@@ -14557,7 +12056,7 @@
                         <a:buNone/>
                       </a:pPr>
                       <a:r>
-                        <a:rPr lang="ko-KR" sz="1100" dirty="0">
+                        <a:rPr lang="ko-KR" sz="1200" dirty="0">
                           <a:solidFill>
                             <a:srgbClr val="0B0B0B"/>
                           </a:solidFill>
@@ -14567,7 +12066,7 @@
                         </a:rPr>
                         <a:t>베이스라인·분할 재계산</a:t>
                       </a:r>
-                      <a:endParaRPr lang="ko-KR" sz="1100" dirty="0">
+                      <a:endParaRPr lang="ko-KR" sz="1200" dirty="0">
                         <a:latin typeface="Pretendard" charset="0"/>
                         <a:ea typeface="Pretendard" charset="0"/>
                         <a:cs typeface="Pretendard" charset="0"/>
@@ -14625,7 +12124,7 @@
                         <a:buNone/>
                       </a:pPr>
                       <a:r>
-                        <a:rPr lang="ko-KR" sz="1100" dirty="0">
+                        <a:rPr lang="ko-KR" sz="1200" dirty="0">
                           <a:solidFill>
                             <a:srgbClr val="0B0B0B"/>
                           </a:solidFill>
@@ -14635,7 +12134,7 @@
                         </a:rPr>
                         <a:t>4</a:t>
                       </a:r>
-                      <a:endParaRPr lang="ko-KR" sz="1100" dirty="0">
+                      <a:endParaRPr lang="ko-KR" sz="1200" dirty="0">
                         <a:latin typeface="Pretendard" charset="0"/>
                         <a:ea typeface="Pretendard" charset="0"/>
                         <a:cs typeface="Pretendard" charset="0"/>
@@ -14693,7 +12192,7 @@
                         <a:buNone/>
                       </a:pPr>
                       <a:r>
-                        <a:rPr lang="ko-KR" sz="1100" dirty="0">
+                        <a:rPr lang="ko-KR" sz="1200" dirty="0">
                           <a:solidFill>
                             <a:srgbClr val="0B0B0B"/>
                           </a:solidFill>
@@ -14701,9 +12200,9 @@
                           <a:ea typeface="Pretendard" pitchFamily="34" charset="-122"/>
                           <a:cs typeface="Pretendard" pitchFamily="34" charset="-120"/>
                         </a:rPr>
-                        <a:t>지표 재계산, 독립 재구현, 코드 감사</a:t>
-                      </a:r>
-                      <a:endParaRPr lang="ko-KR" sz="1100" dirty="0">
+                        <a:t>재계산, 재구현, 코드 감사</a:t>
+                      </a:r>
+                      <a:endParaRPr lang="ko-KR" sz="1200" dirty="0">
                         <a:latin typeface="Pretendard" charset="0"/>
                         <a:ea typeface="Pretendard" charset="0"/>
                         <a:cs typeface="Pretendard" charset="0"/>
@@ -14753,7 +12252,7 @@
                   </a:tcPr>
                 </a:tc>
               </a:tr>
-              <a:tr h="347472">
+              <a:tr h="402336">
                 <a:tc>
                   <a:txBody>
                     <a:bodyPr/>
@@ -14763,7 +12262,7 @@
                         <a:buNone/>
                       </a:pPr>
                       <a:r>
-                        <a:rPr lang="ko-KR" sz="1100" dirty="0">
+                        <a:rPr lang="ko-KR" sz="1200" dirty="0">
                           <a:solidFill>
                             <a:srgbClr val="0B0B0B"/>
                           </a:solidFill>
@@ -14773,7 +12272,7 @@
                         </a:rPr>
                         <a:t>Loc recall 원인 조사</a:t>
                       </a:r>
-                      <a:endParaRPr lang="ko-KR" sz="1100" dirty="0">
+                      <a:endParaRPr lang="ko-KR" sz="1200" dirty="0">
                         <a:latin typeface="Pretendard" charset="0"/>
                         <a:ea typeface="Pretendard" charset="0"/>
                         <a:cs typeface="Pretendard" charset="0"/>
@@ -14831,7 +12330,7 @@
                         <a:buNone/>
                       </a:pPr>
                       <a:r>
-                        <a:rPr lang="ko-KR" sz="1100" dirty="0">
+                        <a:rPr lang="ko-KR" sz="1200" dirty="0">
                           <a:solidFill>
                             <a:srgbClr val="0B0B0B"/>
                           </a:solidFill>
@@ -14841,7 +12340,7 @@
                         </a:rPr>
                         <a:t>3</a:t>
                       </a:r>
-                      <a:endParaRPr lang="ko-KR" sz="1100" dirty="0">
+                      <a:endParaRPr lang="ko-KR" sz="1200" dirty="0">
                         <a:latin typeface="Pretendard" charset="0"/>
                         <a:ea typeface="Pretendard" charset="0"/>
                         <a:cs typeface="Pretendard" charset="0"/>
@@ -14899,7 +12398,7 @@
                         <a:buNone/>
                       </a:pPr>
                       <a:r>
-                        <a:rPr lang="ko-KR" sz="1100" dirty="0">
+                        <a:rPr lang="ko-KR" sz="1200" dirty="0">
                           <a:solidFill>
                             <a:srgbClr val="0B0B0B"/>
                           </a:solidFill>
@@ -14907,9 +12406,9 @@
                           <a:ea typeface="Pretendard" pitchFamily="34" charset="-122"/>
                           <a:cs typeface="Pretendard" pitchFamily="34" charset="-120"/>
                         </a:rPr>
-                        <a:t>원인 추적·구성 점검·반박 → E11</a:t>
-                      </a:r>
-                      <a:endParaRPr lang="ko-KR" sz="1100" dirty="0">
+                        <a:t>원인 추적·반박 → E11</a:t>
+                      </a:r>
+                      <a:endParaRPr lang="ko-KR" sz="1200" dirty="0">
                         <a:latin typeface="Pretendard" charset="0"/>
                         <a:ea typeface="Pretendard" charset="0"/>
                         <a:cs typeface="Pretendard" charset="0"/>
@@ -14959,7 +12458,7 @@
                   </a:tcPr>
                 </a:tc>
               </a:tr>
-              <a:tr h="347472">
+              <a:tr h="402336">
                 <a:tc>
                   <a:txBody>
                     <a:bodyPr/>
@@ -14969,7 +12468,7 @@
                         <a:buNone/>
                       </a:pPr>
                       <a:r>
-                        <a:rPr lang="ko-KR" sz="1100" dirty="0">
+                        <a:rPr lang="ko-KR" sz="1200" dirty="0">
                           <a:solidFill>
                             <a:srgbClr val="0B0B0B"/>
                           </a:solidFill>
@@ -14979,7 +12478,7 @@
                         </a:rPr>
                         <a:t>CNN 검증 2회</a:t>
                       </a:r>
-                      <a:endParaRPr lang="ko-KR" sz="1100" dirty="0">
+                      <a:endParaRPr lang="ko-KR" sz="1200" dirty="0">
                         <a:latin typeface="Pretendard" charset="0"/>
                         <a:ea typeface="Pretendard" charset="0"/>
                         <a:cs typeface="Pretendard" charset="0"/>
@@ -15037,7 +12536,7 @@
                         <a:buNone/>
                       </a:pPr>
                       <a:r>
-                        <a:rPr lang="ko-KR" sz="1100" dirty="0">
+                        <a:rPr lang="ko-KR" sz="1200" dirty="0">
                           <a:solidFill>
                             <a:srgbClr val="0B0B0B"/>
                           </a:solidFill>
@@ -15047,7 +12546,7 @@
                         </a:rPr>
                         <a:t>8</a:t>
                       </a:r>
-                      <a:endParaRPr lang="ko-KR" sz="1100" dirty="0">
+                      <a:endParaRPr lang="ko-KR" sz="1200" dirty="0">
                         <a:latin typeface="Pretendard" charset="0"/>
                         <a:ea typeface="Pretendard" charset="0"/>
                         <a:cs typeface="Pretendard" charset="0"/>
@@ -15105,7 +12604,7 @@
                         <a:buNone/>
                       </a:pPr>
                       <a:r>
-                        <a:rPr lang="ko-KR" sz="1100" dirty="0">
+                        <a:rPr lang="ko-KR" sz="1200" dirty="0">
                           <a:solidFill>
                             <a:srgbClr val="0B0B0B"/>
                           </a:solidFill>
@@ -15113,24 +12612,9 @@
                           <a:ea typeface="Pretendard" pitchFamily="34" charset="-122"/>
                           <a:cs typeface="Pretendard" pitchFamily="34" charset="-120"/>
                         </a:rPr>
-                        <a:t>지표 재계산, 짝비교,</a:t>
-                      </a:r>
-                      <a:br/>
-                      <a:pPr latinLnBrk="0" algn="l" indent="0" marL="0">
-                        <a:buNone/>
-                      </a:pPr>
-                      <a:r>
-                        <a:rPr lang="ko-KR" sz="1100" dirty="0">
-                          <a:solidFill>
-                            <a:srgbClr val="0B0B0B"/>
-                          </a:solidFill>
-                          <a:latin typeface="Pretendard" pitchFamily="34" charset="0"/>
-                          <a:ea typeface="Pretendard" pitchFamily="34" charset="-122"/>
-                          <a:cs typeface="Pretendard" pitchFamily="34" charset="-120"/>
-                        </a:rPr>
-                        <a:t>지름길, 이중맹검 → E13</a:t>
-                      </a:r>
-                      <a:endParaRPr lang="ko-KR" sz="1100" dirty="0">
+                        <a:t>지표·짝비교·지름길·이중맹검 → E13</a:t>
+                      </a:r>
+                      <a:endParaRPr lang="ko-KR" sz="1200" dirty="0">
                         <a:latin typeface="Pretendard" charset="0"/>
                         <a:ea typeface="Pretendard" charset="0"/>
                         <a:cs typeface="Pretendard" charset="0"/>
@@ -15180,7 +12664,7 @@
                   </a:tcPr>
                 </a:tc>
               </a:tr>
-              <a:tr h="347472">
+              <a:tr h="402336">
                 <a:tc>
                   <a:txBody>
                     <a:bodyPr/>
@@ -15190,7 +12674,7 @@
                         <a:buNone/>
                       </a:pPr>
                       <a:r>
-                        <a:rPr lang="ko-KR" sz="1100" dirty="0">
+                        <a:rPr lang="ko-KR" sz="1200" dirty="0">
                           <a:solidFill>
                             <a:srgbClr val="0B0B0B"/>
                           </a:solidFill>
@@ -15200,7 +12684,7 @@
                         </a:rPr>
                         <a:t>문체·포트폴리오 조사</a:t>
                       </a:r>
-                      <a:endParaRPr lang="ko-KR" sz="1100" dirty="0">
+                      <a:endParaRPr lang="ko-KR" sz="1200" dirty="0">
                         <a:latin typeface="Pretendard" charset="0"/>
                         <a:ea typeface="Pretendard" charset="0"/>
                         <a:cs typeface="Pretendard" charset="0"/>
@@ -15258,7 +12742,7 @@
                         <a:buNone/>
                       </a:pPr>
                       <a:r>
-                        <a:rPr lang="ko-KR" sz="1100" dirty="0">
+                        <a:rPr lang="ko-KR" sz="1200" dirty="0">
                           <a:solidFill>
                             <a:srgbClr val="0B0B0B"/>
                           </a:solidFill>
@@ -15268,7 +12752,7 @@
                         </a:rPr>
                         <a:t>10</a:t>
                       </a:r>
-                      <a:endParaRPr lang="ko-KR" sz="1100" dirty="0">
+                      <a:endParaRPr lang="ko-KR" sz="1200" dirty="0">
                         <a:latin typeface="Pretendard" charset="0"/>
                         <a:ea typeface="Pretendard" charset="0"/>
                         <a:cs typeface="Pretendard" charset="0"/>
@@ -15326,7 +12810,7 @@
                         <a:buNone/>
                       </a:pPr>
                       <a:r>
-                        <a:rPr lang="ko-KR" sz="1100" dirty="0">
+                        <a:rPr lang="ko-KR" sz="1200" dirty="0">
                           <a:solidFill>
                             <a:srgbClr val="0B0B0B"/>
                           </a:solidFill>
@@ -15334,9 +12818,9 @@
                           <a:ea typeface="Pretendard" pitchFamily="34" charset="-122"/>
                           <a:cs typeface="Pretendard" pitchFamily="34" charset="-120"/>
                         </a:rPr>
-                        <a:t>대시보드 문구 4, 포트폴리오 3 + 3</a:t>
-                      </a:r>
-                      <a:endParaRPr lang="ko-KR" sz="1100" dirty="0">
+                        <a:t>대시보드 4, 포트폴리오 6</a:t>
+                      </a:r>
+                      <a:endParaRPr lang="ko-KR" sz="1200" dirty="0">
                         <a:latin typeface="Pretendard" charset="0"/>
                         <a:ea typeface="Pretendard" charset="0"/>
                         <a:cs typeface="Pretendard" charset="0"/>
@@ -15379,246 +12863,6 @@
                       <a:round/>
                       <a:headEnd type="none" w="med" len="med"/>
                       <a:tailEnd type="none" w="med" len="med"/>
-                    </a:lnB>
-                    <a:solidFill>
-                      <a:srgbClr val="FFFFFF"/>
-                    </a:solidFill>
-                  </a:tcPr>
-                </a:tc>
-              </a:tr>
-            </a:tbl>
-          </a:graphicData>
-        </a:graphic>
-      </p:graphicFrame>
-      <p:graphicFrame>
-        <p:nvGraphicFramePr>
-          <p:cNvPr id="29" name="Table 3"/>
-          <p:cNvGraphicFramePr>
-            <a:graphicFrameLocks noGrp="1"/>
-          </p:cNvGraphicFramePr>
-          <p:nvPr>
-            <p:extLst>
-              <p:ext uri="{D42A27DB-BD31-4B8C-83A1-F6EECF244321}">
-                <p14:modId xmlns:p14="http://schemas.microsoft.com/office/powerpoint/2010/main" val="1579011935"/>
-              </p:ext>
-            </p:extLst>
-          </p:nvPr>
-        </p:nvGraphicFramePr>
-        <p:xfrm>
-          <a:off x="6400800" y="5029200"/>
-          <a:ext cx="5148072" cy="914400"/>
-        </p:xfrm>
-        <a:graphic>
-          <a:graphicData uri="http://schemas.openxmlformats.org/drawingml/2006/table">
-            <a:tbl>
-              <a:tblPr/>
-              <a:tblGrid>
-                <a:gridCol w="914400"/>
-                <a:gridCol w="4233672"/>
-              </a:tblGrid>
-              <a:tr h="274320">
-                <a:tc>
-                  <a:txBody>
-                    <a:bodyPr/>
-                    <a:lstStyle/>
-                    <a:p>
-                      <a:pPr latinLnBrk="0" indent="0" marL="0">
-                        <a:buNone/>
-                      </a:pPr>
-                      <a:r>
-                        <a:rPr lang="ko-KR" sz="1150" b="1" dirty="0">
-                          <a:solidFill>
-                            <a:srgbClr val="52514E"/>
-                          </a:solidFill>
-                          <a:latin typeface="Pretendard" pitchFamily="34" charset="0"/>
-                          <a:ea typeface="Pretendard" pitchFamily="34" charset="-122"/>
-                          <a:cs typeface="Pretendard" pitchFamily="34" charset="-120"/>
-                        </a:rPr>
-                        <a:t>규칙</a:t>
-                      </a:r>
-                      <a:endParaRPr lang="ko-KR" sz="1150" dirty="0">
-                        <a:latin typeface="Pretendard" charset="0"/>
-                        <a:ea typeface="Pretendard" charset="0"/>
-                        <a:cs typeface="Pretendard" charset="0"/>
-                      </a:endParaRPr>
-                    </a:p>
-                  </a:txBody>
-                  <a:tcPr marL="0" marR="54864" marT="36576" marB="45720" anchor="t">
-                    <a:lnL w="0" cap="flat" cmpd="sng" algn="ctr">
-                      <a:noFill/>
-                    </a:lnL>
-                    <a:lnR w="0" cap="flat" cmpd="sng" algn="ctr">
-                      <a:noFill/>
-                    </a:lnR>
-                    <a:lnT w="0" cap="flat" cmpd="sng" algn="ctr">
-                      <a:noFill/>
-                    </a:lnT>
-                    <a:lnB w="0" cap="flat" cmpd="sng" algn="ctr">
-                      <a:noFill/>
-                    </a:lnB>
-                    <a:solidFill>
-                      <a:srgbClr val="FFFFFF"/>
-                    </a:solidFill>
-                  </a:tcPr>
-                </a:tc>
-                <a:tc>
-                  <a:txBody>
-                    <a:bodyPr/>
-                    <a:lstStyle/>
-                    <a:p>
-                      <a:pPr latinLnBrk="0" indent="0" marL="0">
-                        <a:buNone/>
-                      </a:pPr>
-                      <a:r>
-                        <a:rPr lang="ko-KR" sz="1150" dirty="0">
-                          <a:solidFill>
-                            <a:srgbClr val="52514E"/>
-                          </a:solidFill>
-                          <a:latin typeface="Pretendard" pitchFamily="34" charset="0"/>
-                          <a:ea typeface="Pretendard" pitchFamily="34" charset="-122"/>
-                          <a:cs typeface="Pretendard" pitchFamily="34" charset="-120"/>
-                        </a:rPr>
-                        <a:t>구현한 에이전트와 검증하는 에이전트를 분리. 검증 쪽에는</a:t>
-                      </a:r>
-                      <a:br/>
-                      <a:pPr latinLnBrk="0" indent="0" marL="0">
-                        <a:buNone/>
-                      </a:pPr>
-                      <a:r>
-                        <a:rPr lang="ko-KR" sz="1150" dirty="0">
-                          <a:solidFill>
-                            <a:srgbClr val="52514E"/>
-                          </a:solidFill>
-                          <a:latin typeface="Pretendard" pitchFamily="34" charset="0"/>
-                          <a:ea typeface="Pretendard" pitchFamily="34" charset="-122"/>
-                          <a:cs typeface="Pretendard" pitchFamily="34" charset="-120"/>
-                        </a:rPr>
-                        <a:t>원본 코드 대신 데이터와 결과 파일만 주고 다시 계산하게 함</a:t>
-                      </a:r>
-                      <a:endParaRPr lang="ko-KR" sz="1150" dirty="0">
-                        <a:latin typeface="Pretendard" charset="0"/>
-                        <a:ea typeface="Pretendard" charset="0"/>
-                        <a:cs typeface="Pretendard" charset="0"/>
-                      </a:endParaRPr>
-                    </a:p>
-                  </a:txBody>
-                  <a:tcPr marL="0" marR="54864" marT="36576" marB="45720" anchor="t">
-                    <a:lnL w="0" cap="flat" cmpd="sng" algn="ctr">
-                      <a:noFill/>
-                    </a:lnL>
-                    <a:lnR w="0" cap="flat" cmpd="sng" algn="ctr">
-                      <a:noFill/>
-                    </a:lnR>
-                    <a:lnT w="0" cap="flat" cmpd="sng" algn="ctr">
-                      <a:noFill/>
-                    </a:lnT>
-                    <a:lnB w="0" cap="flat" cmpd="sng" algn="ctr">
-                      <a:noFill/>
-                    </a:lnB>
-                    <a:solidFill>
-                      <a:srgbClr val="FFFFFF"/>
-                    </a:solidFill>
-                  </a:tcPr>
-                </a:tc>
-              </a:tr>
-              <a:tr h="274320">
-                <a:tc>
-                  <a:txBody>
-                    <a:bodyPr/>
-                    <a:lstStyle/>
-                    <a:p>
-                      <a:pPr latinLnBrk="0" indent="0" marL="0">
-                        <a:buNone/>
-                      </a:pPr>
-                      <a:r>
-                        <a:rPr lang="ko-KR" sz="1150" b="1" dirty="0">
-                          <a:solidFill>
-                            <a:srgbClr val="52514E"/>
-                          </a:solidFill>
-                          <a:latin typeface="Pretendard" pitchFamily="34" charset="0"/>
-                          <a:ea typeface="Pretendard" pitchFamily="34" charset="-122"/>
-                          <a:cs typeface="Pretendard" pitchFamily="34" charset="-120"/>
-                        </a:rPr>
-                        <a:t>나머지 8건</a:t>
-                      </a:r>
-                      <a:endParaRPr lang="ko-KR" sz="1150" dirty="0">
-                        <a:latin typeface="Pretendard" charset="0"/>
-                        <a:ea typeface="Pretendard" charset="0"/>
-                        <a:cs typeface="Pretendard" charset="0"/>
-                      </a:endParaRPr>
-                    </a:p>
-                  </a:txBody>
-                  <a:tcPr marL="0" marR="54864" marT="36576" marB="45720" anchor="t">
-                    <a:lnL w="0" cap="flat" cmpd="sng" algn="ctr">
-                      <a:noFill/>
-                    </a:lnL>
-                    <a:lnR w="0" cap="flat" cmpd="sng" algn="ctr">
-                      <a:noFill/>
-                    </a:lnR>
-                    <a:lnT w="0" cap="flat" cmpd="sng" algn="ctr">
-                      <a:noFill/>
-                    </a:lnT>
-                    <a:lnB w="0" cap="flat" cmpd="sng" algn="ctr">
-                      <a:noFill/>
-                    </a:lnB>
-                    <a:solidFill>
-                      <a:srgbClr val="FFFFFF"/>
-                    </a:solidFill>
-                  </a:tcPr>
-                </a:tc>
-                <a:tc>
-                  <a:txBody>
-                    <a:bodyPr/>
-                    <a:lstStyle/>
-                    <a:p>
-                      <a:pPr latinLnBrk="0" indent="0" marL="0">
-                        <a:buNone/>
-                      </a:pPr>
-                      <a:r>
-                        <a:rPr lang="ko-KR" sz="1150" dirty="0">
-                          <a:solidFill>
-                            <a:srgbClr val="52514E"/>
-                          </a:solidFill>
-                          <a:latin typeface="Pretendard" pitchFamily="34" charset="0"/>
-                          <a:ea typeface="Pretendard" pitchFamily="34" charset="-122"/>
-                          <a:cs typeface="Pretendard" pitchFamily="34" charset="-120"/>
-                        </a:rPr>
-                        <a:t>실행 전 자체 검토, 그림·표를 직접 열어 확인, 커밋 전 grep 대조,</a:t>
-                      </a:r>
-                      <a:br/>
-                      <a:pPr latinLnBrk="0" indent="0" marL="0">
-                        <a:buNone/>
-                      </a:pPr>
-                      <a:r>
-                        <a:rPr lang="ko-KR" sz="1150" dirty="0">
-                          <a:solidFill>
-                            <a:srgbClr val="52514E"/>
-                          </a:solidFill>
-                          <a:latin typeface="Pretendard" pitchFamily="34" charset="0"/>
-                          <a:ea typeface="Pretendard" pitchFamily="34" charset="-122"/>
-                          <a:cs typeface="Pretendard" pitchFamily="34" charset="-120"/>
-                        </a:rPr>
-                        <a:t>내보내기 후 pdffonts 점검에서 발견(E5·E6·E8·E9·E12·E14·E15)</a:t>
-                      </a:r>
-                      <a:endParaRPr lang="ko-KR" sz="1150" dirty="0">
-                        <a:latin typeface="Pretendard" charset="0"/>
-                        <a:ea typeface="Pretendard" charset="0"/>
-                        <a:cs typeface="Pretendard" charset="0"/>
-                      </a:endParaRPr>
-                    </a:p>
-                  </a:txBody>
-                  <a:tcPr marL="0" marR="54864" marT="36576" marB="45720" anchor="t">
-                    <a:lnL w="0" cap="flat" cmpd="sng" algn="ctr">
-                      <a:noFill/>
-                    </a:lnL>
-                    <a:lnR w="0" cap="flat" cmpd="sng" algn="ctr">
-                      <a:noFill/>
-                    </a:lnR>
-                    <a:lnT w="0" cap="flat" cmpd="sng" algn="ctr">
-                      <a:noFill/>
-                    </a:lnT>
-                    <a:lnB w="0" cap="flat" cmpd="sng" algn="ctr">
-                      <a:noFill/>
                     </a:lnB>
                     <a:solidFill>
                       <a:srgbClr val="FFFFFF"/>
@@ -15794,25 +13038,7 @@
                 <a:ea typeface="Pretendard SemiBold" pitchFamily="34" charset="-122"/>
                 <a:cs typeface="Pretendard SemiBold" pitchFamily="34" charset="-120"/>
               </a:rPr>
-              <a:t>이 결과는 같은 제품의 새 lot에 대한 1차 분류 보조 수준입니다.</a:t>
-            </a:r>
-            <a:br/>
-            <a:pPr latinLnBrk="0" indent="0" marL="0">
-              <a:lnSpc>
-                <a:spcPts val="2600"/>
-              </a:lnSpc>
-              <a:buNone/>
-            </a:pPr>
-            <a:r>
-              <a:rPr lang="ko-KR" sz="1800" dirty="0">
-                <a:solidFill>
-                  <a:srgbClr val="1F4E9A"/>
-                </a:solidFill>
-                <a:latin typeface="Pretendard SemiBold" pitchFamily="34" charset="0"/>
-                <a:ea typeface="Pretendard SemiBold" pitchFamily="34" charset="-122"/>
-                <a:cs typeface="Pretendard SemiBold" pitchFamily="34" charset="-120"/>
-              </a:rPr>
-              <a:t>수율 개선이나 공정 원인 규명 효과는 주장하지 않습니다.</a:t>
+              <a:t>같은 제품의 새 lot에 대한 1차 분류 보조 수준입니다. 수율 개선 효과는 주장하지 않습니다.</a:t>
             </a:r>
             <a:endParaRPr lang="ko-KR" sz="1800" dirty="0"/>
           </a:p>
@@ -15905,7 +13131,7 @@
         <p:spPr>
           <a:xfrm>
             <a:off x="640080" y="2514600"/>
-            <a:ext cx="3429000" cy="2286000"/>
+            <a:ext cx="3429000" cy="2194560"/>
           </a:xfrm>
           <a:prstGeom prst="rect">
             <a:avLst/>
@@ -15919,16 +13145,16 @@
           <a:p>
             <a:pPr latinLnBrk="0" marL="177800" indent="-177800">
               <a:lnSpc>
-                <a:spcPts val="1900"/>
+                <a:spcPts val="2000"/>
               </a:lnSpc>
               <a:spcAft>
-                <a:spcPts val="600"/>
+                <a:spcPts val="700"/>
               </a:spcAft>
               <a:buSzPct val="100000"/>
               <a:buChar char="•"/>
             </a:pPr>
             <a:r>
-              <a:rPr lang="ko-KR" sz="1300" dirty="0">
+              <a:rPr lang="ko-KR" sz="1350" dirty="0">
                 <a:solidFill>
                   <a:srgbClr val="0B0B0B"/>
                 </a:solidFill>
@@ -15941,15 +13167,15 @@
             <a:br/>
             <a:pPr latinLnBrk="0" indent="0" marL="0">
               <a:lnSpc>
-                <a:spcPts val="1900"/>
+                <a:spcPts val="2000"/>
               </a:lnSpc>
               <a:spcAft>
-                <a:spcPts val="600"/>
+                <a:spcPts val="700"/>
               </a:spcAft>
               <a:buNone/>
             </a:pPr>
             <a:r>
-              <a:rPr lang="ko-KR" sz="1300" dirty="0">
+              <a:rPr lang="ko-KR" sz="1350" dirty="0">
                 <a:solidFill>
                   <a:srgbClr val="0B0B0B"/>
                 </a:solidFill>
@@ -15959,21 +13185,21 @@
               </a:rPr>
               <a:t>베이스라인 0.843</a:t>
             </a:r>
-            <a:endParaRPr lang="ko-KR" sz="1300" dirty="0"/>
+            <a:endParaRPr lang="ko-KR" sz="1350" dirty="0"/>
           </a:p>
           <a:p>
             <a:pPr latinLnBrk="0" marL="177800" indent="-177800">
               <a:lnSpc>
-                <a:spcPts val="1900"/>
+                <a:spcPts val="2000"/>
               </a:lnSpc>
               <a:spcAft>
-                <a:spcPts val="600"/>
+                <a:spcPts val="700"/>
               </a:spcAft>
               <a:buSzPct val="100000"/>
               <a:buChar char="•"/>
             </a:pPr>
             <a:r>
-              <a:rPr lang="ko-KR" sz="1300" dirty="0">
+              <a:rPr lang="ko-KR" sz="1350" dirty="0">
                 <a:solidFill>
                   <a:srgbClr val="0B0B0B"/>
                 </a:solidFill>
@@ -15981,20 +13207,20 @@
                 <a:ea typeface="Pretendard" pitchFamily="34" charset="-122"/>
                 <a:cs typeface="Pretendard" pitchFamily="34" charset="-120"/>
               </a:rPr>
-              <a:t>분할 절차 하나로 Loc recall이 12%p 달라짐.</a:t>
+              <a:t>분할 절차 하나로 Loc recall 12%p 차이.</a:t>
             </a:r>
             <a:br/>
             <a:pPr latinLnBrk="0" indent="0" marL="0">
               <a:lnSpc>
-                <a:spcPts val="1900"/>
+                <a:spcPts val="2000"/>
               </a:lnSpc>
               <a:spcAft>
-                <a:spcPts val="600"/>
+                <a:spcPts val="700"/>
               </a:spcAft>
               <a:buNone/>
             </a:pPr>
             <a:r>
-              <a:rPr lang="ko-KR" sz="1300" dirty="0">
+              <a:rPr lang="ko-KR" sz="1350" dirty="0">
                 <a:solidFill>
                   <a:srgbClr val="0B0B0B"/>
                 </a:solidFill>
@@ -16002,23 +13228,23 @@
                 <a:ea typeface="Pretendard" pitchFamily="34" charset="-122"/>
                 <a:cs typeface="Pretendard" pitchFamily="34" charset="-120"/>
               </a:rPr>
-              <a:t>모델을 고르기 전에 평가 방식부터 확인해야 함</a:t>
+              <a:t>모델보다 평가 방식부터 확인</a:t>
             </a:r>
-            <a:endParaRPr lang="ko-KR" sz="1300" dirty="0"/>
+            <a:endParaRPr lang="ko-KR" sz="1350" dirty="0"/>
           </a:p>
           <a:p>
             <a:pPr latinLnBrk="0" marL="177800" indent="-177800">
               <a:lnSpc>
-                <a:spcPts val="1900"/>
+                <a:spcPts val="2000"/>
               </a:lnSpc>
               <a:spcAft>
-                <a:spcPts val="600"/>
+                <a:spcPts val="700"/>
               </a:spcAft>
               <a:buSzPct val="100000"/>
               <a:buChar char="•"/>
             </a:pPr>
             <a:r>
-              <a:rPr lang="ko-KR" sz="1300" dirty="0">
+              <a:rPr lang="ko-KR" sz="1350" dirty="0">
                 <a:solidFill>
                   <a:srgbClr val="0B0B0B"/>
                 </a:solidFill>
@@ -16028,7 +13254,7 @@
               </a:rPr>
               <a:t>검증 5종 통과, 새 폴더 재현 일치</a:t>
             </a:r>
-            <a:endParaRPr lang="ko-KR" sz="1300" dirty="0"/>
+            <a:endParaRPr lang="ko-KR" sz="1350" dirty="0"/>
           </a:p>
         </p:txBody>
       </p:sp>
@@ -16080,7 +13306,7 @@
         <p:spPr>
           <a:xfrm>
             <a:off x="4343400" y="2514600"/>
-            <a:ext cx="3429000" cy="2286000"/>
+            <a:ext cx="3429000" cy="2194560"/>
           </a:xfrm>
           <a:prstGeom prst="rect">
             <a:avLst/>
@@ -16094,16 +13320,16 @@
           <a:p>
             <a:pPr latinLnBrk="0" marL="177800" indent="-177800">
               <a:lnSpc>
-                <a:spcPts val="1900"/>
+                <a:spcPts val="2000"/>
               </a:lnSpc>
               <a:spcAft>
-                <a:spcPts val="600"/>
+                <a:spcPts val="700"/>
               </a:spcAft>
               <a:buSzPct val="100000"/>
               <a:buChar char="•"/>
             </a:pPr>
             <a:r>
-              <a:rPr lang="ko-KR" sz="1300" dirty="0">
+              <a:rPr lang="ko-KR" sz="1350" dirty="0">
                 <a:solidFill>
                   <a:srgbClr val="0B0B0B"/>
                 </a:solidFill>
@@ -16111,20 +13337,20 @@
                 <a:ea typeface="Pretendard" pitchFamily="34" charset="-122"/>
                 <a:cs typeface="Pretendard" pitchFamily="34" charset="-120"/>
               </a:rPr>
-              <a:t>한 번 나눈 분할의 결과.</a:t>
+              <a:t>한 번 나눈 분할. seed 10개 평균은</a:t>
             </a:r>
             <a:br/>
             <a:pPr latinLnBrk="0" indent="0" marL="0">
               <a:lnSpc>
-                <a:spcPts val="1900"/>
+                <a:spcPts val="2000"/>
               </a:lnSpc>
               <a:spcAft>
-                <a:spcPts val="600"/>
+                <a:spcPts val="700"/>
               </a:spcAft>
               <a:buNone/>
             </a:pPr>
             <a:r>
-              <a:rPr lang="ko-KR" sz="1300" dirty="0">
+              <a:rPr lang="ko-KR" sz="1350" dirty="0">
                 <a:solidFill>
                   <a:srgbClr val="0B0B0B"/>
                 </a:solidFill>
@@ -16132,20 +13358,23 @@
                 <a:ea typeface="Pretendard" pitchFamily="34" charset="-122"/>
                 <a:cs typeface="Pretendard" pitchFamily="34" charset="-120"/>
               </a:rPr>
-              <a:t>seed 10개로 나눠 평균하면 약 0.01 낮음 →</a:t>
+              <a:t>약 0.01 낮음 → 그룹 5-fold</a:t>
             </a:r>
-            <a:br/>
-            <a:pPr latinLnBrk="0" indent="0" marL="0">
+            <a:endParaRPr lang="ko-KR" sz="1350" dirty="0"/>
+          </a:p>
+          <a:p>
+            <a:pPr latinLnBrk="0" marL="177800" indent="-177800">
               <a:lnSpc>
-                <a:spcPts val="1900"/>
+                <a:spcPts val="2000"/>
               </a:lnSpc>
               <a:spcAft>
-                <a:spcPts val="600"/>
+                <a:spcPts val="700"/>
               </a:spcAft>
-              <a:buNone/>
+              <a:buSzPct val="100000"/>
+              <a:buChar char="•"/>
             </a:pPr>
             <a:r>
-              <a:rPr lang="ko-KR" sz="1300" dirty="0">
+              <a:rPr lang="ko-KR" sz="1350" dirty="0">
                 <a:solidFill>
                   <a:srgbClr val="0B0B0B"/>
                 </a:solidFill>
@@ -16153,23 +13382,23 @@
                 <a:ea typeface="Pretendard" pitchFamily="34" charset="-122"/>
                 <a:cs typeface="Pretendard" pitchFamily="34" charset="-120"/>
               </a:rPr>
-              <a:t>그룹 5-fold로 전체 평가</a:t>
+              <a:t>Near-full test 18장, 신뢰구간 0.70–1.00</a:t>
             </a:r>
-            <a:endParaRPr lang="ko-KR" sz="1300" dirty="0"/>
+            <a:endParaRPr lang="ko-KR" sz="1350" dirty="0"/>
           </a:p>
           <a:p>
             <a:pPr latinLnBrk="0" marL="177800" indent="-177800">
               <a:lnSpc>
-                <a:spcPts val="1900"/>
+                <a:spcPts val="2000"/>
               </a:lnSpc>
               <a:spcAft>
-                <a:spcPts val="600"/>
+                <a:spcPts val="700"/>
               </a:spcAft>
               <a:buSzPct val="100000"/>
               <a:buChar char="•"/>
             </a:pPr>
             <a:r>
-              <a:rPr lang="ko-KR" sz="1300" dirty="0">
+              <a:rPr lang="ko-KR" sz="1350" dirty="0">
                 <a:solidFill>
                   <a:srgbClr val="0B0B0B"/>
                 </a:solidFill>
@@ -16177,20 +13406,20 @@
                 <a:ea typeface="Pretendard" pitchFamily="34" charset="-122"/>
                 <a:cs typeface="Pretendard" pitchFamily="34" charset="-120"/>
               </a:rPr>
-              <a:t>Near-full test 18장, 신뢰구간 0.70–1.00 →</a:t>
+              <a:t>짧은 Scratch 약점,</a:t>
             </a:r>
             <a:br/>
             <a:pPr latinLnBrk="0" indent="0" marL="0">
               <a:lnSpc>
-                <a:spcPts val="1900"/>
+                <a:spcPts val="2000"/>
               </a:lnSpc>
               <a:spcAft>
-                <a:spcPts val="600"/>
+                <a:spcPts val="700"/>
               </a:spcAft>
               <a:buNone/>
             </a:pPr>
             <a:r>
-              <a:rPr lang="ko-KR" sz="1300" dirty="0">
+              <a:rPr lang="ko-KR" sz="1350" dirty="0">
                 <a:solidFill>
                   <a:srgbClr val="0B0B0B"/>
                 </a:solidFill>
@@ -16198,75 +13427,9 @@
                 <a:ea typeface="Pretendard" pitchFamily="34" charset="-122"/>
                 <a:cs typeface="Pretendard" pitchFamily="34" charset="-120"/>
               </a:rPr>
-              <a:t>표본 확보 전까지 수치 유보</a:t>
+              <a:t>라벨 노이즈 14쌍 → 라벨 기준 재정의</a:t>
             </a:r>
-            <a:endParaRPr lang="ko-KR" sz="1300" dirty="0"/>
-          </a:p>
-          <a:p>
-            <a:pPr latinLnBrk="0" marL="177800" indent="-177800">
-              <a:lnSpc>
-                <a:spcPts val="1900"/>
-              </a:lnSpc>
-              <a:spcAft>
-                <a:spcPts val="600"/>
-              </a:spcAft>
-              <a:buSzPct val="100000"/>
-              <a:buChar char="•"/>
-            </a:pPr>
-            <a:r>
-              <a:rPr lang="ko-KR" sz="1300" dirty="0">
-                <a:solidFill>
-                  <a:srgbClr val="0B0B0B"/>
-                </a:solidFill>
-                <a:latin typeface="Pretendard" pitchFamily="34" charset="0"/>
-                <a:ea typeface="Pretendard" pitchFamily="34" charset="-122"/>
-                <a:cs typeface="Pretendard" pitchFamily="34" charset="-120"/>
-              </a:rPr>
-              <a:t>같은 맵 다른 라벨 14쌍,</a:t>
-            </a:r>
-            <a:br/>
-            <a:pPr latinLnBrk="0" indent="0" marL="0">
-              <a:lnSpc>
-                <a:spcPts val="1900"/>
-              </a:lnSpc>
-              <a:spcAft>
-                <a:spcPts val="600"/>
-              </a:spcAft>
-              <a:buNone/>
-            </a:pPr>
-            <a:r>
-              <a:rPr lang="ko-KR" sz="1300" dirty="0">
-                <a:solidFill>
-                  <a:srgbClr val="0B0B0B"/>
-                </a:solidFill>
-                <a:latin typeface="Pretendard" pitchFamily="34" charset="0"/>
-                <a:ea typeface="Pretendard" pitchFamily="34" charset="-122"/>
-                <a:cs typeface="Pretendard" pitchFamily="34" charset="-120"/>
-              </a:rPr>
-              <a:t>6~10다이 짧은 Scratch 약점 →</a:t>
-            </a:r>
-            <a:br/>
-            <a:pPr latinLnBrk="0" indent="0" marL="0">
-              <a:lnSpc>
-                <a:spcPts val="1900"/>
-              </a:lnSpc>
-              <a:spcAft>
-                <a:spcPts val="600"/>
-              </a:spcAft>
-              <a:buNone/>
-            </a:pPr>
-            <a:r>
-              <a:rPr lang="ko-KR" sz="1300" dirty="0">
-                <a:solidFill>
-                  <a:srgbClr val="0B0B0B"/>
-                </a:solidFill>
-                <a:latin typeface="Pretendard" pitchFamily="34" charset="0"/>
-                <a:ea typeface="Pretendard" pitchFamily="34" charset="-122"/>
-                <a:cs typeface="Pretendard" pitchFamily="34" charset="-120"/>
-              </a:rPr>
-              <a:t>라벨 기준 재정의, 고해상도 입력</a:t>
-            </a:r>
-            <a:endParaRPr lang="ko-KR" sz="1300" dirty="0"/>
+            <a:endParaRPr lang="ko-KR" sz="1350" dirty="0"/>
           </a:p>
         </p:txBody>
       </p:sp>
@@ -16318,7 +13481,7 @@
         <p:spPr>
           <a:xfrm>
             <a:off x="8046720" y="2514600"/>
-            <a:ext cx="3429000" cy="2286000"/>
+            <a:ext cx="3429000" cy="2194560"/>
           </a:xfrm>
           <a:prstGeom prst="rect">
             <a:avLst/>
@@ -16332,16 +13495,16 @@
           <a:p>
             <a:pPr latinLnBrk="0" marL="177800" indent="-177800">
               <a:lnSpc>
-                <a:spcPts val="1900"/>
+                <a:spcPts val="2000"/>
               </a:lnSpc>
               <a:spcAft>
-                <a:spcPts val="600"/>
+                <a:spcPts val="700"/>
               </a:spcAft>
               <a:buSzPct val="100000"/>
               <a:buChar char="•"/>
             </a:pPr>
             <a:r>
-              <a:rPr lang="ko-KR" sz="1300" dirty="0">
+              <a:rPr lang="ko-KR" sz="1350" dirty="0">
                 <a:solidFill>
                   <a:srgbClr val="0B0B0B"/>
                 </a:solidFill>
@@ -16349,20 +13512,23 @@
                 <a:ea typeface="Pretendard" pitchFamily="34" charset="-122"/>
                 <a:cs typeface="Pretendard" pitchFamily="34" charset="-120"/>
               </a:rPr>
-              <a:t>수치는 스크립트 실행 결과에서만 옮긴다.</a:t>
+              <a:t>수치는 실행 결과에서만 옮긴다</a:t>
             </a:r>
-            <a:br/>
-            <a:pPr latinLnBrk="0" indent="0" marL="0">
+            <a:endParaRPr lang="ko-KR" sz="1350" dirty="0"/>
+          </a:p>
+          <a:p>
+            <a:pPr latinLnBrk="0" marL="177800" indent="-177800">
               <a:lnSpc>
-                <a:spcPts val="1900"/>
+                <a:spcPts val="2000"/>
               </a:lnSpc>
               <a:spcAft>
-                <a:spcPts val="600"/>
+                <a:spcPts val="700"/>
               </a:spcAft>
-              <a:buNone/>
+              <a:buSzPct val="100000"/>
+              <a:buChar char="•"/>
             </a:pPr>
             <a:r>
-              <a:rPr lang="ko-KR" sz="1300" dirty="0">
+              <a:rPr lang="ko-KR" sz="1350" dirty="0">
                 <a:solidFill>
                   <a:srgbClr val="0B0B0B"/>
                 </a:solidFill>
@@ -16370,23 +13536,23 @@
                 <a:ea typeface="Pretendard" pitchFamily="34" charset="-122"/>
                 <a:cs typeface="Pretendard" pitchFamily="34" charset="-120"/>
               </a:rPr>
-              <a:t>추정치는 쓰지 않는다</a:t>
+              <a:t>점수가 갑자기 오르면 원인부터 찾는다</a:t>
             </a:r>
-            <a:endParaRPr lang="ko-KR" sz="1300" dirty="0"/>
+            <a:endParaRPr lang="ko-KR" sz="1350" dirty="0"/>
           </a:p>
           <a:p>
             <a:pPr latinLnBrk="0" marL="177800" indent="-177800">
               <a:lnSpc>
-                <a:spcPts val="1900"/>
+                <a:spcPts val="2000"/>
               </a:lnSpc>
               <a:spcAft>
-                <a:spcPts val="600"/>
+                <a:spcPts val="700"/>
               </a:spcAft>
               <a:buSzPct val="100000"/>
               <a:buChar char="•"/>
             </a:pPr>
             <a:r>
-              <a:rPr lang="ko-KR" sz="1300" dirty="0">
+              <a:rPr lang="ko-KR" sz="1350" dirty="0">
                 <a:solidFill>
                   <a:srgbClr val="0B0B0B"/>
                 </a:solidFill>
@@ -16394,75 +13560,9 @@
                 <a:ea typeface="Pretendard" pitchFamily="34" charset="-122"/>
                 <a:cs typeface="Pretendard" pitchFamily="34" charset="-120"/>
               </a:rPr>
-              <a:t>점수가 갑자기 오르면 원인을</a:t>
+              <a:t>새 데이터는 분할과 라벨부터 검사한다</a:t>
             </a:r>
-            <a:br/>
-            <a:pPr latinLnBrk="0" indent="0" marL="0">
-              <a:lnSpc>
-                <a:spcPts val="1900"/>
-              </a:lnSpc>
-              <a:spcAft>
-                <a:spcPts val="600"/>
-              </a:spcAft>
-              <a:buNone/>
-            </a:pPr>
-            <a:r>
-              <a:rPr lang="ko-KR" sz="1300" dirty="0">
-                <a:solidFill>
-                  <a:srgbClr val="0B0B0B"/>
-                </a:solidFill>
-                <a:latin typeface="Pretendard" pitchFamily="34" charset="0"/>
-                <a:ea typeface="Pretendard" pitchFamily="34" charset="-122"/>
-                <a:cs typeface="Pretendard" pitchFamily="34" charset="-120"/>
-              </a:rPr>
-              <a:t>찾기 전까지 채택하지 않는다</a:t>
-            </a:r>
-            <a:endParaRPr lang="ko-KR" sz="1300" dirty="0"/>
-          </a:p>
-          <a:p>
-            <a:pPr latinLnBrk="0" marL="177800" indent="-177800">
-              <a:lnSpc>
-                <a:spcPts val="1900"/>
-              </a:lnSpc>
-              <a:spcAft>
-                <a:spcPts val="600"/>
-              </a:spcAft>
-              <a:buSzPct val="100000"/>
-              <a:buChar char="•"/>
-            </a:pPr>
-            <a:r>
-              <a:rPr lang="ko-KR" sz="1300" dirty="0">
-                <a:solidFill>
-                  <a:srgbClr val="0B0B0B"/>
-                </a:solidFill>
-                <a:latin typeface="Pretendard" pitchFamily="34" charset="0"/>
-                <a:ea typeface="Pretendard" pitchFamily="34" charset="-122"/>
-                <a:cs typeface="Pretendard" pitchFamily="34" charset="-120"/>
-              </a:rPr>
-              <a:t>새 데이터를 받으면 모델을 만들기 전에</a:t>
-            </a:r>
-            <a:br/>
-            <a:pPr latinLnBrk="0" indent="0" marL="0">
-              <a:lnSpc>
-                <a:spcPts val="1900"/>
-              </a:lnSpc>
-              <a:spcAft>
-                <a:spcPts val="600"/>
-              </a:spcAft>
-              <a:buNone/>
-            </a:pPr>
-            <a:r>
-              <a:rPr lang="ko-KR" sz="1300" dirty="0">
-                <a:solidFill>
-                  <a:srgbClr val="0B0B0B"/>
-                </a:solidFill>
-                <a:latin typeface="Pretendard" pitchFamily="34" charset="0"/>
-                <a:ea typeface="Pretendard" pitchFamily="34" charset="-122"/>
-                <a:cs typeface="Pretendard" pitchFamily="34" charset="-120"/>
-              </a:rPr>
-              <a:t>분할 방식과 라벨 품질부터 검사한다</a:t>
-            </a:r>
-            <a:endParaRPr lang="ko-KR" sz="1300" dirty="0"/>
+            <a:endParaRPr lang="ko-KR" sz="1350" dirty="0"/>
           </a:p>
         </p:txBody>
       </p:sp>
@@ -16475,11 +13575,11 @@
         <p:spPr>
           <a:xfrm>
             <a:off x="640080" y="4937760"/>
-            <a:ext cx="10911535" cy="1371600"/>
+            <a:ext cx="10911535" cy="1325880"/>
           </a:xfrm>
           <a:prstGeom prst="roundRect">
             <a:avLst>
-              <a:gd name="adj" fmla="val 4000"/>
+              <a:gd name="adj" fmla="val 4138"/>
             </a:avLst>
           </a:prstGeom>
           <a:solidFill>
@@ -16568,7 +13668,7 @@
                         <a:buNone/>
                       </a:pPr>
                       <a:r>
-                        <a:rPr lang="ko-KR" sz="1150" b="1" dirty="0">
+                        <a:rPr lang="ko-KR" sz="1200" b="1" dirty="0">
                           <a:solidFill>
                             <a:srgbClr val="0B0B0B"/>
                           </a:solidFill>
@@ -16578,7 +13678,7 @@
                         </a:rPr>
                         <a:t>환경</a:t>
                       </a:r>
-                      <a:endParaRPr lang="ko-KR" sz="1150" dirty="0">
+                      <a:endParaRPr lang="ko-KR" sz="1200" dirty="0">
                         <a:latin typeface="Pretendard" charset="0"/>
                         <a:ea typeface="Pretendard" charset="0"/>
                         <a:cs typeface="Pretendard" charset="0"/>
@@ -16612,7 +13712,7 @@
                         <a:buNone/>
                       </a:pPr>
                       <a:r>
-                        <a:rPr lang="ko-KR" sz="1150" dirty="0">
+                        <a:rPr lang="ko-KR" sz="1200" dirty="0">
                           <a:solidFill>
                             <a:srgbClr val="0B0B0B"/>
                           </a:solidFill>
@@ -16620,9 +13720,9 @@
                           <a:ea typeface="Pretendard" pitchFamily="34" charset="-122"/>
                           <a:cs typeface="Pretendard" pitchFamily="34" charset="-120"/>
                         </a:rPr>
-                        <a:t>Windows 11, Python 3.12.6, torch 2.7.1+cu118, scikit-learn 1.9.1, Quadro P2000. 시드 0 고정</a:t>
-                      </a:r>
-                      <a:endParaRPr lang="ko-KR" sz="1150" dirty="0">
+                        <a:t>Python 3.12.6, torch 2.7.1+cu118, scikit-learn 1.9.1, Quadro P2000, 시드 0</a:t>
+                      </a:r>
+                      <a:endParaRPr lang="ko-KR" sz="1200" dirty="0">
                         <a:latin typeface="Pretendard" charset="0"/>
                         <a:ea typeface="Pretendard" charset="0"/>
                         <a:cs typeface="Pretendard" charset="0"/>
@@ -16658,7 +13758,7 @@
                         <a:buNone/>
                       </a:pPr>
                       <a:r>
-                        <a:rPr lang="ko-KR" sz="1150" b="1" dirty="0">
+                        <a:rPr lang="ko-KR" sz="1200" b="1" dirty="0">
                           <a:solidFill>
                             <a:srgbClr val="0B0B0B"/>
                           </a:solidFill>
@@ -16668,7 +13768,7 @@
                         </a:rPr>
                         <a:t>실행</a:t>
                       </a:r>
-                      <a:endParaRPr lang="ko-KR" sz="1150" dirty="0">
+                      <a:endParaRPr lang="ko-KR" sz="1200" dirty="0">
                         <a:latin typeface="Pretendard" charset="0"/>
                         <a:ea typeface="Pretendard" charset="0"/>
                         <a:cs typeface="Pretendard" charset="0"/>
@@ -16702,7 +13802,7 @@
                         <a:buNone/>
                       </a:pPr>
                       <a:r>
-                        <a:rPr lang="ko-KR" sz="1150" dirty="0">
+                        <a:rPr lang="ko-KR" sz="1200" dirty="0">
                           <a:solidFill>
                             <a:srgbClr val="0B0B0B"/>
                           </a:solidFill>
@@ -16710,9 +13810,9 @@
                           <a:ea typeface="Pretendard" pitchFamily="34" charset="-122"/>
                           <a:cs typeface="Pretendard" pitchFamily="34" charset="-120"/>
                         </a:rPr>
-                        <a:t>python scripts/run_all.py  (데이터 다운로드 → 분할 → 베이스라인 → CNN → 평가, 약 4~5시간). 결과 outputs/*.json</a:t>
-                      </a:r>
-                      <a:endParaRPr lang="ko-KR" sz="1150" dirty="0">
+                        <a:t>python scripts/run_all.py (약 4~5시간) → outputs/*.json</a:t>
+                      </a:r>
+                      <a:endParaRPr lang="ko-KR" sz="1200" dirty="0">
                         <a:latin typeface="Pretendard" charset="0"/>
                         <a:ea typeface="Pretendard" charset="0"/>
                         <a:cs typeface="Pretendard" charset="0"/>
@@ -16748,7 +13848,7 @@
                         <a:buNone/>
                       </a:pPr>
                       <a:r>
-                        <a:rPr lang="ko-KR" sz="1150" b="1" dirty="0">
+                        <a:rPr lang="ko-KR" sz="1200" b="1" dirty="0">
                           <a:solidFill>
                             <a:srgbClr val="0B0B0B"/>
                           </a:solidFill>
@@ -16758,7 +13858,7 @@
                         </a:rPr>
                         <a:t>저장소</a:t>
                       </a:r>
-                      <a:endParaRPr lang="ko-KR" sz="1150" dirty="0">
+                      <a:endParaRPr lang="ko-KR" sz="1200" dirty="0">
                         <a:latin typeface="Pretendard" charset="0"/>
                         <a:ea typeface="Pretendard" charset="0"/>
                         <a:cs typeface="Pretendard" charset="0"/>
@@ -16792,7 +13892,7 @@
                         <a:buNone/>
                       </a:pPr>
                       <a:r>
-                        <a:rPr lang="ko-KR" sz="1150" dirty="0">
+                        <a:rPr lang="ko-KR" sz="1200" dirty="0">
                           <a:solidFill>
                             <a:srgbClr val="0B0B0B"/>
                           </a:solidFill>
@@ -16800,24 +13900,9 @@
                           <a:ea typeface="Pretendard" pitchFamily="34" charset="-122"/>
                           <a:cs typeface="Pretendard" pitchFamily="34" charset="-120"/>
                         </a:rPr>
-                        <a:t>github.com/sl2ver/wm811k-wafer-defect-classification (MIT).</a:t>
-                      </a:r>
-                      <a:br/>
-                      <a:pPr latinLnBrk="0" indent="0" marL="0">
-                        <a:buNone/>
-                      </a:pPr>
-                      <a:r>
-                        <a:rPr lang="ko-KR" sz="1150" dirty="0">
-                          <a:solidFill>
-                            <a:srgbClr val="0B0B0B"/>
-                          </a:solidFill>
-                          <a:latin typeface="Pretendard" pitchFamily="34" charset="0"/>
-                          <a:ea typeface="Pretendard" pitchFamily="34" charset="-122"/>
-                          <a:cs typeface="Pretendard" pitchFamily="34" charset="-120"/>
-                        </a:rPr>
-                        <a:t>PLAN.md 계획·변경 이력 / LOG.md 지시 원문·판단 13건·오류 15건 / RESULT.md 수치·버린 것 9·한계 9</a:t>
-                      </a:r>
-                      <a:endParaRPr lang="ko-KR" sz="1150" dirty="0">
+                        <a:t>github.com/sl2ver/wm811k-wafer-defect-classification — PLAN.md / LOG.md(판단 13건·오류 15건) / RESULT.md</a:t>
+                      </a:r>
+                      <a:endParaRPr lang="ko-KR" sz="1200" dirty="0">
                         <a:latin typeface="Pretendard" charset="0"/>
                         <a:ea typeface="Pretendard" charset="0"/>
                         <a:cs typeface="Pretendard" charset="0"/>
